--- a/MakeItSo_Pitch_Deck.pptx
+++ b/MakeItSo_Pitch_Deck.pptx
@@ -3286,8 +3286,8 @@
         </p:nvSpPr>
         <p:spPr>
           <a:xfrm>
-            <a:off x="5394960" y="1572768"/>
-            <a:ext cx="1371600" cy="1188720"/>
+            <a:off x="5394960" y="1600200"/>
+            <a:ext cx="1371600" cy="1097280"/>
           </a:xfrm>
           <a:prstGeom prst="rect">
             <a:avLst/>
@@ -3301,9 +3301,6 @@
           <a:lstStyle/>
           <a:p>
             <a:pPr algn="ctr">
-              <a:lnSpc>
-                <a:spcPts val="4320"/>
-              </a:lnSpc>
               <a:spcBef>
                 <a:spcPts val="0"/>
               </a:spcBef>
@@ -3331,8 +3328,8 @@
         </p:nvSpPr>
         <p:spPr>
           <a:xfrm>
-            <a:off x="1371600" y="3108960"/>
-            <a:ext cx="9418320" cy="1097280"/>
+            <a:off x="1371600" y="3200400"/>
+            <a:ext cx="9418320" cy="914400"/>
           </a:xfrm>
           <a:prstGeom prst="rect">
             <a:avLst/>
@@ -3346,9 +3343,6 @@
           <a:lstStyle/>
           <a:p>
             <a:pPr algn="ctr">
-              <a:lnSpc>
-                <a:spcPts val="7200"/>
-              </a:lnSpc>
               <a:spcBef>
                 <a:spcPts val="0"/>
               </a:spcBef>
@@ -3376,7 +3370,7 @@
         </p:nvSpPr>
         <p:spPr>
           <a:xfrm>
-            <a:off x="1828800" y="4114800"/>
+            <a:off x="1828800" y="4297680"/>
             <a:ext cx="8503920" cy="731520"/>
           </a:xfrm>
           <a:prstGeom prst="rect">
@@ -3391,9 +3385,6 @@
           <a:lstStyle/>
           <a:p>
             <a:pPr algn="ctr">
-              <a:lnSpc>
-                <a:spcPts val="2640"/>
-              </a:lnSpc>
               <a:spcBef>
                 <a:spcPts val="0"/>
               </a:spcBef>
@@ -3421,7 +3412,7 @@
         </p:nvSpPr>
         <p:spPr>
           <a:xfrm>
-            <a:off x="1828800" y="5669280"/>
+            <a:off x="1828800" y="5760720"/>
             <a:ext cx="8503920" cy="457200"/>
           </a:xfrm>
           <a:prstGeom prst="rect">
@@ -3436,9 +3427,6 @@
           <a:lstStyle/>
           <a:p>
             <a:pPr algn="ctr">
-              <a:lnSpc>
-                <a:spcPts val="1680"/>
-              </a:lnSpc>
               <a:spcBef>
                 <a:spcPts val="0"/>
               </a:spcBef>
@@ -3550,9 +3538,6 @@
           <a:lstStyle/>
           <a:p>
             <a:pPr algn="l">
-              <a:lnSpc>
-                <a:spcPts val="1560"/>
-              </a:lnSpc>
               <a:spcBef>
                 <a:spcPts val="0"/>
               </a:spcBef>
@@ -3580,8 +3565,8 @@
         </p:nvSpPr>
         <p:spPr>
           <a:xfrm>
-            <a:off x="731520" y="914400"/>
-            <a:ext cx="10058400" cy="731520"/>
+            <a:off x="731520" y="1005840"/>
+            <a:ext cx="10058400" cy="640080"/>
           </a:xfrm>
           <a:prstGeom prst="rect">
             <a:avLst/>
@@ -3595,16 +3580,13 @@
           <a:lstStyle/>
           <a:p>
             <a:pPr algn="l">
-              <a:lnSpc>
-                <a:spcPts val="4800"/>
-              </a:lnSpc>
               <a:spcBef>
                 <a:spcPts val="0"/>
               </a:spcBef>
               <a:spcAft>
                 <a:spcPts val="0"/>
               </a:spcAft>
-              <a:defRPr sz="4000" b="1">
+              <a:defRPr sz="3800" b="1">
                 <a:solidFill>
                   <a:srgbClr val="1E2A38"/>
                 </a:solidFill>
@@ -3625,8 +3607,8 @@
         </p:nvSpPr>
         <p:spPr>
           <a:xfrm>
-            <a:off x="731520" y="2103120"/>
-            <a:ext cx="3474720" cy="3840480"/>
+            <a:off x="731520" y="2011680"/>
+            <a:ext cx="3474720" cy="4114800"/>
           </a:xfrm>
           <a:prstGeom prst="roundRect">
             <a:avLst/>
@@ -3668,7 +3650,7 @@
         </p:nvSpPr>
         <p:spPr>
           <a:xfrm>
-            <a:off x="731520" y="2103120"/>
+            <a:off x="731520" y="2011680"/>
             <a:ext cx="3474720" cy="54864"/>
           </a:xfrm>
           <a:prstGeom prst="rect">
@@ -3711,8 +3693,8 @@
         </p:nvSpPr>
         <p:spPr>
           <a:xfrm>
-            <a:off x="1005840" y="2468880"/>
-            <a:ext cx="1097280" cy="365760"/>
+            <a:off x="1005840" y="2377440"/>
+            <a:ext cx="1188720" cy="411480"/>
           </a:xfrm>
           <a:prstGeom prst="roundRect">
             <a:avLst/>
@@ -3754,8 +3736,8 @@
         </p:nvSpPr>
         <p:spPr>
           <a:xfrm>
-            <a:off x="1005840" y="2487168"/>
-            <a:ext cx="1097280" cy="320040"/>
+            <a:off x="1005840" y="2404872"/>
+            <a:ext cx="1188720" cy="365760"/>
           </a:xfrm>
           <a:prstGeom prst="rect">
             <a:avLst/>
@@ -3769,16 +3751,13 @@
           <a:lstStyle/>
           <a:p>
             <a:pPr algn="ctr">
-              <a:lnSpc>
-                <a:spcPts val="1439"/>
-              </a:lnSpc>
               <a:spcBef>
                 <a:spcPts val="0"/>
               </a:spcBef>
               <a:spcAft>
                 <a:spcPts val="0"/>
               </a:spcAft>
-              <a:defRPr sz="1200" b="1">
+              <a:defRPr sz="1300" b="1">
                 <a:solidFill>
                   <a:srgbClr val="FFFFFF"/>
                 </a:solidFill>
@@ -3814,9 +3793,6 @@
           <a:lstStyle/>
           <a:p>
             <a:pPr algn="l">
-              <a:lnSpc>
-                <a:spcPts val="2280"/>
-              </a:lnSpc>
               <a:spcBef>
                 <a:spcPts val="0"/>
               </a:spcBef>
@@ -3844,7 +3820,7 @@
         </p:nvSpPr>
         <p:spPr>
           <a:xfrm>
-            <a:off x="1005840" y="3657600"/>
+            <a:off x="1005840" y="3749040"/>
             <a:ext cx="2926080" cy="2011680"/>
           </a:xfrm>
           <a:prstGeom prst="rect">
@@ -3859,16 +3835,13 @@
           <a:lstStyle/>
           <a:p>
             <a:pPr algn="l">
-              <a:lnSpc>
-                <a:spcPts val="1950"/>
-              </a:lnSpc>
               <a:spcBef>
                 <a:spcPts val="0"/>
               </a:spcBef>
               <a:spcAft>
                 <a:spcPts val="0"/>
               </a:spcAft>
-              <a:defRPr sz="1300" b="0">
+              <a:defRPr sz="1400" b="0">
                 <a:solidFill>
                   <a:srgbClr val="6B7280"/>
                 </a:solidFill>
@@ -3889,8 +3862,8 @@
         </p:nvSpPr>
         <p:spPr>
           <a:xfrm>
-            <a:off x="4480559" y="2103120"/>
-            <a:ext cx="3474720" cy="3840480"/>
+            <a:off x="4480559" y="2011680"/>
+            <a:ext cx="3474720" cy="4114800"/>
           </a:xfrm>
           <a:prstGeom prst="roundRect">
             <a:avLst/>
@@ -3932,7 +3905,7 @@
         </p:nvSpPr>
         <p:spPr>
           <a:xfrm>
-            <a:off x="4480559" y="2103120"/>
+            <a:off x="4480559" y="2011680"/>
             <a:ext cx="3474720" cy="54864"/>
           </a:xfrm>
           <a:prstGeom prst="rect">
@@ -3975,8 +3948,8 @@
         </p:nvSpPr>
         <p:spPr>
           <a:xfrm>
-            <a:off x="4754879" y="2468880"/>
-            <a:ext cx="1097280" cy="365760"/>
+            <a:off x="4754879" y="2377440"/>
+            <a:ext cx="1188720" cy="411480"/>
           </a:xfrm>
           <a:prstGeom prst="roundRect">
             <a:avLst/>
@@ -4018,8 +3991,8 @@
         </p:nvSpPr>
         <p:spPr>
           <a:xfrm>
-            <a:off x="4754879" y="2487168"/>
-            <a:ext cx="1097280" cy="320040"/>
+            <a:off x="4754879" y="2404872"/>
+            <a:ext cx="1188720" cy="365760"/>
           </a:xfrm>
           <a:prstGeom prst="rect">
             <a:avLst/>
@@ -4033,16 +4006,13 @@
           <a:lstStyle/>
           <a:p>
             <a:pPr algn="ctr">
-              <a:lnSpc>
-                <a:spcPts val="1439"/>
-              </a:lnSpc>
               <a:spcBef>
                 <a:spcPts val="0"/>
               </a:spcBef>
               <a:spcAft>
                 <a:spcPts val="0"/>
               </a:spcAft>
-              <a:defRPr sz="1200" b="1">
+              <a:defRPr sz="1300" b="1">
                 <a:solidFill>
                   <a:srgbClr val="FFFFFF"/>
                 </a:solidFill>
@@ -4078,9 +4048,6 @@
           <a:lstStyle/>
           <a:p>
             <a:pPr algn="l">
-              <a:lnSpc>
-                <a:spcPts val="2280"/>
-              </a:lnSpc>
               <a:spcBef>
                 <a:spcPts val="0"/>
               </a:spcBef>
@@ -4108,7 +4075,7 @@
         </p:nvSpPr>
         <p:spPr>
           <a:xfrm>
-            <a:off x="4754879" y="3657600"/>
+            <a:off x="4754879" y="3749040"/>
             <a:ext cx="2926080" cy="2011680"/>
           </a:xfrm>
           <a:prstGeom prst="rect">
@@ -4123,16 +4090,13 @@
           <a:lstStyle/>
           <a:p>
             <a:pPr algn="l">
-              <a:lnSpc>
-                <a:spcPts val="1950"/>
-              </a:lnSpc>
               <a:spcBef>
                 <a:spcPts val="0"/>
               </a:spcBef>
               <a:spcAft>
                 <a:spcPts val="0"/>
               </a:spcAft>
-              <a:defRPr sz="1300" b="0">
+              <a:defRPr sz="1400" b="0">
                 <a:solidFill>
                   <a:srgbClr val="6B7280"/>
                 </a:solidFill>
@@ -4153,8 +4117,8 @@
         </p:nvSpPr>
         <p:spPr>
           <a:xfrm>
-            <a:off x="8229598" y="2103120"/>
-            <a:ext cx="3474720" cy="3840480"/>
+            <a:off x="8229598" y="2011680"/>
+            <a:ext cx="3474720" cy="4114800"/>
           </a:xfrm>
           <a:prstGeom prst="roundRect">
             <a:avLst/>
@@ -4196,7 +4160,7 @@
         </p:nvSpPr>
         <p:spPr>
           <a:xfrm>
-            <a:off x="8229598" y="2103120"/>
+            <a:off x="8229598" y="2011680"/>
             <a:ext cx="3474720" cy="54864"/>
           </a:xfrm>
           <a:prstGeom prst="rect">
@@ -4239,8 +4203,8 @@
         </p:nvSpPr>
         <p:spPr>
           <a:xfrm>
-            <a:off x="8503918" y="2468880"/>
-            <a:ext cx="1097280" cy="365760"/>
+            <a:off x="8503918" y="2377440"/>
+            <a:ext cx="1188720" cy="411480"/>
           </a:xfrm>
           <a:prstGeom prst="roundRect">
             <a:avLst/>
@@ -4282,8 +4246,8 @@
         </p:nvSpPr>
         <p:spPr>
           <a:xfrm>
-            <a:off x="8503918" y="2487168"/>
-            <a:ext cx="1097280" cy="320040"/>
+            <a:off x="8503918" y="2404872"/>
+            <a:ext cx="1188720" cy="365760"/>
           </a:xfrm>
           <a:prstGeom prst="rect">
             <a:avLst/>
@@ -4297,16 +4261,13 @@
           <a:lstStyle/>
           <a:p>
             <a:pPr algn="ctr">
-              <a:lnSpc>
-                <a:spcPts val="1439"/>
-              </a:lnSpc>
               <a:spcBef>
                 <a:spcPts val="0"/>
               </a:spcBef>
               <a:spcAft>
                 <a:spcPts val="0"/>
               </a:spcAft>
-              <a:defRPr sz="1200" b="1">
+              <a:defRPr sz="1300" b="1">
                 <a:solidFill>
                   <a:srgbClr val="FFFFFF"/>
                 </a:solidFill>
@@ -4342,9 +4303,6 @@
           <a:lstStyle/>
           <a:p>
             <a:pPr algn="l">
-              <a:lnSpc>
-                <a:spcPts val="2280"/>
-              </a:lnSpc>
               <a:spcBef>
                 <a:spcPts val="0"/>
               </a:spcBef>
@@ -4372,7 +4330,7 @@
         </p:nvSpPr>
         <p:spPr>
           <a:xfrm>
-            <a:off x="8503918" y="3657600"/>
+            <a:off x="8503918" y="3749040"/>
             <a:ext cx="2926080" cy="2011680"/>
           </a:xfrm>
           <a:prstGeom prst="rect">
@@ -4387,16 +4345,13 @@
           <a:lstStyle/>
           <a:p>
             <a:pPr algn="l">
-              <a:lnSpc>
-                <a:spcPts val="1950"/>
-              </a:lnSpc>
               <a:spcBef>
                 <a:spcPts val="0"/>
               </a:spcBef>
               <a:spcAft>
                 <a:spcPts val="0"/>
               </a:spcAft>
-              <a:defRPr sz="1300" b="0">
+              <a:defRPr sz="1400" b="0">
                 <a:solidFill>
                   <a:srgbClr val="6B7280"/>
                 </a:solidFill>
@@ -4572,7 +4527,7 @@
         </p:nvSpPr>
         <p:spPr>
           <a:xfrm>
-            <a:off x="5394960" y="1097280"/>
+            <a:off x="5394960" y="1188720"/>
             <a:ext cx="1371600" cy="1371600"/>
           </a:xfrm>
           <a:prstGeom prst="roundRect">
@@ -4615,8 +4570,8 @@
         </p:nvSpPr>
         <p:spPr>
           <a:xfrm>
-            <a:off x="5394960" y="1207008"/>
-            <a:ext cx="1371600" cy="1188720"/>
+            <a:off x="5394960" y="1325880"/>
+            <a:ext cx="1371600" cy="1097280"/>
           </a:xfrm>
           <a:prstGeom prst="rect">
             <a:avLst/>
@@ -4630,9 +4585,6 @@
           <a:lstStyle/>
           <a:p>
             <a:pPr algn="ctr">
-              <a:lnSpc>
-                <a:spcPts val="4320"/>
-              </a:lnSpc>
               <a:spcBef>
                 <a:spcPts val="0"/>
               </a:spcBef>
@@ -4660,7 +4612,7 @@
         </p:nvSpPr>
         <p:spPr>
           <a:xfrm>
-            <a:off x="1371600" y="2743200"/>
+            <a:off x="1371600" y="2926080"/>
             <a:ext cx="9418320" cy="914400"/>
           </a:xfrm>
           <a:prstGeom prst="rect">
@@ -4675,9 +4627,6 @@
           <a:lstStyle/>
           <a:p>
             <a:pPr algn="ctr">
-              <a:lnSpc>
-                <a:spcPts val="5280"/>
-              </a:lnSpc>
               <a:spcBef>
                 <a:spcPts val="0"/>
               </a:spcBef>
@@ -4705,8 +4654,8 @@
         </p:nvSpPr>
         <p:spPr>
           <a:xfrm>
-            <a:off x="1828800" y="3749039"/>
-            <a:ext cx="8503920" cy="640080"/>
+            <a:off x="2286000" y="4023360"/>
+            <a:ext cx="7589520" cy="640080"/>
           </a:xfrm>
           <a:prstGeom prst="rect">
             <a:avLst/>
@@ -4720,9 +4669,6 @@
           <a:lstStyle/>
           <a:p>
             <a:pPr algn="ctr">
-              <a:lnSpc>
-                <a:spcPts val="2700"/>
-              </a:lnSpc>
               <a:spcBef>
                 <a:spcPts val="0"/>
               </a:spcBef>
@@ -4750,7 +4696,7 @@
         </p:nvSpPr>
         <p:spPr>
           <a:xfrm>
-            <a:off x="4663440" y="4754880"/>
+            <a:off x="4663440" y="4937760"/>
             <a:ext cx="2834640" cy="594360"/>
           </a:xfrm>
           <a:prstGeom prst="roundRect">
@@ -4793,7 +4739,7 @@
         </p:nvSpPr>
         <p:spPr>
           <a:xfrm>
-            <a:off x="4663440" y="4800600"/>
+            <a:off x="4663440" y="4983480"/>
             <a:ext cx="2834640" cy="502920"/>
           </a:xfrm>
           <a:prstGeom prst="rect">
@@ -4808,9 +4754,6 @@
           <a:lstStyle/>
           <a:p>
             <a:pPr algn="ctr">
-              <a:lnSpc>
-                <a:spcPts val="2160"/>
-              </a:lnSpc>
               <a:spcBef>
                 <a:spcPts val="0"/>
               </a:spcBef>
@@ -4838,7 +4781,7 @@
         </p:nvSpPr>
         <p:spPr>
           <a:xfrm>
-            <a:off x="1828800" y="5760720"/>
+            <a:off x="1828800" y="5852160"/>
             <a:ext cx="8503920" cy="457200"/>
           </a:xfrm>
           <a:prstGeom prst="rect">
@@ -4853,9 +4796,6 @@
           <a:lstStyle/>
           <a:p>
             <a:pPr algn="ctr">
-              <a:lnSpc>
-                <a:spcPts val="1680"/>
-              </a:lnSpc>
               <a:spcBef>
                 <a:spcPts val="0"/>
               </a:spcBef>
@@ -4967,9 +4907,6 @@
           <a:lstStyle/>
           <a:p>
             <a:pPr algn="l">
-              <a:lnSpc>
-                <a:spcPts val="1560"/>
-              </a:lnSpc>
               <a:spcBef>
                 <a:spcPts val="0"/>
               </a:spcBef>
@@ -4997,8 +4934,8 @@
         </p:nvSpPr>
         <p:spPr>
           <a:xfrm>
-            <a:off x="731520" y="914400"/>
-            <a:ext cx="10058400" cy="914400"/>
+            <a:off x="731520" y="1005840"/>
+            <a:ext cx="10058400" cy="640080"/>
           </a:xfrm>
           <a:prstGeom prst="rect">
             <a:avLst/>
@@ -5012,16 +4949,13 @@
           <a:lstStyle/>
           <a:p>
             <a:pPr algn="l">
-              <a:lnSpc>
-                <a:spcPts val="4800"/>
-              </a:lnSpc>
               <a:spcBef>
                 <a:spcPts val="0"/>
               </a:spcBef>
               <a:spcAft>
                 <a:spcPts val="0"/>
               </a:spcAft>
-              <a:defRPr sz="4000" b="1">
+              <a:defRPr sz="3800" b="1">
                 <a:solidFill>
                   <a:srgbClr val="1E2A38"/>
                 </a:solidFill>
@@ -5042,8 +4976,8 @@
         </p:nvSpPr>
         <p:spPr>
           <a:xfrm>
-            <a:off x="731520" y="2286000"/>
-            <a:ext cx="2560320" cy="3291840"/>
+            <a:off x="731520" y="2194560"/>
+            <a:ext cx="2606040" cy="3657600"/>
           </a:xfrm>
           <a:prstGeom prst="roundRect">
             <a:avLst/>
@@ -5085,8 +5019,8 @@
         </p:nvSpPr>
         <p:spPr>
           <a:xfrm>
-            <a:off x="914400" y="2514600"/>
-            <a:ext cx="502920" cy="502920"/>
+            <a:off x="1691640" y="2468880"/>
+            <a:ext cx="594360" cy="594360"/>
           </a:xfrm>
           <a:prstGeom prst="ellipse">
             <a:avLst/>
@@ -5128,8 +5062,8 @@
         </p:nvSpPr>
         <p:spPr>
           <a:xfrm>
-            <a:off x="914400" y="2560320"/>
-            <a:ext cx="502920" cy="411480"/>
+            <a:off x="1691640" y="2532888"/>
+            <a:ext cx="594360" cy="457200"/>
           </a:xfrm>
           <a:prstGeom prst="rect">
             <a:avLst/>
@@ -5143,16 +5077,13 @@
           <a:lstStyle/>
           <a:p>
             <a:pPr algn="ctr">
-              <a:lnSpc>
-                <a:spcPts val="2400"/>
-              </a:lnSpc>
               <a:spcBef>
                 <a:spcPts val="0"/>
               </a:spcBef>
               <a:spcAft>
                 <a:spcPts val="0"/>
               </a:spcAft>
-              <a:defRPr sz="2000" b="1">
+              <a:defRPr sz="2200" b="1">
                 <a:solidFill>
                   <a:srgbClr val="FFFFFF"/>
                 </a:solidFill>
@@ -5173,8 +5104,8 @@
         </p:nvSpPr>
         <p:spPr>
           <a:xfrm>
-            <a:off x="914400" y="3246120"/>
-            <a:ext cx="2194560" cy="457200"/>
+            <a:off x="960120" y="3337560"/>
+            <a:ext cx="2148840" cy="457200"/>
           </a:xfrm>
           <a:prstGeom prst="rect">
             <a:avLst/>
@@ -5187,17 +5118,14 @@
           </a:bodyPr>
           <a:lstStyle/>
           <a:p>
-            <a:pPr algn="l">
-              <a:lnSpc>
-                <a:spcPts val="2160"/>
-              </a:lnSpc>
+            <a:pPr algn="ctr">
               <a:spcBef>
                 <a:spcPts val="0"/>
               </a:spcBef>
               <a:spcAft>
                 <a:spcPts val="0"/>
               </a:spcAft>
-              <a:defRPr sz="1800" b="1">
+              <a:defRPr sz="1700" b="1">
                 <a:solidFill>
                   <a:srgbClr val="1E2A38"/>
                 </a:solidFill>
@@ -5218,8 +5146,8 @@
         </p:nvSpPr>
         <p:spPr>
           <a:xfrm>
-            <a:off x="914400" y="3749040"/>
-            <a:ext cx="2194560" cy="1645920"/>
+            <a:off x="960120" y="3931920"/>
+            <a:ext cx="2148840" cy="1645920"/>
           </a:xfrm>
           <a:prstGeom prst="rect">
             <a:avLst/>
@@ -5232,17 +5160,14 @@
           </a:bodyPr>
           <a:lstStyle/>
           <a:p>
-            <a:pPr algn="l">
-              <a:lnSpc>
-                <a:spcPts val="1959"/>
-              </a:lnSpc>
+            <a:pPr algn="ctr">
               <a:spcBef>
                 <a:spcPts val="0"/>
               </a:spcBef>
               <a:spcAft>
                 <a:spcPts val="0"/>
               </a:spcAft>
-              <a:defRPr sz="1400" b="0">
+              <a:defRPr sz="1300" b="0">
                 <a:solidFill>
                   <a:srgbClr val="6B7280"/>
                 </a:solidFill>
@@ -5263,8 +5188,8 @@
         </p:nvSpPr>
         <p:spPr>
           <a:xfrm>
-            <a:off x="3520440" y="2286000"/>
-            <a:ext cx="2560320" cy="3291840"/>
+            <a:off x="3566160" y="2194560"/>
+            <a:ext cx="2606040" cy="3657600"/>
           </a:xfrm>
           <a:prstGeom prst="roundRect">
             <a:avLst/>
@@ -5306,8 +5231,8 @@
         </p:nvSpPr>
         <p:spPr>
           <a:xfrm>
-            <a:off x="3703320" y="2514600"/>
-            <a:ext cx="502920" cy="502920"/>
+            <a:off x="4526280" y="2468880"/>
+            <a:ext cx="594360" cy="594360"/>
           </a:xfrm>
           <a:prstGeom prst="ellipse">
             <a:avLst/>
@@ -5349,8 +5274,8 @@
         </p:nvSpPr>
         <p:spPr>
           <a:xfrm>
-            <a:off x="3703320" y="2560320"/>
-            <a:ext cx="502920" cy="411480"/>
+            <a:off x="4526280" y="2532888"/>
+            <a:ext cx="594360" cy="457200"/>
           </a:xfrm>
           <a:prstGeom prst="rect">
             <a:avLst/>
@@ -5364,16 +5289,13 @@
           <a:lstStyle/>
           <a:p>
             <a:pPr algn="ctr">
-              <a:lnSpc>
-                <a:spcPts val="2400"/>
-              </a:lnSpc>
               <a:spcBef>
                 <a:spcPts val="0"/>
               </a:spcBef>
               <a:spcAft>
                 <a:spcPts val="0"/>
               </a:spcAft>
-              <a:defRPr sz="2000" b="1">
+              <a:defRPr sz="2200" b="1">
                 <a:solidFill>
                   <a:srgbClr val="FFFFFF"/>
                 </a:solidFill>
@@ -5394,8 +5316,8 @@
         </p:nvSpPr>
         <p:spPr>
           <a:xfrm>
-            <a:off x="3703320" y="3246120"/>
-            <a:ext cx="2194560" cy="457200"/>
+            <a:off x="3794760" y="3337560"/>
+            <a:ext cx="2148840" cy="457200"/>
           </a:xfrm>
           <a:prstGeom prst="rect">
             <a:avLst/>
@@ -5408,17 +5330,14 @@
           </a:bodyPr>
           <a:lstStyle/>
           <a:p>
-            <a:pPr algn="l">
-              <a:lnSpc>
-                <a:spcPts val="2160"/>
-              </a:lnSpc>
+            <a:pPr algn="ctr">
               <a:spcBef>
                 <a:spcPts val="0"/>
               </a:spcBef>
               <a:spcAft>
                 <a:spcPts val="0"/>
               </a:spcAft>
-              <a:defRPr sz="1800" b="1">
+              <a:defRPr sz="1700" b="1">
                 <a:solidFill>
                   <a:srgbClr val="1E2A38"/>
                 </a:solidFill>
@@ -5439,8 +5358,8 @@
         </p:nvSpPr>
         <p:spPr>
           <a:xfrm>
-            <a:off x="3703320" y="3749040"/>
-            <a:ext cx="2194560" cy="1645920"/>
+            <a:off x="3794760" y="3931920"/>
+            <a:ext cx="2148840" cy="1645920"/>
           </a:xfrm>
           <a:prstGeom prst="rect">
             <a:avLst/>
@@ -5453,17 +5372,14 @@
           </a:bodyPr>
           <a:lstStyle/>
           <a:p>
-            <a:pPr algn="l">
-              <a:lnSpc>
-                <a:spcPts val="1959"/>
-              </a:lnSpc>
+            <a:pPr algn="ctr">
               <a:spcBef>
                 <a:spcPts val="0"/>
               </a:spcBef>
               <a:spcAft>
                 <a:spcPts val="0"/>
               </a:spcAft>
-              <a:defRPr sz="1400" b="0">
+              <a:defRPr sz="1300" b="0">
                 <a:solidFill>
                   <a:srgbClr val="6B7280"/>
                 </a:solidFill>
@@ -5471,7 +5387,7 @@
               </a:defRPr>
             </a:pPr>
             <a:r>
-              <a:t>463 courses across 24 departments. Generic advisor meetings aren't enough.</a:t>
+              <a:t>463 courses, 24 departments. Generic advisor meetings aren't enough.</a:t>
             </a:r>
           </a:p>
         </p:txBody>
@@ -5484,8 +5400,8 @@
         </p:nvSpPr>
         <p:spPr>
           <a:xfrm>
-            <a:off x="6309360" y="2286000"/>
-            <a:ext cx="2560320" cy="3291840"/>
+            <a:off x="6400800" y="2194560"/>
+            <a:ext cx="2606040" cy="3657600"/>
           </a:xfrm>
           <a:prstGeom prst="roundRect">
             <a:avLst/>
@@ -5527,8 +5443,8 @@
         </p:nvSpPr>
         <p:spPr>
           <a:xfrm>
-            <a:off x="6492240" y="2514600"/>
-            <a:ext cx="502920" cy="502920"/>
+            <a:off x="7360920" y="2468880"/>
+            <a:ext cx="594360" cy="594360"/>
           </a:xfrm>
           <a:prstGeom prst="ellipse">
             <a:avLst/>
@@ -5570,8 +5486,8 @@
         </p:nvSpPr>
         <p:spPr>
           <a:xfrm>
-            <a:off x="6492240" y="2560320"/>
-            <a:ext cx="502920" cy="411480"/>
+            <a:off x="7360920" y="2532888"/>
+            <a:ext cx="594360" cy="457200"/>
           </a:xfrm>
           <a:prstGeom prst="rect">
             <a:avLst/>
@@ -5585,16 +5501,13 @@
           <a:lstStyle/>
           <a:p>
             <a:pPr algn="ctr">
-              <a:lnSpc>
-                <a:spcPts val="2400"/>
-              </a:lnSpc>
               <a:spcBef>
                 <a:spcPts val="0"/>
               </a:spcBef>
               <a:spcAft>
                 <a:spcPts val="0"/>
               </a:spcAft>
-              <a:defRPr sz="2000" b="1">
+              <a:defRPr sz="2200" b="1">
                 <a:solidFill>
                   <a:srgbClr val="FFFFFF"/>
                 </a:solidFill>
@@ -5615,8 +5528,8 @@
         </p:nvSpPr>
         <p:spPr>
           <a:xfrm>
-            <a:off x="6492240" y="3246120"/>
-            <a:ext cx="2194560" cy="457200"/>
+            <a:off x="6629400" y="3337560"/>
+            <a:ext cx="2148840" cy="457200"/>
           </a:xfrm>
           <a:prstGeom prst="rect">
             <a:avLst/>
@@ -5629,17 +5542,14 @@
           </a:bodyPr>
           <a:lstStyle/>
           <a:p>
-            <a:pPr algn="l">
-              <a:lnSpc>
-                <a:spcPts val="2160"/>
-              </a:lnSpc>
+            <a:pPr algn="ctr">
               <a:spcBef>
                 <a:spcPts val="0"/>
               </a:spcBef>
               <a:spcAft>
                 <a:spcPts val="0"/>
               </a:spcAft>
-              <a:defRPr sz="1800" b="1">
+              <a:defRPr sz="1700" b="1">
                 <a:solidFill>
                   <a:srgbClr val="1E2A38"/>
                 </a:solidFill>
@@ -5660,8 +5570,8 @@
         </p:nvSpPr>
         <p:spPr>
           <a:xfrm>
-            <a:off x="6492240" y="3749040"/>
-            <a:ext cx="2194560" cy="1645920"/>
+            <a:off x="6629400" y="3931920"/>
+            <a:ext cx="2148840" cy="1645920"/>
           </a:xfrm>
           <a:prstGeom prst="rect">
             <a:avLst/>
@@ -5674,17 +5584,14 @@
           </a:bodyPr>
           <a:lstStyle/>
           <a:p>
-            <a:pPr algn="l">
-              <a:lnSpc>
-                <a:spcPts val="1959"/>
-              </a:lnSpc>
+            <a:pPr algn="ctr">
               <a:spcBef>
                 <a:spcPts val="0"/>
               </a:spcBef>
               <a:spcAft>
                 <a:spcPts val="0"/>
               </a:spcAft>
-              <a:defRPr sz="1400" b="0">
+              <a:defRPr sz="1300" b="0">
                 <a:solidFill>
                   <a:srgbClr val="6B7280"/>
                 </a:solidFill>
@@ -5692,7 +5599,7 @@
               </a:defRPr>
             </a:pPr>
             <a:r>
-              <a:t>Alumni exist who can help, but students don't know what to say or who to contact.</a:t>
+              <a:t>Alumni can help, but students don't know what to say or who to reach.</a:t>
             </a:r>
           </a:p>
         </p:txBody>
@@ -5705,8 +5612,8 @@
         </p:nvSpPr>
         <p:spPr>
           <a:xfrm>
-            <a:off x="9098280" y="2286000"/>
-            <a:ext cx="2560320" cy="3291840"/>
+            <a:off x="9235440" y="2194560"/>
+            <a:ext cx="2606040" cy="3657600"/>
           </a:xfrm>
           <a:prstGeom prst="roundRect">
             <a:avLst/>
@@ -5748,8 +5655,8 @@
         </p:nvSpPr>
         <p:spPr>
           <a:xfrm>
-            <a:off x="9281160" y="2514600"/>
-            <a:ext cx="502920" cy="502920"/>
+            <a:off x="10195560" y="2468880"/>
+            <a:ext cx="594360" cy="594360"/>
           </a:xfrm>
           <a:prstGeom prst="ellipse">
             <a:avLst/>
@@ -5791,8 +5698,8 @@
         </p:nvSpPr>
         <p:spPr>
           <a:xfrm>
-            <a:off x="9281160" y="2560320"/>
-            <a:ext cx="502920" cy="411480"/>
+            <a:off x="10195560" y="2532888"/>
+            <a:ext cx="594360" cy="457200"/>
           </a:xfrm>
           <a:prstGeom prst="rect">
             <a:avLst/>
@@ -5806,16 +5713,13 @@
           <a:lstStyle/>
           <a:p>
             <a:pPr algn="ctr">
-              <a:lnSpc>
-                <a:spcPts val="2400"/>
-              </a:lnSpc>
               <a:spcBef>
                 <a:spcPts val="0"/>
               </a:spcBef>
               <a:spcAft>
                 <a:spcPts val="0"/>
               </a:spcAft>
-              <a:defRPr sz="2000" b="1">
+              <a:defRPr sz="2200" b="1">
                 <a:solidFill>
                   <a:srgbClr val="FFFFFF"/>
                 </a:solidFill>
@@ -5836,8 +5740,8 @@
         </p:nvSpPr>
         <p:spPr>
           <a:xfrm>
-            <a:off x="9281160" y="3246120"/>
-            <a:ext cx="2194560" cy="457200"/>
+            <a:off x="9464040" y="3337560"/>
+            <a:ext cx="2148840" cy="457200"/>
           </a:xfrm>
           <a:prstGeom prst="rect">
             <a:avLst/>
@@ -5850,17 +5754,14 @@
           </a:bodyPr>
           <a:lstStyle/>
           <a:p>
-            <a:pPr algn="l">
-              <a:lnSpc>
-                <a:spcPts val="2160"/>
-              </a:lnSpc>
+            <a:pPr algn="ctr">
               <a:spcBef>
                 <a:spcPts val="0"/>
               </a:spcBef>
               <a:spcAft>
                 <a:spcPts val="0"/>
               </a:spcAft>
-              <a:defRPr sz="1800" b="1">
+              <a:defRPr sz="1700" b="1">
                 <a:solidFill>
                   <a:srgbClr val="1E2A38"/>
                 </a:solidFill>
@@ -5881,8 +5782,8 @@
         </p:nvSpPr>
         <p:spPr>
           <a:xfrm>
-            <a:off x="9281160" y="3749040"/>
-            <a:ext cx="2194560" cy="1645920"/>
+            <a:off x="9464040" y="3931920"/>
+            <a:ext cx="2148840" cy="1645920"/>
           </a:xfrm>
           <a:prstGeom prst="rect">
             <a:avLst/>
@@ -5895,17 +5796,14 @@
           </a:bodyPr>
           <a:lstStyle/>
           <a:p>
-            <a:pPr algn="l">
-              <a:lnSpc>
-                <a:spcPts val="1959"/>
-              </a:lnSpc>
+            <a:pPr algn="ctr">
               <a:spcBef>
                 <a:spcPts val="0"/>
               </a:spcBef>
               <a:spcAft>
                 <a:spcPts val="0"/>
               </a:spcAft>
-              <a:defRPr sz="1400" b="0">
+              <a:defRPr sz="1300" b="0">
                 <a:solidFill>
                   <a:srgbClr val="6B7280"/>
                 </a:solidFill>
@@ -5913,7 +5811,7 @@
               </a:defRPr>
             </a:pPr>
             <a:r>
-              <a:t>RateMyProfessors is noisy. There's no synthesized, actionable professor intel.</a:t>
+              <a:t>RateMyProfessors is noisy. No synthesized, actionable professor intel.</a:t>
             </a:r>
           </a:p>
         </p:txBody>
@@ -6010,9 +5908,6 @@
           <a:lstStyle/>
           <a:p>
             <a:pPr algn="l">
-              <a:lnSpc>
-                <a:spcPts val="1560"/>
-              </a:lnSpc>
               <a:spcBef>
                 <a:spcPts val="0"/>
               </a:spcBef>
@@ -6040,8 +5935,8 @@
         </p:nvSpPr>
         <p:spPr>
           <a:xfrm>
-            <a:off x="731520" y="914400"/>
-            <a:ext cx="10058400" cy="914400"/>
+            <a:off x="731520" y="1005840"/>
+            <a:ext cx="10058400" cy="640080"/>
           </a:xfrm>
           <a:prstGeom prst="rect">
             <a:avLst/>
@@ -6055,16 +5950,13 @@
           <a:lstStyle/>
           <a:p>
             <a:pPr algn="l">
-              <a:lnSpc>
-                <a:spcPts val="4800"/>
-              </a:lnSpc>
               <a:spcBef>
                 <a:spcPts val="0"/>
               </a:spcBef>
               <a:spcAft>
                 <a:spcPts val="0"/>
               </a:spcAft>
-              <a:defRPr sz="4000" b="1">
+              <a:defRPr sz="3800" b="1">
                 <a:solidFill>
                   <a:srgbClr val="1E2A38"/>
                 </a:solidFill>
@@ -6085,8 +5977,8 @@
         </p:nvSpPr>
         <p:spPr>
           <a:xfrm>
-            <a:off x="731520" y="1691640"/>
-            <a:ext cx="9144000" cy="640080"/>
+            <a:off x="731520" y="1828800"/>
+            <a:ext cx="10058400" cy="548640"/>
           </a:xfrm>
           <a:prstGeom prst="rect">
             <a:avLst/>
@@ -6100,16 +5992,13 @@
           <a:lstStyle/>
           <a:p>
             <a:pPr algn="l">
-              <a:lnSpc>
-                <a:spcPts val="2550"/>
-              </a:lnSpc>
               <a:spcBef>
                 <a:spcPts val="0"/>
               </a:spcBef>
               <a:spcAft>
                 <a:spcPts val="0"/>
               </a:spcAft>
-              <a:defRPr sz="1700" b="0">
+              <a:defRPr sz="1600" b="0">
                 <a:solidFill>
                   <a:srgbClr val="6B7280"/>
                 </a:solidFill>
@@ -6117,7 +6006,7 @@
               </a:defRPr>
             </a:pPr>
             <a:r>
-              <a:t>MakeItSo flips course planning on its head. Start with your dream career, and AI builds your entire academic roadmap backward—courses, people, activities, and timeline.</a:t>
+              <a:t>MakeItSo flips planning on its head. Start with your dream career, and AI builds your entire roadmap backward—courses, people, activities, timeline.</a:t>
             </a:r>
           </a:p>
         </p:txBody>
@@ -6130,8 +6019,8 @@
         </p:nvSpPr>
         <p:spPr>
           <a:xfrm>
-            <a:off x="1371600" y="2834640"/>
-            <a:ext cx="4389120" cy="3474720"/>
+            <a:off x="1371600" y="2743200"/>
+            <a:ext cx="4389120" cy="3657600"/>
           </a:xfrm>
           <a:prstGeom prst="roundRect">
             <a:avLst/>
@@ -6173,7 +6062,7 @@
         </p:nvSpPr>
         <p:spPr>
           <a:xfrm>
-            <a:off x="1371600" y="2834640"/>
+            <a:off x="1371600" y="2743200"/>
             <a:ext cx="4389120" cy="54864"/>
           </a:xfrm>
           <a:prstGeom prst="rect">
@@ -6216,8 +6105,8 @@
         </p:nvSpPr>
         <p:spPr>
           <a:xfrm>
-            <a:off x="1737360" y="3154680"/>
-            <a:ext cx="3657600" cy="411480"/>
+            <a:off x="1737360" y="3017520"/>
+            <a:ext cx="3657600" cy="457200"/>
           </a:xfrm>
           <a:prstGeom prst="rect">
             <a:avLst/>
@@ -6231,9 +6120,6 @@
           <a:lstStyle/>
           <a:p>
             <a:pPr algn="l">
-              <a:lnSpc>
-                <a:spcPts val="2879"/>
-              </a:lnSpc>
               <a:spcBef>
                 <a:spcPts val="0"/>
               </a:spcBef>
@@ -6261,8 +6147,8 @@
         </p:nvSpPr>
         <p:spPr>
           <a:xfrm>
-            <a:off x="1737360" y="3611880"/>
-            <a:ext cx="3657600" cy="320040"/>
+            <a:off x="1737360" y="3520440"/>
+            <a:ext cx="3657600" cy="365760"/>
           </a:xfrm>
           <a:prstGeom prst="rect">
             <a:avLst/>
@@ -6276,9 +6162,6 @@
           <a:lstStyle/>
           <a:p>
             <a:pPr algn="l">
-              <a:lnSpc>
-                <a:spcPts val="1680"/>
-              </a:lnSpc>
               <a:spcBef>
                 <a:spcPts val="0"/>
               </a:spcBef>
@@ -6306,7 +6189,7 @@
         </p:nvSpPr>
         <p:spPr>
           <a:xfrm>
-            <a:off x="1737360" y="4206240"/>
+            <a:off x="1737360" y="4142232"/>
             <a:ext cx="274320" cy="274320"/>
           </a:xfrm>
           <a:prstGeom prst="ellipse">
@@ -6349,8 +6232,8 @@
         </p:nvSpPr>
         <p:spPr>
           <a:xfrm>
-            <a:off x="1737360" y="4224528"/>
-            <a:ext cx="274320" cy="237744"/>
+            <a:off x="1737360" y="4160520"/>
+            <a:ext cx="274320" cy="228600"/>
           </a:xfrm>
           <a:prstGeom prst="rect">
             <a:avLst/>
@@ -6364,9 +6247,6 @@
           <a:lstStyle/>
           <a:p>
             <a:pPr algn="ctr">
-              <a:lnSpc>
-                <a:spcPts val="1320"/>
-              </a:lnSpc>
               <a:spcBef>
                 <a:spcPts val="0"/>
               </a:spcBef>
@@ -6394,8 +6274,8 @@
         </p:nvSpPr>
         <p:spPr>
           <a:xfrm>
-            <a:off x="2194560" y="4224528"/>
-            <a:ext cx="3200400" cy="274320"/>
+            <a:off x="2194560" y="4142232"/>
+            <a:ext cx="3200400" cy="320040"/>
           </a:xfrm>
           <a:prstGeom prst="rect">
             <a:avLst/>
@@ -6409,9 +6289,6 @@
           <a:lstStyle/>
           <a:p>
             <a:pPr algn="l">
-              <a:lnSpc>
-                <a:spcPts val="1680"/>
-              </a:lnSpc>
               <a:spcBef>
                 <a:spcPts val="0"/>
               </a:spcBef>
@@ -6439,7 +6316,7 @@
         </p:nvSpPr>
         <p:spPr>
           <a:xfrm>
-            <a:off x="1737360" y="4663440"/>
+            <a:off x="1737360" y="4645152"/>
             <a:ext cx="274320" cy="274320"/>
           </a:xfrm>
           <a:prstGeom prst="ellipse">
@@ -6482,8 +6359,8 @@
         </p:nvSpPr>
         <p:spPr>
           <a:xfrm>
-            <a:off x="1737360" y="4681728"/>
-            <a:ext cx="274320" cy="237744"/>
+            <a:off x="1737360" y="4663440"/>
+            <a:ext cx="274320" cy="228600"/>
           </a:xfrm>
           <a:prstGeom prst="rect">
             <a:avLst/>
@@ -6497,9 +6374,6 @@
           <a:lstStyle/>
           <a:p>
             <a:pPr algn="ctr">
-              <a:lnSpc>
-                <a:spcPts val="1320"/>
-              </a:lnSpc>
               <a:spcBef>
                 <a:spcPts val="0"/>
               </a:spcBef>
@@ -6527,8 +6401,8 @@
         </p:nvSpPr>
         <p:spPr>
           <a:xfrm>
-            <a:off x="2194560" y="4681728"/>
-            <a:ext cx="3200400" cy="274320"/>
+            <a:off x="2194560" y="4645152"/>
+            <a:ext cx="3200400" cy="320040"/>
           </a:xfrm>
           <a:prstGeom prst="rect">
             <a:avLst/>
@@ -6542,9 +6416,6 @@
           <a:lstStyle/>
           <a:p>
             <a:pPr algn="l">
-              <a:lnSpc>
-                <a:spcPts val="1680"/>
-              </a:lnSpc>
               <a:spcBef>
                 <a:spcPts val="0"/>
               </a:spcBef>
@@ -6572,7 +6443,7 @@
         </p:nvSpPr>
         <p:spPr>
           <a:xfrm>
-            <a:off x="1737360" y="5120640"/>
+            <a:off x="1737360" y="5148072"/>
             <a:ext cx="274320" cy="274320"/>
           </a:xfrm>
           <a:prstGeom prst="ellipse">
@@ -6615,8 +6486,8 @@
         </p:nvSpPr>
         <p:spPr>
           <a:xfrm>
-            <a:off x="1737360" y="5138928"/>
-            <a:ext cx="274320" cy="237744"/>
+            <a:off x="1737360" y="5166360"/>
+            <a:ext cx="274320" cy="228600"/>
           </a:xfrm>
           <a:prstGeom prst="rect">
             <a:avLst/>
@@ -6630,9 +6501,6 @@
           <a:lstStyle/>
           <a:p>
             <a:pPr algn="ctr">
-              <a:lnSpc>
-                <a:spcPts val="1320"/>
-              </a:lnSpc>
               <a:spcBef>
                 <a:spcPts val="0"/>
               </a:spcBef>
@@ -6660,8 +6528,8 @@
         </p:nvSpPr>
         <p:spPr>
           <a:xfrm>
-            <a:off x="2194560" y="5138928"/>
-            <a:ext cx="3200400" cy="274320"/>
+            <a:off x="2194560" y="5148072"/>
+            <a:ext cx="3200400" cy="320040"/>
           </a:xfrm>
           <a:prstGeom prst="rect">
             <a:avLst/>
@@ -6675,9 +6543,6 @@
           <a:lstStyle/>
           <a:p>
             <a:pPr algn="l">
-              <a:lnSpc>
-                <a:spcPts val="1680"/>
-              </a:lnSpc>
               <a:spcBef>
                 <a:spcPts val="0"/>
               </a:spcBef>
@@ -6705,7 +6570,7 @@
         </p:nvSpPr>
         <p:spPr>
           <a:xfrm>
-            <a:off x="1737360" y="5577840"/>
+            <a:off x="1737360" y="5650992"/>
             <a:ext cx="274320" cy="274320"/>
           </a:xfrm>
           <a:prstGeom prst="ellipse">
@@ -6748,8 +6613,8 @@
         </p:nvSpPr>
         <p:spPr>
           <a:xfrm>
-            <a:off x="1737360" y="5596128"/>
-            <a:ext cx="274320" cy="237744"/>
+            <a:off x="1737360" y="5669280"/>
+            <a:ext cx="274320" cy="228600"/>
           </a:xfrm>
           <a:prstGeom prst="rect">
             <a:avLst/>
@@ -6763,9 +6628,6 @@
           <a:lstStyle/>
           <a:p>
             <a:pPr algn="ctr">
-              <a:lnSpc>
-                <a:spcPts val="1320"/>
-              </a:lnSpc>
               <a:spcBef>
                 <a:spcPts val="0"/>
               </a:spcBef>
@@ -6793,8 +6655,8 @@
         </p:nvSpPr>
         <p:spPr>
           <a:xfrm>
-            <a:off x="2194560" y="5596128"/>
-            <a:ext cx="3200400" cy="274320"/>
+            <a:off x="2194560" y="5650992"/>
+            <a:ext cx="3200400" cy="320040"/>
           </a:xfrm>
           <a:prstGeom prst="rect">
             <a:avLst/>
@@ -6808,9 +6670,6 @@
           <a:lstStyle/>
           <a:p>
             <a:pPr algn="l">
-              <a:lnSpc>
-                <a:spcPts val="1680"/>
-              </a:lnSpc>
               <a:spcBef>
                 <a:spcPts val="0"/>
               </a:spcBef>
@@ -6838,8 +6697,8 @@
         </p:nvSpPr>
         <p:spPr>
           <a:xfrm>
-            <a:off x="6400800" y="2834640"/>
-            <a:ext cx="4389120" cy="3474720"/>
+            <a:off x="6400800" y="2743200"/>
+            <a:ext cx="4389120" cy="3657600"/>
           </a:xfrm>
           <a:prstGeom prst="roundRect">
             <a:avLst/>
@@ -6881,7 +6740,7 @@
         </p:nvSpPr>
         <p:spPr>
           <a:xfrm>
-            <a:off x="6400800" y="2834640"/>
+            <a:off x="6400800" y="2743200"/>
             <a:ext cx="4389120" cy="54864"/>
           </a:xfrm>
           <a:prstGeom prst="rect">
@@ -6924,8 +6783,8 @@
         </p:nvSpPr>
         <p:spPr>
           <a:xfrm>
-            <a:off x="6766560" y="3154680"/>
-            <a:ext cx="3657600" cy="411480"/>
+            <a:off x="6766560" y="3017520"/>
+            <a:ext cx="3657600" cy="457200"/>
           </a:xfrm>
           <a:prstGeom prst="rect">
             <a:avLst/>
@@ -6939,9 +6798,6 @@
           <a:lstStyle/>
           <a:p>
             <a:pPr algn="l">
-              <a:lnSpc>
-                <a:spcPts val="2879"/>
-              </a:lnSpc>
               <a:spcBef>
                 <a:spcPts val="0"/>
               </a:spcBef>
@@ -6969,8 +6825,8 @@
         </p:nvSpPr>
         <p:spPr>
           <a:xfrm>
-            <a:off x="6766560" y="3611880"/>
-            <a:ext cx="3657600" cy="320040"/>
+            <a:off x="6766560" y="3520440"/>
+            <a:ext cx="3657600" cy="365760"/>
           </a:xfrm>
           <a:prstGeom prst="rect">
             <a:avLst/>
@@ -6984,9 +6840,6 @@
           <a:lstStyle/>
           <a:p>
             <a:pPr algn="l">
-              <a:lnSpc>
-                <a:spcPts val="1680"/>
-              </a:lnSpc>
               <a:spcBef>
                 <a:spcPts val="0"/>
               </a:spcBef>
@@ -7014,7 +6867,7 @@
         </p:nvSpPr>
         <p:spPr>
           <a:xfrm>
-            <a:off x="6766560" y="4206240"/>
+            <a:off x="6766560" y="4142232"/>
             <a:ext cx="274320" cy="274320"/>
           </a:xfrm>
           <a:prstGeom prst="ellipse">
@@ -7057,8 +6910,8 @@
         </p:nvSpPr>
         <p:spPr>
           <a:xfrm>
-            <a:off x="6766560" y="4224528"/>
-            <a:ext cx="274320" cy="237744"/>
+            <a:off x="6766560" y="4160520"/>
+            <a:ext cx="274320" cy="228600"/>
           </a:xfrm>
           <a:prstGeom prst="rect">
             <a:avLst/>
@@ -7072,9 +6925,6 @@
           <a:lstStyle/>
           <a:p>
             <a:pPr algn="ctr">
-              <a:lnSpc>
-                <a:spcPts val="1320"/>
-              </a:lnSpc>
               <a:spcBef>
                 <a:spcPts val="0"/>
               </a:spcBef>
@@ -7102,8 +6952,8 @@
         </p:nvSpPr>
         <p:spPr>
           <a:xfrm>
-            <a:off x="7223760" y="4224528"/>
-            <a:ext cx="3200400" cy="274320"/>
+            <a:off x="7223760" y="4142232"/>
+            <a:ext cx="3200400" cy="320040"/>
           </a:xfrm>
           <a:prstGeom prst="rect">
             <a:avLst/>
@@ -7117,9 +6967,6 @@
           <a:lstStyle/>
           <a:p>
             <a:pPr algn="l">
-              <a:lnSpc>
-                <a:spcPts val="1680"/>
-              </a:lnSpc>
               <a:spcBef>
                 <a:spcPts val="0"/>
               </a:spcBef>
@@ -7147,7 +6994,7 @@
         </p:nvSpPr>
         <p:spPr>
           <a:xfrm>
-            <a:off x="6766560" y="4663440"/>
+            <a:off x="6766560" y="4645152"/>
             <a:ext cx="274320" cy="274320"/>
           </a:xfrm>
           <a:prstGeom prst="ellipse">
@@ -7190,8 +7037,8 @@
         </p:nvSpPr>
         <p:spPr>
           <a:xfrm>
-            <a:off x="6766560" y="4681728"/>
-            <a:ext cx="274320" cy="237744"/>
+            <a:off x="6766560" y="4663440"/>
+            <a:ext cx="274320" cy="228600"/>
           </a:xfrm>
           <a:prstGeom prst="rect">
             <a:avLst/>
@@ -7205,9 +7052,6 @@
           <a:lstStyle/>
           <a:p>
             <a:pPr algn="ctr">
-              <a:lnSpc>
-                <a:spcPts val="1320"/>
-              </a:lnSpc>
               <a:spcBef>
                 <a:spcPts val="0"/>
               </a:spcBef>
@@ -7235,8 +7079,8 @@
         </p:nvSpPr>
         <p:spPr>
           <a:xfrm>
-            <a:off x="7223760" y="4681728"/>
-            <a:ext cx="3200400" cy="274320"/>
+            <a:off x="7223760" y="4645152"/>
+            <a:ext cx="3200400" cy="320040"/>
           </a:xfrm>
           <a:prstGeom prst="rect">
             <a:avLst/>
@@ -7250,9 +7094,6 @@
           <a:lstStyle/>
           <a:p>
             <a:pPr algn="l">
-              <a:lnSpc>
-                <a:spcPts val="1680"/>
-              </a:lnSpc>
               <a:spcBef>
                 <a:spcPts val="0"/>
               </a:spcBef>
@@ -7280,7 +7121,7 @@
         </p:nvSpPr>
         <p:spPr>
           <a:xfrm>
-            <a:off x="6766560" y="5120640"/>
+            <a:off x="6766560" y="5148072"/>
             <a:ext cx="274320" cy="274320"/>
           </a:xfrm>
           <a:prstGeom prst="ellipse">
@@ -7323,8 +7164,8 @@
         </p:nvSpPr>
         <p:spPr>
           <a:xfrm>
-            <a:off x="6766560" y="5138928"/>
-            <a:ext cx="274320" cy="237744"/>
+            <a:off x="6766560" y="5166360"/>
+            <a:ext cx="274320" cy="228600"/>
           </a:xfrm>
           <a:prstGeom prst="rect">
             <a:avLst/>
@@ -7338,9 +7179,6 @@
           <a:lstStyle/>
           <a:p>
             <a:pPr algn="ctr">
-              <a:lnSpc>
-                <a:spcPts val="1320"/>
-              </a:lnSpc>
               <a:spcBef>
                 <a:spcPts val="0"/>
               </a:spcBef>
@@ -7368,8 +7206,8 @@
         </p:nvSpPr>
         <p:spPr>
           <a:xfrm>
-            <a:off x="7223760" y="5138928"/>
-            <a:ext cx="3200400" cy="274320"/>
+            <a:off x="7223760" y="5148072"/>
+            <a:ext cx="3200400" cy="320040"/>
           </a:xfrm>
           <a:prstGeom prst="rect">
             <a:avLst/>
@@ -7383,9 +7221,6 @@
           <a:lstStyle/>
           <a:p>
             <a:pPr algn="l">
-              <a:lnSpc>
-                <a:spcPts val="1680"/>
-              </a:lnSpc>
               <a:spcBef>
                 <a:spcPts val="0"/>
               </a:spcBef>
@@ -7413,7 +7248,7 @@
         </p:nvSpPr>
         <p:spPr>
           <a:xfrm>
-            <a:off x="6766560" y="5577840"/>
+            <a:off x="6766560" y="5650992"/>
             <a:ext cx="274320" cy="274320"/>
           </a:xfrm>
           <a:prstGeom prst="ellipse">
@@ -7456,8 +7291,8 @@
         </p:nvSpPr>
         <p:spPr>
           <a:xfrm>
-            <a:off x="6766560" y="5596128"/>
-            <a:ext cx="274320" cy="237744"/>
+            <a:off x="6766560" y="5669280"/>
+            <a:ext cx="274320" cy="228600"/>
           </a:xfrm>
           <a:prstGeom prst="rect">
             <a:avLst/>
@@ -7471,9 +7306,6 @@
           <a:lstStyle/>
           <a:p>
             <a:pPr algn="ctr">
-              <a:lnSpc>
-                <a:spcPts val="1320"/>
-              </a:lnSpc>
               <a:spcBef>
                 <a:spcPts val="0"/>
               </a:spcBef>
@@ -7501,8 +7333,8 @@
         </p:nvSpPr>
         <p:spPr>
           <a:xfrm>
-            <a:off x="7223760" y="5596128"/>
-            <a:ext cx="3200400" cy="274320"/>
+            <a:off x="7223760" y="5650992"/>
+            <a:ext cx="3200400" cy="320040"/>
           </a:xfrm>
           <a:prstGeom prst="rect">
             <a:avLst/>
@@ -7516,9 +7348,6 @@
           <a:lstStyle/>
           <a:p>
             <a:pPr algn="l">
-              <a:lnSpc>
-                <a:spcPts val="1680"/>
-              </a:lnSpc>
               <a:spcBef>
                 <a:spcPts val="0"/>
               </a:spcBef>
@@ -7630,9 +7459,6 @@
           <a:lstStyle/>
           <a:p>
             <a:pPr algn="l">
-              <a:lnSpc>
-                <a:spcPts val="1560"/>
-              </a:lnSpc>
               <a:spcBef>
                 <a:spcPts val="0"/>
               </a:spcBef>
@@ -7660,8 +7486,8 @@
         </p:nvSpPr>
         <p:spPr>
           <a:xfrm>
-            <a:off x="731520" y="914400"/>
-            <a:ext cx="10058400" cy="731520"/>
+            <a:off x="731520" y="1005840"/>
+            <a:ext cx="10058400" cy="640080"/>
           </a:xfrm>
           <a:prstGeom prst="rect">
             <a:avLst/>
@@ -7675,16 +7501,13 @@
           <a:lstStyle/>
           <a:p>
             <a:pPr algn="l">
-              <a:lnSpc>
-                <a:spcPts val="4800"/>
-              </a:lnSpc>
               <a:spcBef>
                 <a:spcPts val="0"/>
               </a:spcBef>
               <a:spcAft>
                 <a:spcPts val="0"/>
               </a:spcAft>
-              <a:defRPr sz="4000" b="1">
+              <a:defRPr sz="3800" b="1">
                 <a:solidFill>
                   <a:srgbClr val="1E2A38"/>
                 </a:solidFill>
@@ -7706,7 +7529,7 @@
         <p:spPr>
           <a:xfrm>
             <a:off x="731520" y="2011680"/>
-            <a:ext cx="3474720" cy="4114800"/>
+            <a:ext cx="3474720" cy="4389120"/>
           </a:xfrm>
           <a:prstGeom prst="roundRect">
             <a:avLst/>
@@ -7791,8 +7614,8 @@
         </p:nvSpPr>
         <p:spPr>
           <a:xfrm>
-            <a:off x="1005840" y="2377440"/>
-            <a:ext cx="548640" cy="548640"/>
+            <a:off x="2103120" y="2377440"/>
+            <a:ext cx="640080" cy="640080"/>
           </a:xfrm>
           <a:prstGeom prst="ellipse">
             <a:avLst/>
@@ -7834,8 +7657,8 @@
         </p:nvSpPr>
         <p:spPr>
           <a:xfrm>
-            <a:off x="1005840" y="2423160"/>
-            <a:ext cx="548640" cy="457200"/>
+            <a:off x="2103120" y="2441448"/>
+            <a:ext cx="640080" cy="502920"/>
           </a:xfrm>
           <a:prstGeom prst="rect">
             <a:avLst/>
@@ -7849,24 +7672,21 @@
           <a:lstStyle/>
           <a:p>
             <a:pPr algn="ctr">
-              <a:lnSpc>
-                <a:spcPts val="2640"/>
-              </a:lnSpc>
               <a:spcBef>
                 <a:spcPts val="0"/>
               </a:spcBef>
               <a:spcAft>
                 <a:spcPts val="0"/>
               </a:spcAft>
-              <a:defRPr sz="2200" b="1">
+              <a:defRPr sz="2400" b="1">
                 <a:solidFill>
                   <a:srgbClr val="FFFFFF"/>
                 </a:solidFill>
-                <a:latin typeface="Calibri"/>
-              </a:defRPr>
-            </a:pPr>
-            <a:r>
-              <a:t>★</a:t>
+                <a:latin typeface="Georgia"/>
+              </a:defRPr>
+            </a:pPr>
+            <a:r>
+              <a:t>1</a:t>
             </a:r>
           </a:p>
         </p:txBody>
@@ -7879,7 +7699,7 @@
         </p:nvSpPr>
         <p:spPr>
           <a:xfrm>
-            <a:off x="1005840" y="3108960"/>
+            <a:off x="1005840" y="3291840"/>
             <a:ext cx="2926080" cy="457200"/>
           </a:xfrm>
           <a:prstGeom prst="rect">
@@ -7893,17 +7713,14 @@
           </a:bodyPr>
           <a:lstStyle/>
           <a:p>
-            <a:pPr algn="l">
-              <a:lnSpc>
-                <a:spcPts val="2280"/>
-              </a:lnSpc>
+            <a:pPr algn="ctr">
               <a:spcBef>
                 <a:spcPts val="0"/>
               </a:spcBef>
               <a:spcAft>
                 <a:spcPts val="0"/>
               </a:spcAft>
-              <a:defRPr sz="1900" b="1">
+              <a:defRPr sz="1800" b="1">
                 <a:solidFill>
                   <a:srgbClr val="1E2A38"/>
                 </a:solidFill>
@@ -7924,7 +7741,7 @@
         </p:nvSpPr>
         <p:spPr>
           <a:xfrm>
-            <a:off x="1005840" y="3657600"/>
+            <a:off x="1005840" y="3931920"/>
             <a:ext cx="2926080" cy="2286000"/>
           </a:xfrm>
           <a:prstGeom prst="rect">
@@ -7938,10 +7755,7 @@
           </a:bodyPr>
           <a:lstStyle/>
           <a:p>
-            <a:pPr algn="l">
-              <a:lnSpc>
-                <a:spcPts val="1950"/>
-              </a:lnSpc>
+            <a:pPr algn="ctr">
               <a:spcBef>
                 <a:spcPts val="0"/>
               </a:spcBef>
@@ -7956,7 +7770,7 @@
               </a:defRPr>
             </a:pPr>
             <a:r>
-              <a:t>463 real Davidson courses with live enrollment, RateMyProfessors ratings, and AI-generated insights showing key topics, skills gained, and career connections.</a:t>
+              <a:t>463 real Davidson courses with live enrollment, RateMyProfessors ratings, and AI-generated insights for key topics, skills, and career connections.</a:t>
             </a:r>
           </a:p>
         </p:txBody>
@@ -7970,7 +7784,7 @@
         <p:spPr>
           <a:xfrm>
             <a:off x="4480559" y="2011680"/>
-            <a:ext cx="3474720" cy="4114800"/>
+            <a:ext cx="3474720" cy="4389120"/>
           </a:xfrm>
           <a:prstGeom prst="roundRect">
             <a:avLst/>
@@ -8055,8 +7869,8 @@
         </p:nvSpPr>
         <p:spPr>
           <a:xfrm>
-            <a:off x="4754879" y="2377440"/>
-            <a:ext cx="548640" cy="548640"/>
+            <a:off x="5852159" y="2377440"/>
+            <a:ext cx="640080" cy="640080"/>
           </a:xfrm>
           <a:prstGeom prst="ellipse">
             <a:avLst/>
@@ -8098,8 +7912,8 @@
         </p:nvSpPr>
         <p:spPr>
           <a:xfrm>
-            <a:off x="4754879" y="2423160"/>
-            <a:ext cx="548640" cy="457200"/>
+            <a:off x="5852159" y="2441448"/>
+            <a:ext cx="640080" cy="502920"/>
           </a:xfrm>
           <a:prstGeom prst="rect">
             <a:avLst/>
@@ -8113,24 +7927,21 @@
           <a:lstStyle/>
           <a:p>
             <a:pPr algn="ctr">
-              <a:lnSpc>
-                <a:spcPts val="2640"/>
-              </a:lnSpc>
               <a:spcBef>
                 <a:spcPts val="0"/>
               </a:spcBef>
               <a:spcAft>
                 <a:spcPts val="0"/>
               </a:spcAft>
-              <a:defRPr sz="2200" b="1">
+              <a:defRPr sz="2400" b="1">
                 <a:solidFill>
                   <a:srgbClr val="FFFFFF"/>
                 </a:solidFill>
-                <a:latin typeface="Calibri"/>
-              </a:defRPr>
-            </a:pPr>
-            <a:r>
-              <a:t>▶</a:t>
+                <a:latin typeface="Georgia"/>
+              </a:defRPr>
+            </a:pPr>
+            <a:r>
+              <a:t>2</a:t>
             </a:r>
           </a:p>
         </p:txBody>
@@ -8143,7 +7954,7 @@
         </p:nvSpPr>
         <p:spPr>
           <a:xfrm>
-            <a:off x="4754879" y="3108960"/>
+            <a:off x="4754879" y="3291840"/>
             <a:ext cx="2926080" cy="457200"/>
           </a:xfrm>
           <a:prstGeom prst="rect">
@@ -8157,17 +7968,14 @@
           </a:bodyPr>
           <a:lstStyle/>
           <a:p>
-            <a:pPr algn="l">
-              <a:lnSpc>
-                <a:spcPts val="2280"/>
-              </a:lnSpc>
+            <a:pPr algn="ctr">
               <a:spcBef>
                 <a:spcPts val="0"/>
               </a:spcBef>
               <a:spcAft>
                 <a:spcPts val="0"/>
               </a:spcAft>
-              <a:defRPr sz="1900" b="1">
+              <a:defRPr sz="1800" b="1">
                 <a:solidFill>
                   <a:srgbClr val="1E2A38"/>
                 </a:solidFill>
@@ -8188,7 +7996,7 @@
         </p:nvSpPr>
         <p:spPr>
           <a:xfrm>
-            <a:off x="4754879" y="3657600"/>
+            <a:off x="4754879" y="3931920"/>
             <a:ext cx="2926080" cy="2286000"/>
           </a:xfrm>
           <a:prstGeom prst="rect">
@@ -8202,10 +8010,7 @@
           </a:bodyPr>
           <a:lstStyle/>
           <a:p>
-            <a:pPr algn="l">
-              <a:lnSpc>
-                <a:spcPts val="1950"/>
-              </a:lnSpc>
+            <a:pPr algn="ctr">
               <a:spcBef>
                 <a:spcPts val="0"/>
               </a:spcBef>
@@ -8234,7 +8039,7 @@
         <p:spPr>
           <a:xfrm>
             <a:off x="8229598" y="2011680"/>
-            <a:ext cx="3474720" cy="4114800"/>
+            <a:ext cx="3474720" cy="4389120"/>
           </a:xfrm>
           <a:prstGeom prst="roundRect">
             <a:avLst/>
@@ -8319,8 +8124,8 @@
         </p:nvSpPr>
         <p:spPr>
           <a:xfrm>
-            <a:off x="8503918" y="2377440"/>
-            <a:ext cx="548640" cy="548640"/>
+            <a:off x="9601198" y="2377440"/>
+            <a:ext cx="640080" cy="640080"/>
           </a:xfrm>
           <a:prstGeom prst="ellipse">
             <a:avLst/>
@@ -8362,8 +8167,8 @@
         </p:nvSpPr>
         <p:spPr>
           <a:xfrm>
-            <a:off x="8503918" y="2423160"/>
-            <a:ext cx="548640" cy="457200"/>
+            <a:off x="9601198" y="2441448"/>
+            <a:ext cx="640080" cy="502920"/>
           </a:xfrm>
           <a:prstGeom prst="rect">
             <a:avLst/>
@@ -8377,24 +8182,21 @@
           <a:lstStyle/>
           <a:p>
             <a:pPr algn="ctr">
-              <a:lnSpc>
-                <a:spcPts val="2640"/>
-              </a:lnSpc>
               <a:spcBef>
                 <a:spcPts val="0"/>
               </a:spcBef>
               <a:spcAft>
                 <a:spcPts val="0"/>
               </a:spcAft>
-              <a:defRPr sz="2200" b="1">
+              <a:defRPr sz="2400" b="1">
                 <a:solidFill>
                   <a:srgbClr val="FFFFFF"/>
                 </a:solidFill>
-                <a:latin typeface="Calibri"/>
-              </a:defRPr>
-            </a:pPr>
-            <a:r>
-              <a:t>✦</a:t>
+                <a:latin typeface="Georgia"/>
+              </a:defRPr>
+            </a:pPr>
+            <a:r>
+              <a:t>3</a:t>
             </a:r>
           </a:p>
         </p:txBody>
@@ -8407,7 +8209,7 @@
         </p:nvSpPr>
         <p:spPr>
           <a:xfrm>
-            <a:off x="8503918" y="3108960"/>
+            <a:off x="8503918" y="3291840"/>
             <a:ext cx="2926080" cy="457200"/>
           </a:xfrm>
           <a:prstGeom prst="rect">
@@ -8421,17 +8223,14 @@
           </a:bodyPr>
           <a:lstStyle/>
           <a:p>
-            <a:pPr algn="l">
-              <a:lnSpc>
-                <a:spcPts val="2280"/>
-              </a:lnSpc>
+            <a:pPr algn="ctr">
               <a:spcBef>
                 <a:spcPts val="0"/>
               </a:spcBef>
               <a:spcAft>
                 <a:spcPts val="0"/>
               </a:spcAft>
-              <a:defRPr sz="1900" b="1">
+              <a:defRPr sz="1800" b="1">
                 <a:solidFill>
                   <a:srgbClr val="1E2A38"/>
                 </a:solidFill>
@@ -8452,7 +8251,7 @@
         </p:nvSpPr>
         <p:spPr>
           <a:xfrm>
-            <a:off x="8503918" y="3657600"/>
+            <a:off x="8503918" y="3931920"/>
             <a:ext cx="2926080" cy="2286000"/>
           </a:xfrm>
           <a:prstGeom prst="rect">
@@ -8466,10 +8265,7 @@
           </a:bodyPr>
           <a:lstStyle/>
           <a:p>
-            <a:pPr algn="l">
-              <a:lnSpc>
-                <a:spcPts val="1950"/>
-              </a:lnSpc>
+            <a:pPr algn="ctr">
               <a:spcBef>
                 <a:spcPts val="0"/>
               </a:spcBef>
@@ -8484,7 +8280,7 @@
               </a:defRPr>
             </a:pPr>
             <a:r>
-              <a:t>AI creates optimized semester-by-semester schedules respecting prerequisites, distribution requirements, and workload balance. Adjustable specificity levels 1–5.</a:t>
+              <a:t>AI creates optimized semester-by-semester schedules respecting prerequisites, distribution requirements, and workload balance.</a:t>
             </a:r>
           </a:p>
         </p:txBody>
@@ -8581,9 +8377,6 @@
           <a:lstStyle/>
           <a:p>
             <a:pPr algn="l">
-              <a:lnSpc>
-                <a:spcPts val="1560"/>
-              </a:lnSpc>
               <a:spcBef>
                 <a:spcPts val="0"/>
               </a:spcBef>
@@ -8611,8 +8404,8 @@
         </p:nvSpPr>
         <p:spPr>
           <a:xfrm>
-            <a:off x="731520" y="914400"/>
-            <a:ext cx="10058400" cy="731520"/>
+            <a:off x="731520" y="1005840"/>
+            <a:ext cx="10058400" cy="640080"/>
           </a:xfrm>
           <a:prstGeom prst="rect">
             <a:avLst/>
@@ -8626,16 +8419,13 @@
           <a:lstStyle/>
           <a:p>
             <a:pPr algn="l">
-              <a:lnSpc>
-                <a:spcPts val="4800"/>
-              </a:lnSpc>
               <a:spcBef>
                 <a:spcPts val="0"/>
               </a:spcBef>
               <a:spcAft>
                 <a:spcPts val="0"/>
               </a:spcAft>
-              <a:defRPr sz="4000" b="1">
+              <a:defRPr sz="3800" b="1">
                 <a:solidFill>
                   <a:srgbClr val="1E2A38"/>
                 </a:solidFill>
@@ -8657,7 +8447,7 @@
         <p:spPr>
           <a:xfrm>
             <a:off x="731520" y="2011680"/>
-            <a:ext cx="3474720" cy="4114800"/>
+            <a:ext cx="3474720" cy="4389120"/>
           </a:xfrm>
           <a:prstGeom prst="roundRect">
             <a:avLst/>
@@ -8742,8 +8532,8 @@
         </p:nvSpPr>
         <p:spPr>
           <a:xfrm>
-            <a:off x="1005840" y="2377440"/>
-            <a:ext cx="548640" cy="548640"/>
+            <a:off x="2103120" y="2377440"/>
+            <a:ext cx="640080" cy="640080"/>
           </a:xfrm>
           <a:prstGeom prst="ellipse">
             <a:avLst/>
@@ -8785,8 +8575,8 @@
         </p:nvSpPr>
         <p:spPr>
           <a:xfrm>
-            <a:off x="1005840" y="2423160"/>
-            <a:ext cx="548640" cy="457200"/>
+            <a:off x="2103120" y="2441448"/>
+            <a:ext cx="640080" cy="502920"/>
           </a:xfrm>
           <a:prstGeom prst="rect">
             <a:avLst/>
@@ -8800,24 +8590,21 @@
           <a:lstStyle/>
           <a:p>
             <a:pPr algn="ctr">
-              <a:lnSpc>
-                <a:spcPts val="2640"/>
-              </a:lnSpc>
               <a:spcBef>
                 <a:spcPts val="0"/>
               </a:spcBef>
               <a:spcAft>
                 <a:spcPts val="0"/>
               </a:spcAft>
-              <a:defRPr sz="2200" b="1">
+              <a:defRPr sz="2400" b="1">
                 <a:solidFill>
                   <a:srgbClr val="FFFFFF"/>
                 </a:solidFill>
-                <a:latin typeface="Calibri"/>
-              </a:defRPr>
-            </a:pPr>
-            <a:r>
-              <a:t>☆</a:t>
+                <a:latin typeface="Georgia"/>
+              </a:defRPr>
+            </a:pPr>
+            <a:r>
+              <a:t>4</a:t>
             </a:r>
           </a:p>
         </p:txBody>
@@ -8830,7 +8617,7 @@
         </p:nvSpPr>
         <p:spPr>
           <a:xfrm>
-            <a:off x="1005840" y="3108960"/>
+            <a:off x="1005840" y="3291840"/>
             <a:ext cx="2926080" cy="457200"/>
           </a:xfrm>
           <a:prstGeom prst="rect">
@@ -8844,17 +8631,14 @@
           </a:bodyPr>
           <a:lstStyle/>
           <a:p>
-            <a:pPr algn="l">
-              <a:lnSpc>
-                <a:spcPts val="2280"/>
-              </a:lnSpc>
+            <a:pPr algn="ctr">
               <a:spcBef>
                 <a:spcPts val="0"/>
               </a:spcBef>
               <a:spcAft>
                 <a:spcPts val="0"/>
               </a:spcAft>
-              <a:defRPr sz="1900" b="1">
+              <a:defRPr sz="1800" b="1">
                 <a:solidFill>
                   <a:srgbClr val="1E2A38"/>
                 </a:solidFill>
@@ -8875,7 +8659,7 @@
         </p:nvSpPr>
         <p:spPr>
           <a:xfrm>
-            <a:off x="1005840" y="3657600"/>
+            <a:off x="1005840" y="3931920"/>
             <a:ext cx="2926080" cy="2286000"/>
           </a:xfrm>
           <a:prstGeom prst="rect">
@@ -8889,10 +8673,7 @@
           </a:bodyPr>
           <a:lstStyle/>
           <a:p>
-            <a:pPr algn="l">
-              <a:lnSpc>
-                <a:spcPts val="1950"/>
-              </a:lnSpc>
+            <a:pPr algn="ctr">
               <a:spcBef>
                 <a:spcPts val="0"/>
               </a:spcBef>
@@ -8907,7 +8688,7 @@
               </a:defRPr>
             </a:pPr>
             <a:r>
-              <a:t>AI synthesizes RateMyProfessors reviews into balanced summaries with strengths, considerations, and a specific tip for success—actionable, not discouraging.</a:t>
+              <a:t>AI synthesizes RateMyProfessors reviews into balanced summaries with strengths, considerations, and a specific tip for success.</a:t>
             </a:r>
           </a:p>
         </p:txBody>
@@ -8921,7 +8702,7 @@
         <p:spPr>
           <a:xfrm>
             <a:off x="4480559" y="2011680"/>
-            <a:ext cx="3474720" cy="4114800"/>
+            <a:ext cx="3474720" cy="4389120"/>
           </a:xfrm>
           <a:prstGeom prst="roundRect">
             <a:avLst/>
@@ -9006,8 +8787,8 @@
         </p:nvSpPr>
         <p:spPr>
           <a:xfrm>
-            <a:off x="4754879" y="2377440"/>
-            <a:ext cx="548640" cy="548640"/>
+            <a:off x="5852159" y="2377440"/>
+            <a:ext cx="640080" cy="640080"/>
           </a:xfrm>
           <a:prstGeom prst="ellipse">
             <a:avLst/>
@@ -9049,8 +8830,8 @@
         </p:nvSpPr>
         <p:spPr>
           <a:xfrm>
-            <a:off x="4754879" y="2423160"/>
-            <a:ext cx="548640" cy="457200"/>
+            <a:off x="5852159" y="2441448"/>
+            <a:ext cx="640080" cy="502920"/>
           </a:xfrm>
           <a:prstGeom prst="rect">
             <a:avLst/>
@@ -9064,24 +8845,21 @@
           <a:lstStyle/>
           <a:p>
             <a:pPr algn="ctr">
-              <a:lnSpc>
-                <a:spcPts val="2640"/>
-              </a:lnSpc>
               <a:spcBef>
                 <a:spcPts val="0"/>
               </a:spcBef>
               <a:spcAft>
                 <a:spcPts val="0"/>
               </a:spcAft>
-              <a:defRPr sz="2200" b="1">
+              <a:defRPr sz="2400" b="1">
                 <a:solidFill>
                   <a:srgbClr val="FFFFFF"/>
                 </a:solidFill>
-                <a:latin typeface="Calibri"/>
-              </a:defRPr>
-            </a:pPr>
-            <a:r>
-              <a:t>●</a:t>
+                <a:latin typeface="Georgia"/>
+              </a:defRPr>
+            </a:pPr>
+            <a:r>
+              <a:t>5</a:t>
             </a:r>
           </a:p>
         </p:txBody>
@@ -9094,7 +8872,7 @@
         </p:nvSpPr>
         <p:spPr>
           <a:xfrm>
-            <a:off x="4754879" y="3108960"/>
+            <a:off x="4754879" y="3291840"/>
             <a:ext cx="2926080" cy="457200"/>
           </a:xfrm>
           <a:prstGeom prst="rect">
@@ -9108,17 +8886,14 @@
           </a:bodyPr>
           <a:lstStyle/>
           <a:p>
-            <a:pPr algn="l">
-              <a:lnSpc>
-                <a:spcPts val="2280"/>
-              </a:lnSpc>
+            <a:pPr algn="ctr">
               <a:spcBef>
                 <a:spcPts val="0"/>
               </a:spcBef>
               <a:spcAft>
                 <a:spcPts val="0"/>
               </a:spcAft>
-              <a:defRPr sz="1900" b="1">
+              <a:defRPr sz="1800" b="1">
                 <a:solidFill>
                   <a:srgbClr val="1E2A38"/>
                 </a:solidFill>
@@ -9139,7 +8914,7 @@
         </p:nvSpPr>
         <p:spPr>
           <a:xfrm>
-            <a:off x="4754879" y="3657600"/>
+            <a:off x="4754879" y="3931920"/>
             <a:ext cx="2926080" cy="2286000"/>
           </a:xfrm>
           <a:prstGeom prst="rect">
@@ -9153,10 +8928,7 @@
           </a:bodyPr>
           <a:lstStyle/>
           <a:p>
-            <a:pPr algn="l">
-              <a:lnSpc>
-                <a:spcPts val="1950"/>
-              </a:lnSpc>
+            <a:pPr algn="ctr">
               <a:spcBef>
                 <a:spcPts val="0"/>
               </a:spcBef>
@@ -9171,7 +8943,7 @@
               </a:defRPr>
             </a:pPr>
             <a:r>
-              <a:t>40+ curated Davidson alumni across McKinsey, Goldman Sachs, Google, Microsoft, and more. Browse by career field, company, and graduation year.</a:t>
+              <a:t>40+ curated Davidson alumni across McKinsey, Goldman Sachs, Google, Microsoft, and more. Browse by career field and graduation year.</a:t>
             </a:r>
           </a:p>
         </p:txBody>
@@ -9185,7 +8957,7 @@
         <p:spPr>
           <a:xfrm>
             <a:off x="8229598" y="2011680"/>
-            <a:ext cx="3474720" cy="4114800"/>
+            <a:ext cx="3474720" cy="4389120"/>
           </a:xfrm>
           <a:prstGeom prst="roundRect">
             <a:avLst/>
@@ -9270,8 +9042,8 @@
         </p:nvSpPr>
         <p:spPr>
           <a:xfrm>
-            <a:off x="8503918" y="2377440"/>
-            <a:ext cx="548640" cy="548640"/>
+            <a:off x="9601198" y="2377440"/>
+            <a:ext cx="640080" cy="640080"/>
           </a:xfrm>
           <a:prstGeom prst="ellipse">
             <a:avLst/>
@@ -9313,8 +9085,8 @@
         </p:nvSpPr>
         <p:spPr>
           <a:xfrm>
-            <a:off x="8503918" y="2423160"/>
-            <a:ext cx="548640" cy="457200"/>
+            <a:off x="9601198" y="2441448"/>
+            <a:ext cx="640080" cy="502920"/>
           </a:xfrm>
           <a:prstGeom prst="rect">
             <a:avLst/>
@@ -9328,24 +9100,21 @@
           <a:lstStyle/>
           <a:p>
             <a:pPr algn="ctr">
-              <a:lnSpc>
-                <a:spcPts val="2640"/>
-              </a:lnSpc>
               <a:spcBef>
                 <a:spcPts val="0"/>
               </a:spcBef>
               <a:spcAft>
                 <a:spcPts val="0"/>
               </a:spcAft>
-              <a:defRPr sz="2200" b="1">
+              <a:defRPr sz="2400" b="1">
                 <a:solidFill>
                   <a:srgbClr val="FFFFFF"/>
                 </a:solidFill>
-                <a:latin typeface="Calibri"/>
-              </a:defRPr>
-            </a:pPr>
-            <a:r>
-              <a:t>✉</a:t>
+                <a:latin typeface="Georgia"/>
+              </a:defRPr>
+            </a:pPr>
+            <a:r>
+              <a:t>6</a:t>
             </a:r>
           </a:p>
         </p:txBody>
@@ -9358,7 +9127,7 @@
         </p:nvSpPr>
         <p:spPr>
           <a:xfrm>
-            <a:off x="8503918" y="3108960"/>
+            <a:off x="8503918" y="3291840"/>
             <a:ext cx="2926080" cy="457200"/>
           </a:xfrm>
           <a:prstGeom prst="rect">
@@ -9372,17 +9141,14 @@
           </a:bodyPr>
           <a:lstStyle/>
           <a:p>
-            <a:pPr algn="l">
-              <a:lnSpc>
-                <a:spcPts val="2280"/>
-              </a:lnSpc>
+            <a:pPr algn="ctr">
               <a:spcBef>
                 <a:spcPts val="0"/>
               </a:spcBef>
               <a:spcAft>
                 <a:spcPts val="0"/>
               </a:spcAft>
-              <a:defRPr sz="1900" b="1">
+              <a:defRPr sz="1800" b="1">
                 <a:solidFill>
                   <a:srgbClr val="1E2A38"/>
                 </a:solidFill>
@@ -9403,7 +9169,7 @@
         </p:nvSpPr>
         <p:spPr>
           <a:xfrm>
-            <a:off x="8503918" y="3657600"/>
+            <a:off x="8503918" y="3931920"/>
             <a:ext cx="2926080" cy="2286000"/>
           </a:xfrm>
           <a:prstGeom prst="rect">
@@ -9417,10 +9183,7 @@
           </a:bodyPr>
           <a:lstStyle/>
           <a:p>
-            <a:pPr algn="l">
-              <a:lnSpc>
-                <a:spcPts val="1950"/>
-              </a:lnSpc>
+            <a:pPr algn="ctr">
               <a:spcBef>
                 <a:spcPts val="0"/>
               </a:spcBef>
@@ -9435,7 +9198,7 @@
               </a:defRPr>
             </a:pPr>
             <a:r>
-              <a:t>Solves networking anxiety. AI writes personalized, professional outreach emails tailored to each alumnus's role and the student's interests.</a:t>
+              <a:t>Solves networking anxiety. AI writes personalized, professional outreach emails tailored to each alumnus's role and your interests.</a:t>
             </a:r>
           </a:p>
         </p:txBody>
@@ -9532,9 +9295,6 @@
           <a:lstStyle/>
           <a:p>
             <a:pPr algn="l">
-              <a:lnSpc>
-                <a:spcPts val="1560"/>
-              </a:lnSpc>
               <a:spcBef>
                 <a:spcPts val="0"/>
               </a:spcBef>
@@ -9562,8 +9322,8 @@
         </p:nvSpPr>
         <p:spPr>
           <a:xfrm>
-            <a:off x="731520" y="822960"/>
-            <a:ext cx="10058400" cy="731520"/>
+            <a:off x="731520" y="914400"/>
+            <a:ext cx="10058400" cy="640080"/>
           </a:xfrm>
           <a:prstGeom prst="rect">
             <a:avLst/>
@@ -9577,9 +9337,6 @@
           <a:lstStyle/>
           <a:p>
             <a:pPr algn="l">
-              <a:lnSpc>
-                <a:spcPts val="4320"/>
-              </a:lnSpc>
               <a:spcBef>
                 <a:spcPts val="0"/>
               </a:spcBef>
@@ -9607,8 +9364,8 @@
         </p:nvSpPr>
         <p:spPr>
           <a:xfrm>
-            <a:off x="548640" y="2103120"/>
-            <a:ext cx="2651760" cy="3291840"/>
+            <a:off x="457200" y="2011680"/>
+            <a:ext cx="2697480" cy="3657600"/>
           </a:xfrm>
           <a:prstGeom prst="roundRect">
             <a:avLst/>
@@ -9650,8 +9407,8 @@
         </p:nvSpPr>
         <p:spPr>
           <a:xfrm>
-            <a:off x="548640" y="2103120"/>
-            <a:ext cx="2651760" cy="54864"/>
+            <a:off x="457200" y="2011680"/>
+            <a:ext cx="2697480" cy="54864"/>
           </a:xfrm>
           <a:prstGeom prst="rect">
             <a:avLst/>
@@ -9693,8 +9450,8 @@
         </p:nvSpPr>
         <p:spPr>
           <a:xfrm>
-            <a:off x="822960" y="2377440"/>
-            <a:ext cx="2103120" cy="365760"/>
+            <a:off x="731520" y="2331720"/>
+            <a:ext cx="2148840" cy="411480"/>
           </a:xfrm>
           <a:prstGeom prst="rect">
             <a:avLst/>
@@ -9708,9 +9465,6 @@
           <a:lstStyle/>
           <a:p>
             <a:pPr algn="l">
-              <a:lnSpc>
-                <a:spcPts val="2400"/>
-              </a:lnSpc>
               <a:spcBef>
                 <a:spcPts val="0"/>
               </a:spcBef>
@@ -9738,8 +9492,8 @@
         </p:nvSpPr>
         <p:spPr>
           <a:xfrm>
-            <a:off x="822960" y="3017520"/>
-            <a:ext cx="2103120" cy="365760"/>
+            <a:off x="731520" y="3017520"/>
+            <a:ext cx="2148840" cy="2286000"/>
           </a:xfrm>
           <a:prstGeom prst="rect">
             <a:avLst/>
@@ -9753,14 +9507,8 @@
           <a:lstStyle/>
           <a:p>
             <a:pPr algn="l">
-              <a:lnSpc>
-                <a:spcPts val="1560"/>
-              </a:lnSpc>
-              <a:spcBef>
-                <a:spcPts val="0"/>
-              </a:spcBef>
-              <a:spcAft>
-                <a:spcPts val="0"/>
+              <a:spcAft>
+                <a:spcPts val="520"/>
               </a:spcAft>
               <a:defRPr sz="1300" b="0">
                 <a:solidFill>
@@ -9773,39 +9521,10 @@
               <a:t>Next.js 14 + TypeScript</a:t>
             </a:r>
           </a:p>
-        </p:txBody>
-      </p:sp>
-      <p:sp>
-        <p:nvSpPr>
-          <p:cNvPr id="9" name="TextBox 8"/>
-          <p:cNvSpPr txBox="1"/>
-          <p:nvPr/>
-        </p:nvSpPr>
-        <p:spPr>
-          <a:xfrm>
-            <a:off x="822960" y="3474720"/>
-            <a:ext cx="2103120" cy="365760"/>
-          </a:xfrm>
-          <a:prstGeom prst="rect">
-            <a:avLst/>
-          </a:prstGeom>
-          <a:noFill/>
-        </p:spPr>
-        <p:txBody>
-          <a:bodyPr wrap="square">
-            <a:spAutoFit/>
-          </a:bodyPr>
-          <a:lstStyle/>
           <a:p>
             <a:pPr algn="l">
-              <a:lnSpc>
-                <a:spcPts val="1560"/>
-              </a:lnSpc>
-              <a:spcBef>
-                <a:spcPts val="0"/>
-              </a:spcBef>
-              <a:spcAft>
-                <a:spcPts val="0"/>
+              <a:spcAft>
+                <a:spcPts val="520"/>
               </a:spcAft>
               <a:defRPr sz="1300" b="0">
                 <a:solidFill>
@@ -9818,39 +9537,10 @@
               <a:t>shadcn/ui + Tailwind CSS</a:t>
             </a:r>
           </a:p>
-        </p:txBody>
-      </p:sp>
-      <p:sp>
-        <p:nvSpPr>
-          <p:cNvPr id="10" name="TextBox 9"/>
-          <p:cNvSpPr txBox="1"/>
-          <p:nvPr/>
-        </p:nvSpPr>
-        <p:spPr>
-          <a:xfrm>
-            <a:off x="822960" y="3931920"/>
-            <a:ext cx="2103120" cy="365760"/>
-          </a:xfrm>
-          <a:prstGeom prst="rect">
-            <a:avLst/>
-          </a:prstGeom>
-          <a:noFill/>
-        </p:spPr>
-        <p:txBody>
-          <a:bodyPr wrap="square">
-            <a:spAutoFit/>
-          </a:bodyPr>
-          <a:lstStyle/>
           <a:p>
             <a:pPr algn="l">
-              <a:lnSpc>
-                <a:spcPts val="1560"/>
-              </a:lnSpc>
-              <a:spcBef>
-                <a:spcPts val="0"/>
-              </a:spcBef>
-              <a:spcAft>
-                <a:spcPts val="0"/>
+              <a:spcAft>
+                <a:spcPts val="520"/>
               </a:spcAft>
               <a:defRPr sz="1300" b="0">
                 <a:solidFill>
@@ -9863,39 +9553,10 @@
               <a:t>Framer Motion animations</a:t>
             </a:r>
           </a:p>
-        </p:txBody>
-      </p:sp>
-      <p:sp>
-        <p:nvSpPr>
-          <p:cNvPr id="11" name="TextBox 10"/>
-          <p:cNvSpPr txBox="1"/>
-          <p:nvPr/>
-        </p:nvSpPr>
-        <p:spPr>
-          <a:xfrm>
-            <a:off x="822960" y="4389120"/>
-            <a:ext cx="2103120" cy="365760"/>
-          </a:xfrm>
-          <a:prstGeom prst="rect">
-            <a:avLst/>
-          </a:prstGeom>
-          <a:noFill/>
-        </p:spPr>
-        <p:txBody>
-          <a:bodyPr wrap="square">
-            <a:spAutoFit/>
-          </a:bodyPr>
-          <a:lstStyle/>
           <a:p>
             <a:pPr algn="l">
-              <a:lnSpc>
-                <a:spcPts val="1560"/>
-              </a:lnSpc>
-              <a:spcBef>
-                <a:spcPts val="0"/>
-              </a:spcBef>
-              <a:spcAft>
-                <a:spcPts val="0"/>
+              <a:spcAft>
+                <a:spcPts val="520"/>
               </a:spcAft>
               <a:defRPr sz="1300" b="0">
                 <a:solidFill>
@@ -9912,14 +9573,14 @@
       </p:sp>
       <p:sp>
         <p:nvSpPr>
-          <p:cNvPr id="12" name="Rounded Rectangle 11"/>
+          <p:cNvPr id="9" name="Rounded Rectangle 8"/>
           <p:cNvSpPr/>
           <p:nvPr/>
         </p:nvSpPr>
         <p:spPr>
           <a:xfrm>
-            <a:off x="3429000" y="2103120"/>
-            <a:ext cx="2651760" cy="3291840"/>
+            <a:off x="3383280" y="2011680"/>
+            <a:ext cx="2697480" cy="3657600"/>
           </a:xfrm>
           <a:prstGeom prst="roundRect">
             <a:avLst/>
@@ -9955,14 +9616,14 @@
       </p:sp>
       <p:sp>
         <p:nvSpPr>
-          <p:cNvPr id="13" name="Rectangle 12"/>
+          <p:cNvPr id="10" name="Rectangle 9"/>
           <p:cNvSpPr/>
           <p:nvPr/>
         </p:nvSpPr>
         <p:spPr>
           <a:xfrm>
-            <a:off x="3429000" y="2103120"/>
-            <a:ext cx="2651760" cy="54864"/>
+            <a:off x="3383280" y="2011680"/>
+            <a:ext cx="2697480" cy="54864"/>
           </a:xfrm>
           <a:prstGeom prst="rect">
             <a:avLst/>
@@ -9998,14 +9659,14 @@
       </p:sp>
       <p:sp>
         <p:nvSpPr>
-          <p:cNvPr id="14" name="TextBox 13"/>
+          <p:cNvPr id="11" name="TextBox 10"/>
           <p:cNvSpPr txBox="1"/>
           <p:nvPr/>
         </p:nvSpPr>
         <p:spPr>
           <a:xfrm>
-            <a:off x="3703320" y="2377440"/>
-            <a:ext cx="2103120" cy="365760"/>
+            <a:off x="3657600" y="2331720"/>
+            <a:ext cx="2148840" cy="411480"/>
           </a:xfrm>
           <a:prstGeom prst="rect">
             <a:avLst/>
@@ -10019,9 +9680,6 @@
           <a:lstStyle/>
           <a:p>
             <a:pPr algn="l">
-              <a:lnSpc>
-                <a:spcPts val="2400"/>
-              </a:lnSpc>
               <a:spcBef>
                 <a:spcPts val="0"/>
               </a:spcBef>
@@ -10043,14 +9701,14 @@
       </p:sp>
       <p:sp>
         <p:nvSpPr>
-          <p:cNvPr id="15" name="TextBox 14"/>
+          <p:cNvPr id="12" name="TextBox 11"/>
           <p:cNvSpPr txBox="1"/>
           <p:nvPr/>
         </p:nvSpPr>
         <p:spPr>
           <a:xfrm>
-            <a:off x="3703320" y="3017520"/>
-            <a:ext cx="2103120" cy="365760"/>
+            <a:off x="3657600" y="3017520"/>
+            <a:ext cx="2148840" cy="2286000"/>
           </a:xfrm>
           <a:prstGeom prst="rect">
             <a:avLst/>
@@ -10064,14 +9722,8 @@
           <a:lstStyle/>
           <a:p>
             <a:pPr algn="l">
-              <a:lnSpc>
-                <a:spcPts val="1560"/>
-              </a:lnSpc>
-              <a:spcBef>
-                <a:spcPts val="0"/>
-              </a:spcBef>
-              <a:spcAft>
-                <a:spcPts val="0"/>
+              <a:spcAft>
+                <a:spcPts val="520"/>
               </a:spcAft>
               <a:defRPr sz="1300" b="0">
                 <a:solidFill>
@@ -10084,39 +9736,10 @@
               <a:t>Next.js API Routes (serverless)</a:t>
             </a:r>
           </a:p>
-        </p:txBody>
-      </p:sp>
-      <p:sp>
-        <p:nvSpPr>
-          <p:cNvPr id="16" name="TextBox 15"/>
-          <p:cNvSpPr txBox="1"/>
-          <p:nvPr/>
-        </p:nvSpPr>
-        <p:spPr>
-          <a:xfrm>
-            <a:off x="3703320" y="3474720"/>
-            <a:ext cx="2103120" cy="365760"/>
-          </a:xfrm>
-          <a:prstGeom prst="rect">
-            <a:avLst/>
-          </a:prstGeom>
-          <a:noFill/>
-        </p:spPr>
-        <p:txBody>
-          <a:bodyPr wrap="square">
-            <a:spAutoFit/>
-          </a:bodyPr>
-          <a:lstStyle/>
           <a:p>
             <a:pPr algn="l">
-              <a:lnSpc>
-                <a:spcPts val="1560"/>
-              </a:lnSpc>
-              <a:spcBef>
-                <a:spcPts val="0"/>
-              </a:spcBef>
-              <a:spcAft>
-                <a:spcPts val="0"/>
+              <a:spcAft>
+                <a:spcPts val="520"/>
               </a:spcAft>
               <a:defRPr sz="1300" b="0">
                 <a:solidFill>
@@ -10129,39 +9752,10 @@
               <a:t>MongoDB Atlas + Mongoose</a:t>
             </a:r>
           </a:p>
-        </p:txBody>
-      </p:sp>
-      <p:sp>
-        <p:nvSpPr>
-          <p:cNvPr id="17" name="TextBox 16"/>
-          <p:cNvSpPr txBox="1"/>
-          <p:nvPr/>
-        </p:nvSpPr>
-        <p:spPr>
-          <a:xfrm>
-            <a:off x="3703320" y="3931920"/>
-            <a:ext cx="2103120" cy="365760"/>
-          </a:xfrm>
-          <a:prstGeom prst="rect">
-            <a:avLst/>
-          </a:prstGeom>
-          <a:noFill/>
-        </p:spPr>
-        <p:txBody>
-          <a:bodyPr wrap="square">
-            <a:spAutoFit/>
-          </a:bodyPr>
-          <a:lstStyle/>
           <a:p>
             <a:pPr algn="l">
-              <a:lnSpc>
-                <a:spcPts val="1560"/>
-              </a:lnSpc>
-              <a:spcBef>
-                <a:spcPts val="0"/>
-              </a:spcBef>
-              <a:spcAft>
-                <a:spcPts val="0"/>
+              <a:spcAft>
+                <a:spcPts val="520"/>
               </a:spcAft>
               <a:defRPr sz="1300" b="0">
                 <a:solidFill>
@@ -10174,39 +9768,10 @@
               <a:t>NextAuth.js authentication</a:t>
             </a:r>
           </a:p>
-        </p:txBody>
-      </p:sp>
-      <p:sp>
-        <p:nvSpPr>
-          <p:cNvPr id="18" name="TextBox 17"/>
-          <p:cNvSpPr txBox="1"/>
-          <p:nvPr/>
-        </p:nvSpPr>
-        <p:spPr>
-          <a:xfrm>
-            <a:off x="3703320" y="4389120"/>
-            <a:ext cx="2103120" cy="365760"/>
-          </a:xfrm>
-          <a:prstGeom prst="rect">
-            <a:avLst/>
-          </a:prstGeom>
-          <a:noFill/>
-        </p:spPr>
-        <p:txBody>
-          <a:bodyPr wrap="square">
-            <a:spAutoFit/>
-          </a:bodyPr>
-          <a:lstStyle/>
           <a:p>
             <a:pPr algn="l">
-              <a:lnSpc>
-                <a:spcPts val="1560"/>
-              </a:lnSpc>
-              <a:spcBef>
-                <a:spcPts val="0"/>
-              </a:spcBef>
-              <a:spcAft>
-                <a:spcPts val="0"/>
+              <a:spcAft>
+                <a:spcPts val="520"/>
               </a:spcAft>
               <a:defRPr sz="1300" b="0">
                 <a:solidFill>
@@ -10223,14 +9788,14 @@
       </p:sp>
       <p:sp>
         <p:nvSpPr>
-          <p:cNvPr id="19" name="Rounded Rectangle 18"/>
+          <p:cNvPr id="13" name="Rounded Rectangle 12"/>
           <p:cNvSpPr/>
           <p:nvPr/>
         </p:nvSpPr>
         <p:spPr>
           <a:xfrm>
-            <a:off x="6309360" y="2103120"/>
-            <a:ext cx="2651760" cy="3291840"/>
+            <a:off x="6309360" y="2011680"/>
+            <a:ext cx="2697480" cy="3657600"/>
           </a:xfrm>
           <a:prstGeom prst="roundRect">
             <a:avLst/>
@@ -10266,14 +9831,14 @@
       </p:sp>
       <p:sp>
         <p:nvSpPr>
-          <p:cNvPr id="20" name="Rectangle 19"/>
+          <p:cNvPr id="14" name="Rectangle 13"/>
           <p:cNvSpPr/>
           <p:nvPr/>
         </p:nvSpPr>
         <p:spPr>
           <a:xfrm>
-            <a:off x="6309360" y="2103120"/>
-            <a:ext cx="2651760" cy="54864"/>
+            <a:off x="6309360" y="2011680"/>
+            <a:ext cx="2697480" cy="54864"/>
           </a:xfrm>
           <a:prstGeom prst="rect">
             <a:avLst/>
@@ -10309,14 +9874,14 @@
       </p:sp>
       <p:sp>
         <p:nvSpPr>
-          <p:cNvPr id="21" name="TextBox 20"/>
+          <p:cNvPr id="15" name="TextBox 14"/>
           <p:cNvSpPr txBox="1"/>
           <p:nvPr/>
         </p:nvSpPr>
         <p:spPr>
           <a:xfrm>
-            <a:off x="6583680" y="2377440"/>
-            <a:ext cx="2103120" cy="365760"/>
+            <a:off x="6583680" y="2331720"/>
+            <a:ext cx="2148840" cy="411480"/>
           </a:xfrm>
           <a:prstGeom prst="rect">
             <a:avLst/>
@@ -10330,9 +9895,6 @@
           <a:lstStyle/>
           <a:p>
             <a:pPr algn="l">
-              <a:lnSpc>
-                <a:spcPts val="2400"/>
-              </a:lnSpc>
               <a:spcBef>
                 <a:spcPts val="0"/>
               </a:spcBef>
@@ -10354,14 +9916,14 @@
       </p:sp>
       <p:sp>
         <p:nvSpPr>
-          <p:cNvPr id="22" name="TextBox 21"/>
+          <p:cNvPr id="16" name="TextBox 15"/>
           <p:cNvSpPr txBox="1"/>
           <p:nvPr/>
         </p:nvSpPr>
         <p:spPr>
           <a:xfrm>
             <a:off x="6583680" y="3017520"/>
-            <a:ext cx="2103120" cy="365760"/>
+            <a:ext cx="2148840" cy="2286000"/>
           </a:xfrm>
           <a:prstGeom prst="rect">
             <a:avLst/>
@@ -10375,14 +9937,8 @@
           <a:lstStyle/>
           <a:p>
             <a:pPr algn="l">
-              <a:lnSpc>
-                <a:spcPts val="1560"/>
-              </a:lnSpc>
-              <a:spcBef>
-                <a:spcPts val="0"/>
-              </a:spcBef>
-              <a:spcAft>
-                <a:spcPts val="0"/>
+              <a:spcAft>
+                <a:spcPts val="520"/>
               </a:spcAft>
               <a:defRPr sz="1300" b="0">
                 <a:solidFill>
@@ -10395,39 +9951,10 @@
               <a:t>Google Gemini 3 Flash</a:t>
             </a:r>
           </a:p>
-        </p:txBody>
-      </p:sp>
-      <p:sp>
-        <p:nvSpPr>
-          <p:cNvPr id="23" name="TextBox 22"/>
-          <p:cNvSpPr txBox="1"/>
-          <p:nvPr/>
-        </p:nvSpPr>
-        <p:spPr>
-          <a:xfrm>
-            <a:off x="6583680" y="3474720"/>
-            <a:ext cx="2103120" cy="365760"/>
-          </a:xfrm>
-          <a:prstGeom prst="rect">
-            <a:avLst/>
-          </a:prstGeom>
-          <a:noFill/>
-        </p:spPr>
-        <p:txBody>
-          <a:bodyPr wrap="square">
-            <a:spAutoFit/>
-          </a:bodyPr>
-          <a:lstStyle/>
           <a:p>
             <a:pPr algn="l">
-              <a:lnSpc>
-                <a:spcPts val="1560"/>
-              </a:lnSpc>
-              <a:spcBef>
-                <a:spcPts val="0"/>
-              </a:spcBef>
-              <a:spcAft>
-                <a:spcPts val="0"/>
+              <a:spcAft>
+                <a:spcPts val="520"/>
               </a:spcAft>
               <a:defRPr sz="1300" b="0">
                 <a:solidFill>
@@ -10440,39 +9967,10 @@
               <a:t>Structured JSON outputs</a:t>
             </a:r>
           </a:p>
-        </p:txBody>
-      </p:sp>
-      <p:sp>
-        <p:nvSpPr>
-          <p:cNvPr id="24" name="TextBox 23"/>
-          <p:cNvSpPr txBox="1"/>
-          <p:nvPr/>
-        </p:nvSpPr>
-        <p:spPr>
-          <a:xfrm>
-            <a:off x="6583680" y="3931920"/>
-            <a:ext cx="2103120" cy="365760"/>
-          </a:xfrm>
-          <a:prstGeom prst="rect">
-            <a:avLst/>
-          </a:prstGeom>
-          <a:noFill/>
-        </p:spPr>
-        <p:txBody>
-          <a:bodyPr wrap="square">
-            <a:spAutoFit/>
-          </a:bodyPr>
-          <a:lstStyle/>
           <a:p>
             <a:pPr algn="l">
-              <a:lnSpc>
-                <a:spcPts val="1560"/>
-              </a:lnSpc>
-              <a:spcBef>
-                <a:spcPts val="0"/>
-              </a:spcBef>
-              <a:spcAft>
-                <a:spcPts val="0"/>
+              <a:spcAft>
+                <a:spcPts val="520"/>
               </a:spcAft>
               <a:defRPr sz="1300" b="0">
                 <a:solidFill>
@@ -10485,39 +9983,10 @@
               <a:t>Smart caching (80% hit rate)</a:t>
             </a:r>
           </a:p>
-        </p:txBody>
-      </p:sp>
-      <p:sp>
-        <p:nvSpPr>
-          <p:cNvPr id="25" name="TextBox 24"/>
-          <p:cNvSpPr txBox="1"/>
-          <p:nvPr/>
-        </p:nvSpPr>
-        <p:spPr>
-          <a:xfrm>
-            <a:off x="6583680" y="4389120"/>
-            <a:ext cx="2103120" cy="365760"/>
-          </a:xfrm>
-          <a:prstGeom prst="rect">
-            <a:avLst/>
-          </a:prstGeom>
-          <a:noFill/>
-        </p:spPr>
-        <p:txBody>
-          <a:bodyPr wrap="square">
-            <a:spAutoFit/>
-          </a:bodyPr>
-          <a:lstStyle/>
           <a:p>
             <a:pPr algn="l">
-              <a:lnSpc>
-                <a:spcPts val="1560"/>
-              </a:lnSpc>
-              <a:spcBef>
-                <a:spcPts val="0"/>
-              </a:spcBef>
-              <a:spcAft>
-                <a:spcPts val="0"/>
+              <a:spcAft>
+                <a:spcPts val="520"/>
               </a:spcAft>
               <a:defRPr sz="1300" b="0">
                 <a:solidFill>
@@ -10534,14 +10003,14 @@
       </p:sp>
       <p:sp>
         <p:nvSpPr>
-          <p:cNvPr id="26" name="Rounded Rectangle 25"/>
+          <p:cNvPr id="17" name="Rounded Rectangle 16"/>
           <p:cNvSpPr/>
           <p:nvPr/>
         </p:nvSpPr>
         <p:spPr>
           <a:xfrm>
-            <a:off x="9189720" y="2103120"/>
-            <a:ext cx="2651760" cy="3291840"/>
+            <a:off x="9235440" y="2011680"/>
+            <a:ext cx="2697480" cy="3657600"/>
           </a:xfrm>
           <a:prstGeom prst="roundRect">
             <a:avLst/>
@@ -10577,14 +10046,14 @@
       </p:sp>
       <p:sp>
         <p:nvSpPr>
-          <p:cNvPr id="27" name="Rectangle 26"/>
+          <p:cNvPr id="18" name="Rectangle 17"/>
           <p:cNvSpPr/>
           <p:nvPr/>
         </p:nvSpPr>
         <p:spPr>
           <a:xfrm>
-            <a:off x="9189720" y="2103120"/>
-            <a:ext cx="2651760" cy="54864"/>
+            <a:off x="9235440" y="2011680"/>
+            <a:ext cx="2697480" cy="54864"/>
           </a:xfrm>
           <a:prstGeom prst="rect">
             <a:avLst/>
@@ -10620,14 +10089,14 @@
       </p:sp>
       <p:sp>
         <p:nvSpPr>
-          <p:cNvPr id="28" name="TextBox 27"/>
+          <p:cNvPr id="19" name="TextBox 18"/>
           <p:cNvSpPr txBox="1"/>
           <p:nvPr/>
         </p:nvSpPr>
         <p:spPr>
           <a:xfrm>
-            <a:off x="9464040" y="2377440"/>
-            <a:ext cx="2103120" cy="365760"/>
+            <a:off x="9509760" y="2331720"/>
+            <a:ext cx="2148840" cy="411480"/>
           </a:xfrm>
           <a:prstGeom prst="rect">
             <a:avLst/>
@@ -10641,9 +10110,6 @@
           <a:lstStyle/>
           <a:p>
             <a:pPr algn="l">
-              <a:lnSpc>
-                <a:spcPts val="2400"/>
-              </a:lnSpc>
               <a:spcBef>
                 <a:spcPts val="0"/>
               </a:spcBef>
@@ -10665,14 +10131,14 @@
       </p:sp>
       <p:sp>
         <p:nvSpPr>
-          <p:cNvPr id="29" name="TextBox 28"/>
+          <p:cNvPr id="20" name="TextBox 19"/>
           <p:cNvSpPr txBox="1"/>
           <p:nvPr/>
         </p:nvSpPr>
         <p:spPr>
           <a:xfrm>
-            <a:off x="9464040" y="3017520"/>
-            <a:ext cx="2103120" cy="365760"/>
+            <a:off x="9509760" y="3017520"/>
+            <a:ext cx="2148840" cy="2286000"/>
           </a:xfrm>
           <a:prstGeom prst="rect">
             <a:avLst/>
@@ -10686,14 +10152,8 @@
           <a:lstStyle/>
           <a:p>
             <a:pPr algn="l">
-              <a:lnSpc>
-                <a:spcPts val="1560"/>
-              </a:lnSpc>
-              <a:spcBef>
-                <a:spcPts val="0"/>
-              </a:spcBef>
-              <a:spcAft>
-                <a:spcPts val="0"/>
+              <a:spcAft>
+                <a:spcPts val="520"/>
               </a:spcAft>
               <a:defRPr sz="1300" b="0">
                 <a:solidFill>
@@ -10706,18 +10166,66 @@
               <a:t>Davidson College API (live)</a:t>
             </a:r>
           </a:p>
-        </p:txBody>
-      </p:sp>
-      <p:sp>
-        <p:nvSpPr>
-          <p:cNvPr id="30" name="TextBox 29"/>
+          <a:p>
+            <a:pPr algn="l">
+              <a:spcAft>
+                <a:spcPts val="520"/>
+              </a:spcAft>
+              <a:defRPr sz="1300" b="0">
+                <a:solidFill>
+                  <a:srgbClr val="A0AEC0"/>
+                </a:solidFill>
+                <a:latin typeface="Calibri"/>
+              </a:defRPr>
+            </a:pPr>
+            <a:r>
+              <a:t>RateMyProfessors GraphQL</a:t>
+            </a:r>
+          </a:p>
+          <a:p>
+            <a:pPr algn="l">
+              <a:spcAft>
+                <a:spcPts val="520"/>
+              </a:spcAft>
+              <a:defRPr sz="1300" b="0">
+                <a:solidFill>
+                  <a:srgbClr val="A0AEC0"/>
+                </a:solidFill>
+                <a:latin typeface="Calibri"/>
+              </a:defRPr>
+            </a:pPr>
+            <a:r>
+              <a:t>463 courses indexed</a:t>
+            </a:r>
+          </a:p>
+          <a:p>
+            <a:pPr algn="l">
+              <a:spcAft>
+                <a:spcPts val="520"/>
+              </a:spcAft>
+              <a:defRPr sz="1300" b="0">
+                <a:solidFill>
+                  <a:srgbClr val="A0AEC0"/>
+                </a:solidFill>
+                <a:latin typeface="Calibri"/>
+              </a:defRPr>
+            </a:pPr>
+            <a:r>
+              <a:t>40+ alumni curated</a:t>
+            </a:r>
+          </a:p>
+        </p:txBody>
+      </p:sp>
+      <p:sp>
+        <p:nvSpPr>
+          <p:cNvPr id="21" name="TextBox 20"/>
           <p:cNvSpPr txBox="1"/>
           <p:nvPr/>
         </p:nvSpPr>
         <p:spPr>
           <a:xfrm>
-            <a:off x="9464040" y="3474720"/>
-            <a:ext cx="2103120" cy="365760"/>
+            <a:off x="731520" y="6035040"/>
+            <a:ext cx="10698480" cy="365760"/>
           </a:xfrm>
           <a:prstGeom prst="rect">
             <a:avLst/>
@@ -10730,145 +10238,7 @@
           </a:bodyPr>
           <a:lstStyle/>
           <a:p>
-            <a:pPr algn="l">
-              <a:lnSpc>
-                <a:spcPts val="1560"/>
-              </a:lnSpc>
-              <a:spcBef>
-                <a:spcPts val="0"/>
-              </a:spcBef>
-              <a:spcAft>
-                <a:spcPts val="0"/>
-              </a:spcAft>
-              <a:defRPr sz="1300" b="0">
-                <a:solidFill>
-                  <a:srgbClr val="A0AEC0"/>
-                </a:solidFill>
-                <a:latin typeface="Calibri"/>
-              </a:defRPr>
-            </a:pPr>
-            <a:r>
-              <a:t>RateMyProfessors GraphQL</a:t>
-            </a:r>
-          </a:p>
-        </p:txBody>
-      </p:sp>
-      <p:sp>
-        <p:nvSpPr>
-          <p:cNvPr id="31" name="TextBox 30"/>
-          <p:cNvSpPr txBox="1"/>
-          <p:nvPr/>
-        </p:nvSpPr>
-        <p:spPr>
-          <a:xfrm>
-            <a:off x="9464040" y="3931920"/>
-            <a:ext cx="2103120" cy="365760"/>
-          </a:xfrm>
-          <a:prstGeom prst="rect">
-            <a:avLst/>
-          </a:prstGeom>
-          <a:noFill/>
-        </p:spPr>
-        <p:txBody>
-          <a:bodyPr wrap="square">
-            <a:spAutoFit/>
-          </a:bodyPr>
-          <a:lstStyle/>
-          <a:p>
-            <a:pPr algn="l">
-              <a:lnSpc>
-                <a:spcPts val="1560"/>
-              </a:lnSpc>
-              <a:spcBef>
-                <a:spcPts val="0"/>
-              </a:spcBef>
-              <a:spcAft>
-                <a:spcPts val="0"/>
-              </a:spcAft>
-              <a:defRPr sz="1300" b="0">
-                <a:solidFill>
-                  <a:srgbClr val="A0AEC0"/>
-                </a:solidFill>
-                <a:latin typeface="Calibri"/>
-              </a:defRPr>
-            </a:pPr>
-            <a:r>
-              <a:t>463 courses indexed</a:t>
-            </a:r>
-          </a:p>
-        </p:txBody>
-      </p:sp>
-      <p:sp>
-        <p:nvSpPr>
-          <p:cNvPr id="32" name="TextBox 31"/>
-          <p:cNvSpPr txBox="1"/>
-          <p:nvPr/>
-        </p:nvSpPr>
-        <p:spPr>
-          <a:xfrm>
-            <a:off x="9464040" y="4389120"/>
-            <a:ext cx="2103120" cy="365760"/>
-          </a:xfrm>
-          <a:prstGeom prst="rect">
-            <a:avLst/>
-          </a:prstGeom>
-          <a:noFill/>
-        </p:spPr>
-        <p:txBody>
-          <a:bodyPr wrap="square">
-            <a:spAutoFit/>
-          </a:bodyPr>
-          <a:lstStyle/>
-          <a:p>
-            <a:pPr algn="l">
-              <a:lnSpc>
-                <a:spcPts val="1560"/>
-              </a:lnSpc>
-              <a:spcBef>
-                <a:spcPts val="0"/>
-              </a:spcBef>
-              <a:spcAft>
-                <a:spcPts val="0"/>
-              </a:spcAft>
-              <a:defRPr sz="1300" b="0">
-                <a:solidFill>
-                  <a:srgbClr val="A0AEC0"/>
-                </a:solidFill>
-                <a:latin typeface="Calibri"/>
-              </a:defRPr>
-            </a:pPr>
-            <a:r>
-              <a:t>40+ alumni curated</a:t>
-            </a:r>
-          </a:p>
-        </p:txBody>
-      </p:sp>
-      <p:sp>
-        <p:nvSpPr>
-          <p:cNvPr id="33" name="TextBox 32"/>
-          <p:cNvSpPr txBox="1"/>
-          <p:nvPr/>
-        </p:nvSpPr>
-        <p:spPr>
-          <a:xfrm>
-            <a:off x="731520" y="5852160"/>
-            <a:ext cx="10058400" cy="457200"/>
-          </a:xfrm>
-          <a:prstGeom prst="rect">
-            <a:avLst/>
-          </a:prstGeom>
-          <a:noFill/>
-        </p:spPr>
-        <p:txBody>
-          <a:bodyPr wrap="square">
-            <a:spAutoFit/>
-          </a:bodyPr>
-          <a:lstStyle/>
-          <a:p>
             <a:pPr algn="ctr">
-              <a:lnSpc>
-                <a:spcPts val="1560"/>
-              </a:lnSpc>
               <a:spcBef>
                 <a:spcPts val="0"/>
               </a:spcBef>
@@ -10980,9 +10350,6 @@
           <a:lstStyle/>
           <a:p>
             <a:pPr algn="l">
-              <a:lnSpc>
-                <a:spcPts val="1560"/>
-              </a:lnSpc>
               <a:spcBef>
                 <a:spcPts val="0"/>
               </a:spcBef>
@@ -11010,8 +10377,8 @@
         </p:nvSpPr>
         <p:spPr>
           <a:xfrm>
-            <a:off x="731520" y="914400"/>
-            <a:ext cx="10058400" cy="731520"/>
+            <a:off x="731520" y="1005840"/>
+            <a:ext cx="10058400" cy="640080"/>
           </a:xfrm>
           <a:prstGeom prst="rect">
             <a:avLst/>
@@ -11025,16 +10392,13 @@
           <a:lstStyle/>
           <a:p>
             <a:pPr algn="l">
-              <a:lnSpc>
-                <a:spcPts val="4800"/>
-              </a:lnSpc>
               <a:spcBef>
                 <a:spcPts val="0"/>
               </a:spcBef>
               <a:spcAft>
                 <a:spcPts val="0"/>
               </a:spcAft>
-              <a:defRPr sz="4000" b="1">
+              <a:defRPr sz="3800" b="1">
                 <a:solidFill>
                   <a:srgbClr val="1E2A38"/>
                 </a:solidFill>
@@ -11055,8 +10419,8 @@
         </p:nvSpPr>
         <p:spPr>
           <a:xfrm>
-            <a:off x="1097280" y="2194560"/>
-            <a:ext cx="2926080" cy="1828800"/>
+            <a:off x="914400" y="2103120"/>
+            <a:ext cx="3108960" cy="2011680"/>
           </a:xfrm>
           <a:prstGeom prst="roundRect">
             <a:avLst/>
@@ -11098,8 +10462,8 @@
         </p:nvSpPr>
         <p:spPr>
           <a:xfrm>
-            <a:off x="1097280" y="2423160"/>
-            <a:ext cx="2926080" cy="731520"/>
+            <a:off x="914400" y="2377440"/>
+            <a:ext cx="3108960" cy="822960"/>
           </a:xfrm>
           <a:prstGeom prst="rect">
             <a:avLst/>
@@ -11113,16 +10477,13 @@
           <a:lstStyle/>
           <a:p>
             <a:pPr algn="ctr">
-              <a:lnSpc>
-                <a:spcPts val="5759"/>
-              </a:lnSpc>
               <a:spcBef>
                 <a:spcPts val="0"/>
               </a:spcBef>
               <a:spcAft>
                 <a:spcPts val="0"/>
               </a:spcAft>
-              <a:defRPr sz="4800" b="1">
+              <a:defRPr sz="5200" b="1">
                 <a:solidFill>
                   <a:srgbClr val="3B82F6"/>
                 </a:solidFill>
@@ -11143,8 +10504,8 @@
         </p:nvSpPr>
         <p:spPr>
           <a:xfrm>
-            <a:off x="1097280" y="3200400"/>
-            <a:ext cx="2926080" cy="274320"/>
+            <a:off x="914400" y="3337560"/>
+            <a:ext cx="3108960" cy="457200"/>
           </a:xfrm>
           <a:prstGeom prst="rect">
             <a:avLst/>
@@ -11158,16 +10519,13 @@
           <a:lstStyle/>
           <a:p>
             <a:pPr algn="ctr">
-              <a:lnSpc>
-                <a:spcPts val="1680"/>
-              </a:lnSpc>
               <a:spcBef>
                 <a:spcPts val="0"/>
               </a:spcBef>
               <a:spcAft>
                 <a:spcPts val="0"/>
               </a:spcAft>
-              <a:defRPr sz="1400" b="0">
+              <a:defRPr sz="1500" b="0">
                 <a:solidFill>
                   <a:srgbClr val="6B7280"/>
                 </a:solidFill>
@@ -11175,66 +10533,21 @@
               </a:defRPr>
             </a:pPr>
             <a:r>
-              <a:t>Davidson courses</a:t>
-            </a:r>
-          </a:p>
-        </p:txBody>
-      </p:sp>
-      <p:sp>
-        <p:nvSpPr>
-          <p:cNvPr id="8" name="TextBox 7"/>
-          <p:cNvSpPr txBox="1"/>
-          <p:nvPr/>
-        </p:nvSpPr>
-        <p:spPr>
-          <a:xfrm>
-            <a:off x="1097280" y="3474720"/>
-            <a:ext cx="2926080" cy="274320"/>
-          </a:xfrm>
-          <a:prstGeom prst="rect">
-            <a:avLst/>
-          </a:prstGeom>
-          <a:noFill/>
-        </p:spPr>
-        <p:txBody>
-          <a:bodyPr wrap="square">
-            <a:spAutoFit/>
-          </a:bodyPr>
-          <a:lstStyle/>
-          <a:p>
-            <a:pPr algn="ctr">
-              <a:lnSpc>
-                <a:spcPts val="1680"/>
-              </a:lnSpc>
-              <a:spcBef>
-                <a:spcPts val="0"/>
-              </a:spcBef>
-              <a:spcAft>
-                <a:spcPts val="0"/>
-              </a:spcAft>
-              <a:defRPr sz="1400" b="0">
-                <a:solidFill>
-                  <a:srgbClr val="6B7280"/>
-                </a:solidFill>
-                <a:latin typeface="Calibri"/>
-              </a:defRPr>
-            </a:pPr>
-            <a:r>
-              <a:t>fully indexed</a:t>
-            </a:r>
-          </a:p>
-        </p:txBody>
-      </p:sp>
-      <p:sp>
-        <p:nvSpPr>
-          <p:cNvPr id="9" name="Rounded Rectangle 8"/>
+              <a:t>Davidson courses fully indexed</a:t>
+            </a:r>
+          </a:p>
+        </p:txBody>
+      </p:sp>
+      <p:sp>
+        <p:nvSpPr>
+          <p:cNvPr id="8" name="Rounded Rectangle 7"/>
           <p:cNvSpPr/>
           <p:nvPr/>
         </p:nvSpPr>
         <p:spPr>
           <a:xfrm>
-            <a:off x="4572000" y="2194560"/>
-            <a:ext cx="2926080" cy="1828800"/>
+            <a:off x="4480560" y="2103120"/>
+            <a:ext cx="3108960" cy="2011680"/>
           </a:xfrm>
           <a:prstGeom prst="roundRect">
             <a:avLst/>
@@ -11270,14 +10583,56 @@
       </p:sp>
       <p:sp>
         <p:nvSpPr>
+          <p:cNvPr id="9" name="TextBox 8"/>
+          <p:cNvSpPr txBox="1"/>
+          <p:nvPr/>
+        </p:nvSpPr>
+        <p:spPr>
+          <a:xfrm>
+            <a:off x="4480560" y="2377440"/>
+            <a:ext cx="3108960" cy="822960"/>
+          </a:xfrm>
+          <a:prstGeom prst="rect">
+            <a:avLst/>
+          </a:prstGeom>
+          <a:noFill/>
+        </p:spPr>
+        <p:txBody>
+          <a:bodyPr wrap="square">
+            <a:spAutoFit/>
+          </a:bodyPr>
+          <a:lstStyle/>
+          <a:p>
+            <a:pPr algn="ctr">
+              <a:spcBef>
+                <a:spcPts val="0"/>
+              </a:spcBef>
+              <a:spcAft>
+                <a:spcPts val="0"/>
+              </a:spcAft>
+              <a:defRPr sz="5200" b="1">
+                <a:solidFill>
+                  <a:srgbClr val="8C1D1D"/>
+                </a:solidFill>
+                <a:latin typeface="Georgia"/>
+              </a:defRPr>
+            </a:pPr>
+            <a:r>
+              <a:t>24</a:t>
+            </a:r>
+          </a:p>
+        </p:txBody>
+      </p:sp>
+      <p:sp>
+        <p:nvSpPr>
           <p:cNvPr id="10" name="TextBox 9"/>
           <p:cNvSpPr txBox="1"/>
           <p:nvPr/>
         </p:nvSpPr>
         <p:spPr>
           <a:xfrm>
-            <a:off x="4572000" y="2423160"/>
-            <a:ext cx="2926080" cy="731520"/>
+            <a:off x="4480560" y="3337560"/>
+            <a:ext cx="3108960" cy="457200"/>
           </a:xfrm>
           <a:prstGeom prst="rect">
             <a:avLst/>
@@ -11291,61 +10646,13 @@
           <a:lstStyle/>
           <a:p>
             <a:pPr algn="ctr">
-              <a:lnSpc>
-                <a:spcPts val="5759"/>
-              </a:lnSpc>
               <a:spcBef>
                 <a:spcPts val="0"/>
               </a:spcBef>
               <a:spcAft>
                 <a:spcPts val="0"/>
               </a:spcAft>
-              <a:defRPr sz="4800" b="1">
-                <a:solidFill>
-                  <a:srgbClr val="8C1D1D"/>
-                </a:solidFill>
-                <a:latin typeface="Georgia"/>
-              </a:defRPr>
-            </a:pPr>
-            <a:r>
-              <a:t>24</a:t>
-            </a:r>
-          </a:p>
-        </p:txBody>
-      </p:sp>
-      <p:sp>
-        <p:nvSpPr>
-          <p:cNvPr id="11" name="TextBox 10"/>
-          <p:cNvSpPr txBox="1"/>
-          <p:nvPr/>
-        </p:nvSpPr>
-        <p:spPr>
-          <a:xfrm>
-            <a:off x="4572000" y="3200400"/>
-            <a:ext cx="2926080" cy="274320"/>
-          </a:xfrm>
-          <a:prstGeom prst="rect">
-            <a:avLst/>
-          </a:prstGeom>
-          <a:noFill/>
-        </p:spPr>
-        <p:txBody>
-          <a:bodyPr wrap="square">
-            <a:spAutoFit/>
-          </a:bodyPr>
-          <a:lstStyle/>
-          <a:p>
-            <a:pPr algn="ctr">
-              <a:lnSpc>
-                <a:spcPts val="1680"/>
-              </a:lnSpc>
-              <a:spcBef>
-                <a:spcPts val="0"/>
-              </a:spcBef>
-              <a:spcAft>
-                <a:spcPts val="0"/>
-              </a:spcAft>
-              <a:defRPr sz="1400" b="0">
+              <a:defRPr sz="1500" b="0">
                 <a:solidFill>
                   <a:srgbClr val="6B7280"/>
                 </a:solidFill>
@@ -11353,66 +10660,21 @@
               </a:defRPr>
             </a:pPr>
             <a:r>
-              <a:t>Career paths</a:t>
-            </a:r>
-          </a:p>
-        </p:txBody>
-      </p:sp>
-      <p:sp>
-        <p:nvSpPr>
-          <p:cNvPr id="12" name="TextBox 11"/>
-          <p:cNvSpPr txBox="1"/>
-          <p:nvPr/>
-        </p:nvSpPr>
-        <p:spPr>
-          <a:xfrm>
-            <a:off x="4572000" y="3474720"/>
-            <a:ext cx="2926080" cy="274320"/>
-          </a:xfrm>
-          <a:prstGeom prst="rect">
-            <a:avLst/>
-          </a:prstGeom>
-          <a:noFill/>
-        </p:spPr>
-        <p:txBody>
-          <a:bodyPr wrap="square">
-            <a:spAutoFit/>
-          </a:bodyPr>
-          <a:lstStyle/>
-          <a:p>
-            <a:pPr algn="ctr">
-              <a:lnSpc>
-                <a:spcPts val="1680"/>
-              </a:lnSpc>
-              <a:spcBef>
-                <a:spcPts val="0"/>
-              </a:spcBef>
-              <a:spcAft>
-                <a:spcPts val="0"/>
-              </a:spcAft>
-              <a:defRPr sz="1400" b="0">
-                <a:solidFill>
-                  <a:srgbClr val="6B7280"/>
-                </a:solidFill>
-                <a:latin typeface="Calibri"/>
-              </a:defRPr>
-            </a:pPr>
-            <a:r>
-              <a:t>mapped</a:t>
-            </a:r>
-          </a:p>
-        </p:txBody>
-      </p:sp>
-      <p:sp>
-        <p:nvSpPr>
-          <p:cNvPr id="13" name="Rounded Rectangle 12"/>
+              <a:t>Career paths mapped</a:t>
+            </a:r>
+          </a:p>
+        </p:txBody>
+      </p:sp>
+      <p:sp>
+        <p:nvSpPr>
+          <p:cNvPr id="11" name="Rounded Rectangle 10"/>
           <p:cNvSpPr/>
           <p:nvPr/>
         </p:nvSpPr>
         <p:spPr>
           <a:xfrm>
-            <a:off x="8046720" y="2194560"/>
-            <a:ext cx="2926080" cy="1828800"/>
+            <a:off x="8046720" y="2103120"/>
+            <a:ext cx="3108960" cy="2011680"/>
           </a:xfrm>
           <a:prstGeom prst="roundRect">
             <a:avLst/>
@@ -11448,14 +10710,14 @@
       </p:sp>
       <p:sp>
         <p:nvSpPr>
-          <p:cNvPr id="14" name="TextBox 13"/>
+          <p:cNvPr id="12" name="TextBox 11"/>
           <p:cNvSpPr txBox="1"/>
           <p:nvPr/>
         </p:nvSpPr>
         <p:spPr>
           <a:xfrm>
-            <a:off x="8046720" y="2423160"/>
-            <a:ext cx="2926080" cy="731520"/>
+            <a:off x="8046720" y="2377440"/>
+            <a:ext cx="3108960" cy="822960"/>
           </a:xfrm>
           <a:prstGeom prst="rect">
             <a:avLst/>
@@ -11469,16 +10731,13 @@
           <a:lstStyle/>
           <a:p>
             <a:pPr algn="ctr">
-              <a:lnSpc>
-                <a:spcPts val="5759"/>
-              </a:lnSpc>
               <a:spcBef>
                 <a:spcPts val="0"/>
               </a:spcBef>
               <a:spcAft>
                 <a:spcPts val="0"/>
               </a:spcAft>
-              <a:defRPr sz="4800" b="1">
+              <a:defRPr sz="5200" b="1">
                 <a:solidFill>
                   <a:srgbClr val="10B981"/>
                 </a:solidFill>
@@ -11493,14 +10752,14 @@
       </p:sp>
       <p:sp>
         <p:nvSpPr>
-          <p:cNvPr id="15" name="TextBox 14"/>
+          <p:cNvPr id="13" name="TextBox 12"/>
           <p:cNvSpPr txBox="1"/>
           <p:nvPr/>
         </p:nvSpPr>
         <p:spPr>
           <a:xfrm>
-            <a:off x="8046720" y="3200400"/>
-            <a:ext cx="2926080" cy="274320"/>
+            <a:off x="8046720" y="3337560"/>
+            <a:ext cx="3108960" cy="457200"/>
           </a:xfrm>
           <a:prstGeom prst="rect">
             <a:avLst/>
@@ -11514,16 +10773,13 @@
           <a:lstStyle/>
           <a:p>
             <a:pPr algn="ctr">
-              <a:lnSpc>
-                <a:spcPts val="1680"/>
-              </a:lnSpc>
               <a:spcBef>
                 <a:spcPts val="0"/>
               </a:spcBef>
               <a:spcAft>
                 <a:spcPts val="0"/>
               </a:spcAft>
-              <a:defRPr sz="1400" b="0">
+              <a:defRPr sz="1500" b="0">
                 <a:solidFill>
                   <a:srgbClr val="6B7280"/>
                 </a:solidFill>
@@ -11531,66 +10787,21 @@
               </a:defRPr>
             </a:pPr>
             <a:r>
-              <a:t>Alumni contacts</a:t>
-            </a:r>
-          </a:p>
-        </p:txBody>
-      </p:sp>
-      <p:sp>
-        <p:nvSpPr>
-          <p:cNvPr id="16" name="TextBox 15"/>
-          <p:cNvSpPr txBox="1"/>
-          <p:nvPr/>
-        </p:nvSpPr>
-        <p:spPr>
-          <a:xfrm>
-            <a:off x="8046720" y="3474720"/>
-            <a:ext cx="2926080" cy="274320"/>
-          </a:xfrm>
-          <a:prstGeom prst="rect">
-            <a:avLst/>
-          </a:prstGeom>
-          <a:noFill/>
-        </p:spPr>
-        <p:txBody>
-          <a:bodyPr wrap="square">
-            <a:spAutoFit/>
-          </a:bodyPr>
-          <a:lstStyle/>
-          <a:p>
-            <a:pPr algn="ctr">
-              <a:lnSpc>
-                <a:spcPts val="1680"/>
-              </a:lnSpc>
-              <a:spcBef>
-                <a:spcPts val="0"/>
-              </a:spcBef>
-              <a:spcAft>
-                <a:spcPts val="0"/>
-              </a:spcAft>
-              <a:defRPr sz="1400" b="0">
-                <a:solidFill>
-                  <a:srgbClr val="6B7280"/>
-                </a:solidFill>
-                <a:latin typeface="Calibri"/>
-              </a:defRPr>
-            </a:pPr>
-            <a:r>
-              <a:t>curated</a:t>
-            </a:r>
-          </a:p>
-        </p:txBody>
-      </p:sp>
-      <p:sp>
-        <p:nvSpPr>
-          <p:cNvPr id="17" name="Rounded Rectangle 16"/>
+              <a:t>Alumni contacts curated</a:t>
+            </a:r>
+          </a:p>
+        </p:txBody>
+      </p:sp>
+      <p:sp>
+        <p:nvSpPr>
+          <p:cNvPr id="14" name="Rounded Rectangle 13"/>
           <p:cNvSpPr/>
           <p:nvPr/>
         </p:nvSpPr>
         <p:spPr>
           <a:xfrm>
-            <a:off x="1097280" y="4480560"/>
-            <a:ext cx="2926080" cy="1828800"/>
+            <a:off x="914400" y="4480560"/>
+            <a:ext cx="3108960" cy="2011680"/>
           </a:xfrm>
           <a:prstGeom prst="roundRect">
             <a:avLst/>
@@ -11626,14 +10837,14 @@
       </p:sp>
       <p:sp>
         <p:nvSpPr>
-          <p:cNvPr id="18" name="TextBox 17"/>
+          <p:cNvPr id="15" name="TextBox 14"/>
           <p:cNvSpPr txBox="1"/>
           <p:nvPr/>
         </p:nvSpPr>
         <p:spPr>
           <a:xfrm>
-            <a:off x="1097280" y="4709160"/>
-            <a:ext cx="2926080" cy="731520"/>
+            <a:off x="914400" y="4754880"/>
+            <a:ext cx="3108960" cy="822960"/>
           </a:xfrm>
           <a:prstGeom prst="rect">
             <a:avLst/>
@@ -11647,16 +10858,13 @@
           <a:lstStyle/>
           <a:p>
             <a:pPr algn="ctr">
-              <a:lnSpc>
-                <a:spcPts val="5759"/>
-              </a:lnSpc>
               <a:spcBef>
                 <a:spcPts val="0"/>
               </a:spcBef>
               <a:spcAft>
                 <a:spcPts val="0"/>
               </a:spcAft>
-              <a:defRPr sz="4800" b="1">
+              <a:defRPr sz="5200" b="1">
                 <a:solidFill>
                   <a:srgbClr val="8B5CF6"/>
                 </a:solidFill>
@@ -11671,14 +10879,14 @@
       </p:sp>
       <p:sp>
         <p:nvSpPr>
-          <p:cNvPr id="19" name="TextBox 18"/>
+          <p:cNvPr id="16" name="TextBox 15"/>
           <p:cNvSpPr txBox="1"/>
           <p:nvPr/>
         </p:nvSpPr>
         <p:spPr>
           <a:xfrm>
-            <a:off x="1097280" y="5486400"/>
-            <a:ext cx="2926080" cy="274320"/>
+            <a:off x="914400" y="5715000"/>
+            <a:ext cx="3108960" cy="457200"/>
           </a:xfrm>
           <a:prstGeom prst="rect">
             <a:avLst/>
@@ -11692,16 +10900,13 @@
           <a:lstStyle/>
           <a:p>
             <a:pPr algn="ctr">
-              <a:lnSpc>
-                <a:spcPts val="1680"/>
-              </a:lnSpc>
               <a:spcBef>
                 <a:spcPts val="0"/>
               </a:spcBef>
               <a:spcAft>
                 <a:spcPts val="0"/>
               </a:spcAft>
-              <a:defRPr sz="1400" b="0">
+              <a:defRPr sz="1500" b="0">
                 <a:solidFill>
                   <a:srgbClr val="6B7280"/>
                 </a:solidFill>
@@ -11709,66 +10914,21 @@
               </a:defRPr>
             </a:pPr>
             <a:r>
-              <a:t>AI-powered</a:t>
-            </a:r>
-          </a:p>
-        </p:txBody>
-      </p:sp>
-      <p:sp>
-        <p:nvSpPr>
-          <p:cNvPr id="20" name="TextBox 19"/>
-          <p:cNvSpPr txBox="1"/>
-          <p:nvPr/>
-        </p:nvSpPr>
-        <p:spPr>
-          <a:xfrm>
-            <a:off x="1097280" y="5760720"/>
-            <a:ext cx="2926080" cy="274320"/>
-          </a:xfrm>
-          <a:prstGeom prst="rect">
-            <a:avLst/>
-          </a:prstGeom>
-          <a:noFill/>
-        </p:spPr>
-        <p:txBody>
-          <a:bodyPr wrap="square">
-            <a:spAutoFit/>
-          </a:bodyPr>
-          <a:lstStyle/>
-          <a:p>
-            <a:pPr algn="ctr">
-              <a:lnSpc>
-                <a:spcPts val="1680"/>
-              </a:lnSpc>
-              <a:spcBef>
-                <a:spcPts val="0"/>
-              </a:spcBef>
-              <a:spcAft>
-                <a:spcPts val="0"/>
-              </a:spcAft>
-              <a:defRPr sz="1400" b="0">
-                <a:solidFill>
-                  <a:srgbClr val="6B7280"/>
-                </a:solidFill>
-                <a:latin typeface="Calibri"/>
-              </a:defRPr>
-            </a:pPr>
-            <a:r>
-              <a:t>features</a:t>
-            </a:r>
-          </a:p>
-        </p:txBody>
-      </p:sp>
-      <p:sp>
-        <p:nvSpPr>
-          <p:cNvPr id="21" name="Rounded Rectangle 20"/>
+              <a:t>AI-powered features</a:t>
+            </a:r>
+          </a:p>
+        </p:txBody>
+      </p:sp>
+      <p:sp>
+        <p:nvSpPr>
+          <p:cNvPr id="17" name="Rounded Rectangle 16"/>
           <p:cNvSpPr/>
           <p:nvPr/>
         </p:nvSpPr>
         <p:spPr>
           <a:xfrm>
-            <a:off x="4572000" y="4480560"/>
-            <a:ext cx="2926080" cy="1828800"/>
+            <a:off x="4480560" y="4480560"/>
+            <a:ext cx="3108960" cy="2011680"/>
           </a:xfrm>
           <a:prstGeom prst="roundRect">
             <a:avLst/>
@@ -11804,14 +10964,14 @@
       </p:sp>
       <p:sp>
         <p:nvSpPr>
-          <p:cNvPr id="22" name="TextBox 21"/>
+          <p:cNvPr id="18" name="TextBox 17"/>
           <p:cNvSpPr txBox="1"/>
           <p:nvPr/>
         </p:nvSpPr>
         <p:spPr>
           <a:xfrm>
-            <a:off x="4572000" y="4709160"/>
-            <a:ext cx="2926080" cy="731520"/>
+            <a:off x="4480560" y="4754880"/>
+            <a:ext cx="3108960" cy="822960"/>
           </a:xfrm>
           <a:prstGeom prst="rect">
             <a:avLst/>
@@ -11825,16 +10985,13 @@
           <a:lstStyle/>
           <a:p>
             <a:pPr algn="ctr">
-              <a:lnSpc>
-                <a:spcPts val="5759"/>
-              </a:lnSpc>
               <a:spcBef>
                 <a:spcPts val="0"/>
               </a:spcBef>
               <a:spcAft>
                 <a:spcPts val="0"/>
               </a:spcAft>
-              <a:defRPr sz="4800" b="1">
+              <a:defRPr sz="5200" b="1">
                 <a:solidFill>
                   <a:srgbClr val="F59E0B"/>
                 </a:solidFill>
@@ -11849,14 +11006,14 @@
       </p:sp>
       <p:sp>
         <p:nvSpPr>
-          <p:cNvPr id="23" name="TextBox 22"/>
+          <p:cNvPr id="19" name="TextBox 18"/>
           <p:cNvSpPr txBox="1"/>
           <p:nvPr/>
         </p:nvSpPr>
         <p:spPr>
           <a:xfrm>
-            <a:off x="4572000" y="5486400"/>
-            <a:ext cx="2926080" cy="274320"/>
+            <a:off x="4480560" y="5715000"/>
+            <a:ext cx="3108960" cy="457200"/>
           </a:xfrm>
           <a:prstGeom prst="rect">
             <a:avLst/>
@@ -11870,16 +11027,13 @@
           <a:lstStyle/>
           <a:p>
             <a:pPr algn="ctr">
-              <a:lnSpc>
-                <a:spcPts val="1680"/>
-              </a:lnSpc>
               <a:spcBef>
                 <a:spcPts val="0"/>
               </a:spcBef>
               <a:spcAft>
                 <a:spcPts val="0"/>
               </a:spcAft>
-              <a:defRPr sz="1400" b="0">
+              <a:defRPr sz="1500" b="0">
                 <a:solidFill>
                   <a:srgbClr val="6B7280"/>
                 </a:solidFill>
@@ -11887,66 +11041,21 @@
               </a:defRPr>
             </a:pPr>
             <a:r>
-              <a:t>Credits tracked</a:t>
-            </a:r>
-          </a:p>
-        </p:txBody>
-      </p:sp>
-      <p:sp>
-        <p:nvSpPr>
-          <p:cNvPr id="24" name="TextBox 23"/>
-          <p:cNvSpPr txBox="1"/>
-          <p:nvPr/>
-        </p:nvSpPr>
-        <p:spPr>
-          <a:xfrm>
-            <a:off x="4572000" y="5760720"/>
-            <a:ext cx="2926080" cy="274320"/>
-          </a:xfrm>
-          <a:prstGeom prst="rect">
-            <a:avLst/>
-          </a:prstGeom>
-          <a:noFill/>
-        </p:spPr>
-        <p:txBody>
-          <a:bodyPr wrap="square">
-            <a:spAutoFit/>
-          </a:bodyPr>
-          <a:lstStyle/>
-          <a:p>
-            <a:pPr algn="ctr">
-              <a:lnSpc>
-                <a:spcPts val="1680"/>
-              </a:lnSpc>
-              <a:spcBef>
-                <a:spcPts val="0"/>
-              </a:spcBef>
-              <a:spcAft>
-                <a:spcPts val="0"/>
-              </a:spcAft>
-              <a:defRPr sz="1400" b="0">
-                <a:solidFill>
-                  <a:srgbClr val="6B7280"/>
-                </a:solidFill>
-                <a:latin typeface="Calibri"/>
-              </a:defRPr>
-            </a:pPr>
-            <a:r>
-              <a:t>to graduation</a:t>
-            </a:r>
-          </a:p>
-        </p:txBody>
-      </p:sp>
-      <p:sp>
-        <p:nvSpPr>
-          <p:cNvPr id="25" name="Rounded Rectangle 24"/>
+              <a:t>Credits tracked to graduation</a:t>
+            </a:r>
+          </a:p>
+        </p:txBody>
+      </p:sp>
+      <p:sp>
+        <p:nvSpPr>
+          <p:cNvPr id="20" name="Rounded Rectangle 19"/>
           <p:cNvSpPr/>
           <p:nvPr/>
         </p:nvSpPr>
         <p:spPr>
           <a:xfrm>
             <a:off x="8046720" y="4480560"/>
-            <a:ext cx="2926080" cy="1828800"/>
+            <a:ext cx="3108960" cy="2011680"/>
           </a:xfrm>
           <a:prstGeom prst="roundRect">
             <a:avLst/>
@@ -11982,14 +11091,14 @@
       </p:sp>
       <p:sp>
         <p:nvSpPr>
-          <p:cNvPr id="26" name="TextBox 25"/>
+          <p:cNvPr id="21" name="TextBox 20"/>
           <p:cNvSpPr txBox="1"/>
           <p:nvPr/>
         </p:nvSpPr>
         <p:spPr>
           <a:xfrm>
-            <a:off x="8046720" y="4709160"/>
-            <a:ext cx="2926080" cy="731520"/>
+            <a:off x="8046720" y="4754880"/>
+            <a:ext cx="3108960" cy="822960"/>
           </a:xfrm>
           <a:prstGeom prst="rect">
             <a:avLst/>
@@ -12003,16 +11112,13 @@
           <a:lstStyle/>
           <a:p>
             <a:pPr algn="ctr">
-              <a:lnSpc>
-                <a:spcPts val="5759"/>
-              </a:lnSpc>
               <a:spcBef>
                 <a:spcPts val="0"/>
               </a:spcBef>
               <a:spcAft>
                 <a:spcPts val="0"/>
               </a:spcAft>
-              <a:defRPr sz="4800" b="1">
+              <a:defRPr sz="5200" b="1">
                 <a:solidFill>
                   <a:srgbClr val="EC4899"/>
                 </a:solidFill>
@@ -12027,14 +11133,14 @@
       </p:sp>
       <p:sp>
         <p:nvSpPr>
-          <p:cNvPr id="27" name="TextBox 26"/>
+          <p:cNvPr id="22" name="TextBox 21"/>
           <p:cNvSpPr txBox="1"/>
           <p:nvPr/>
         </p:nvSpPr>
         <p:spPr>
           <a:xfrm>
-            <a:off x="8046720" y="5486400"/>
-            <a:ext cx="2926080" cy="274320"/>
+            <a:off x="8046720" y="5715000"/>
+            <a:ext cx="3108960" cy="457200"/>
           </a:xfrm>
           <a:prstGeom prst="rect">
             <a:avLst/>
@@ -12048,16 +11154,13 @@
           <a:lstStyle/>
           <a:p>
             <a:pPr algn="ctr">
-              <a:lnSpc>
-                <a:spcPts val="1680"/>
-              </a:lnSpc>
               <a:spcBef>
                 <a:spcPts val="0"/>
               </a:spcBef>
               <a:spcAft>
                 <a:spcPts val="0"/>
               </a:spcAft>
-              <a:defRPr sz="1400" b="0">
+              <a:defRPr sz="1500" b="0">
                 <a:solidFill>
                   <a:srgbClr val="6B7280"/>
                 </a:solidFill>
@@ -12065,52 +11168,7 @@
               </a:defRPr>
             </a:pPr>
             <a:r>
-              <a:t>API endpoints</a:t>
-            </a:r>
-          </a:p>
-        </p:txBody>
-      </p:sp>
-      <p:sp>
-        <p:nvSpPr>
-          <p:cNvPr id="28" name="TextBox 27"/>
-          <p:cNvSpPr txBox="1"/>
-          <p:nvPr/>
-        </p:nvSpPr>
-        <p:spPr>
-          <a:xfrm>
-            <a:off x="8046720" y="5760720"/>
-            <a:ext cx="2926080" cy="274320"/>
-          </a:xfrm>
-          <a:prstGeom prst="rect">
-            <a:avLst/>
-          </a:prstGeom>
-          <a:noFill/>
-        </p:spPr>
-        <p:txBody>
-          <a:bodyPr wrap="square">
-            <a:spAutoFit/>
-          </a:bodyPr>
-          <a:lstStyle/>
-          <a:p>
-            <a:pPr algn="ctr">
-              <a:lnSpc>
-                <a:spcPts val="1680"/>
-              </a:lnSpc>
-              <a:spcBef>
-                <a:spcPts val="0"/>
-              </a:spcBef>
-              <a:spcAft>
-                <a:spcPts val="0"/>
-              </a:spcAft>
-              <a:defRPr sz="1400" b="0">
-                <a:solidFill>
-                  <a:srgbClr val="6B7280"/>
-                </a:solidFill>
-                <a:latin typeface="Calibri"/>
-              </a:defRPr>
-            </a:pPr>
-            <a:r>
-              <a:t>built</a:t>
+              <a:t>API endpoints built</a:t>
             </a:r>
           </a:p>
         </p:txBody>
@@ -12207,9 +11265,6 @@
           <a:lstStyle/>
           <a:p>
             <a:pPr algn="l">
-              <a:lnSpc>
-                <a:spcPts val="1560"/>
-              </a:lnSpc>
               <a:spcBef>
                 <a:spcPts val="0"/>
               </a:spcBef>
@@ -12237,8 +11292,8 @@
         </p:nvSpPr>
         <p:spPr>
           <a:xfrm>
-            <a:off x="731520" y="914400"/>
-            <a:ext cx="10058400" cy="731520"/>
+            <a:off x="731520" y="1005840"/>
+            <a:ext cx="10058400" cy="640080"/>
           </a:xfrm>
           <a:prstGeom prst="rect">
             <a:avLst/>
@@ -12252,16 +11307,13 @@
           <a:lstStyle/>
           <a:p>
             <a:pPr algn="l">
-              <a:lnSpc>
-                <a:spcPts val="4800"/>
-              </a:lnSpc>
               <a:spcBef>
                 <a:spcPts val="0"/>
               </a:spcBef>
               <a:spcAft>
                 <a:spcPts val="0"/>
               </a:spcAft>
-              <a:defRPr sz="4000" b="1">
+              <a:defRPr sz="3800" b="1">
                 <a:solidFill>
                   <a:srgbClr val="1E2A38"/>
                 </a:solidFill>
@@ -12282,8 +11334,8 @@
         </p:nvSpPr>
         <p:spPr>
           <a:xfrm>
-            <a:off x="822960" y="2103120"/>
-            <a:ext cx="137160" cy="137160"/>
+            <a:off x="914400" y="2121408"/>
+            <a:ext cx="164592" cy="164592"/>
           </a:xfrm>
           <a:prstGeom prst="ellipse">
             <a:avLst/>
@@ -12325,8 +11377,8 @@
         </p:nvSpPr>
         <p:spPr>
           <a:xfrm>
-            <a:off x="1188720" y="2011680"/>
-            <a:ext cx="3200400" cy="365760"/>
+            <a:off x="1371600" y="2011680"/>
+            <a:ext cx="3657600" cy="365760"/>
           </a:xfrm>
           <a:prstGeom prst="rect">
             <a:avLst/>
@@ -12340,16 +11392,13 @@
           <a:lstStyle/>
           <a:p>
             <a:pPr algn="l">
-              <a:lnSpc>
-                <a:spcPts val="2039"/>
-              </a:lnSpc>
               <a:spcBef>
                 <a:spcPts val="0"/>
               </a:spcBef>
               <a:spcAft>
                 <a:spcPts val="0"/>
               </a:spcAft>
-              <a:defRPr sz="1700" b="1">
+              <a:defRPr sz="1600" b="1">
                 <a:solidFill>
                   <a:srgbClr val="1E2A38"/>
                 </a:solidFill>
@@ -12370,8 +11419,8 @@
         </p:nvSpPr>
         <p:spPr>
           <a:xfrm>
-            <a:off x="1188720" y="2331720"/>
-            <a:ext cx="9601200" cy="457200"/>
+            <a:off x="5029200" y="2011680"/>
+            <a:ext cx="6400800" cy="731520"/>
           </a:xfrm>
           <a:prstGeom prst="rect">
             <a:avLst/>
@@ -12385,16 +11434,13 @@
           <a:lstStyle/>
           <a:p>
             <a:pPr algn="l">
-              <a:lnSpc>
-                <a:spcPts val="1820"/>
-              </a:lnSpc>
               <a:spcBef>
                 <a:spcPts val="0"/>
               </a:spcBef>
               <a:spcAft>
                 <a:spcPts val="0"/>
               </a:spcAft>
-              <a:defRPr sz="1300" b="0">
+              <a:defRPr sz="1400" b="0">
                 <a:solidFill>
                   <a:srgbClr val="6B7280"/>
                 </a:solidFill>
@@ -12402,7 +11448,7 @@
               </a:defRPr>
             </a:pPr>
             <a:r>
-              <a:t>We flip the paradigm. Most tools ask “what courses should I take?” We ask “what career do you want?” and build backward.</a:t>
+              <a:t>Most tools ask “what courses should I take?” We ask “what career do you want?” and build backward.</a:t>
             </a:r>
           </a:p>
         </p:txBody>
@@ -12415,8 +11461,8 @@
         </p:nvSpPr>
         <p:spPr>
           <a:xfrm>
-            <a:off x="822960" y="2971800"/>
-            <a:ext cx="137160" cy="137160"/>
+            <a:off x="914400" y="3035808"/>
+            <a:ext cx="164592" cy="164592"/>
           </a:xfrm>
           <a:prstGeom prst="ellipse">
             <a:avLst/>
@@ -12458,8 +11504,8 @@
         </p:nvSpPr>
         <p:spPr>
           <a:xfrm>
-            <a:off x="1188720" y="2880360"/>
-            <a:ext cx="3200400" cy="365760"/>
+            <a:off x="1371600" y="2926080"/>
+            <a:ext cx="3657600" cy="365760"/>
           </a:xfrm>
           <a:prstGeom prst="rect">
             <a:avLst/>
@@ -12473,16 +11519,13 @@
           <a:lstStyle/>
           <a:p>
             <a:pPr algn="l">
-              <a:lnSpc>
-                <a:spcPts val="2039"/>
-              </a:lnSpc>
               <a:spcBef>
                 <a:spcPts val="0"/>
               </a:spcBef>
               <a:spcAft>
                 <a:spcPts val="0"/>
               </a:spcAft>
-              <a:defRPr sz="1700" b="1">
+              <a:defRPr sz="1600" b="1">
                 <a:solidFill>
                   <a:srgbClr val="1E2A38"/>
                 </a:solidFill>
@@ -12503,8 +11546,8 @@
         </p:nvSpPr>
         <p:spPr>
           <a:xfrm>
-            <a:off x="1188720" y="3200400"/>
-            <a:ext cx="9601200" cy="457200"/>
+            <a:off x="5029200" y="2926080"/>
+            <a:ext cx="6400800" cy="731520"/>
           </a:xfrm>
           <a:prstGeom prst="rect">
             <a:avLst/>
@@ -12518,16 +11561,13 @@
           <a:lstStyle/>
           <a:p>
             <a:pPr algn="l">
-              <a:lnSpc>
-                <a:spcPts val="1820"/>
-              </a:lnSpc>
               <a:spcBef>
                 <a:spcPts val="0"/>
               </a:spcBef>
               <a:spcAft>
                 <a:spcPts val="0"/>
               </a:spcAft>
-              <a:defRPr sz="1300" b="0">
+              <a:defRPr sz="1400" b="0">
                 <a:solidFill>
                   <a:srgbClr val="6B7280"/>
                 </a:solidFill>
@@ -12535,7 +11575,7 @@
               </a:defRPr>
             </a:pPr>
             <a:r>
-              <a:t>Not a generic tool. 463 real Davidson courses, real faculty, real alumni, live enrollment from Davidson’s own API.</a:t>
+              <a:t>463 real courses, real faculty, real alumni, live enrollment from Davidson’s own API.</a:t>
             </a:r>
           </a:p>
         </p:txBody>
@@ -12548,8 +11588,8 @@
         </p:nvSpPr>
         <p:spPr>
           <a:xfrm>
-            <a:off x="822960" y="3840480"/>
-            <a:ext cx="137160" cy="137160"/>
+            <a:off x="914400" y="3950208"/>
+            <a:ext cx="164592" cy="164592"/>
           </a:xfrm>
           <a:prstGeom prst="ellipse">
             <a:avLst/>
@@ -12591,8 +11631,8 @@
         </p:nvSpPr>
         <p:spPr>
           <a:xfrm>
-            <a:off x="1188720" y="3749040"/>
-            <a:ext cx="3200400" cy="365760"/>
+            <a:off x="1371600" y="3840480"/>
+            <a:ext cx="3657600" cy="365760"/>
           </a:xfrm>
           <a:prstGeom prst="rect">
             <a:avLst/>
@@ -12606,16 +11646,13 @@
           <a:lstStyle/>
           <a:p>
             <a:pPr algn="l">
-              <a:lnSpc>
-                <a:spcPts val="2039"/>
-              </a:lnSpc>
               <a:spcBef>
                 <a:spcPts val="0"/>
               </a:spcBef>
               <a:spcAft>
                 <a:spcPts val="0"/>
               </a:spcAft>
-              <a:defRPr sz="1700" b="1">
+              <a:defRPr sz="1600" b="1">
                 <a:solidFill>
                   <a:srgbClr val="1E2A38"/>
                 </a:solidFill>
@@ -12636,8 +11673,8 @@
         </p:nvSpPr>
         <p:spPr>
           <a:xfrm>
-            <a:off x="1188720" y="4069080"/>
-            <a:ext cx="9601200" cy="457200"/>
+            <a:off x="5029200" y="3840480"/>
+            <a:ext cx="6400800" cy="731520"/>
           </a:xfrm>
           <a:prstGeom prst="rect">
             <a:avLst/>
@@ -12651,16 +11688,13 @@
           <a:lstStyle/>
           <a:p>
             <a:pPr algn="l">
-              <a:lnSpc>
-                <a:spcPts val="1820"/>
-              </a:lnSpc>
               <a:spcBef>
                 <a:spcPts val="0"/>
               </a:spcBef>
               <a:spcAft>
                 <a:spcPts val="0"/>
               </a:spcAft>
-              <a:defRPr sz="1300" b="0">
+              <a:defRPr sz="1400" b="0">
                 <a:solidFill>
                   <a:srgbClr val="6B7280"/>
                 </a:solidFill>
@@ -12668,7 +11702,7 @@
               </a:defRPr>
             </a:pPr>
             <a:r>
-              <a:t>Raw RMP is noisy. Our AI reads actual reviews and creates balanced, actionable summaries with tips for success.</a:t>
+              <a:t>Our AI reads actual RMP reviews and creates balanced, actionable summaries with tips for success.</a:t>
             </a:r>
           </a:p>
         </p:txBody>
@@ -12681,8 +11715,8 @@
         </p:nvSpPr>
         <p:spPr>
           <a:xfrm>
-            <a:off x="822960" y="4709160"/>
-            <a:ext cx="137160" cy="137160"/>
+            <a:off x="914400" y="4864608"/>
+            <a:ext cx="164592" cy="164592"/>
           </a:xfrm>
           <a:prstGeom prst="ellipse">
             <a:avLst/>
@@ -12724,8 +11758,8 @@
         </p:nvSpPr>
         <p:spPr>
           <a:xfrm>
-            <a:off x="1188720" y="4617720"/>
-            <a:ext cx="3200400" cy="365760"/>
+            <a:off x="1371600" y="4754880"/>
+            <a:ext cx="3657600" cy="365760"/>
           </a:xfrm>
           <a:prstGeom prst="rect">
             <a:avLst/>
@@ -12739,16 +11773,13 @@
           <a:lstStyle/>
           <a:p>
             <a:pPr algn="l">
-              <a:lnSpc>
-                <a:spcPts val="2039"/>
-              </a:lnSpc>
               <a:spcBef>
                 <a:spcPts val="0"/>
               </a:spcBef>
               <a:spcAft>
                 <a:spcPts val="0"/>
               </a:spcAft>
-              <a:defRPr sz="1700" b="1">
+              <a:defRPr sz="1600" b="1">
                 <a:solidFill>
                   <a:srgbClr val="1E2A38"/>
                 </a:solidFill>
@@ -12769,8 +11800,8 @@
         </p:nvSpPr>
         <p:spPr>
           <a:xfrm>
-            <a:off x="1188720" y="4937760"/>
-            <a:ext cx="9601200" cy="457200"/>
+            <a:off x="5029200" y="4754880"/>
+            <a:ext cx="6400800" cy="731520"/>
           </a:xfrm>
           <a:prstGeom prst="rect">
             <a:avLst/>
@@ -12784,16 +11815,13 @@
           <a:lstStyle/>
           <a:p>
             <a:pPr algn="l">
-              <a:lnSpc>
-                <a:spcPts val="1820"/>
-              </a:lnSpc>
               <a:spcBef>
                 <a:spcPts val="0"/>
               </a:spcBef>
               <a:spcAft>
                 <a:spcPts val="0"/>
               </a:spcAft>
-              <a:defRPr sz="1300" b="0">
+              <a:defRPr sz="1400" b="0">
                 <a:solidFill>
                   <a:srgbClr val="6B7280"/>
                 </a:solidFill>
@@ -12801,7 +11829,7 @@
               </a:defRPr>
             </a:pPr>
             <a:r>
-              <a:t>Every course shows career relevance: “CSC 121 is 90% relevant to Software Engineering, 45% to Data Science.”</a:t>
+              <a:t>Every course shows relevance: “CSC 121 is 90% relevant to SWE, 45% to Data Science.”</a:t>
             </a:r>
           </a:p>
         </p:txBody>
@@ -12814,8 +11842,8 @@
         </p:nvSpPr>
         <p:spPr>
           <a:xfrm>
-            <a:off x="822960" y="5577840"/>
-            <a:ext cx="137160" cy="137160"/>
+            <a:off x="914400" y="5779008"/>
+            <a:ext cx="164592" cy="164592"/>
           </a:xfrm>
           <a:prstGeom prst="ellipse">
             <a:avLst/>
@@ -12857,8 +11885,8 @@
         </p:nvSpPr>
         <p:spPr>
           <a:xfrm>
-            <a:off x="1188720" y="5486400"/>
-            <a:ext cx="3200400" cy="365760"/>
+            <a:off x="1371600" y="5669280"/>
+            <a:ext cx="3657600" cy="365760"/>
           </a:xfrm>
           <a:prstGeom prst="rect">
             <a:avLst/>
@@ -12872,16 +11900,13 @@
           <a:lstStyle/>
           <a:p>
             <a:pPr algn="l">
-              <a:lnSpc>
-                <a:spcPts val="2039"/>
-              </a:lnSpc>
               <a:spcBef>
                 <a:spcPts val="0"/>
               </a:spcBef>
               <a:spcAft>
                 <a:spcPts val="0"/>
               </a:spcAft>
-              <a:defRPr sz="1700" b="1">
+              <a:defRPr sz="1600" b="1">
                 <a:solidFill>
                   <a:srgbClr val="1E2A38"/>
                 </a:solidFill>
@@ -12902,8 +11927,8 @@
         </p:nvSpPr>
         <p:spPr>
           <a:xfrm>
-            <a:off x="1188720" y="5806440"/>
-            <a:ext cx="9601200" cy="457200"/>
+            <a:off x="5029200" y="5669280"/>
+            <a:ext cx="6400800" cy="731520"/>
           </a:xfrm>
           <a:prstGeom prst="rect">
             <a:avLst/>
@@ -12917,16 +11942,13 @@
           <a:lstStyle/>
           <a:p>
             <a:pPr algn="l">
-              <a:lnSpc>
-                <a:spcPts val="1820"/>
-              </a:lnSpc>
               <a:spcBef>
                 <a:spcPts val="0"/>
               </a:spcBef>
               <a:spcAft>
                 <a:spcPts val="0"/>
               </a:spcAft>
-              <a:defRPr sz="1300" b="0">
+              <a:defRPr sz="1400" b="0">
                 <a:solidFill>
                   <a:srgbClr val="6B7280"/>
                 </a:solidFill>
@@ -13031,9 +12053,6 @@
           <a:lstStyle/>
           <a:p>
             <a:pPr algn="l">
-              <a:lnSpc>
-                <a:spcPts val="1560"/>
-              </a:lnSpc>
               <a:spcBef>
                 <a:spcPts val="0"/>
               </a:spcBef>
@@ -13061,8 +12080,8 @@
         </p:nvSpPr>
         <p:spPr>
           <a:xfrm>
-            <a:off x="731520" y="822960"/>
-            <a:ext cx="10058400" cy="731520"/>
+            <a:off x="731520" y="914400"/>
+            <a:ext cx="10058400" cy="640080"/>
           </a:xfrm>
           <a:prstGeom prst="rect">
             <a:avLst/>
@@ -13076,9 +12095,6 @@
           <a:lstStyle/>
           <a:p>
             <a:pPr algn="l">
-              <a:lnSpc>
-                <a:spcPts val="4320"/>
-              </a:lnSpc>
               <a:spcBef>
                 <a:spcPts val="0"/>
               </a:spcBef>
@@ -13106,8 +12122,8 @@
         </p:nvSpPr>
         <p:spPr>
           <a:xfrm>
-            <a:off x="594360" y="2103120"/>
-            <a:ext cx="2011680" cy="3200400"/>
+            <a:off x="457200" y="2011680"/>
+            <a:ext cx="2103120" cy="3474720"/>
           </a:xfrm>
           <a:prstGeom prst="roundRect">
             <a:avLst/>
@@ -13149,7 +12165,7 @@
         </p:nvSpPr>
         <p:spPr>
           <a:xfrm>
-            <a:off x="1280160" y="2423160"/>
+            <a:off x="1188720" y="2331720"/>
             <a:ext cx="640080" cy="640080"/>
           </a:xfrm>
           <a:prstGeom prst="ellipse">
@@ -13192,7 +12208,7 @@
         </p:nvSpPr>
         <p:spPr>
           <a:xfrm>
-            <a:off x="1280160" y="2487168"/>
+            <a:off x="1188720" y="2395728"/>
             <a:ext cx="640080" cy="502920"/>
           </a:xfrm>
           <a:prstGeom prst="rect">
@@ -13207,16 +12223,13 @@
           <a:lstStyle/>
           <a:p>
             <a:pPr algn="ctr">
-              <a:lnSpc>
-                <a:spcPts val="3360"/>
-              </a:lnSpc>
               <a:spcBef>
                 <a:spcPts val="0"/>
               </a:spcBef>
               <a:spcAft>
                 <a:spcPts val="0"/>
               </a:spcAft>
-              <a:defRPr sz="2800" b="1">
+              <a:defRPr sz="2600" b="1">
                 <a:solidFill>
                   <a:srgbClr val="FFFFFF"/>
                 </a:solidFill>
@@ -13237,8 +12250,8 @@
         </p:nvSpPr>
         <p:spPr>
           <a:xfrm>
-            <a:off x="731520" y="3337560"/>
-            <a:ext cx="1737360" cy="365760"/>
+            <a:off x="594360" y="3246120"/>
+            <a:ext cx="1828800" cy="411480"/>
           </a:xfrm>
           <a:prstGeom prst="rect">
             <a:avLst/>
@@ -13252,16 +12265,13 @@
           <a:lstStyle/>
           <a:p>
             <a:pPr algn="ctr">
-              <a:lnSpc>
-                <a:spcPts val="2160"/>
-              </a:lnSpc>
               <a:spcBef>
                 <a:spcPts val="0"/>
               </a:spcBef>
               <a:spcAft>
                 <a:spcPts val="0"/>
               </a:spcAft>
-              <a:defRPr sz="1800" b="1">
+              <a:defRPr sz="1700" b="1">
                 <a:solidFill>
                   <a:srgbClr val="FFFFFF"/>
                 </a:solidFill>
@@ -13282,8 +12292,8 @@
         </p:nvSpPr>
         <p:spPr>
           <a:xfrm>
-            <a:off x="731520" y="3840480"/>
-            <a:ext cx="1737360" cy="274320"/>
+            <a:off x="594360" y="3840480"/>
+            <a:ext cx="1828800" cy="1097280"/>
           </a:xfrm>
           <a:prstGeom prst="rect">
             <a:avLst/>
@@ -13297,14 +12307,8 @@
           <a:lstStyle/>
           <a:p>
             <a:pPr algn="ctr">
-              <a:lnSpc>
-                <a:spcPts val="1560"/>
-              </a:lnSpc>
-              <a:spcBef>
-                <a:spcPts val="0"/>
-              </a:spcBef>
-              <a:spcAft>
-                <a:spcPts val="0"/>
+              <a:spcAft>
+                <a:spcPts val="520"/>
               </a:spcAft>
               <a:defRPr sz="1300" b="0">
                 <a:solidFill>
@@ -13314,7 +12318,23 @@
               </a:defRPr>
             </a:pPr>
             <a:r>
-              <a:t>Create account,</a:t>
+              <a:t>Create account, set</a:t>
+            </a:r>
+          </a:p>
+          <a:p>
+            <a:pPr algn="ctr">
+              <a:spcAft>
+                <a:spcPts val="520"/>
+              </a:spcAft>
+              <a:defRPr sz="1300" b="0">
+                <a:solidFill>
+                  <a:srgbClr val="A0AEC0"/>
+                </a:solidFill>
+                <a:latin typeface="Calibri"/>
+              </a:defRPr>
+            </a:pPr>
+            <a:r>
+              <a:t>major &amp; interests</a:t>
             </a:r>
           </a:p>
         </p:txBody>
@@ -13327,8 +12347,8 @@
         </p:nvSpPr>
         <p:spPr>
           <a:xfrm>
-            <a:off x="731520" y="4160520"/>
-            <a:ext cx="1737360" cy="274320"/>
+            <a:off x="2560320" y="3383280"/>
+            <a:ext cx="228600" cy="365760"/>
           </a:xfrm>
           <a:prstGeom prst="rect">
             <a:avLst/>
@@ -13342,68 +12362,20 @@
           <a:lstStyle/>
           <a:p>
             <a:pPr algn="ctr">
-              <a:lnSpc>
-                <a:spcPts val="1560"/>
-              </a:lnSpc>
               <a:spcBef>
                 <a:spcPts val="0"/>
               </a:spcBef>
               <a:spcAft>
                 <a:spcPts val="0"/>
               </a:spcAft>
-              <a:defRPr sz="1300" b="0">
-                <a:solidFill>
-                  <a:srgbClr val="A0AEC0"/>
+              <a:defRPr sz="1800" b="0">
+                <a:solidFill>
+                  <a:srgbClr val="6B7B90"/>
                 </a:solidFill>
                 <a:latin typeface="Calibri"/>
               </a:defRPr>
             </a:pPr>
             <a:r>
-              <a:t>set major &amp; interests</a:t>
-            </a:r>
-          </a:p>
-        </p:txBody>
-      </p:sp>
-      <p:sp>
-        <p:nvSpPr>
-          <p:cNvPr id="11" name="TextBox 10"/>
-          <p:cNvSpPr txBox="1"/>
-          <p:nvPr/>
-        </p:nvSpPr>
-        <p:spPr>
-          <a:xfrm>
-            <a:off x="2606040" y="3291840"/>
-            <a:ext cx="274320" cy="365760"/>
-          </a:xfrm>
-          <a:prstGeom prst="rect">
-            <a:avLst/>
-          </a:prstGeom>
-          <a:noFill/>
-        </p:spPr>
-        <p:txBody>
-          <a:bodyPr wrap="square">
-            <a:spAutoFit/>
-          </a:bodyPr>
-          <a:lstStyle/>
-          <a:p>
-            <a:pPr algn="ctr">
-              <a:lnSpc>
-                <a:spcPts val="2400"/>
-              </a:lnSpc>
-              <a:spcBef>
-                <a:spcPts val="0"/>
-              </a:spcBef>
-              <a:spcAft>
-                <a:spcPts val="0"/>
-              </a:spcAft>
-              <a:defRPr sz="2000" b="0">
-                <a:solidFill>
-                  <a:srgbClr val="4A5A6E"/>
-                </a:solidFill>
-                <a:latin typeface="Calibri"/>
-              </a:defRPr>
-            </a:pPr>
-            <a:r>
               <a:t>▸</a:t>
             </a:r>
           </a:p>
@@ -13411,14 +12383,14 @@
       </p:sp>
       <p:sp>
         <p:nvSpPr>
-          <p:cNvPr id="12" name="Rounded Rectangle 11"/>
+          <p:cNvPr id="11" name="Rounded Rectangle 10"/>
           <p:cNvSpPr/>
           <p:nvPr/>
         </p:nvSpPr>
         <p:spPr>
           <a:xfrm>
-            <a:off x="2880360" y="2103120"/>
-            <a:ext cx="2011680" cy="3200400"/>
+            <a:off x="2788920" y="2011680"/>
+            <a:ext cx="2103120" cy="3474720"/>
           </a:xfrm>
           <a:prstGeom prst="roundRect">
             <a:avLst/>
@@ -13454,13 +12426,13 @@
       </p:sp>
       <p:sp>
         <p:nvSpPr>
-          <p:cNvPr id="13" name="Oval 12"/>
+          <p:cNvPr id="12" name="Oval 11"/>
           <p:cNvSpPr/>
           <p:nvPr/>
         </p:nvSpPr>
         <p:spPr>
           <a:xfrm>
-            <a:off x="3566160" y="2423160"/>
+            <a:off x="3520440" y="2331720"/>
             <a:ext cx="640080" cy="640080"/>
           </a:xfrm>
           <a:prstGeom prst="ellipse">
@@ -13497,14 +12469,56 @@
       </p:sp>
       <p:sp>
         <p:nvSpPr>
+          <p:cNvPr id="13" name="TextBox 12"/>
+          <p:cNvSpPr txBox="1"/>
+          <p:nvPr/>
+        </p:nvSpPr>
+        <p:spPr>
+          <a:xfrm>
+            <a:off x="3520440" y="2395728"/>
+            <a:ext cx="640080" cy="502920"/>
+          </a:xfrm>
+          <a:prstGeom prst="rect">
+            <a:avLst/>
+          </a:prstGeom>
+          <a:noFill/>
+        </p:spPr>
+        <p:txBody>
+          <a:bodyPr wrap="square">
+            <a:spAutoFit/>
+          </a:bodyPr>
+          <a:lstStyle/>
+          <a:p>
+            <a:pPr algn="ctr">
+              <a:spcBef>
+                <a:spcPts val="0"/>
+              </a:spcBef>
+              <a:spcAft>
+                <a:spcPts val="0"/>
+              </a:spcAft>
+              <a:defRPr sz="2600" b="1">
+                <a:solidFill>
+                  <a:srgbClr val="FFFFFF"/>
+                </a:solidFill>
+                <a:latin typeface="Georgia"/>
+              </a:defRPr>
+            </a:pPr>
+            <a:r>
+              <a:t>2</a:t>
+            </a:r>
+          </a:p>
+        </p:txBody>
+      </p:sp>
+      <p:sp>
+        <p:nvSpPr>
           <p:cNvPr id="14" name="TextBox 13"/>
           <p:cNvSpPr txBox="1"/>
           <p:nvPr/>
         </p:nvSpPr>
         <p:spPr>
           <a:xfrm>
-            <a:off x="3566160" y="2487168"/>
-            <a:ext cx="640080" cy="502920"/>
+            <a:off x="2926080" y="3246120"/>
+            <a:ext cx="1828800" cy="411480"/>
           </a:xfrm>
           <a:prstGeom prst="rect">
             <a:avLst/>
@@ -13518,16 +12532,13 @@
           <a:lstStyle/>
           <a:p>
             <a:pPr algn="ctr">
-              <a:lnSpc>
-                <a:spcPts val="3360"/>
-              </a:lnSpc>
               <a:spcBef>
                 <a:spcPts val="0"/>
               </a:spcBef>
               <a:spcAft>
                 <a:spcPts val="0"/>
               </a:spcAft>
-              <a:defRPr sz="2800" b="1">
+              <a:defRPr sz="1700" b="1">
                 <a:solidFill>
                   <a:srgbClr val="FFFFFF"/>
                 </a:solidFill>
@@ -13535,7 +12546,7 @@
               </a:defRPr>
             </a:pPr>
             <a:r>
-              <a:t>2</a:t>
+              <a:t>Explore Careers</a:t>
             </a:r>
           </a:p>
         </p:txBody>
@@ -13548,8 +12559,8 @@
         </p:nvSpPr>
         <p:spPr>
           <a:xfrm>
-            <a:off x="3017520" y="3337560"/>
-            <a:ext cx="1737360" cy="365760"/>
+            <a:off x="2926080" y="3840480"/>
+            <a:ext cx="1828800" cy="1097280"/>
           </a:xfrm>
           <a:prstGeom prst="rect">
             <a:avLst/>
@@ -13563,24 +12574,34 @@
           <a:lstStyle/>
           <a:p>
             <a:pPr algn="ctr">
-              <a:lnSpc>
-                <a:spcPts val="2160"/>
-              </a:lnSpc>
-              <a:spcBef>
-                <a:spcPts val="0"/>
-              </a:spcBef>
-              <a:spcAft>
-                <a:spcPts val="0"/>
-              </a:spcAft>
-              <a:defRPr sz="1800" b="1">
-                <a:solidFill>
-                  <a:srgbClr val="FFFFFF"/>
-                </a:solidFill>
-                <a:latin typeface="Georgia"/>
-              </a:defRPr>
-            </a:pPr>
-            <a:r>
-              <a:t>Explore Careers</a:t>
+              <a:spcAft>
+                <a:spcPts val="520"/>
+              </a:spcAft>
+              <a:defRPr sz="1300" b="0">
+                <a:solidFill>
+                  <a:srgbClr val="A0AEC0"/>
+                </a:solidFill>
+                <a:latin typeface="Calibri"/>
+              </a:defRPr>
+            </a:pPr>
+            <a:r>
+              <a:t>Browse 24 paths,</a:t>
+            </a:r>
+          </a:p>
+          <a:p>
+            <a:pPr algn="ctr">
+              <a:spcAft>
+                <a:spcPts val="520"/>
+              </a:spcAft>
+              <a:defRPr sz="1300" b="0">
+                <a:solidFill>
+                  <a:srgbClr val="A0AEC0"/>
+                </a:solidFill>
+                <a:latin typeface="Calibri"/>
+              </a:defRPr>
+            </a:pPr>
+            <a:r>
+              <a:t>pick your target</a:t>
             </a:r>
           </a:p>
         </p:txBody>
@@ -13593,8 +12614,8 @@
         </p:nvSpPr>
         <p:spPr>
           <a:xfrm>
-            <a:off x="3017520" y="3840480"/>
-            <a:ext cx="1737360" cy="274320"/>
+            <a:off x="4892040" y="3383280"/>
+            <a:ext cx="228600" cy="365760"/>
           </a:xfrm>
           <a:prstGeom prst="rect">
             <a:avLst/>
@@ -13608,113 +12629,20 @@
           <a:lstStyle/>
           <a:p>
             <a:pPr algn="ctr">
-              <a:lnSpc>
-                <a:spcPts val="1560"/>
-              </a:lnSpc>
               <a:spcBef>
                 <a:spcPts val="0"/>
               </a:spcBef>
               <a:spcAft>
                 <a:spcPts val="0"/>
               </a:spcAft>
-              <a:defRPr sz="1300" b="0">
-                <a:solidFill>
-                  <a:srgbClr val="A0AEC0"/>
+              <a:defRPr sz="1800" b="0">
+                <a:solidFill>
+                  <a:srgbClr val="6B7B90"/>
                 </a:solidFill>
                 <a:latin typeface="Calibri"/>
               </a:defRPr>
             </a:pPr>
             <a:r>
-              <a:t>Browse 24 paths,</a:t>
-            </a:r>
-          </a:p>
-        </p:txBody>
-      </p:sp>
-      <p:sp>
-        <p:nvSpPr>
-          <p:cNvPr id="17" name="TextBox 16"/>
-          <p:cNvSpPr txBox="1"/>
-          <p:nvPr/>
-        </p:nvSpPr>
-        <p:spPr>
-          <a:xfrm>
-            <a:off x="3017520" y="4160520"/>
-            <a:ext cx="1737360" cy="274320"/>
-          </a:xfrm>
-          <a:prstGeom prst="rect">
-            <a:avLst/>
-          </a:prstGeom>
-          <a:noFill/>
-        </p:spPr>
-        <p:txBody>
-          <a:bodyPr wrap="square">
-            <a:spAutoFit/>
-          </a:bodyPr>
-          <a:lstStyle/>
-          <a:p>
-            <a:pPr algn="ctr">
-              <a:lnSpc>
-                <a:spcPts val="1560"/>
-              </a:lnSpc>
-              <a:spcBef>
-                <a:spcPts val="0"/>
-              </a:spcBef>
-              <a:spcAft>
-                <a:spcPts val="0"/>
-              </a:spcAft>
-              <a:defRPr sz="1300" b="0">
-                <a:solidFill>
-                  <a:srgbClr val="A0AEC0"/>
-                </a:solidFill>
-                <a:latin typeface="Calibri"/>
-              </a:defRPr>
-            </a:pPr>
-            <a:r>
-              <a:t>pick your target</a:t>
-            </a:r>
-          </a:p>
-        </p:txBody>
-      </p:sp>
-      <p:sp>
-        <p:nvSpPr>
-          <p:cNvPr id="18" name="TextBox 17"/>
-          <p:cNvSpPr txBox="1"/>
-          <p:nvPr/>
-        </p:nvSpPr>
-        <p:spPr>
-          <a:xfrm>
-            <a:off x="4892040" y="3291840"/>
-            <a:ext cx="274320" cy="365760"/>
-          </a:xfrm>
-          <a:prstGeom prst="rect">
-            <a:avLst/>
-          </a:prstGeom>
-          <a:noFill/>
-        </p:spPr>
-        <p:txBody>
-          <a:bodyPr wrap="square">
-            <a:spAutoFit/>
-          </a:bodyPr>
-          <a:lstStyle/>
-          <a:p>
-            <a:pPr algn="ctr">
-              <a:lnSpc>
-                <a:spcPts val="2400"/>
-              </a:lnSpc>
-              <a:spcBef>
-                <a:spcPts val="0"/>
-              </a:spcBef>
-              <a:spcAft>
-                <a:spcPts val="0"/>
-              </a:spcAft>
-              <a:defRPr sz="2000" b="0">
-                <a:solidFill>
-                  <a:srgbClr val="4A5A6E"/>
-                </a:solidFill>
-                <a:latin typeface="Calibri"/>
-              </a:defRPr>
-            </a:pPr>
-            <a:r>
               <a:t>▸</a:t>
             </a:r>
           </a:p>
@@ -13722,14 +12650,14 @@
       </p:sp>
       <p:sp>
         <p:nvSpPr>
-          <p:cNvPr id="19" name="Rounded Rectangle 18"/>
+          <p:cNvPr id="17" name="Rounded Rectangle 16"/>
           <p:cNvSpPr/>
           <p:nvPr/>
         </p:nvSpPr>
         <p:spPr>
           <a:xfrm>
-            <a:off x="5166360" y="2103120"/>
-            <a:ext cx="2011680" cy="3200400"/>
+            <a:off x="5120640" y="2011680"/>
+            <a:ext cx="2103120" cy="3474720"/>
           </a:xfrm>
           <a:prstGeom prst="roundRect">
             <a:avLst/>
@@ -13765,13 +12693,13 @@
       </p:sp>
       <p:sp>
         <p:nvSpPr>
-          <p:cNvPr id="20" name="Oval 19"/>
+          <p:cNvPr id="18" name="Oval 17"/>
           <p:cNvSpPr/>
           <p:nvPr/>
         </p:nvSpPr>
         <p:spPr>
           <a:xfrm>
-            <a:off x="5852160" y="2423160"/>
+            <a:off x="5852160" y="2331720"/>
             <a:ext cx="640080" cy="640080"/>
           </a:xfrm>
           <a:prstGeom prst="ellipse">
@@ -13808,14 +12736,98 @@
       </p:sp>
       <p:sp>
         <p:nvSpPr>
+          <p:cNvPr id="19" name="TextBox 18"/>
+          <p:cNvSpPr txBox="1"/>
+          <p:nvPr/>
+        </p:nvSpPr>
+        <p:spPr>
+          <a:xfrm>
+            <a:off x="5852160" y="2395728"/>
+            <a:ext cx="640080" cy="502920"/>
+          </a:xfrm>
+          <a:prstGeom prst="rect">
+            <a:avLst/>
+          </a:prstGeom>
+          <a:noFill/>
+        </p:spPr>
+        <p:txBody>
+          <a:bodyPr wrap="square">
+            <a:spAutoFit/>
+          </a:bodyPr>
+          <a:lstStyle/>
+          <a:p>
+            <a:pPr algn="ctr">
+              <a:spcBef>
+                <a:spcPts val="0"/>
+              </a:spcBef>
+              <a:spcAft>
+                <a:spcPts val="0"/>
+              </a:spcAft>
+              <a:defRPr sz="2600" b="1">
+                <a:solidFill>
+                  <a:srgbClr val="FFFFFF"/>
+                </a:solidFill>
+                <a:latin typeface="Georgia"/>
+              </a:defRPr>
+            </a:pPr>
+            <a:r>
+              <a:t>3</a:t>
+            </a:r>
+          </a:p>
+        </p:txBody>
+      </p:sp>
+      <p:sp>
+        <p:nvSpPr>
+          <p:cNvPr id="20" name="TextBox 19"/>
+          <p:cNvSpPr txBox="1"/>
+          <p:nvPr/>
+        </p:nvSpPr>
+        <p:spPr>
+          <a:xfrm>
+            <a:off x="5257800" y="3246120"/>
+            <a:ext cx="1828800" cy="411480"/>
+          </a:xfrm>
+          <a:prstGeom prst="rect">
+            <a:avLst/>
+          </a:prstGeom>
+          <a:noFill/>
+        </p:spPr>
+        <p:txBody>
+          <a:bodyPr wrap="square">
+            <a:spAutoFit/>
+          </a:bodyPr>
+          <a:lstStyle/>
+          <a:p>
+            <a:pPr algn="ctr">
+              <a:spcBef>
+                <a:spcPts val="0"/>
+              </a:spcBef>
+              <a:spcAft>
+                <a:spcPts val="0"/>
+              </a:spcAft>
+              <a:defRPr sz="1700" b="1">
+                <a:solidFill>
+                  <a:srgbClr val="FFFFFF"/>
+                </a:solidFill>
+                <a:latin typeface="Georgia"/>
+              </a:defRPr>
+            </a:pPr>
+            <a:r>
+              <a:t>Generate Plan</a:t>
+            </a:r>
+          </a:p>
+        </p:txBody>
+      </p:sp>
+      <p:sp>
+        <p:nvSpPr>
           <p:cNvPr id="21" name="TextBox 20"/>
           <p:cNvSpPr txBox="1"/>
           <p:nvPr/>
         </p:nvSpPr>
         <p:spPr>
           <a:xfrm>
-            <a:off x="5852160" y="2487168"/>
-            <a:ext cx="640080" cy="502920"/>
+            <a:off x="5257800" y="3840480"/>
+            <a:ext cx="1828800" cy="1097280"/>
           </a:xfrm>
           <a:prstGeom prst="rect">
             <a:avLst/>
@@ -13829,24 +12841,34 @@
           <a:lstStyle/>
           <a:p>
             <a:pPr algn="ctr">
-              <a:lnSpc>
-                <a:spcPts val="3360"/>
-              </a:lnSpc>
-              <a:spcBef>
-                <a:spcPts val="0"/>
-              </a:spcBef>
-              <a:spcAft>
-                <a:spcPts val="0"/>
-              </a:spcAft>
-              <a:defRPr sz="2800" b="1">
-                <a:solidFill>
-                  <a:srgbClr val="FFFFFF"/>
-                </a:solidFill>
-                <a:latin typeface="Georgia"/>
-              </a:defRPr>
-            </a:pPr>
-            <a:r>
-              <a:t>3</a:t>
+              <a:spcAft>
+                <a:spcPts val="520"/>
+              </a:spcAft>
+              <a:defRPr sz="1300" b="0">
+                <a:solidFill>
+                  <a:srgbClr val="A0AEC0"/>
+                </a:solidFill>
+                <a:latin typeface="Calibri"/>
+              </a:defRPr>
+            </a:pPr>
+            <a:r>
+              <a:t>AI builds courses,</a:t>
+            </a:r>
+          </a:p>
+          <a:p>
+            <a:pPr algn="ctr">
+              <a:spcAft>
+                <a:spcPts val="520"/>
+              </a:spcAft>
+              <a:defRPr sz="1300" b="0">
+                <a:solidFill>
+                  <a:srgbClr val="A0AEC0"/>
+                </a:solidFill>
+                <a:latin typeface="Calibri"/>
+              </a:defRPr>
+            </a:pPr>
+            <a:r>
+              <a:t>people, activities</a:t>
             </a:r>
           </a:p>
         </p:txBody>
@@ -13859,8 +12881,8 @@
         </p:nvSpPr>
         <p:spPr>
           <a:xfrm>
-            <a:off x="5303520" y="3337560"/>
-            <a:ext cx="1737360" cy="365760"/>
+            <a:off x="7223760" y="3383280"/>
+            <a:ext cx="228600" cy="365760"/>
           </a:xfrm>
           <a:prstGeom prst="rect">
             <a:avLst/>
@@ -13874,158 +12896,20 @@
           <a:lstStyle/>
           <a:p>
             <a:pPr algn="ctr">
-              <a:lnSpc>
-                <a:spcPts val="2160"/>
-              </a:lnSpc>
               <a:spcBef>
                 <a:spcPts val="0"/>
               </a:spcBef>
               <a:spcAft>
                 <a:spcPts val="0"/>
               </a:spcAft>
-              <a:defRPr sz="1800" b="1">
-                <a:solidFill>
-                  <a:srgbClr val="FFFFFF"/>
-                </a:solidFill>
-                <a:latin typeface="Georgia"/>
-              </a:defRPr>
-            </a:pPr>
-            <a:r>
-              <a:t>Generate Plan</a:t>
-            </a:r>
-          </a:p>
-        </p:txBody>
-      </p:sp>
-      <p:sp>
-        <p:nvSpPr>
-          <p:cNvPr id="23" name="TextBox 22"/>
-          <p:cNvSpPr txBox="1"/>
-          <p:nvPr/>
-        </p:nvSpPr>
-        <p:spPr>
-          <a:xfrm>
-            <a:off x="5303520" y="3840480"/>
-            <a:ext cx="1737360" cy="274320"/>
-          </a:xfrm>
-          <a:prstGeom prst="rect">
-            <a:avLst/>
-          </a:prstGeom>
-          <a:noFill/>
-        </p:spPr>
-        <p:txBody>
-          <a:bodyPr wrap="square">
-            <a:spAutoFit/>
-          </a:bodyPr>
-          <a:lstStyle/>
-          <a:p>
-            <a:pPr algn="ctr">
-              <a:lnSpc>
-                <a:spcPts val="1560"/>
-              </a:lnSpc>
-              <a:spcBef>
-                <a:spcPts val="0"/>
-              </a:spcBef>
-              <a:spcAft>
-                <a:spcPts val="0"/>
-              </a:spcAft>
-              <a:defRPr sz="1300" b="0">
-                <a:solidFill>
-                  <a:srgbClr val="A0AEC0"/>
+              <a:defRPr sz="1800" b="0">
+                <a:solidFill>
+                  <a:srgbClr val="6B7B90"/>
                 </a:solidFill>
                 <a:latin typeface="Calibri"/>
               </a:defRPr>
             </a:pPr>
             <a:r>
-              <a:t>AI builds courses,</a:t>
-            </a:r>
-          </a:p>
-        </p:txBody>
-      </p:sp>
-      <p:sp>
-        <p:nvSpPr>
-          <p:cNvPr id="24" name="TextBox 23"/>
-          <p:cNvSpPr txBox="1"/>
-          <p:nvPr/>
-        </p:nvSpPr>
-        <p:spPr>
-          <a:xfrm>
-            <a:off x="5303520" y="4160520"/>
-            <a:ext cx="1737360" cy="274320"/>
-          </a:xfrm>
-          <a:prstGeom prst="rect">
-            <a:avLst/>
-          </a:prstGeom>
-          <a:noFill/>
-        </p:spPr>
-        <p:txBody>
-          <a:bodyPr wrap="square">
-            <a:spAutoFit/>
-          </a:bodyPr>
-          <a:lstStyle/>
-          <a:p>
-            <a:pPr algn="ctr">
-              <a:lnSpc>
-                <a:spcPts val="1560"/>
-              </a:lnSpc>
-              <a:spcBef>
-                <a:spcPts val="0"/>
-              </a:spcBef>
-              <a:spcAft>
-                <a:spcPts val="0"/>
-              </a:spcAft>
-              <a:defRPr sz="1300" b="0">
-                <a:solidFill>
-                  <a:srgbClr val="A0AEC0"/>
-                </a:solidFill>
-                <a:latin typeface="Calibri"/>
-              </a:defRPr>
-            </a:pPr>
-            <a:r>
-              <a:t>people, activities</a:t>
-            </a:r>
-          </a:p>
-        </p:txBody>
-      </p:sp>
-      <p:sp>
-        <p:nvSpPr>
-          <p:cNvPr id="25" name="TextBox 24"/>
-          <p:cNvSpPr txBox="1"/>
-          <p:nvPr/>
-        </p:nvSpPr>
-        <p:spPr>
-          <a:xfrm>
-            <a:off x="7178040" y="3291840"/>
-            <a:ext cx="274320" cy="365760"/>
-          </a:xfrm>
-          <a:prstGeom prst="rect">
-            <a:avLst/>
-          </a:prstGeom>
-          <a:noFill/>
-        </p:spPr>
-        <p:txBody>
-          <a:bodyPr wrap="square">
-            <a:spAutoFit/>
-          </a:bodyPr>
-          <a:lstStyle/>
-          <a:p>
-            <a:pPr algn="ctr">
-              <a:lnSpc>
-                <a:spcPts val="2400"/>
-              </a:lnSpc>
-              <a:spcBef>
-                <a:spcPts val="0"/>
-              </a:spcBef>
-              <a:spcAft>
-                <a:spcPts val="0"/>
-              </a:spcAft>
-              <a:defRPr sz="2000" b="0">
-                <a:solidFill>
-                  <a:srgbClr val="4A5A6E"/>
-                </a:solidFill>
-                <a:latin typeface="Calibri"/>
-              </a:defRPr>
-            </a:pPr>
-            <a:r>
               <a:t>▸</a:t>
             </a:r>
           </a:p>
@@ -14033,14 +12917,14 @@
       </p:sp>
       <p:sp>
         <p:nvSpPr>
-          <p:cNvPr id="26" name="Rounded Rectangle 25"/>
+          <p:cNvPr id="23" name="Rounded Rectangle 22"/>
           <p:cNvSpPr/>
           <p:nvPr/>
         </p:nvSpPr>
         <p:spPr>
           <a:xfrm>
-            <a:off x="7452360" y="2103120"/>
-            <a:ext cx="2011680" cy="3200400"/>
+            <a:off x="7452360" y="2011680"/>
+            <a:ext cx="2103120" cy="3474720"/>
           </a:xfrm>
           <a:prstGeom prst="roundRect">
             <a:avLst/>
@@ -14076,13 +12960,13 @@
       </p:sp>
       <p:sp>
         <p:nvSpPr>
-          <p:cNvPr id="27" name="Oval 26"/>
+          <p:cNvPr id="24" name="Oval 23"/>
           <p:cNvSpPr/>
           <p:nvPr/>
         </p:nvSpPr>
         <p:spPr>
           <a:xfrm>
-            <a:off x="8138160" y="2423160"/>
+            <a:off x="8183880" y="2331720"/>
             <a:ext cx="640080" cy="640080"/>
           </a:xfrm>
           <a:prstGeom prst="ellipse">
@@ -14119,14 +13003,153 @@
       </p:sp>
       <p:sp>
         <p:nvSpPr>
+          <p:cNvPr id="25" name="TextBox 24"/>
+          <p:cNvSpPr txBox="1"/>
+          <p:nvPr/>
+        </p:nvSpPr>
+        <p:spPr>
+          <a:xfrm>
+            <a:off x="8183880" y="2395728"/>
+            <a:ext cx="640080" cy="502920"/>
+          </a:xfrm>
+          <a:prstGeom prst="rect">
+            <a:avLst/>
+          </a:prstGeom>
+          <a:noFill/>
+        </p:spPr>
+        <p:txBody>
+          <a:bodyPr wrap="square">
+            <a:spAutoFit/>
+          </a:bodyPr>
+          <a:lstStyle/>
+          <a:p>
+            <a:pPr algn="ctr">
+              <a:spcBef>
+                <a:spcPts val="0"/>
+              </a:spcBef>
+              <a:spcAft>
+                <a:spcPts val="0"/>
+              </a:spcAft>
+              <a:defRPr sz="2600" b="1">
+                <a:solidFill>
+                  <a:srgbClr val="FFFFFF"/>
+                </a:solidFill>
+                <a:latin typeface="Georgia"/>
+              </a:defRPr>
+            </a:pPr>
+            <a:r>
+              <a:t>4</a:t>
+            </a:r>
+          </a:p>
+        </p:txBody>
+      </p:sp>
+      <p:sp>
+        <p:nvSpPr>
+          <p:cNvPr id="26" name="TextBox 25"/>
+          <p:cNvSpPr txBox="1"/>
+          <p:nvPr/>
+        </p:nvSpPr>
+        <p:spPr>
+          <a:xfrm>
+            <a:off x="7589520" y="3246120"/>
+            <a:ext cx="1828800" cy="411480"/>
+          </a:xfrm>
+          <a:prstGeom prst="rect">
+            <a:avLst/>
+          </a:prstGeom>
+          <a:noFill/>
+        </p:spPr>
+        <p:txBody>
+          <a:bodyPr wrap="square">
+            <a:spAutoFit/>
+          </a:bodyPr>
+          <a:lstStyle/>
+          <a:p>
+            <a:pPr algn="ctr">
+              <a:spcBef>
+                <a:spcPts val="0"/>
+              </a:spcBef>
+              <a:spcAft>
+                <a:spcPts val="0"/>
+              </a:spcAft>
+              <a:defRPr sz="1700" b="1">
+                <a:solidFill>
+                  <a:srgbClr val="FFFFFF"/>
+                </a:solidFill>
+                <a:latin typeface="Georgia"/>
+              </a:defRPr>
+            </a:pPr>
+            <a:r>
+              <a:t>Build Schedule</a:t>
+            </a:r>
+          </a:p>
+        </p:txBody>
+      </p:sp>
+      <p:sp>
+        <p:nvSpPr>
+          <p:cNvPr id="27" name="TextBox 26"/>
+          <p:cNvSpPr txBox="1"/>
+          <p:nvPr/>
+        </p:nvSpPr>
+        <p:spPr>
+          <a:xfrm>
+            <a:off x="7589520" y="3840480"/>
+            <a:ext cx="1828800" cy="1097280"/>
+          </a:xfrm>
+          <a:prstGeom prst="rect">
+            <a:avLst/>
+          </a:prstGeom>
+          <a:noFill/>
+        </p:spPr>
+        <p:txBody>
+          <a:bodyPr wrap="square">
+            <a:spAutoFit/>
+          </a:bodyPr>
+          <a:lstStyle/>
+          <a:p>
+            <a:pPr algn="ctr">
+              <a:spcAft>
+                <a:spcPts val="520"/>
+              </a:spcAft>
+              <a:defRPr sz="1300" b="0">
+                <a:solidFill>
+                  <a:srgbClr val="A0AEC0"/>
+                </a:solidFill>
+                <a:latin typeface="Calibri"/>
+              </a:defRPr>
+            </a:pPr>
+            <a:r>
+              <a:t>Drag &amp; drop into</a:t>
+            </a:r>
+          </a:p>
+          <a:p>
+            <a:pPr algn="ctr">
+              <a:spcAft>
+                <a:spcPts val="520"/>
+              </a:spcAft>
+              <a:defRPr sz="1300" b="0">
+                <a:solidFill>
+                  <a:srgbClr val="A0AEC0"/>
+                </a:solidFill>
+                <a:latin typeface="Calibri"/>
+              </a:defRPr>
+            </a:pPr>
+            <a:r>
+              <a:t>4-year roadmap</a:t>
+            </a:r>
+          </a:p>
+        </p:txBody>
+      </p:sp>
+      <p:sp>
+        <p:nvSpPr>
           <p:cNvPr id="28" name="TextBox 27"/>
           <p:cNvSpPr txBox="1"/>
           <p:nvPr/>
         </p:nvSpPr>
         <p:spPr>
           <a:xfrm>
-            <a:off x="8138160" y="2487168"/>
-            <a:ext cx="640080" cy="502920"/>
+            <a:off x="9555480" y="3383280"/>
+            <a:ext cx="228600" cy="365760"/>
           </a:xfrm>
           <a:prstGeom prst="rect">
             <a:avLst/>
@@ -14140,203 +13163,20 @@
           <a:lstStyle/>
           <a:p>
             <a:pPr algn="ctr">
-              <a:lnSpc>
-                <a:spcPts val="3360"/>
-              </a:lnSpc>
               <a:spcBef>
                 <a:spcPts val="0"/>
               </a:spcBef>
               <a:spcAft>
                 <a:spcPts val="0"/>
               </a:spcAft>
-              <a:defRPr sz="2800" b="1">
-                <a:solidFill>
-                  <a:srgbClr val="FFFFFF"/>
-                </a:solidFill>
-                <a:latin typeface="Georgia"/>
-              </a:defRPr>
-            </a:pPr>
-            <a:r>
-              <a:t>4</a:t>
-            </a:r>
-          </a:p>
-        </p:txBody>
-      </p:sp>
-      <p:sp>
-        <p:nvSpPr>
-          <p:cNvPr id="29" name="TextBox 28"/>
-          <p:cNvSpPr txBox="1"/>
-          <p:nvPr/>
-        </p:nvSpPr>
-        <p:spPr>
-          <a:xfrm>
-            <a:off x="7589520" y="3337560"/>
-            <a:ext cx="1737360" cy="365760"/>
-          </a:xfrm>
-          <a:prstGeom prst="rect">
-            <a:avLst/>
-          </a:prstGeom>
-          <a:noFill/>
-        </p:spPr>
-        <p:txBody>
-          <a:bodyPr wrap="square">
-            <a:spAutoFit/>
-          </a:bodyPr>
-          <a:lstStyle/>
-          <a:p>
-            <a:pPr algn="ctr">
-              <a:lnSpc>
-                <a:spcPts val="2160"/>
-              </a:lnSpc>
-              <a:spcBef>
-                <a:spcPts val="0"/>
-              </a:spcBef>
-              <a:spcAft>
-                <a:spcPts val="0"/>
-              </a:spcAft>
-              <a:defRPr sz="1800" b="1">
-                <a:solidFill>
-                  <a:srgbClr val="FFFFFF"/>
-                </a:solidFill>
-                <a:latin typeface="Georgia"/>
-              </a:defRPr>
-            </a:pPr>
-            <a:r>
-              <a:t>Build Schedule</a:t>
-            </a:r>
-          </a:p>
-        </p:txBody>
-      </p:sp>
-      <p:sp>
-        <p:nvSpPr>
-          <p:cNvPr id="30" name="TextBox 29"/>
-          <p:cNvSpPr txBox="1"/>
-          <p:nvPr/>
-        </p:nvSpPr>
-        <p:spPr>
-          <a:xfrm>
-            <a:off x="7589520" y="3840480"/>
-            <a:ext cx="1737360" cy="274320"/>
-          </a:xfrm>
-          <a:prstGeom prst="rect">
-            <a:avLst/>
-          </a:prstGeom>
-          <a:noFill/>
-        </p:spPr>
-        <p:txBody>
-          <a:bodyPr wrap="square">
-            <a:spAutoFit/>
-          </a:bodyPr>
-          <a:lstStyle/>
-          <a:p>
-            <a:pPr algn="ctr">
-              <a:lnSpc>
-                <a:spcPts val="1560"/>
-              </a:lnSpc>
-              <a:spcBef>
-                <a:spcPts val="0"/>
-              </a:spcBef>
-              <a:spcAft>
-                <a:spcPts val="0"/>
-              </a:spcAft>
-              <a:defRPr sz="1300" b="0">
-                <a:solidFill>
-                  <a:srgbClr val="A0AEC0"/>
+              <a:defRPr sz="1800" b="0">
+                <a:solidFill>
+                  <a:srgbClr val="6B7B90"/>
                 </a:solidFill>
                 <a:latin typeface="Calibri"/>
               </a:defRPr>
             </a:pPr>
             <a:r>
-              <a:t>Drag &amp; drop into</a:t>
-            </a:r>
-          </a:p>
-        </p:txBody>
-      </p:sp>
-      <p:sp>
-        <p:nvSpPr>
-          <p:cNvPr id="31" name="TextBox 30"/>
-          <p:cNvSpPr txBox="1"/>
-          <p:nvPr/>
-        </p:nvSpPr>
-        <p:spPr>
-          <a:xfrm>
-            <a:off x="7589520" y="4160520"/>
-            <a:ext cx="1737360" cy="274320"/>
-          </a:xfrm>
-          <a:prstGeom prst="rect">
-            <a:avLst/>
-          </a:prstGeom>
-          <a:noFill/>
-        </p:spPr>
-        <p:txBody>
-          <a:bodyPr wrap="square">
-            <a:spAutoFit/>
-          </a:bodyPr>
-          <a:lstStyle/>
-          <a:p>
-            <a:pPr algn="ctr">
-              <a:lnSpc>
-                <a:spcPts val="1560"/>
-              </a:lnSpc>
-              <a:spcBef>
-                <a:spcPts val="0"/>
-              </a:spcBef>
-              <a:spcAft>
-                <a:spcPts val="0"/>
-              </a:spcAft>
-              <a:defRPr sz="1300" b="0">
-                <a:solidFill>
-                  <a:srgbClr val="A0AEC0"/>
-                </a:solidFill>
-                <a:latin typeface="Calibri"/>
-              </a:defRPr>
-            </a:pPr>
-            <a:r>
-              <a:t>4-year roadmap</a:t>
-            </a:r>
-          </a:p>
-        </p:txBody>
-      </p:sp>
-      <p:sp>
-        <p:nvSpPr>
-          <p:cNvPr id="32" name="TextBox 31"/>
-          <p:cNvSpPr txBox="1"/>
-          <p:nvPr/>
-        </p:nvSpPr>
-        <p:spPr>
-          <a:xfrm>
-            <a:off x="9464040" y="3291840"/>
-            <a:ext cx="274320" cy="365760"/>
-          </a:xfrm>
-          <a:prstGeom prst="rect">
-            <a:avLst/>
-          </a:prstGeom>
-          <a:noFill/>
-        </p:spPr>
-        <p:txBody>
-          <a:bodyPr wrap="square">
-            <a:spAutoFit/>
-          </a:bodyPr>
-          <a:lstStyle/>
-          <a:p>
-            <a:pPr algn="ctr">
-              <a:lnSpc>
-                <a:spcPts val="2400"/>
-              </a:lnSpc>
-              <a:spcBef>
-                <a:spcPts val="0"/>
-              </a:spcBef>
-              <a:spcAft>
-                <a:spcPts val="0"/>
-              </a:spcAft>
-              <a:defRPr sz="2000" b="0">
-                <a:solidFill>
-                  <a:srgbClr val="4A5A6E"/>
-                </a:solidFill>
-                <a:latin typeface="Calibri"/>
-              </a:defRPr>
-            </a:pPr>
-            <a:r>
               <a:t>▸</a:t>
             </a:r>
           </a:p>
@@ -14344,14 +13184,14 @@
       </p:sp>
       <p:sp>
         <p:nvSpPr>
-          <p:cNvPr id="33" name="Rounded Rectangle 32"/>
+          <p:cNvPr id="29" name="Rounded Rectangle 28"/>
           <p:cNvSpPr/>
           <p:nvPr/>
         </p:nvSpPr>
         <p:spPr>
           <a:xfrm>
-            <a:off x="9738360" y="2103120"/>
-            <a:ext cx="2011680" cy="3200400"/>
+            <a:off x="9784080" y="2011680"/>
+            <a:ext cx="2103120" cy="3474720"/>
           </a:xfrm>
           <a:prstGeom prst="roundRect">
             <a:avLst/>
@@ -14387,13 +13227,13 @@
       </p:sp>
       <p:sp>
         <p:nvSpPr>
-          <p:cNvPr id="34" name="Oval 33"/>
+          <p:cNvPr id="30" name="Oval 29"/>
           <p:cNvSpPr/>
           <p:nvPr/>
         </p:nvSpPr>
         <p:spPr>
           <a:xfrm>
-            <a:off x="10424160" y="2423160"/>
+            <a:off x="10515600" y="2331720"/>
             <a:ext cx="640080" cy="640080"/>
           </a:xfrm>
           <a:prstGeom prst="ellipse">
@@ -14430,13 +13270,13 @@
       </p:sp>
       <p:sp>
         <p:nvSpPr>
-          <p:cNvPr id="35" name="TextBox 34"/>
+          <p:cNvPr id="31" name="TextBox 30"/>
           <p:cNvSpPr txBox="1"/>
           <p:nvPr/>
         </p:nvSpPr>
         <p:spPr>
           <a:xfrm>
-            <a:off x="10424160" y="2487168"/>
+            <a:off x="10515600" y="2395728"/>
             <a:ext cx="640080" cy="502920"/>
           </a:xfrm>
           <a:prstGeom prst="rect">
@@ -14451,16 +13291,13 @@
           <a:lstStyle/>
           <a:p>
             <a:pPr algn="ctr">
-              <a:lnSpc>
-                <a:spcPts val="3360"/>
-              </a:lnSpc>
               <a:spcBef>
                 <a:spcPts val="0"/>
               </a:spcBef>
               <a:spcAft>
                 <a:spcPts val="0"/>
               </a:spcAft>
-              <a:defRPr sz="2800" b="1">
+              <a:defRPr sz="2600" b="1">
                 <a:solidFill>
                   <a:srgbClr val="FFFFFF"/>
                 </a:solidFill>
@@ -14475,14 +13312,14 @@
       </p:sp>
       <p:sp>
         <p:nvSpPr>
-          <p:cNvPr id="36" name="TextBox 35"/>
+          <p:cNvPr id="32" name="TextBox 31"/>
           <p:cNvSpPr txBox="1"/>
           <p:nvPr/>
         </p:nvSpPr>
         <p:spPr>
           <a:xfrm>
-            <a:off x="9875520" y="3337560"/>
-            <a:ext cx="1737360" cy="365760"/>
+            <a:off x="9921240" y="3246120"/>
+            <a:ext cx="1828800" cy="411480"/>
           </a:xfrm>
           <a:prstGeom prst="rect">
             <a:avLst/>
@@ -14496,16 +13333,13 @@
           <a:lstStyle/>
           <a:p>
             <a:pPr algn="ctr">
-              <a:lnSpc>
-                <a:spcPts val="2160"/>
-              </a:lnSpc>
               <a:spcBef>
                 <a:spcPts val="0"/>
               </a:spcBef>
               <a:spcAft>
                 <a:spcPts val="0"/>
               </a:spcAft>
-              <a:defRPr sz="1800" b="1">
+              <a:defRPr sz="1700" b="1">
                 <a:solidFill>
                   <a:srgbClr val="FFFFFF"/>
                 </a:solidFill>
@@ -14520,14 +13354,14 @@
       </p:sp>
       <p:sp>
         <p:nvSpPr>
-          <p:cNvPr id="37" name="TextBox 36"/>
+          <p:cNvPr id="33" name="TextBox 32"/>
           <p:cNvSpPr txBox="1"/>
           <p:nvPr/>
         </p:nvSpPr>
         <p:spPr>
           <a:xfrm>
-            <a:off x="9875520" y="3840480"/>
-            <a:ext cx="1737360" cy="274320"/>
+            <a:off x="9921240" y="3840480"/>
+            <a:ext cx="1828800" cy="1097280"/>
           </a:xfrm>
           <a:prstGeom prst="rect">
             <a:avLst/>
@@ -14541,14 +13375,8 @@
           <a:lstStyle/>
           <a:p>
             <a:pPr algn="ctr">
-              <a:lnSpc>
-                <a:spcPts val="1560"/>
-              </a:lnSpc>
-              <a:spcBef>
-                <a:spcPts val="0"/>
-              </a:spcBef>
-              <a:spcAft>
-                <a:spcPts val="0"/>
+              <a:spcAft>
+                <a:spcPts val="520"/>
               </a:spcAft>
               <a:defRPr sz="1300" b="0">
                 <a:solidFill>
@@ -14561,18 +13389,34 @@
               <a:t>Find alumni, generate</a:t>
             </a:r>
           </a:p>
-        </p:txBody>
-      </p:sp>
-      <p:sp>
-        <p:nvSpPr>
-          <p:cNvPr id="38" name="TextBox 37"/>
+          <a:p>
+            <a:pPr algn="ctr">
+              <a:spcAft>
+                <a:spcPts val="520"/>
+              </a:spcAft>
+              <a:defRPr sz="1300" b="0">
+                <a:solidFill>
+                  <a:srgbClr val="A0AEC0"/>
+                </a:solidFill>
+                <a:latin typeface="Calibri"/>
+              </a:defRPr>
+            </a:pPr>
+            <a:r>
+              <a:t>cold emails with AI</a:t>
+            </a:r>
+          </a:p>
+        </p:txBody>
+      </p:sp>
+      <p:sp>
+        <p:nvSpPr>
+          <p:cNvPr id="34" name="TextBox 33"/>
           <p:cNvSpPr txBox="1"/>
           <p:nvPr/>
         </p:nvSpPr>
         <p:spPr>
           <a:xfrm>
-            <a:off x="9875520" y="4160520"/>
-            <a:ext cx="1737360" cy="274320"/>
+            <a:off x="914400" y="5943600"/>
+            <a:ext cx="10332720" cy="365760"/>
           </a:xfrm>
           <a:prstGeom prst="rect">
             <a:avLst/>
@@ -14586,61 +13430,13 @@
           <a:lstStyle/>
           <a:p>
             <a:pPr algn="ctr">
-              <a:lnSpc>
-                <a:spcPts val="1560"/>
-              </a:lnSpc>
               <a:spcBef>
                 <a:spcPts val="0"/>
               </a:spcBef>
               <a:spcAft>
                 <a:spcPts val="0"/>
               </a:spcAft>
-              <a:defRPr sz="1300" b="0">
-                <a:solidFill>
-                  <a:srgbClr val="A0AEC0"/>
-                </a:solidFill>
-                <a:latin typeface="Calibri"/>
-              </a:defRPr>
-            </a:pPr>
-            <a:r>
-              <a:t>cold emails with AI</a:t>
-            </a:r>
-          </a:p>
-        </p:txBody>
-      </p:sp>
-      <p:sp>
-        <p:nvSpPr>
-          <p:cNvPr id="39" name="TextBox 38"/>
-          <p:cNvSpPr txBox="1"/>
-          <p:nvPr/>
-        </p:nvSpPr>
-        <p:spPr>
-          <a:xfrm>
-            <a:off x="914400" y="5760720"/>
-            <a:ext cx="10058400" cy="365760"/>
-          </a:xfrm>
-          <a:prstGeom prst="rect">
-            <a:avLst/>
-          </a:prstGeom>
-          <a:noFill/>
-        </p:spPr>
-        <p:txBody>
-          <a:bodyPr wrap="square">
-            <a:spAutoFit/>
-          </a:bodyPr>
-          <a:lstStyle/>
-          <a:p>
-            <a:pPr algn="ctr">
-              <a:lnSpc>
-                <a:spcPts val="1800"/>
-              </a:lnSpc>
-              <a:spcBef>
-                <a:spcPts val="0"/>
-              </a:spcBef>
-              <a:spcAft>
-                <a:spcPts val="0"/>
-              </a:spcAft>
-              <a:defRPr sz="1500" b="0">
+              <a:defRPr sz="1400" b="0">
                 <a:solidFill>
                   <a:srgbClr val="6B7B90"/>
                 </a:solidFill>

--- a/MakeItSo_Pitch_Deck.pptx
+++ b/MakeItSo_Pitch_Deck.pptx
@@ -3295,12 +3295,15 @@
           <a:noFill/>
         </p:spPr>
         <p:txBody>
-          <a:bodyPr wrap="square">
-            <a:spAutoFit/>
+          <a:bodyPr wrap="square" lIns="36576" rIns="36576" tIns="18288" bIns="18288">
+            <a:normAutofit/>
           </a:bodyPr>
           <a:lstStyle/>
           <a:p>
             <a:pPr algn="ctr">
+              <a:lnSpc>
+                <a:spcPts val="4500"/>
+              </a:lnSpc>
               <a:spcBef>
                 <a:spcPts val="0"/>
               </a:spcBef>
@@ -3337,12 +3340,15 @@
           <a:noFill/>
         </p:spPr>
         <p:txBody>
-          <a:bodyPr wrap="square">
-            <a:spAutoFit/>
+          <a:bodyPr wrap="square" lIns="36576" rIns="36576" tIns="18288" bIns="18288">
+            <a:normAutofit/>
           </a:bodyPr>
           <a:lstStyle/>
           <a:p>
             <a:pPr algn="ctr">
+              <a:lnSpc>
+                <a:spcPts val="7500"/>
+              </a:lnSpc>
               <a:spcBef>
                 <a:spcPts val="0"/>
               </a:spcBef>
@@ -3379,12 +3385,15 @@
           <a:noFill/>
         </p:spPr>
         <p:txBody>
-          <a:bodyPr wrap="square">
-            <a:spAutoFit/>
+          <a:bodyPr wrap="square" lIns="36576" rIns="36576" tIns="18288" bIns="18288">
+            <a:normAutofit/>
           </a:bodyPr>
           <a:lstStyle/>
           <a:p>
             <a:pPr algn="ctr">
+              <a:lnSpc>
+                <a:spcPts val="2700"/>
+              </a:lnSpc>
               <a:spcBef>
                 <a:spcPts val="0"/>
               </a:spcBef>
@@ -3421,12 +3430,15 @@
           <a:noFill/>
         </p:spPr>
         <p:txBody>
-          <a:bodyPr wrap="square">
-            <a:spAutoFit/>
+          <a:bodyPr wrap="square" lIns="36576" rIns="36576" tIns="18288" bIns="18288">
+            <a:normAutofit/>
           </a:bodyPr>
           <a:lstStyle/>
           <a:p>
             <a:pPr algn="ctr">
+              <a:lnSpc>
+                <a:spcPts val="1700"/>
+              </a:lnSpc>
               <a:spcBef>
                 <a:spcPts val="0"/>
               </a:spcBef>
@@ -3532,12 +3544,15 @@
           <a:noFill/>
         </p:spPr>
         <p:txBody>
-          <a:bodyPr wrap="square">
-            <a:spAutoFit/>
+          <a:bodyPr wrap="square" lIns="36576" rIns="36576" tIns="18288" bIns="18288">
+            <a:normAutofit/>
           </a:bodyPr>
           <a:lstStyle/>
           <a:p>
             <a:pPr algn="l">
+              <a:lnSpc>
+                <a:spcPts val="1600"/>
+              </a:lnSpc>
               <a:spcBef>
                 <a:spcPts val="0"/>
               </a:spcBef>
@@ -3574,12 +3589,15 @@
           <a:noFill/>
         </p:spPr>
         <p:txBody>
-          <a:bodyPr wrap="square">
-            <a:spAutoFit/>
+          <a:bodyPr wrap="square" lIns="36576" rIns="36576" tIns="18288" bIns="18288">
+            <a:normAutofit/>
           </a:bodyPr>
           <a:lstStyle/>
           <a:p>
             <a:pPr algn="l">
+              <a:lnSpc>
+                <a:spcPts val="4700"/>
+              </a:lnSpc>
               <a:spcBef>
                 <a:spcPts val="0"/>
               </a:spcBef>
@@ -3745,12 +3763,15 @@
           <a:noFill/>
         </p:spPr>
         <p:txBody>
-          <a:bodyPr wrap="square">
-            <a:spAutoFit/>
+          <a:bodyPr wrap="square" lIns="36576" rIns="36576" tIns="18288" bIns="18288">
+            <a:normAutofit/>
           </a:bodyPr>
           <a:lstStyle/>
           <a:p>
             <a:pPr algn="ctr">
+              <a:lnSpc>
+                <a:spcPts val="1600"/>
+              </a:lnSpc>
               <a:spcBef>
                 <a:spcPts val="0"/>
               </a:spcBef>
@@ -3787,12 +3808,15 @@
           <a:noFill/>
         </p:spPr>
         <p:txBody>
-          <a:bodyPr wrap="square">
-            <a:spAutoFit/>
+          <a:bodyPr wrap="square" lIns="36576" rIns="36576" tIns="18288" bIns="18288">
+            <a:normAutofit/>
           </a:bodyPr>
           <a:lstStyle/>
           <a:p>
             <a:pPr algn="l">
+              <a:lnSpc>
+                <a:spcPts val="2300"/>
+              </a:lnSpc>
               <a:spcBef>
                 <a:spcPts val="0"/>
               </a:spcBef>
@@ -3829,12 +3853,15 @@
           <a:noFill/>
         </p:spPr>
         <p:txBody>
-          <a:bodyPr wrap="square">
-            <a:spAutoFit/>
+          <a:bodyPr wrap="square" lIns="36576" rIns="36576" tIns="18288" bIns="18288">
+            <a:normAutofit/>
           </a:bodyPr>
           <a:lstStyle/>
           <a:p>
             <a:pPr algn="l">
+              <a:lnSpc>
+                <a:spcPts val="1700"/>
+              </a:lnSpc>
               <a:spcBef>
                 <a:spcPts val="0"/>
               </a:spcBef>
@@ -4000,12 +4027,15 @@
           <a:noFill/>
         </p:spPr>
         <p:txBody>
-          <a:bodyPr wrap="square">
-            <a:spAutoFit/>
+          <a:bodyPr wrap="square" lIns="36576" rIns="36576" tIns="18288" bIns="18288">
+            <a:normAutofit/>
           </a:bodyPr>
           <a:lstStyle/>
           <a:p>
             <a:pPr algn="ctr">
+              <a:lnSpc>
+                <a:spcPts val="1600"/>
+              </a:lnSpc>
               <a:spcBef>
                 <a:spcPts val="0"/>
               </a:spcBef>
@@ -4042,12 +4072,15 @@
           <a:noFill/>
         </p:spPr>
         <p:txBody>
-          <a:bodyPr wrap="square">
-            <a:spAutoFit/>
+          <a:bodyPr wrap="square" lIns="36576" rIns="36576" tIns="18288" bIns="18288">
+            <a:normAutofit/>
           </a:bodyPr>
           <a:lstStyle/>
           <a:p>
             <a:pPr algn="l">
+              <a:lnSpc>
+                <a:spcPts val="2300"/>
+              </a:lnSpc>
               <a:spcBef>
                 <a:spcPts val="0"/>
               </a:spcBef>
@@ -4084,12 +4117,15 @@
           <a:noFill/>
         </p:spPr>
         <p:txBody>
-          <a:bodyPr wrap="square">
-            <a:spAutoFit/>
+          <a:bodyPr wrap="square" lIns="36576" rIns="36576" tIns="18288" bIns="18288">
+            <a:normAutofit/>
           </a:bodyPr>
           <a:lstStyle/>
           <a:p>
             <a:pPr algn="l">
+              <a:lnSpc>
+                <a:spcPts val="1700"/>
+              </a:lnSpc>
               <a:spcBef>
                 <a:spcPts val="0"/>
               </a:spcBef>
@@ -4255,12 +4291,15 @@
           <a:noFill/>
         </p:spPr>
         <p:txBody>
-          <a:bodyPr wrap="square">
-            <a:spAutoFit/>
+          <a:bodyPr wrap="square" lIns="36576" rIns="36576" tIns="18288" bIns="18288">
+            <a:normAutofit/>
           </a:bodyPr>
           <a:lstStyle/>
           <a:p>
             <a:pPr algn="ctr">
+              <a:lnSpc>
+                <a:spcPts val="1600"/>
+              </a:lnSpc>
               <a:spcBef>
                 <a:spcPts val="0"/>
               </a:spcBef>
@@ -4297,12 +4336,15 @@
           <a:noFill/>
         </p:spPr>
         <p:txBody>
-          <a:bodyPr wrap="square">
-            <a:spAutoFit/>
+          <a:bodyPr wrap="square" lIns="36576" rIns="36576" tIns="18288" bIns="18288">
+            <a:normAutofit/>
           </a:bodyPr>
           <a:lstStyle/>
           <a:p>
             <a:pPr algn="l">
+              <a:lnSpc>
+                <a:spcPts val="2300"/>
+              </a:lnSpc>
               <a:spcBef>
                 <a:spcPts val="0"/>
               </a:spcBef>
@@ -4339,12 +4381,15 @@
           <a:noFill/>
         </p:spPr>
         <p:txBody>
-          <a:bodyPr wrap="square">
-            <a:spAutoFit/>
+          <a:bodyPr wrap="square" lIns="36576" rIns="36576" tIns="18288" bIns="18288">
+            <a:normAutofit/>
           </a:bodyPr>
           <a:lstStyle/>
           <a:p>
             <a:pPr algn="l">
+              <a:lnSpc>
+                <a:spcPts val="1700"/>
+              </a:lnSpc>
               <a:spcBef>
                 <a:spcPts val="0"/>
               </a:spcBef>
@@ -4579,12 +4624,15 @@
           <a:noFill/>
         </p:spPr>
         <p:txBody>
-          <a:bodyPr wrap="square">
-            <a:spAutoFit/>
+          <a:bodyPr wrap="square" lIns="36576" rIns="36576" tIns="18288" bIns="18288">
+            <a:normAutofit/>
           </a:bodyPr>
           <a:lstStyle/>
           <a:p>
             <a:pPr algn="ctr">
+              <a:lnSpc>
+                <a:spcPts val="4500"/>
+              </a:lnSpc>
               <a:spcBef>
                 <a:spcPts val="0"/>
               </a:spcBef>
@@ -4621,12 +4669,15 @@
           <a:noFill/>
         </p:spPr>
         <p:txBody>
-          <a:bodyPr wrap="square">
-            <a:spAutoFit/>
+          <a:bodyPr wrap="square" lIns="36576" rIns="36576" tIns="18288" bIns="18288">
+            <a:normAutofit/>
           </a:bodyPr>
           <a:lstStyle/>
           <a:p>
             <a:pPr algn="ctr">
+              <a:lnSpc>
+                <a:spcPts val="5500"/>
+              </a:lnSpc>
               <a:spcBef>
                 <a:spcPts val="0"/>
               </a:spcBef>
@@ -4663,12 +4714,15 @@
           <a:noFill/>
         </p:spPr>
         <p:txBody>
-          <a:bodyPr wrap="square">
-            <a:spAutoFit/>
+          <a:bodyPr wrap="square" lIns="36576" rIns="36576" tIns="18288" bIns="18288">
+            <a:normAutofit/>
           </a:bodyPr>
           <a:lstStyle/>
           <a:p>
             <a:pPr algn="ctr">
+              <a:lnSpc>
+                <a:spcPts val="2200"/>
+              </a:lnSpc>
               <a:spcBef>
                 <a:spcPts val="0"/>
               </a:spcBef>
@@ -4748,12 +4802,15 @@
           <a:noFill/>
         </p:spPr>
         <p:txBody>
-          <a:bodyPr wrap="square">
-            <a:spAutoFit/>
+          <a:bodyPr wrap="square" lIns="36576" rIns="36576" tIns="18288" bIns="18288">
+            <a:normAutofit/>
           </a:bodyPr>
           <a:lstStyle/>
           <a:p>
             <a:pPr algn="ctr">
+              <a:lnSpc>
+                <a:spcPts val="2200"/>
+              </a:lnSpc>
               <a:spcBef>
                 <a:spcPts val="0"/>
               </a:spcBef>
@@ -4790,12 +4847,15 @@
           <a:noFill/>
         </p:spPr>
         <p:txBody>
-          <a:bodyPr wrap="square">
-            <a:spAutoFit/>
+          <a:bodyPr wrap="square" lIns="36576" rIns="36576" tIns="18288" bIns="18288">
+            <a:normAutofit/>
           </a:bodyPr>
           <a:lstStyle/>
           <a:p>
             <a:pPr algn="ctr">
+              <a:lnSpc>
+                <a:spcPts val="1700"/>
+              </a:lnSpc>
               <a:spcBef>
                 <a:spcPts val="0"/>
               </a:spcBef>
@@ -4901,12 +4961,15 @@
           <a:noFill/>
         </p:spPr>
         <p:txBody>
-          <a:bodyPr wrap="square">
-            <a:spAutoFit/>
+          <a:bodyPr wrap="square" lIns="36576" rIns="36576" tIns="18288" bIns="18288">
+            <a:normAutofit/>
           </a:bodyPr>
           <a:lstStyle/>
           <a:p>
             <a:pPr algn="l">
+              <a:lnSpc>
+                <a:spcPts val="1600"/>
+              </a:lnSpc>
               <a:spcBef>
                 <a:spcPts val="0"/>
               </a:spcBef>
@@ -4943,12 +5006,15 @@
           <a:noFill/>
         </p:spPr>
         <p:txBody>
-          <a:bodyPr wrap="square">
-            <a:spAutoFit/>
+          <a:bodyPr wrap="square" lIns="36576" rIns="36576" tIns="18288" bIns="18288">
+            <a:normAutofit/>
           </a:bodyPr>
           <a:lstStyle/>
           <a:p>
             <a:pPr algn="l">
+              <a:lnSpc>
+                <a:spcPts val="4700"/>
+              </a:lnSpc>
               <a:spcBef>
                 <a:spcPts val="0"/>
               </a:spcBef>
@@ -5071,12 +5137,15 @@
           <a:noFill/>
         </p:spPr>
         <p:txBody>
-          <a:bodyPr wrap="square">
-            <a:spAutoFit/>
+          <a:bodyPr wrap="square" lIns="36576" rIns="36576" tIns="18288" bIns="18288">
+            <a:normAutofit/>
           </a:bodyPr>
           <a:lstStyle/>
           <a:p>
             <a:pPr algn="ctr">
+              <a:lnSpc>
+                <a:spcPts val="2700"/>
+              </a:lnSpc>
               <a:spcBef>
                 <a:spcPts val="0"/>
               </a:spcBef>
@@ -5113,12 +5182,15 @@
           <a:noFill/>
         </p:spPr>
         <p:txBody>
-          <a:bodyPr wrap="square">
-            <a:spAutoFit/>
+          <a:bodyPr wrap="square" lIns="36576" rIns="36576" tIns="18288" bIns="18288">
+            <a:normAutofit/>
           </a:bodyPr>
           <a:lstStyle/>
           <a:p>
             <a:pPr algn="ctr">
+              <a:lnSpc>
+                <a:spcPts val="2100"/>
+              </a:lnSpc>
               <a:spcBef>
                 <a:spcPts val="0"/>
               </a:spcBef>
@@ -5155,12 +5227,15 @@
           <a:noFill/>
         </p:spPr>
         <p:txBody>
-          <a:bodyPr wrap="square">
-            <a:spAutoFit/>
+          <a:bodyPr wrap="square" lIns="36576" rIns="36576" tIns="18288" bIns="18288">
+            <a:normAutofit/>
           </a:bodyPr>
           <a:lstStyle/>
           <a:p>
             <a:pPr algn="ctr">
+              <a:lnSpc>
+                <a:spcPts val="1600"/>
+              </a:lnSpc>
               <a:spcBef>
                 <a:spcPts val="0"/>
               </a:spcBef>
@@ -5283,12 +5358,15 @@
           <a:noFill/>
         </p:spPr>
         <p:txBody>
-          <a:bodyPr wrap="square">
-            <a:spAutoFit/>
+          <a:bodyPr wrap="square" lIns="36576" rIns="36576" tIns="18288" bIns="18288">
+            <a:normAutofit/>
           </a:bodyPr>
           <a:lstStyle/>
           <a:p>
             <a:pPr algn="ctr">
+              <a:lnSpc>
+                <a:spcPts val="2700"/>
+              </a:lnSpc>
               <a:spcBef>
                 <a:spcPts val="0"/>
               </a:spcBef>
@@ -5325,12 +5403,15 @@
           <a:noFill/>
         </p:spPr>
         <p:txBody>
-          <a:bodyPr wrap="square">
-            <a:spAutoFit/>
+          <a:bodyPr wrap="square" lIns="36576" rIns="36576" tIns="18288" bIns="18288">
+            <a:normAutofit/>
           </a:bodyPr>
           <a:lstStyle/>
           <a:p>
             <a:pPr algn="ctr">
+              <a:lnSpc>
+                <a:spcPts val="2100"/>
+              </a:lnSpc>
               <a:spcBef>
                 <a:spcPts val="0"/>
               </a:spcBef>
@@ -5367,12 +5448,15 @@
           <a:noFill/>
         </p:spPr>
         <p:txBody>
-          <a:bodyPr wrap="square">
-            <a:spAutoFit/>
+          <a:bodyPr wrap="square" lIns="36576" rIns="36576" tIns="18288" bIns="18288">
+            <a:normAutofit/>
           </a:bodyPr>
           <a:lstStyle/>
           <a:p>
             <a:pPr algn="ctr">
+              <a:lnSpc>
+                <a:spcPts val="1600"/>
+              </a:lnSpc>
               <a:spcBef>
                 <a:spcPts val="0"/>
               </a:spcBef>
@@ -5495,12 +5579,15 @@
           <a:noFill/>
         </p:spPr>
         <p:txBody>
-          <a:bodyPr wrap="square">
-            <a:spAutoFit/>
+          <a:bodyPr wrap="square" lIns="36576" rIns="36576" tIns="18288" bIns="18288">
+            <a:normAutofit/>
           </a:bodyPr>
           <a:lstStyle/>
           <a:p>
             <a:pPr algn="ctr">
+              <a:lnSpc>
+                <a:spcPts val="2700"/>
+              </a:lnSpc>
               <a:spcBef>
                 <a:spcPts val="0"/>
               </a:spcBef>
@@ -5537,12 +5624,15 @@
           <a:noFill/>
         </p:spPr>
         <p:txBody>
-          <a:bodyPr wrap="square">
-            <a:spAutoFit/>
+          <a:bodyPr wrap="square" lIns="36576" rIns="36576" tIns="18288" bIns="18288">
+            <a:normAutofit/>
           </a:bodyPr>
           <a:lstStyle/>
           <a:p>
             <a:pPr algn="ctr">
+              <a:lnSpc>
+                <a:spcPts val="2100"/>
+              </a:lnSpc>
               <a:spcBef>
                 <a:spcPts val="0"/>
               </a:spcBef>
@@ -5579,12 +5669,15 @@
           <a:noFill/>
         </p:spPr>
         <p:txBody>
-          <a:bodyPr wrap="square">
-            <a:spAutoFit/>
+          <a:bodyPr wrap="square" lIns="36576" rIns="36576" tIns="18288" bIns="18288">
+            <a:normAutofit/>
           </a:bodyPr>
           <a:lstStyle/>
           <a:p>
             <a:pPr algn="ctr">
+              <a:lnSpc>
+                <a:spcPts val="1600"/>
+              </a:lnSpc>
               <a:spcBef>
                 <a:spcPts val="0"/>
               </a:spcBef>
@@ -5707,12 +5800,15 @@
           <a:noFill/>
         </p:spPr>
         <p:txBody>
-          <a:bodyPr wrap="square">
-            <a:spAutoFit/>
+          <a:bodyPr wrap="square" lIns="36576" rIns="36576" tIns="18288" bIns="18288">
+            <a:normAutofit/>
           </a:bodyPr>
           <a:lstStyle/>
           <a:p>
             <a:pPr algn="ctr">
+              <a:lnSpc>
+                <a:spcPts val="2700"/>
+              </a:lnSpc>
               <a:spcBef>
                 <a:spcPts val="0"/>
               </a:spcBef>
@@ -5749,12 +5845,15 @@
           <a:noFill/>
         </p:spPr>
         <p:txBody>
-          <a:bodyPr wrap="square">
-            <a:spAutoFit/>
+          <a:bodyPr wrap="square" lIns="36576" rIns="36576" tIns="18288" bIns="18288">
+            <a:normAutofit/>
           </a:bodyPr>
           <a:lstStyle/>
           <a:p>
             <a:pPr algn="ctr">
+              <a:lnSpc>
+                <a:spcPts val="2100"/>
+              </a:lnSpc>
               <a:spcBef>
                 <a:spcPts val="0"/>
               </a:spcBef>
@@ -5791,12 +5890,15 @@
           <a:noFill/>
         </p:spPr>
         <p:txBody>
-          <a:bodyPr wrap="square">
-            <a:spAutoFit/>
+          <a:bodyPr wrap="square" lIns="36576" rIns="36576" tIns="18288" bIns="18288">
+            <a:normAutofit/>
           </a:bodyPr>
           <a:lstStyle/>
           <a:p>
             <a:pPr algn="ctr">
+              <a:lnSpc>
+                <a:spcPts val="1600"/>
+              </a:lnSpc>
               <a:spcBef>
                 <a:spcPts val="0"/>
               </a:spcBef>
@@ -5902,12 +6004,15 @@
           <a:noFill/>
         </p:spPr>
         <p:txBody>
-          <a:bodyPr wrap="square">
-            <a:spAutoFit/>
+          <a:bodyPr wrap="square" lIns="36576" rIns="36576" tIns="18288" bIns="18288">
+            <a:normAutofit/>
           </a:bodyPr>
           <a:lstStyle/>
           <a:p>
             <a:pPr algn="l">
+              <a:lnSpc>
+                <a:spcPts val="1600"/>
+              </a:lnSpc>
               <a:spcBef>
                 <a:spcPts val="0"/>
               </a:spcBef>
@@ -5944,12 +6049,15 @@
           <a:noFill/>
         </p:spPr>
         <p:txBody>
-          <a:bodyPr wrap="square">
-            <a:spAutoFit/>
+          <a:bodyPr wrap="square" lIns="36576" rIns="36576" tIns="18288" bIns="18288">
+            <a:normAutofit/>
           </a:bodyPr>
           <a:lstStyle/>
           <a:p>
             <a:pPr algn="l">
+              <a:lnSpc>
+                <a:spcPts val="4700"/>
+              </a:lnSpc>
               <a:spcBef>
                 <a:spcPts val="0"/>
               </a:spcBef>
@@ -5986,12 +6094,15 @@
           <a:noFill/>
         </p:spPr>
         <p:txBody>
-          <a:bodyPr wrap="square">
-            <a:spAutoFit/>
+          <a:bodyPr wrap="square" lIns="36576" rIns="36576" tIns="18288" bIns="18288">
+            <a:normAutofit/>
           </a:bodyPr>
           <a:lstStyle/>
           <a:p>
             <a:pPr algn="l">
+              <a:lnSpc>
+                <a:spcPts val="2000"/>
+              </a:lnSpc>
               <a:spcBef>
                 <a:spcPts val="0"/>
               </a:spcBef>
@@ -6114,12 +6225,15 @@
           <a:noFill/>
         </p:spPr>
         <p:txBody>
-          <a:bodyPr wrap="square">
-            <a:spAutoFit/>
+          <a:bodyPr wrap="square" lIns="36576" rIns="36576" tIns="18288" bIns="18288">
+            <a:normAutofit/>
           </a:bodyPr>
           <a:lstStyle/>
           <a:p>
             <a:pPr algn="l">
+              <a:lnSpc>
+                <a:spcPts val="3000"/>
+              </a:lnSpc>
               <a:spcBef>
                 <a:spcPts val="0"/>
               </a:spcBef>
@@ -6156,12 +6270,15 @@
           <a:noFill/>
         </p:spPr>
         <p:txBody>
-          <a:bodyPr wrap="square">
-            <a:spAutoFit/>
+          <a:bodyPr wrap="square" lIns="36576" rIns="36576" tIns="18288" bIns="18288">
+            <a:normAutofit/>
           </a:bodyPr>
           <a:lstStyle/>
           <a:p>
             <a:pPr algn="l">
+              <a:lnSpc>
+                <a:spcPts val="1700"/>
+              </a:lnSpc>
               <a:spcBef>
                 <a:spcPts val="0"/>
               </a:spcBef>
@@ -6241,12 +6358,15 @@
           <a:noFill/>
         </p:spPr>
         <p:txBody>
-          <a:bodyPr wrap="square">
-            <a:spAutoFit/>
+          <a:bodyPr wrap="square" lIns="36576" rIns="36576" tIns="18288" bIns="18288">
+            <a:normAutofit/>
           </a:bodyPr>
           <a:lstStyle/>
           <a:p>
             <a:pPr algn="ctr">
+              <a:lnSpc>
+                <a:spcPts val="1300"/>
+              </a:lnSpc>
               <a:spcBef>
                 <a:spcPts val="0"/>
               </a:spcBef>
@@ -6283,12 +6403,15 @@
           <a:noFill/>
         </p:spPr>
         <p:txBody>
-          <a:bodyPr wrap="square">
-            <a:spAutoFit/>
+          <a:bodyPr wrap="square" lIns="36576" rIns="36576" tIns="18288" bIns="18288">
+            <a:normAutofit/>
           </a:bodyPr>
           <a:lstStyle/>
           <a:p>
             <a:pPr algn="l">
+              <a:lnSpc>
+                <a:spcPts val="1700"/>
+              </a:lnSpc>
               <a:spcBef>
                 <a:spcPts val="0"/>
               </a:spcBef>
@@ -6368,12 +6491,15 @@
           <a:noFill/>
         </p:spPr>
         <p:txBody>
-          <a:bodyPr wrap="square">
-            <a:spAutoFit/>
+          <a:bodyPr wrap="square" lIns="36576" rIns="36576" tIns="18288" bIns="18288">
+            <a:normAutofit/>
           </a:bodyPr>
           <a:lstStyle/>
           <a:p>
             <a:pPr algn="ctr">
+              <a:lnSpc>
+                <a:spcPts val="1300"/>
+              </a:lnSpc>
               <a:spcBef>
                 <a:spcPts val="0"/>
               </a:spcBef>
@@ -6410,12 +6536,15 @@
           <a:noFill/>
         </p:spPr>
         <p:txBody>
-          <a:bodyPr wrap="square">
-            <a:spAutoFit/>
+          <a:bodyPr wrap="square" lIns="36576" rIns="36576" tIns="18288" bIns="18288">
+            <a:normAutofit/>
           </a:bodyPr>
           <a:lstStyle/>
           <a:p>
             <a:pPr algn="l">
+              <a:lnSpc>
+                <a:spcPts val="1700"/>
+              </a:lnSpc>
               <a:spcBef>
                 <a:spcPts val="0"/>
               </a:spcBef>
@@ -6495,12 +6624,15 @@
           <a:noFill/>
         </p:spPr>
         <p:txBody>
-          <a:bodyPr wrap="square">
-            <a:spAutoFit/>
+          <a:bodyPr wrap="square" lIns="36576" rIns="36576" tIns="18288" bIns="18288">
+            <a:normAutofit/>
           </a:bodyPr>
           <a:lstStyle/>
           <a:p>
             <a:pPr algn="ctr">
+              <a:lnSpc>
+                <a:spcPts val="1300"/>
+              </a:lnSpc>
               <a:spcBef>
                 <a:spcPts val="0"/>
               </a:spcBef>
@@ -6537,12 +6669,15 @@
           <a:noFill/>
         </p:spPr>
         <p:txBody>
-          <a:bodyPr wrap="square">
-            <a:spAutoFit/>
+          <a:bodyPr wrap="square" lIns="36576" rIns="36576" tIns="18288" bIns="18288">
+            <a:normAutofit/>
           </a:bodyPr>
           <a:lstStyle/>
           <a:p>
             <a:pPr algn="l">
+              <a:lnSpc>
+                <a:spcPts val="1700"/>
+              </a:lnSpc>
               <a:spcBef>
                 <a:spcPts val="0"/>
               </a:spcBef>
@@ -6622,12 +6757,15 @@
           <a:noFill/>
         </p:spPr>
         <p:txBody>
-          <a:bodyPr wrap="square">
-            <a:spAutoFit/>
+          <a:bodyPr wrap="square" lIns="36576" rIns="36576" tIns="18288" bIns="18288">
+            <a:normAutofit/>
           </a:bodyPr>
           <a:lstStyle/>
           <a:p>
             <a:pPr algn="ctr">
+              <a:lnSpc>
+                <a:spcPts val="1300"/>
+              </a:lnSpc>
               <a:spcBef>
                 <a:spcPts val="0"/>
               </a:spcBef>
@@ -6664,12 +6802,15 @@
           <a:noFill/>
         </p:spPr>
         <p:txBody>
-          <a:bodyPr wrap="square">
-            <a:spAutoFit/>
+          <a:bodyPr wrap="square" lIns="36576" rIns="36576" tIns="18288" bIns="18288">
+            <a:normAutofit/>
           </a:bodyPr>
           <a:lstStyle/>
           <a:p>
             <a:pPr algn="l">
+              <a:lnSpc>
+                <a:spcPts val="1700"/>
+              </a:lnSpc>
               <a:spcBef>
                 <a:spcPts val="0"/>
               </a:spcBef>
@@ -6792,12 +6933,15 @@
           <a:noFill/>
         </p:spPr>
         <p:txBody>
-          <a:bodyPr wrap="square">
-            <a:spAutoFit/>
+          <a:bodyPr wrap="square" lIns="36576" rIns="36576" tIns="18288" bIns="18288">
+            <a:normAutofit/>
           </a:bodyPr>
           <a:lstStyle/>
           <a:p>
             <a:pPr algn="l">
+              <a:lnSpc>
+                <a:spcPts val="3000"/>
+              </a:lnSpc>
               <a:spcBef>
                 <a:spcPts val="0"/>
               </a:spcBef>
@@ -6834,12 +6978,15 @@
           <a:noFill/>
         </p:spPr>
         <p:txBody>
-          <a:bodyPr wrap="square">
-            <a:spAutoFit/>
+          <a:bodyPr wrap="square" lIns="36576" rIns="36576" tIns="18288" bIns="18288">
+            <a:normAutofit/>
           </a:bodyPr>
           <a:lstStyle/>
           <a:p>
             <a:pPr algn="l">
+              <a:lnSpc>
+                <a:spcPts val="1700"/>
+              </a:lnSpc>
               <a:spcBef>
                 <a:spcPts val="0"/>
               </a:spcBef>
@@ -6919,12 +7066,15 @@
           <a:noFill/>
         </p:spPr>
         <p:txBody>
-          <a:bodyPr wrap="square">
-            <a:spAutoFit/>
+          <a:bodyPr wrap="square" lIns="36576" rIns="36576" tIns="18288" bIns="18288">
+            <a:normAutofit/>
           </a:bodyPr>
           <a:lstStyle/>
           <a:p>
             <a:pPr algn="ctr">
+              <a:lnSpc>
+                <a:spcPts val="1300"/>
+              </a:lnSpc>
               <a:spcBef>
                 <a:spcPts val="0"/>
               </a:spcBef>
@@ -6961,12 +7111,15 @@
           <a:noFill/>
         </p:spPr>
         <p:txBody>
-          <a:bodyPr wrap="square">
-            <a:spAutoFit/>
+          <a:bodyPr wrap="square" lIns="36576" rIns="36576" tIns="18288" bIns="18288">
+            <a:normAutofit/>
           </a:bodyPr>
           <a:lstStyle/>
           <a:p>
             <a:pPr algn="l">
+              <a:lnSpc>
+                <a:spcPts val="1700"/>
+              </a:lnSpc>
               <a:spcBef>
                 <a:spcPts val="0"/>
               </a:spcBef>
@@ -7046,12 +7199,15 @@
           <a:noFill/>
         </p:spPr>
         <p:txBody>
-          <a:bodyPr wrap="square">
-            <a:spAutoFit/>
+          <a:bodyPr wrap="square" lIns="36576" rIns="36576" tIns="18288" bIns="18288">
+            <a:normAutofit/>
           </a:bodyPr>
           <a:lstStyle/>
           <a:p>
             <a:pPr algn="ctr">
+              <a:lnSpc>
+                <a:spcPts val="1300"/>
+              </a:lnSpc>
               <a:spcBef>
                 <a:spcPts val="0"/>
               </a:spcBef>
@@ -7088,12 +7244,15 @@
           <a:noFill/>
         </p:spPr>
         <p:txBody>
-          <a:bodyPr wrap="square">
-            <a:spAutoFit/>
+          <a:bodyPr wrap="square" lIns="36576" rIns="36576" tIns="18288" bIns="18288">
+            <a:normAutofit/>
           </a:bodyPr>
           <a:lstStyle/>
           <a:p>
             <a:pPr algn="l">
+              <a:lnSpc>
+                <a:spcPts val="1700"/>
+              </a:lnSpc>
               <a:spcBef>
                 <a:spcPts val="0"/>
               </a:spcBef>
@@ -7173,12 +7332,15 @@
           <a:noFill/>
         </p:spPr>
         <p:txBody>
-          <a:bodyPr wrap="square">
-            <a:spAutoFit/>
+          <a:bodyPr wrap="square" lIns="36576" rIns="36576" tIns="18288" bIns="18288">
+            <a:normAutofit/>
           </a:bodyPr>
           <a:lstStyle/>
           <a:p>
             <a:pPr algn="ctr">
+              <a:lnSpc>
+                <a:spcPts val="1300"/>
+              </a:lnSpc>
               <a:spcBef>
                 <a:spcPts val="0"/>
               </a:spcBef>
@@ -7215,12 +7377,15 @@
           <a:noFill/>
         </p:spPr>
         <p:txBody>
-          <a:bodyPr wrap="square">
-            <a:spAutoFit/>
+          <a:bodyPr wrap="square" lIns="36576" rIns="36576" tIns="18288" bIns="18288">
+            <a:normAutofit/>
           </a:bodyPr>
           <a:lstStyle/>
           <a:p>
             <a:pPr algn="l">
+              <a:lnSpc>
+                <a:spcPts val="1700"/>
+              </a:lnSpc>
               <a:spcBef>
                 <a:spcPts val="0"/>
               </a:spcBef>
@@ -7300,12 +7465,15 @@
           <a:noFill/>
         </p:spPr>
         <p:txBody>
-          <a:bodyPr wrap="square">
-            <a:spAutoFit/>
+          <a:bodyPr wrap="square" lIns="36576" rIns="36576" tIns="18288" bIns="18288">
+            <a:normAutofit/>
           </a:bodyPr>
           <a:lstStyle/>
           <a:p>
             <a:pPr algn="ctr">
+              <a:lnSpc>
+                <a:spcPts val="1300"/>
+              </a:lnSpc>
               <a:spcBef>
                 <a:spcPts val="0"/>
               </a:spcBef>
@@ -7342,12 +7510,15 @@
           <a:noFill/>
         </p:spPr>
         <p:txBody>
-          <a:bodyPr wrap="square">
-            <a:spAutoFit/>
+          <a:bodyPr wrap="square" lIns="36576" rIns="36576" tIns="18288" bIns="18288">
+            <a:normAutofit/>
           </a:bodyPr>
           <a:lstStyle/>
           <a:p>
             <a:pPr algn="l">
+              <a:lnSpc>
+                <a:spcPts val="1700"/>
+              </a:lnSpc>
               <a:spcBef>
                 <a:spcPts val="0"/>
               </a:spcBef>
@@ -7453,12 +7624,15 @@
           <a:noFill/>
         </p:spPr>
         <p:txBody>
-          <a:bodyPr wrap="square">
-            <a:spAutoFit/>
+          <a:bodyPr wrap="square" lIns="36576" rIns="36576" tIns="18288" bIns="18288">
+            <a:normAutofit/>
           </a:bodyPr>
           <a:lstStyle/>
           <a:p>
             <a:pPr algn="l">
+              <a:lnSpc>
+                <a:spcPts val="1600"/>
+              </a:lnSpc>
               <a:spcBef>
                 <a:spcPts val="0"/>
               </a:spcBef>
@@ -7495,12 +7669,15 @@
           <a:noFill/>
         </p:spPr>
         <p:txBody>
-          <a:bodyPr wrap="square">
-            <a:spAutoFit/>
+          <a:bodyPr wrap="square" lIns="36576" rIns="36576" tIns="18288" bIns="18288">
+            <a:normAutofit/>
           </a:bodyPr>
           <a:lstStyle/>
           <a:p>
             <a:pPr algn="l">
+              <a:lnSpc>
+                <a:spcPts val="4700"/>
+              </a:lnSpc>
               <a:spcBef>
                 <a:spcPts val="0"/>
               </a:spcBef>
@@ -7666,12 +7843,15 @@
           <a:noFill/>
         </p:spPr>
         <p:txBody>
-          <a:bodyPr wrap="square">
-            <a:spAutoFit/>
+          <a:bodyPr wrap="square" lIns="36576" rIns="36576" tIns="18288" bIns="18288">
+            <a:normAutofit/>
           </a:bodyPr>
           <a:lstStyle/>
           <a:p>
             <a:pPr algn="ctr">
+              <a:lnSpc>
+                <a:spcPts val="3000"/>
+              </a:lnSpc>
               <a:spcBef>
                 <a:spcPts val="0"/>
               </a:spcBef>
@@ -7708,12 +7888,15 @@
           <a:noFill/>
         </p:spPr>
         <p:txBody>
-          <a:bodyPr wrap="square">
-            <a:spAutoFit/>
+          <a:bodyPr wrap="square" lIns="36576" rIns="36576" tIns="18288" bIns="18288">
+            <a:normAutofit/>
           </a:bodyPr>
           <a:lstStyle/>
           <a:p>
             <a:pPr algn="ctr">
+              <a:lnSpc>
+                <a:spcPts val="2200"/>
+              </a:lnSpc>
               <a:spcBef>
                 <a:spcPts val="0"/>
               </a:spcBef>
@@ -7750,12 +7933,15 @@
           <a:noFill/>
         </p:spPr>
         <p:txBody>
-          <a:bodyPr wrap="square">
-            <a:spAutoFit/>
+          <a:bodyPr wrap="square" lIns="36576" rIns="36576" tIns="18288" bIns="18288">
+            <a:normAutofit/>
           </a:bodyPr>
           <a:lstStyle/>
           <a:p>
             <a:pPr algn="ctr">
+              <a:lnSpc>
+                <a:spcPts val="1600"/>
+              </a:lnSpc>
               <a:spcBef>
                 <a:spcPts val="0"/>
               </a:spcBef>
@@ -7921,12 +8107,15 @@
           <a:noFill/>
         </p:spPr>
         <p:txBody>
-          <a:bodyPr wrap="square">
-            <a:spAutoFit/>
+          <a:bodyPr wrap="square" lIns="36576" rIns="36576" tIns="18288" bIns="18288">
+            <a:normAutofit/>
           </a:bodyPr>
           <a:lstStyle/>
           <a:p>
             <a:pPr algn="ctr">
+              <a:lnSpc>
+                <a:spcPts val="3000"/>
+              </a:lnSpc>
               <a:spcBef>
                 <a:spcPts val="0"/>
               </a:spcBef>
@@ -7963,12 +8152,15 @@
           <a:noFill/>
         </p:spPr>
         <p:txBody>
-          <a:bodyPr wrap="square">
-            <a:spAutoFit/>
+          <a:bodyPr wrap="square" lIns="36576" rIns="36576" tIns="18288" bIns="18288">
+            <a:normAutofit/>
           </a:bodyPr>
           <a:lstStyle/>
           <a:p>
             <a:pPr algn="ctr">
+              <a:lnSpc>
+                <a:spcPts val="2200"/>
+              </a:lnSpc>
               <a:spcBef>
                 <a:spcPts val="0"/>
               </a:spcBef>
@@ -8005,12 +8197,15 @@
           <a:noFill/>
         </p:spPr>
         <p:txBody>
-          <a:bodyPr wrap="square">
-            <a:spAutoFit/>
+          <a:bodyPr wrap="square" lIns="36576" rIns="36576" tIns="18288" bIns="18288">
+            <a:normAutofit/>
           </a:bodyPr>
           <a:lstStyle/>
           <a:p>
             <a:pPr algn="ctr">
+              <a:lnSpc>
+                <a:spcPts val="1600"/>
+              </a:lnSpc>
               <a:spcBef>
                 <a:spcPts val="0"/>
               </a:spcBef>
@@ -8176,12 +8371,15 @@
           <a:noFill/>
         </p:spPr>
         <p:txBody>
-          <a:bodyPr wrap="square">
-            <a:spAutoFit/>
+          <a:bodyPr wrap="square" lIns="36576" rIns="36576" tIns="18288" bIns="18288">
+            <a:normAutofit/>
           </a:bodyPr>
           <a:lstStyle/>
           <a:p>
             <a:pPr algn="ctr">
+              <a:lnSpc>
+                <a:spcPts val="3000"/>
+              </a:lnSpc>
               <a:spcBef>
                 <a:spcPts val="0"/>
               </a:spcBef>
@@ -8218,12 +8416,15 @@
           <a:noFill/>
         </p:spPr>
         <p:txBody>
-          <a:bodyPr wrap="square">
-            <a:spAutoFit/>
+          <a:bodyPr wrap="square" lIns="36576" rIns="36576" tIns="18288" bIns="18288">
+            <a:normAutofit/>
           </a:bodyPr>
           <a:lstStyle/>
           <a:p>
             <a:pPr algn="ctr">
+              <a:lnSpc>
+                <a:spcPts val="2200"/>
+              </a:lnSpc>
               <a:spcBef>
                 <a:spcPts val="0"/>
               </a:spcBef>
@@ -8260,12 +8461,15 @@
           <a:noFill/>
         </p:spPr>
         <p:txBody>
-          <a:bodyPr wrap="square">
-            <a:spAutoFit/>
+          <a:bodyPr wrap="square" lIns="36576" rIns="36576" tIns="18288" bIns="18288">
+            <a:normAutofit/>
           </a:bodyPr>
           <a:lstStyle/>
           <a:p>
             <a:pPr algn="ctr">
+              <a:lnSpc>
+                <a:spcPts val="1600"/>
+              </a:lnSpc>
               <a:spcBef>
                 <a:spcPts val="0"/>
               </a:spcBef>
@@ -8371,12 +8575,15 @@
           <a:noFill/>
         </p:spPr>
         <p:txBody>
-          <a:bodyPr wrap="square">
-            <a:spAutoFit/>
+          <a:bodyPr wrap="square" lIns="36576" rIns="36576" tIns="18288" bIns="18288">
+            <a:normAutofit/>
           </a:bodyPr>
           <a:lstStyle/>
           <a:p>
             <a:pPr algn="l">
+              <a:lnSpc>
+                <a:spcPts val="1600"/>
+              </a:lnSpc>
               <a:spcBef>
                 <a:spcPts val="0"/>
               </a:spcBef>
@@ -8413,12 +8620,15 @@
           <a:noFill/>
         </p:spPr>
         <p:txBody>
-          <a:bodyPr wrap="square">
-            <a:spAutoFit/>
+          <a:bodyPr wrap="square" lIns="36576" rIns="36576" tIns="18288" bIns="18288">
+            <a:normAutofit/>
           </a:bodyPr>
           <a:lstStyle/>
           <a:p>
             <a:pPr algn="l">
+              <a:lnSpc>
+                <a:spcPts val="4700"/>
+              </a:lnSpc>
               <a:spcBef>
                 <a:spcPts val="0"/>
               </a:spcBef>
@@ -8584,12 +8794,15 @@
           <a:noFill/>
         </p:spPr>
         <p:txBody>
-          <a:bodyPr wrap="square">
-            <a:spAutoFit/>
+          <a:bodyPr wrap="square" lIns="36576" rIns="36576" tIns="18288" bIns="18288">
+            <a:normAutofit/>
           </a:bodyPr>
           <a:lstStyle/>
           <a:p>
             <a:pPr algn="ctr">
+              <a:lnSpc>
+                <a:spcPts val="3000"/>
+              </a:lnSpc>
               <a:spcBef>
                 <a:spcPts val="0"/>
               </a:spcBef>
@@ -8626,12 +8839,15 @@
           <a:noFill/>
         </p:spPr>
         <p:txBody>
-          <a:bodyPr wrap="square">
-            <a:spAutoFit/>
+          <a:bodyPr wrap="square" lIns="36576" rIns="36576" tIns="18288" bIns="18288">
+            <a:normAutofit/>
           </a:bodyPr>
           <a:lstStyle/>
           <a:p>
             <a:pPr algn="ctr">
+              <a:lnSpc>
+                <a:spcPts val="2200"/>
+              </a:lnSpc>
               <a:spcBef>
                 <a:spcPts val="0"/>
               </a:spcBef>
@@ -8668,12 +8884,15 @@
           <a:noFill/>
         </p:spPr>
         <p:txBody>
-          <a:bodyPr wrap="square">
-            <a:spAutoFit/>
+          <a:bodyPr wrap="square" lIns="36576" rIns="36576" tIns="18288" bIns="18288">
+            <a:normAutofit/>
           </a:bodyPr>
           <a:lstStyle/>
           <a:p>
             <a:pPr algn="ctr">
+              <a:lnSpc>
+                <a:spcPts val="1600"/>
+              </a:lnSpc>
               <a:spcBef>
                 <a:spcPts val="0"/>
               </a:spcBef>
@@ -8839,12 +9058,15 @@
           <a:noFill/>
         </p:spPr>
         <p:txBody>
-          <a:bodyPr wrap="square">
-            <a:spAutoFit/>
+          <a:bodyPr wrap="square" lIns="36576" rIns="36576" tIns="18288" bIns="18288">
+            <a:normAutofit/>
           </a:bodyPr>
           <a:lstStyle/>
           <a:p>
             <a:pPr algn="ctr">
+              <a:lnSpc>
+                <a:spcPts val="3000"/>
+              </a:lnSpc>
               <a:spcBef>
                 <a:spcPts val="0"/>
               </a:spcBef>
@@ -8881,12 +9103,15 @@
           <a:noFill/>
         </p:spPr>
         <p:txBody>
-          <a:bodyPr wrap="square">
-            <a:spAutoFit/>
+          <a:bodyPr wrap="square" lIns="36576" rIns="36576" tIns="18288" bIns="18288">
+            <a:normAutofit/>
           </a:bodyPr>
           <a:lstStyle/>
           <a:p>
             <a:pPr algn="ctr">
+              <a:lnSpc>
+                <a:spcPts val="2200"/>
+              </a:lnSpc>
               <a:spcBef>
                 <a:spcPts val="0"/>
               </a:spcBef>
@@ -8923,12 +9148,15 @@
           <a:noFill/>
         </p:spPr>
         <p:txBody>
-          <a:bodyPr wrap="square">
-            <a:spAutoFit/>
+          <a:bodyPr wrap="square" lIns="36576" rIns="36576" tIns="18288" bIns="18288">
+            <a:normAutofit/>
           </a:bodyPr>
           <a:lstStyle/>
           <a:p>
             <a:pPr algn="ctr">
+              <a:lnSpc>
+                <a:spcPts val="1600"/>
+              </a:lnSpc>
               <a:spcBef>
                 <a:spcPts val="0"/>
               </a:spcBef>
@@ -9094,12 +9322,15 @@
           <a:noFill/>
         </p:spPr>
         <p:txBody>
-          <a:bodyPr wrap="square">
-            <a:spAutoFit/>
+          <a:bodyPr wrap="square" lIns="36576" rIns="36576" tIns="18288" bIns="18288">
+            <a:normAutofit/>
           </a:bodyPr>
           <a:lstStyle/>
           <a:p>
             <a:pPr algn="ctr">
+              <a:lnSpc>
+                <a:spcPts val="3000"/>
+              </a:lnSpc>
               <a:spcBef>
                 <a:spcPts val="0"/>
               </a:spcBef>
@@ -9136,12 +9367,15 @@
           <a:noFill/>
         </p:spPr>
         <p:txBody>
-          <a:bodyPr wrap="square">
-            <a:spAutoFit/>
+          <a:bodyPr wrap="square" lIns="36576" rIns="36576" tIns="18288" bIns="18288">
+            <a:normAutofit/>
           </a:bodyPr>
           <a:lstStyle/>
           <a:p>
             <a:pPr algn="ctr">
+              <a:lnSpc>
+                <a:spcPts val="2200"/>
+              </a:lnSpc>
               <a:spcBef>
                 <a:spcPts val="0"/>
               </a:spcBef>
@@ -9178,12 +9412,15 @@
           <a:noFill/>
         </p:spPr>
         <p:txBody>
-          <a:bodyPr wrap="square">
-            <a:spAutoFit/>
+          <a:bodyPr wrap="square" lIns="36576" rIns="36576" tIns="18288" bIns="18288">
+            <a:normAutofit/>
           </a:bodyPr>
           <a:lstStyle/>
           <a:p>
             <a:pPr algn="ctr">
+              <a:lnSpc>
+                <a:spcPts val="1600"/>
+              </a:lnSpc>
               <a:spcBef>
                 <a:spcPts val="0"/>
               </a:spcBef>
@@ -9289,12 +9526,15 @@
           <a:noFill/>
         </p:spPr>
         <p:txBody>
-          <a:bodyPr wrap="square">
-            <a:spAutoFit/>
+          <a:bodyPr wrap="square" lIns="36576" rIns="36576" tIns="18288" bIns="18288">
+            <a:normAutofit/>
           </a:bodyPr>
           <a:lstStyle/>
           <a:p>
             <a:pPr algn="l">
+              <a:lnSpc>
+                <a:spcPts val="1600"/>
+              </a:lnSpc>
               <a:spcBef>
                 <a:spcPts val="0"/>
               </a:spcBef>
@@ -9331,12 +9571,15 @@
           <a:noFill/>
         </p:spPr>
         <p:txBody>
-          <a:bodyPr wrap="square">
-            <a:spAutoFit/>
+          <a:bodyPr wrap="square" lIns="36576" rIns="36576" tIns="18288" bIns="18288">
+            <a:normAutofit/>
           </a:bodyPr>
           <a:lstStyle/>
           <a:p>
             <a:pPr algn="l">
+              <a:lnSpc>
+                <a:spcPts val="4500"/>
+              </a:lnSpc>
               <a:spcBef>
                 <a:spcPts val="0"/>
               </a:spcBef>
@@ -9459,12 +9702,15 @@
           <a:noFill/>
         </p:spPr>
         <p:txBody>
-          <a:bodyPr wrap="square">
-            <a:spAutoFit/>
+          <a:bodyPr wrap="square" lIns="36576" rIns="36576" tIns="18288" bIns="18288">
+            <a:normAutofit/>
           </a:bodyPr>
           <a:lstStyle/>
           <a:p>
             <a:pPr algn="l">
+              <a:lnSpc>
+                <a:spcPts val="2500"/>
+              </a:lnSpc>
               <a:spcBef>
                 <a:spcPts val="0"/>
               </a:spcBef>
@@ -9501,14 +9747,20 @@
           <a:noFill/>
         </p:spPr>
         <p:txBody>
-          <a:bodyPr wrap="square">
-            <a:spAutoFit/>
+          <a:bodyPr wrap="square" lIns="36576" rIns="36576" tIns="18288" bIns="18288">
+            <a:normAutofit/>
           </a:bodyPr>
           <a:lstStyle/>
           <a:p>
             <a:pPr algn="l">
-              <a:spcAft>
-                <a:spcPts val="520"/>
+              <a:lnSpc>
+                <a:spcPts val="1600"/>
+              </a:lnSpc>
+              <a:spcBef>
+                <a:spcPts val="0"/>
+              </a:spcBef>
+              <a:spcAft>
+                <a:spcPts val="400"/>
               </a:spcAft>
               <a:defRPr sz="1300" b="0">
                 <a:solidFill>
@@ -9523,8 +9775,14 @@
           </a:p>
           <a:p>
             <a:pPr algn="l">
-              <a:spcAft>
-                <a:spcPts val="520"/>
+              <a:lnSpc>
+                <a:spcPts val="1600"/>
+              </a:lnSpc>
+              <a:spcBef>
+                <a:spcPts val="0"/>
+              </a:spcBef>
+              <a:spcAft>
+                <a:spcPts val="400"/>
               </a:spcAft>
               <a:defRPr sz="1300" b="0">
                 <a:solidFill>
@@ -9539,8 +9797,14 @@
           </a:p>
           <a:p>
             <a:pPr algn="l">
-              <a:spcAft>
-                <a:spcPts val="520"/>
+              <a:lnSpc>
+                <a:spcPts val="1600"/>
+              </a:lnSpc>
+              <a:spcBef>
+                <a:spcPts val="0"/>
+              </a:spcBef>
+              <a:spcAft>
+                <a:spcPts val="400"/>
               </a:spcAft>
               <a:defRPr sz="1300" b="0">
                 <a:solidFill>
@@ -9555,8 +9819,14 @@
           </a:p>
           <a:p>
             <a:pPr algn="l">
-              <a:spcAft>
-                <a:spcPts val="520"/>
+              <a:lnSpc>
+                <a:spcPts val="1600"/>
+              </a:lnSpc>
+              <a:spcBef>
+                <a:spcPts val="0"/>
+              </a:spcBef>
+              <a:spcAft>
+                <a:spcPts val="400"/>
               </a:spcAft>
               <a:defRPr sz="1300" b="0">
                 <a:solidFill>
@@ -9674,12 +9944,15 @@
           <a:noFill/>
         </p:spPr>
         <p:txBody>
-          <a:bodyPr wrap="square">
-            <a:spAutoFit/>
+          <a:bodyPr wrap="square" lIns="36576" rIns="36576" tIns="18288" bIns="18288">
+            <a:normAutofit/>
           </a:bodyPr>
           <a:lstStyle/>
           <a:p>
             <a:pPr algn="l">
+              <a:lnSpc>
+                <a:spcPts val="2500"/>
+              </a:lnSpc>
               <a:spcBef>
                 <a:spcPts val="0"/>
               </a:spcBef>
@@ -9716,14 +9989,20 @@
           <a:noFill/>
         </p:spPr>
         <p:txBody>
-          <a:bodyPr wrap="square">
-            <a:spAutoFit/>
+          <a:bodyPr wrap="square" lIns="36576" rIns="36576" tIns="18288" bIns="18288">
+            <a:normAutofit/>
           </a:bodyPr>
           <a:lstStyle/>
           <a:p>
             <a:pPr algn="l">
-              <a:spcAft>
-                <a:spcPts val="520"/>
+              <a:lnSpc>
+                <a:spcPts val="1600"/>
+              </a:lnSpc>
+              <a:spcBef>
+                <a:spcPts val="0"/>
+              </a:spcBef>
+              <a:spcAft>
+                <a:spcPts val="400"/>
               </a:spcAft>
               <a:defRPr sz="1300" b="0">
                 <a:solidFill>
@@ -9738,8 +10017,14 @@
           </a:p>
           <a:p>
             <a:pPr algn="l">
-              <a:spcAft>
-                <a:spcPts val="520"/>
+              <a:lnSpc>
+                <a:spcPts val="1600"/>
+              </a:lnSpc>
+              <a:spcBef>
+                <a:spcPts val="0"/>
+              </a:spcBef>
+              <a:spcAft>
+                <a:spcPts val="400"/>
               </a:spcAft>
               <a:defRPr sz="1300" b="0">
                 <a:solidFill>
@@ -9754,8 +10039,14 @@
           </a:p>
           <a:p>
             <a:pPr algn="l">
-              <a:spcAft>
-                <a:spcPts val="520"/>
+              <a:lnSpc>
+                <a:spcPts val="1600"/>
+              </a:lnSpc>
+              <a:spcBef>
+                <a:spcPts val="0"/>
+              </a:spcBef>
+              <a:spcAft>
+                <a:spcPts val="400"/>
               </a:spcAft>
               <a:defRPr sz="1300" b="0">
                 <a:solidFill>
@@ -9770,8 +10061,14 @@
           </a:p>
           <a:p>
             <a:pPr algn="l">
-              <a:spcAft>
-                <a:spcPts val="520"/>
+              <a:lnSpc>
+                <a:spcPts val="1600"/>
+              </a:lnSpc>
+              <a:spcBef>
+                <a:spcPts val="0"/>
+              </a:spcBef>
+              <a:spcAft>
+                <a:spcPts val="400"/>
               </a:spcAft>
               <a:defRPr sz="1300" b="0">
                 <a:solidFill>
@@ -9889,12 +10186,15 @@
           <a:noFill/>
         </p:spPr>
         <p:txBody>
-          <a:bodyPr wrap="square">
-            <a:spAutoFit/>
+          <a:bodyPr wrap="square" lIns="36576" rIns="36576" tIns="18288" bIns="18288">
+            <a:normAutofit/>
           </a:bodyPr>
           <a:lstStyle/>
           <a:p>
             <a:pPr algn="l">
+              <a:lnSpc>
+                <a:spcPts val="2500"/>
+              </a:lnSpc>
               <a:spcBef>
                 <a:spcPts val="0"/>
               </a:spcBef>
@@ -9931,14 +10231,20 @@
           <a:noFill/>
         </p:spPr>
         <p:txBody>
-          <a:bodyPr wrap="square">
-            <a:spAutoFit/>
+          <a:bodyPr wrap="square" lIns="36576" rIns="36576" tIns="18288" bIns="18288">
+            <a:normAutofit/>
           </a:bodyPr>
           <a:lstStyle/>
           <a:p>
             <a:pPr algn="l">
-              <a:spcAft>
-                <a:spcPts val="520"/>
+              <a:lnSpc>
+                <a:spcPts val="1600"/>
+              </a:lnSpc>
+              <a:spcBef>
+                <a:spcPts val="0"/>
+              </a:spcBef>
+              <a:spcAft>
+                <a:spcPts val="400"/>
               </a:spcAft>
               <a:defRPr sz="1300" b="0">
                 <a:solidFill>
@@ -9953,8 +10259,14 @@
           </a:p>
           <a:p>
             <a:pPr algn="l">
-              <a:spcAft>
-                <a:spcPts val="520"/>
+              <a:lnSpc>
+                <a:spcPts val="1600"/>
+              </a:lnSpc>
+              <a:spcBef>
+                <a:spcPts val="0"/>
+              </a:spcBef>
+              <a:spcAft>
+                <a:spcPts val="400"/>
               </a:spcAft>
               <a:defRPr sz="1300" b="0">
                 <a:solidFill>
@@ -9969,8 +10281,14 @@
           </a:p>
           <a:p>
             <a:pPr algn="l">
-              <a:spcAft>
-                <a:spcPts val="520"/>
+              <a:lnSpc>
+                <a:spcPts val="1600"/>
+              </a:lnSpc>
+              <a:spcBef>
+                <a:spcPts val="0"/>
+              </a:spcBef>
+              <a:spcAft>
+                <a:spcPts val="400"/>
               </a:spcAft>
               <a:defRPr sz="1300" b="0">
                 <a:solidFill>
@@ -9985,8 +10303,14 @@
           </a:p>
           <a:p>
             <a:pPr algn="l">
-              <a:spcAft>
-                <a:spcPts val="520"/>
+              <a:lnSpc>
+                <a:spcPts val="1600"/>
+              </a:lnSpc>
+              <a:spcBef>
+                <a:spcPts val="0"/>
+              </a:spcBef>
+              <a:spcAft>
+                <a:spcPts val="400"/>
               </a:spcAft>
               <a:defRPr sz="1300" b="0">
                 <a:solidFill>
@@ -10104,12 +10428,15 @@
           <a:noFill/>
         </p:spPr>
         <p:txBody>
-          <a:bodyPr wrap="square">
-            <a:spAutoFit/>
+          <a:bodyPr wrap="square" lIns="36576" rIns="36576" tIns="18288" bIns="18288">
+            <a:normAutofit/>
           </a:bodyPr>
           <a:lstStyle/>
           <a:p>
             <a:pPr algn="l">
+              <a:lnSpc>
+                <a:spcPts val="2500"/>
+              </a:lnSpc>
               <a:spcBef>
                 <a:spcPts val="0"/>
               </a:spcBef>
@@ -10146,14 +10473,20 @@
           <a:noFill/>
         </p:spPr>
         <p:txBody>
-          <a:bodyPr wrap="square">
-            <a:spAutoFit/>
+          <a:bodyPr wrap="square" lIns="36576" rIns="36576" tIns="18288" bIns="18288">
+            <a:normAutofit/>
           </a:bodyPr>
           <a:lstStyle/>
           <a:p>
             <a:pPr algn="l">
-              <a:spcAft>
-                <a:spcPts val="520"/>
+              <a:lnSpc>
+                <a:spcPts val="1600"/>
+              </a:lnSpc>
+              <a:spcBef>
+                <a:spcPts val="0"/>
+              </a:spcBef>
+              <a:spcAft>
+                <a:spcPts val="400"/>
               </a:spcAft>
               <a:defRPr sz="1300" b="0">
                 <a:solidFill>
@@ -10168,8 +10501,14 @@
           </a:p>
           <a:p>
             <a:pPr algn="l">
-              <a:spcAft>
-                <a:spcPts val="520"/>
+              <a:lnSpc>
+                <a:spcPts val="1600"/>
+              </a:lnSpc>
+              <a:spcBef>
+                <a:spcPts val="0"/>
+              </a:spcBef>
+              <a:spcAft>
+                <a:spcPts val="400"/>
               </a:spcAft>
               <a:defRPr sz="1300" b="0">
                 <a:solidFill>
@@ -10184,8 +10523,14 @@
           </a:p>
           <a:p>
             <a:pPr algn="l">
-              <a:spcAft>
-                <a:spcPts val="520"/>
+              <a:lnSpc>
+                <a:spcPts val="1600"/>
+              </a:lnSpc>
+              <a:spcBef>
+                <a:spcPts val="0"/>
+              </a:spcBef>
+              <a:spcAft>
+                <a:spcPts val="400"/>
               </a:spcAft>
               <a:defRPr sz="1300" b="0">
                 <a:solidFill>
@@ -10200,8 +10545,14 @@
           </a:p>
           <a:p>
             <a:pPr algn="l">
-              <a:spcAft>
-                <a:spcPts val="520"/>
+              <a:lnSpc>
+                <a:spcPts val="1600"/>
+              </a:lnSpc>
+              <a:spcBef>
+                <a:spcPts val="0"/>
+              </a:spcBef>
+              <a:spcAft>
+                <a:spcPts val="400"/>
               </a:spcAft>
               <a:defRPr sz="1300" b="0">
                 <a:solidFill>
@@ -10233,12 +10584,15 @@
           <a:noFill/>
         </p:spPr>
         <p:txBody>
-          <a:bodyPr wrap="square">
-            <a:spAutoFit/>
+          <a:bodyPr wrap="square" lIns="36576" rIns="36576" tIns="18288" bIns="18288">
+            <a:normAutofit/>
           </a:bodyPr>
           <a:lstStyle/>
           <a:p>
             <a:pPr algn="ctr">
+              <a:lnSpc>
+                <a:spcPts val="1600"/>
+              </a:lnSpc>
               <a:spcBef>
                 <a:spcPts val="0"/>
               </a:spcBef>
@@ -10344,12 +10698,15 @@
           <a:noFill/>
         </p:spPr>
         <p:txBody>
-          <a:bodyPr wrap="square">
-            <a:spAutoFit/>
+          <a:bodyPr wrap="square" lIns="36576" rIns="36576" tIns="18288" bIns="18288">
+            <a:normAutofit/>
           </a:bodyPr>
           <a:lstStyle/>
           <a:p>
             <a:pPr algn="l">
+              <a:lnSpc>
+                <a:spcPts val="1600"/>
+              </a:lnSpc>
               <a:spcBef>
                 <a:spcPts val="0"/>
               </a:spcBef>
@@ -10386,12 +10743,15 @@
           <a:noFill/>
         </p:spPr>
         <p:txBody>
-          <a:bodyPr wrap="square">
-            <a:spAutoFit/>
+          <a:bodyPr wrap="square" lIns="36576" rIns="36576" tIns="18288" bIns="18288">
+            <a:normAutofit/>
           </a:bodyPr>
           <a:lstStyle/>
           <a:p>
             <a:pPr algn="l">
+              <a:lnSpc>
+                <a:spcPts val="4700"/>
+              </a:lnSpc>
               <a:spcBef>
                 <a:spcPts val="0"/>
               </a:spcBef>
@@ -10471,12 +10831,15 @@
           <a:noFill/>
         </p:spPr>
         <p:txBody>
-          <a:bodyPr wrap="square">
-            <a:spAutoFit/>
+          <a:bodyPr wrap="square" lIns="36576" rIns="36576" tIns="18288" bIns="18288">
+            <a:normAutofit/>
           </a:bodyPr>
           <a:lstStyle/>
           <a:p>
             <a:pPr algn="ctr">
+              <a:lnSpc>
+                <a:spcPts val="6500"/>
+              </a:lnSpc>
               <a:spcBef>
                 <a:spcPts val="0"/>
               </a:spcBef>
@@ -10513,12 +10876,15 @@
           <a:noFill/>
         </p:spPr>
         <p:txBody>
-          <a:bodyPr wrap="square">
-            <a:spAutoFit/>
+          <a:bodyPr wrap="square" lIns="36576" rIns="36576" tIns="18288" bIns="18288">
+            <a:normAutofit/>
           </a:bodyPr>
           <a:lstStyle/>
           <a:p>
             <a:pPr algn="ctr">
+              <a:lnSpc>
+                <a:spcPts val="1800"/>
+              </a:lnSpc>
               <a:spcBef>
                 <a:spcPts val="0"/>
               </a:spcBef>
@@ -10598,12 +10964,15 @@
           <a:noFill/>
         </p:spPr>
         <p:txBody>
-          <a:bodyPr wrap="square">
-            <a:spAutoFit/>
+          <a:bodyPr wrap="square" lIns="36576" rIns="36576" tIns="18288" bIns="18288">
+            <a:normAutofit/>
           </a:bodyPr>
           <a:lstStyle/>
           <a:p>
             <a:pPr algn="ctr">
+              <a:lnSpc>
+                <a:spcPts val="6500"/>
+              </a:lnSpc>
               <a:spcBef>
                 <a:spcPts val="0"/>
               </a:spcBef>
@@ -10640,12 +11009,15 @@
           <a:noFill/>
         </p:spPr>
         <p:txBody>
-          <a:bodyPr wrap="square">
-            <a:spAutoFit/>
+          <a:bodyPr wrap="square" lIns="36576" rIns="36576" tIns="18288" bIns="18288">
+            <a:normAutofit/>
           </a:bodyPr>
           <a:lstStyle/>
           <a:p>
             <a:pPr algn="ctr">
+              <a:lnSpc>
+                <a:spcPts val="1800"/>
+              </a:lnSpc>
               <a:spcBef>
                 <a:spcPts val="0"/>
               </a:spcBef>
@@ -10725,12 +11097,15 @@
           <a:noFill/>
         </p:spPr>
         <p:txBody>
-          <a:bodyPr wrap="square">
-            <a:spAutoFit/>
+          <a:bodyPr wrap="square" lIns="36576" rIns="36576" tIns="18288" bIns="18288">
+            <a:normAutofit/>
           </a:bodyPr>
           <a:lstStyle/>
           <a:p>
             <a:pPr algn="ctr">
+              <a:lnSpc>
+                <a:spcPts val="6500"/>
+              </a:lnSpc>
               <a:spcBef>
                 <a:spcPts val="0"/>
               </a:spcBef>
@@ -10767,12 +11142,15 @@
           <a:noFill/>
         </p:spPr>
         <p:txBody>
-          <a:bodyPr wrap="square">
-            <a:spAutoFit/>
+          <a:bodyPr wrap="square" lIns="36576" rIns="36576" tIns="18288" bIns="18288">
+            <a:normAutofit/>
           </a:bodyPr>
           <a:lstStyle/>
           <a:p>
             <a:pPr algn="ctr">
+              <a:lnSpc>
+                <a:spcPts val="1800"/>
+              </a:lnSpc>
               <a:spcBef>
                 <a:spcPts val="0"/>
               </a:spcBef>
@@ -10852,12 +11230,15 @@
           <a:noFill/>
         </p:spPr>
         <p:txBody>
-          <a:bodyPr wrap="square">
-            <a:spAutoFit/>
+          <a:bodyPr wrap="square" lIns="36576" rIns="36576" tIns="18288" bIns="18288">
+            <a:normAutofit/>
           </a:bodyPr>
           <a:lstStyle/>
           <a:p>
             <a:pPr algn="ctr">
+              <a:lnSpc>
+                <a:spcPts val="6500"/>
+              </a:lnSpc>
               <a:spcBef>
                 <a:spcPts val="0"/>
               </a:spcBef>
@@ -10894,12 +11275,15 @@
           <a:noFill/>
         </p:spPr>
         <p:txBody>
-          <a:bodyPr wrap="square">
-            <a:spAutoFit/>
+          <a:bodyPr wrap="square" lIns="36576" rIns="36576" tIns="18288" bIns="18288">
+            <a:normAutofit/>
           </a:bodyPr>
           <a:lstStyle/>
           <a:p>
             <a:pPr algn="ctr">
+              <a:lnSpc>
+                <a:spcPts val="1800"/>
+              </a:lnSpc>
               <a:spcBef>
                 <a:spcPts val="0"/>
               </a:spcBef>
@@ -10979,12 +11363,15 @@
           <a:noFill/>
         </p:spPr>
         <p:txBody>
-          <a:bodyPr wrap="square">
-            <a:spAutoFit/>
+          <a:bodyPr wrap="square" lIns="36576" rIns="36576" tIns="18288" bIns="18288">
+            <a:normAutofit/>
           </a:bodyPr>
           <a:lstStyle/>
           <a:p>
             <a:pPr algn="ctr">
+              <a:lnSpc>
+                <a:spcPts val="6500"/>
+              </a:lnSpc>
               <a:spcBef>
                 <a:spcPts val="0"/>
               </a:spcBef>
@@ -11021,12 +11408,15 @@
           <a:noFill/>
         </p:spPr>
         <p:txBody>
-          <a:bodyPr wrap="square">
-            <a:spAutoFit/>
+          <a:bodyPr wrap="square" lIns="36576" rIns="36576" tIns="18288" bIns="18288">
+            <a:normAutofit/>
           </a:bodyPr>
           <a:lstStyle/>
           <a:p>
             <a:pPr algn="ctr">
+              <a:lnSpc>
+                <a:spcPts val="1800"/>
+              </a:lnSpc>
               <a:spcBef>
                 <a:spcPts val="0"/>
               </a:spcBef>
@@ -11106,12 +11496,15 @@
           <a:noFill/>
         </p:spPr>
         <p:txBody>
-          <a:bodyPr wrap="square">
-            <a:spAutoFit/>
+          <a:bodyPr wrap="square" lIns="36576" rIns="36576" tIns="18288" bIns="18288">
+            <a:normAutofit/>
           </a:bodyPr>
           <a:lstStyle/>
           <a:p>
             <a:pPr algn="ctr">
+              <a:lnSpc>
+                <a:spcPts val="6500"/>
+              </a:lnSpc>
               <a:spcBef>
                 <a:spcPts val="0"/>
               </a:spcBef>
@@ -11148,12 +11541,15 @@
           <a:noFill/>
         </p:spPr>
         <p:txBody>
-          <a:bodyPr wrap="square">
-            <a:spAutoFit/>
+          <a:bodyPr wrap="square" lIns="36576" rIns="36576" tIns="18288" bIns="18288">
+            <a:normAutofit/>
           </a:bodyPr>
           <a:lstStyle/>
           <a:p>
             <a:pPr algn="ctr">
+              <a:lnSpc>
+                <a:spcPts val="1800"/>
+              </a:lnSpc>
               <a:spcBef>
                 <a:spcPts val="0"/>
               </a:spcBef>
@@ -11259,12 +11655,15 @@
           <a:noFill/>
         </p:spPr>
         <p:txBody>
-          <a:bodyPr wrap="square">
-            <a:spAutoFit/>
+          <a:bodyPr wrap="square" lIns="36576" rIns="36576" tIns="18288" bIns="18288">
+            <a:normAutofit/>
           </a:bodyPr>
           <a:lstStyle/>
           <a:p>
             <a:pPr algn="l">
+              <a:lnSpc>
+                <a:spcPts val="1600"/>
+              </a:lnSpc>
               <a:spcBef>
                 <a:spcPts val="0"/>
               </a:spcBef>
@@ -11301,12 +11700,15 @@
           <a:noFill/>
         </p:spPr>
         <p:txBody>
-          <a:bodyPr wrap="square">
-            <a:spAutoFit/>
+          <a:bodyPr wrap="square" lIns="36576" rIns="36576" tIns="18288" bIns="18288">
+            <a:normAutofit/>
           </a:bodyPr>
           <a:lstStyle/>
           <a:p>
             <a:pPr algn="l">
+              <a:lnSpc>
+                <a:spcPts val="4700"/>
+              </a:lnSpc>
               <a:spcBef>
                 <a:spcPts val="0"/>
               </a:spcBef>
@@ -11386,12 +11788,15 @@
           <a:noFill/>
         </p:spPr>
         <p:txBody>
-          <a:bodyPr wrap="square">
-            <a:spAutoFit/>
+          <a:bodyPr wrap="square" lIns="36576" rIns="36576" tIns="18288" bIns="18288">
+            <a:normAutofit/>
           </a:bodyPr>
           <a:lstStyle/>
           <a:p>
             <a:pPr algn="l">
+              <a:lnSpc>
+                <a:spcPts val="2000"/>
+              </a:lnSpc>
               <a:spcBef>
                 <a:spcPts val="0"/>
               </a:spcBef>
@@ -11428,12 +11833,15 @@
           <a:noFill/>
         </p:spPr>
         <p:txBody>
-          <a:bodyPr wrap="square">
-            <a:spAutoFit/>
+          <a:bodyPr wrap="square" lIns="36576" rIns="36576" tIns="18288" bIns="18288">
+            <a:normAutofit/>
           </a:bodyPr>
           <a:lstStyle/>
           <a:p>
             <a:pPr algn="l">
+              <a:lnSpc>
+                <a:spcPts val="1700"/>
+              </a:lnSpc>
               <a:spcBef>
                 <a:spcPts val="0"/>
               </a:spcBef>
@@ -11513,12 +11921,15 @@
           <a:noFill/>
         </p:spPr>
         <p:txBody>
-          <a:bodyPr wrap="square">
-            <a:spAutoFit/>
+          <a:bodyPr wrap="square" lIns="36576" rIns="36576" tIns="18288" bIns="18288">
+            <a:normAutofit/>
           </a:bodyPr>
           <a:lstStyle/>
           <a:p>
             <a:pPr algn="l">
+              <a:lnSpc>
+                <a:spcPts val="2000"/>
+              </a:lnSpc>
               <a:spcBef>
                 <a:spcPts val="0"/>
               </a:spcBef>
@@ -11555,12 +11966,15 @@
           <a:noFill/>
         </p:spPr>
         <p:txBody>
-          <a:bodyPr wrap="square">
-            <a:spAutoFit/>
+          <a:bodyPr wrap="square" lIns="36576" rIns="36576" tIns="18288" bIns="18288">
+            <a:normAutofit/>
           </a:bodyPr>
           <a:lstStyle/>
           <a:p>
             <a:pPr algn="l">
+              <a:lnSpc>
+                <a:spcPts val="1700"/>
+              </a:lnSpc>
               <a:spcBef>
                 <a:spcPts val="0"/>
               </a:spcBef>
@@ -11640,12 +12054,15 @@
           <a:noFill/>
         </p:spPr>
         <p:txBody>
-          <a:bodyPr wrap="square">
-            <a:spAutoFit/>
+          <a:bodyPr wrap="square" lIns="36576" rIns="36576" tIns="18288" bIns="18288">
+            <a:normAutofit/>
           </a:bodyPr>
           <a:lstStyle/>
           <a:p>
             <a:pPr algn="l">
+              <a:lnSpc>
+                <a:spcPts val="2000"/>
+              </a:lnSpc>
               <a:spcBef>
                 <a:spcPts val="0"/>
               </a:spcBef>
@@ -11682,12 +12099,15 @@
           <a:noFill/>
         </p:spPr>
         <p:txBody>
-          <a:bodyPr wrap="square">
-            <a:spAutoFit/>
+          <a:bodyPr wrap="square" lIns="36576" rIns="36576" tIns="18288" bIns="18288">
+            <a:normAutofit/>
           </a:bodyPr>
           <a:lstStyle/>
           <a:p>
             <a:pPr algn="l">
+              <a:lnSpc>
+                <a:spcPts val="1700"/>
+              </a:lnSpc>
               <a:spcBef>
                 <a:spcPts val="0"/>
               </a:spcBef>
@@ -11767,12 +12187,15 @@
           <a:noFill/>
         </p:spPr>
         <p:txBody>
-          <a:bodyPr wrap="square">
-            <a:spAutoFit/>
+          <a:bodyPr wrap="square" lIns="36576" rIns="36576" tIns="18288" bIns="18288">
+            <a:normAutofit/>
           </a:bodyPr>
           <a:lstStyle/>
           <a:p>
             <a:pPr algn="l">
+              <a:lnSpc>
+                <a:spcPts val="2000"/>
+              </a:lnSpc>
               <a:spcBef>
                 <a:spcPts val="0"/>
               </a:spcBef>
@@ -11809,12 +12232,15 @@
           <a:noFill/>
         </p:spPr>
         <p:txBody>
-          <a:bodyPr wrap="square">
-            <a:spAutoFit/>
+          <a:bodyPr wrap="square" lIns="36576" rIns="36576" tIns="18288" bIns="18288">
+            <a:normAutofit/>
           </a:bodyPr>
           <a:lstStyle/>
           <a:p>
             <a:pPr algn="l">
+              <a:lnSpc>
+                <a:spcPts val="1700"/>
+              </a:lnSpc>
               <a:spcBef>
                 <a:spcPts val="0"/>
               </a:spcBef>
@@ -11894,12 +12320,15 @@
           <a:noFill/>
         </p:spPr>
         <p:txBody>
-          <a:bodyPr wrap="square">
-            <a:spAutoFit/>
+          <a:bodyPr wrap="square" lIns="36576" rIns="36576" tIns="18288" bIns="18288">
+            <a:normAutofit/>
           </a:bodyPr>
           <a:lstStyle/>
           <a:p>
             <a:pPr algn="l">
+              <a:lnSpc>
+                <a:spcPts val="2000"/>
+              </a:lnSpc>
               <a:spcBef>
                 <a:spcPts val="0"/>
               </a:spcBef>
@@ -11936,12 +12365,15 @@
           <a:noFill/>
         </p:spPr>
         <p:txBody>
-          <a:bodyPr wrap="square">
-            <a:spAutoFit/>
+          <a:bodyPr wrap="square" lIns="36576" rIns="36576" tIns="18288" bIns="18288">
+            <a:normAutofit/>
           </a:bodyPr>
           <a:lstStyle/>
           <a:p>
             <a:pPr algn="l">
+              <a:lnSpc>
+                <a:spcPts val="1700"/>
+              </a:lnSpc>
               <a:spcBef>
                 <a:spcPts val="0"/>
               </a:spcBef>
@@ -12047,12 +12479,15 @@
           <a:noFill/>
         </p:spPr>
         <p:txBody>
-          <a:bodyPr wrap="square">
-            <a:spAutoFit/>
+          <a:bodyPr wrap="square" lIns="36576" rIns="36576" tIns="18288" bIns="18288">
+            <a:normAutofit/>
           </a:bodyPr>
           <a:lstStyle/>
           <a:p>
             <a:pPr algn="l">
+              <a:lnSpc>
+                <a:spcPts val="1600"/>
+              </a:lnSpc>
               <a:spcBef>
                 <a:spcPts val="0"/>
               </a:spcBef>
@@ -12089,12 +12524,15 @@
           <a:noFill/>
         </p:spPr>
         <p:txBody>
-          <a:bodyPr wrap="square">
-            <a:spAutoFit/>
+          <a:bodyPr wrap="square" lIns="36576" rIns="36576" tIns="18288" bIns="18288">
+            <a:normAutofit/>
           </a:bodyPr>
           <a:lstStyle/>
           <a:p>
             <a:pPr algn="l">
+              <a:lnSpc>
+                <a:spcPts val="4500"/>
+              </a:lnSpc>
               <a:spcBef>
                 <a:spcPts val="0"/>
               </a:spcBef>
@@ -12217,12 +12655,15 @@
           <a:noFill/>
         </p:spPr>
         <p:txBody>
-          <a:bodyPr wrap="square">
-            <a:spAutoFit/>
+          <a:bodyPr wrap="square" lIns="36576" rIns="36576" tIns="18288" bIns="18288">
+            <a:normAutofit/>
           </a:bodyPr>
           <a:lstStyle/>
           <a:p>
             <a:pPr algn="ctr">
+              <a:lnSpc>
+                <a:spcPts val="3200"/>
+              </a:lnSpc>
               <a:spcBef>
                 <a:spcPts val="0"/>
               </a:spcBef>
@@ -12259,12 +12700,15 @@
           <a:noFill/>
         </p:spPr>
         <p:txBody>
-          <a:bodyPr wrap="square">
-            <a:spAutoFit/>
+          <a:bodyPr wrap="square" lIns="36576" rIns="36576" tIns="18288" bIns="18288">
+            <a:normAutofit/>
           </a:bodyPr>
           <a:lstStyle/>
           <a:p>
             <a:pPr algn="ctr">
+              <a:lnSpc>
+                <a:spcPts val="2100"/>
+              </a:lnSpc>
               <a:spcBef>
                 <a:spcPts val="0"/>
               </a:spcBef>
@@ -12301,14 +12745,20 @@
           <a:noFill/>
         </p:spPr>
         <p:txBody>
-          <a:bodyPr wrap="square">
-            <a:spAutoFit/>
+          <a:bodyPr wrap="square" lIns="36576" rIns="36576" tIns="18288" bIns="18288">
+            <a:normAutofit/>
           </a:bodyPr>
           <a:lstStyle/>
           <a:p>
             <a:pPr algn="ctr">
-              <a:spcAft>
-                <a:spcPts val="520"/>
+              <a:lnSpc>
+                <a:spcPts val="1600"/>
+              </a:lnSpc>
+              <a:spcBef>
+                <a:spcPts val="0"/>
+              </a:spcBef>
+              <a:spcAft>
+                <a:spcPts val="400"/>
               </a:spcAft>
               <a:defRPr sz="1300" b="0">
                 <a:solidFill>
@@ -12323,8 +12773,14 @@
           </a:p>
           <a:p>
             <a:pPr algn="ctr">
-              <a:spcAft>
-                <a:spcPts val="520"/>
+              <a:lnSpc>
+                <a:spcPts val="1600"/>
+              </a:lnSpc>
+              <a:spcBef>
+                <a:spcPts val="0"/>
+              </a:spcBef>
+              <a:spcAft>
+                <a:spcPts val="400"/>
               </a:spcAft>
               <a:defRPr sz="1300" b="0">
                 <a:solidFill>
@@ -12356,12 +12812,15 @@
           <a:noFill/>
         </p:spPr>
         <p:txBody>
-          <a:bodyPr wrap="square">
-            <a:spAutoFit/>
+          <a:bodyPr wrap="square" lIns="36576" rIns="36576" tIns="18288" bIns="18288">
+            <a:normAutofit/>
           </a:bodyPr>
           <a:lstStyle/>
           <a:p>
             <a:pPr algn="ctr">
+              <a:lnSpc>
+                <a:spcPts val="2200"/>
+              </a:lnSpc>
               <a:spcBef>
                 <a:spcPts val="0"/>
               </a:spcBef>
@@ -12484,12 +12943,15 @@
           <a:noFill/>
         </p:spPr>
         <p:txBody>
-          <a:bodyPr wrap="square">
-            <a:spAutoFit/>
+          <a:bodyPr wrap="square" lIns="36576" rIns="36576" tIns="18288" bIns="18288">
+            <a:normAutofit/>
           </a:bodyPr>
           <a:lstStyle/>
           <a:p>
             <a:pPr algn="ctr">
+              <a:lnSpc>
+                <a:spcPts val="3200"/>
+              </a:lnSpc>
               <a:spcBef>
                 <a:spcPts val="0"/>
               </a:spcBef>
@@ -12526,12 +12988,15 @@
           <a:noFill/>
         </p:spPr>
         <p:txBody>
-          <a:bodyPr wrap="square">
-            <a:spAutoFit/>
+          <a:bodyPr wrap="square" lIns="36576" rIns="36576" tIns="18288" bIns="18288">
+            <a:normAutofit/>
           </a:bodyPr>
           <a:lstStyle/>
           <a:p>
             <a:pPr algn="ctr">
+              <a:lnSpc>
+                <a:spcPts val="2100"/>
+              </a:lnSpc>
               <a:spcBef>
                 <a:spcPts val="0"/>
               </a:spcBef>
@@ -12568,14 +13033,20 @@
           <a:noFill/>
         </p:spPr>
         <p:txBody>
-          <a:bodyPr wrap="square">
-            <a:spAutoFit/>
+          <a:bodyPr wrap="square" lIns="36576" rIns="36576" tIns="18288" bIns="18288">
+            <a:normAutofit/>
           </a:bodyPr>
           <a:lstStyle/>
           <a:p>
             <a:pPr algn="ctr">
-              <a:spcAft>
-                <a:spcPts val="520"/>
+              <a:lnSpc>
+                <a:spcPts val="1600"/>
+              </a:lnSpc>
+              <a:spcBef>
+                <a:spcPts val="0"/>
+              </a:spcBef>
+              <a:spcAft>
+                <a:spcPts val="400"/>
               </a:spcAft>
               <a:defRPr sz="1300" b="0">
                 <a:solidFill>
@@ -12590,8 +13061,14 @@
           </a:p>
           <a:p>
             <a:pPr algn="ctr">
-              <a:spcAft>
-                <a:spcPts val="520"/>
+              <a:lnSpc>
+                <a:spcPts val="1600"/>
+              </a:lnSpc>
+              <a:spcBef>
+                <a:spcPts val="0"/>
+              </a:spcBef>
+              <a:spcAft>
+                <a:spcPts val="400"/>
               </a:spcAft>
               <a:defRPr sz="1300" b="0">
                 <a:solidFill>
@@ -12623,12 +13100,15 @@
           <a:noFill/>
         </p:spPr>
         <p:txBody>
-          <a:bodyPr wrap="square">
-            <a:spAutoFit/>
+          <a:bodyPr wrap="square" lIns="36576" rIns="36576" tIns="18288" bIns="18288">
+            <a:normAutofit/>
           </a:bodyPr>
           <a:lstStyle/>
           <a:p>
             <a:pPr algn="ctr">
+              <a:lnSpc>
+                <a:spcPts val="2200"/>
+              </a:lnSpc>
               <a:spcBef>
                 <a:spcPts val="0"/>
               </a:spcBef>
@@ -12751,12 +13231,15 @@
           <a:noFill/>
         </p:spPr>
         <p:txBody>
-          <a:bodyPr wrap="square">
-            <a:spAutoFit/>
+          <a:bodyPr wrap="square" lIns="36576" rIns="36576" tIns="18288" bIns="18288">
+            <a:normAutofit/>
           </a:bodyPr>
           <a:lstStyle/>
           <a:p>
             <a:pPr algn="ctr">
+              <a:lnSpc>
+                <a:spcPts val="3200"/>
+              </a:lnSpc>
               <a:spcBef>
                 <a:spcPts val="0"/>
               </a:spcBef>
@@ -12793,12 +13276,15 @@
           <a:noFill/>
         </p:spPr>
         <p:txBody>
-          <a:bodyPr wrap="square">
-            <a:spAutoFit/>
+          <a:bodyPr wrap="square" lIns="36576" rIns="36576" tIns="18288" bIns="18288">
+            <a:normAutofit/>
           </a:bodyPr>
           <a:lstStyle/>
           <a:p>
             <a:pPr algn="ctr">
+              <a:lnSpc>
+                <a:spcPts val="2100"/>
+              </a:lnSpc>
               <a:spcBef>
                 <a:spcPts val="0"/>
               </a:spcBef>
@@ -12835,14 +13321,20 @@
           <a:noFill/>
         </p:spPr>
         <p:txBody>
-          <a:bodyPr wrap="square">
-            <a:spAutoFit/>
+          <a:bodyPr wrap="square" lIns="36576" rIns="36576" tIns="18288" bIns="18288">
+            <a:normAutofit/>
           </a:bodyPr>
           <a:lstStyle/>
           <a:p>
             <a:pPr algn="ctr">
-              <a:spcAft>
-                <a:spcPts val="520"/>
+              <a:lnSpc>
+                <a:spcPts val="1600"/>
+              </a:lnSpc>
+              <a:spcBef>
+                <a:spcPts val="0"/>
+              </a:spcBef>
+              <a:spcAft>
+                <a:spcPts val="400"/>
               </a:spcAft>
               <a:defRPr sz="1300" b="0">
                 <a:solidFill>
@@ -12857,8 +13349,14 @@
           </a:p>
           <a:p>
             <a:pPr algn="ctr">
-              <a:spcAft>
-                <a:spcPts val="520"/>
+              <a:lnSpc>
+                <a:spcPts val="1600"/>
+              </a:lnSpc>
+              <a:spcBef>
+                <a:spcPts val="0"/>
+              </a:spcBef>
+              <a:spcAft>
+                <a:spcPts val="400"/>
               </a:spcAft>
               <a:defRPr sz="1300" b="0">
                 <a:solidFill>
@@ -12890,12 +13388,15 @@
           <a:noFill/>
         </p:spPr>
         <p:txBody>
-          <a:bodyPr wrap="square">
-            <a:spAutoFit/>
+          <a:bodyPr wrap="square" lIns="36576" rIns="36576" tIns="18288" bIns="18288">
+            <a:normAutofit/>
           </a:bodyPr>
           <a:lstStyle/>
           <a:p>
             <a:pPr algn="ctr">
+              <a:lnSpc>
+                <a:spcPts val="2200"/>
+              </a:lnSpc>
               <a:spcBef>
                 <a:spcPts val="0"/>
               </a:spcBef>
@@ -13018,12 +13519,15 @@
           <a:noFill/>
         </p:spPr>
         <p:txBody>
-          <a:bodyPr wrap="square">
-            <a:spAutoFit/>
+          <a:bodyPr wrap="square" lIns="36576" rIns="36576" tIns="18288" bIns="18288">
+            <a:normAutofit/>
           </a:bodyPr>
           <a:lstStyle/>
           <a:p>
             <a:pPr algn="ctr">
+              <a:lnSpc>
+                <a:spcPts val="3200"/>
+              </a:lnSpc>
               <a:spcBef>
                 <a:spcPts val="0"/>
               </a:spcBef>
@@ -13060,12 +13564,15 @@
           <a:noFill/>
         </p:spPr>
         <p:txBody>
-          <a:bodyPr wrap="square">
-            <a:spAutoFit/>
+          <a:bodyPr wrap="square" lIns="36576" rIns="36576" tIns="18288" bIns="18288">
+            <a:normAutofit/>
           </a:bodyPr>
           <a:lstStyle/>
           <a:p>
             <a:pPr algn="ctr">
+              <a:lnSpc>
+                <a:spcPts val="2100"/>
+              </a:lnSpc>
               <a:spcBef>
                 <a:spcPts val="0"/>
               </a:spcBef>
@@ -13102,14 +13609,20 @@
           <a:noFill/>
         </p:spPr>
         <p:txBody>
-          <a:bodyPr wrap="square">
-            <a:spAutoFit/>
+          <a:bodyPr wrap="square" lIns="36576" rIns="36576" tIns="18288" bIns="18288">
+            <a:normAutofit/>
           </a:bodyPr>
           <a:lstStyle/>
           <a:p>
             <a:pPr algn="ctr">
-              <a:spcAft>
-                <a:spcPts val="520"/>
+              <a:lnSpc>
+                <a:spcPts val="1600"/>
+              </a:lnSpc>
+              <a:spcBef>
+                <a:spcPts val="0"/>
+              </a:spcBef>
+              <a:spcAft>
+                <a:spcPts val="400"/>
               </a:spcAft>
               <a:defRPr sz="1300" b="0">
                 <a:solidFill>
@@ -13124,8 +13637,14 @@
           </a:p>
           <a:p>
             <a:pPr algn="ctr">
-              <a:spcAft>
-                <a:spcPts val="520"/>
+              <a:lnSpc>
+                <a:spcPts val="1600"/>
+              </a:lnSpc>
+              <a:spcBef>
+                <a:spcPts val="0"/>
+              </a:spcBef>
+              <a:spcAft>
+                <a:spcPts val="400"/>
               </a:spcAft>
               <a:defRPr sz="1300" b="0">
                 <a:solidFill>
@@ -13157,12 +13676,15 @@
           <a:noFill/>
         </p:spPr>
         <p:txBody>
-          <a:bodyPr wrap="square">
-            <a:spAutoFit/>
+          <a:bodyPr wrap="square" lIns="36576" rIns="36576" tIns="18288" bIns="18288">
+            <a:normAutofit/>
           </a:bodyPr>
           <a:lstStyle/>
           <a:p>
             <a:pPr algn="ctr">
+              <a:lnSpc>
+                <a:spcPts val="2200"/>
+              </a:lnSpc>
               <a:spcBef>
                 <a:spcPts val="0"/>
               </a:spcBef>
@@ -13285,12 +13807,15 @@
           <a:noFill/>
         </p:spPr>
         <p:txBody>
-          <a:bodyPr wrap="square">
-            <a:spAutoFit/>
+          <a:bodyPr wrap="square" lIns="36576" rIns="36576" tIns="18288" bIns="18288">
+            <a:normAutofit/>
           </a:bodyPr>
           <a:lstStyle/>
           <a:p>
             <a:pPr algn="ctr">
+              <a:lnSpc>
+                <a:spcPts val="3200"/>
+              </a:lnSpc>
               <a:spcBef>
                 <a:spcPts val="0"/>
               </a:spcBef>
@@ -13327,12 +13852,15 @@
           <a:noFill/>
         </p:spPr>
         <p:txBody>
-          <a:bodyPr wrap="square">
-            <a:spAutoFit/>
+          <a:bodyPr wrap="square" lIns="36576" rIns="36576" tIns="18288" bIns="18288">
+            <a:normAutofit/>
           </a:bodyPr>
           <a:lstStyle/>
           <a:p>
             <a:pPr algn="ctr">
+              <a:lnSpc>
+                <a:spcPts val="2100"/>
+              </a:lnSpc>
               <a:spcBef>
                 <a:spcPts val="0"/>
               </a:spcBef>
@@ -13369,14 +13897,20 @@
           <a:noFill/>
         </p:spPr>
         <p:txBody>
-          <a:bodyPr wrap="square">
-            <a:spAutoFit/>
+          <a:bodyPr wrap="square" lIns="36576" rIns="36576" tIns="18288" bIns="18288">
+            <a:normAutofit/>
           </a:bodyPr>
           <a:lstStyle/>
           <a:p>
             <a:pPr algn="ctr">
-              <a:spcAft>
-                <a:spcPts val="520"/>
+              <a:lnSpc>
+                <a:spcPts val="1600"/>
+              </a:lnSpc>
+              <a:spcBef>
+                <a:spcPts val="0"/>
+              </a:spcBef>
+              <a:spcAft>
+                <a:spcPts val="400"/>
               </a:spcAft>
               <a:defRPr sz="1300" b="0">
                 <a:solidFill>
@@ -13391,8 +13925,14 @@
           </a:p>
           <a:p>
             <a:pPr algn="ctr">
-              <a:spcAft>
-                <a:spcPts val="520"/>
+              <a:lnSpc>
+                <a:spcPts val="1600"/>
+              </a:lnSpc>
+              <a:spcBef>
+                <a:spcPts val="0"/>
+              </a:spcBef>
+              <a:spcAft>
+                <a:spcPts val="400"/>
               </a:spcAft>
               <a:defRPr sz="1300" b="0">
                 <a:solidFill>
@@ -13424,12 +13964,15 @@
           <a:noFill/>
         </p:spPr>
         <p:txBody>
-          <a:bodyPr wrap="square">
-            <a:spAutoFit/>
+          <a:bodyPr wrap="square" lIns="36576" rIns="36576" tIns="18288" bIns="18288">
+            <a:normAutofit/>
           </a:bodyPr>
           <a:lstStyle/>
           <a:p>
             <a:pPr algn="ctr">
+              <a:lnSpc>
+                <a:spcPts val="1700"/>
+              </a:lnSpc>
               <a:spcBef>
                 <a:spcPts val="0"/>
               </a:spcBef>

--- a/MakeItSo_Pitch_Deck.pptx
+++ b/MakeItSo_Pitch_Deck.pptx
@@ -3302,7 +3302,7 @@
           <a:p>
             <a:pPr algn="ctr">
               <a:lnSpc>
-                <a:spcPts val="4500"/>
+                <a:spcPct val="100000"/>
               </a:lnSpc>
               <a:spcBef>
                 <a:spcPts val="0"/>
@@ -3347,7 +3347,7 @@
           <a:p>
             <a:pPr algn="ctr">
               <a:lnSpc>
-                <a:spcPts val="7500"/>
+                <a:spcPct val="100000"/>
               </a:lnSpc>
               <a:spcBef>
                 <a:spcPts val="0"/>
@@ -3392,7 +3392,7 @@
           <a:p>
             <a:pPr algn="ctr">
               <a:lnSpc>
-                <a:spcPts val="2700"/>
+                <a:spcPct val="100000"/>
               </a:lnSpc>
               <a:spcBef>
                 <a:spcPts val="0"/>
@@ -3437,7 +3437,7 @@
           <a:p>
             <a:pPr algn="ctr">
               <a:lnSpc>
-                <a:spcPts val="1700"/>
+                <a:spcPct val="100000"/>
               </a:lnSpc>
               <a:spcBef>
                 <a:spcPts val="0"/>
@@ -3551,7 +3551,7 @@
           <a:p>
             <a:pPr algn="l">
               <a:lnSpc>
-                <a:spcPts val="1600"/>
+                <a:spcPct val="100000"/>
               </a:lnSpc>
               <a:spcBef>
                 <a:spcPts val="0"/>
@@ -3580,8 +3580,8 @@
         </p:nvSpPr>
         <p:spPr>
           <a:xfrm>
-            <a:off x="731520" y="1005840"/>
-            <a:ext cx="10058400" cy="640080"/>
+            <a:off x="731520" y="914400"/>
+            <a:ext cx="10515600" cy="1097280"/>
           </a:xfrm>
           <a:prstGeom prst="rect">
             <a:avLst/>
@@ -3596,15 +3596,15 @@
           <a:p>
             <a:pPr algn="l">
               <a:lnSpc>
-                <a:spcPts val="4700"/>
-              </a:lnSpc>
-              <a:spcBef>
-                <a:spcPts val="0"/>
-              </a:spcBef>
-              <a:spcAft>
-                <a:spcPts val="0"/>
-              </a:spcAft>
-              <a:defRPr sz="3800" b="1">
+                <a:spcPct val="100000"/>
+              </a:lnSpc>
+              <a:spcBef>
+                <a:spcPts val="0"/>
+              </a:spcBef>
+              <a:spcAft>
+                <a:spcPts val="0"/>
+              </a:spcAft>
+              <a:defRPr sz="3400" b="1">
                 <a:solidFill>
                   <a:srgbClr val="1E2A38"/>
                 </a:solidFill>
@@ -3770,7 +3770,7 @@
           <a:p>
             <a:pPr algn="ctr">
               <a:lnSpc>
-                <a:spcPts val="1600"/>
+                <a:spcPct val="100000"/>
               </a:lnSpc>
               <a:spcBef>
                 <a:spcPts val="0"/>
@@ -3815,7 +3815,7 @@
           <a:p>
             <a:pPr algn="l">
               <a:lnSpc>
-                <a:spcPts val="2300"/>
+                <a:spcPct val="100000"/>
               </a:lnSpc>
               <a:spcBef>
                 <a:spcPts val="0"/>
@@ -3860,7 +3860,7 @@
           <a:p>
             <a:pPr algn="l">
               <a:lnSpc>
-                <a:spcPts val="1700"/>
+                <a:spcPct val="100000"/>
               </a:lnSpc>
               <a:spcBef>
                 <a:spcPts val="0"/>
@@ -4034,7 +4034,7 @@
           <a:p>
             <a:pPr algn="ctr">
               <a:lnSpc>
-                <a:spcPts val="1600"/>
+                <a:spcPct val="100000"/>
               </a:lnSpc>
               <a:spcBef>
                 <a:spcPts val="0"/>
@@ -4079,7 +4079,7 @@
           <a:p>
             <a:pPr algn="l">
               <a:lnSpc>
-                <a:spcPts val="2300"/>
+                <a:spcPct val="100000"/>
               </a:lnSpc>
               <a:spcBef>
                 <a:spcPts val="0"/>
@@ -4124,7 +4124,7 @@
           <a:p>
             <a:pPr algn="l">
               <a:lnSpc>
-                <a:spcPts val="1700"/>
+                <a:spcPct val="100000"/>
               </a:lnSpc>
               <a:spcBef>
                 <a:spcPts val="0"/>
@@ -4298,7 +4298,7 @@
           <a:p>
             <a:pPr algn="ctr">
               <a:lnSpc>
-                <a:spcPts val="1600"/>
+                <a:spcPct val="100000"/>
               </a:lnSpc>
               <a:spcBef>
                 <a:spcPts val="0"/>
@@ -4343,7 +4343,7 @@
           <a:p>
             <a:pPr algn="l">
               <a:lnSpc>
-                <a:spcPts val="2300"/>
+                <a:spcPct val="100000"/>
               </a:lnSpc>
               <a:spcBef>
                 <a:spcPts val="0"/>
@@ -4388,7 +4388,7 @@
           <a:p>
             <a:pPr algn="l">
               <a:lnSpc>
-                <a:spcPts val="1700"/>
+                <a:spcPct val="100000"/>
               </a:lnSpc>
               <a:spcBef>
                 <a:spcPts val="0"/>
@@ -4631,7 +4631,7 @@
           <a:p>
             <a:pPr algn="ctr">
               <a:lnSpc>
-                <a:spcPts val="4500"/>
+                <a:spcPct val="100000"/>
               </a:lnSpc>
               <a:spcBef>
                 <a:spcPts val="0"/>
@@ -4660,8 +4660,8 @@
         </p:nvSpPr>
         <p:spPr>
           <a:xfrm>
-            <a:off x="1371600" y="2926080"/>
-            <a:ext cx="9418320" cy="914400"/>
+            <a:off x="1371600" y="2743200"/>
+            <a:ext cx="9418320" cy="1280160"/>
           </a:xfrm>
           <a:prstGeom prst="rect">
             <a:avLst/>
@@ -4676,15 +4676,15 @@
           <a:p>
             <a:pPr algn="ctr">
               <a:lnSpc>
-                <a:spcPts val="5500"/>
-              </a:lnSpc>
-              <a:spcBef>
-                <a:spcPts val="0"/>
-              </a:spcBef>
-              <a:spcAft>
-                <a:spcPts val="0"/>
-              </a:spcAft>
-              <a:defRPr sz="4400" b="1">
+                <a:spcPct val="100000"/>
+              </a:lnSpc>
+              <a:spcBef>
+                <a:spcPts val="0"/>
+              </a:spcBef>
+              <a:spcAft>
+                <a:spcPts val="0"/>
+              </a:spcAft>
+              <a:defRPr sz="3800" b="1">
                 <a:solidFill>
                   <a:srgbClr val="FFFFFF"/>
                 </a:solidFill>
@@ -4721,7 +4721,7 @@
           <a:p>
             <a:pPr algn="ctr">
               <a:lnSpc>
-                <a:spcPts val="2200"/>
+                <a:spcPct val="100000"/>
               </a:lnSpc>
               <a:spcBef>
                 <a:spcPts val="0"/>
@@ -4809,7 +4809,7 @@
           <a:p>
             <a:pPr algn="ctr">
               <a:lnSpc>
-                <a:spcPts val="2200"/>
+                <a:spcPct val="100000"/>
               </a:lnSpc>
               <a:spcBef>
                 <a:spcPts val="0"/>
@@ -4854,7 +4854,7 @@
           <a:p>
             <a:pPr algn="ctr">
               <a:lnSpc>
-                <a:spcPts val="1700"/>
+                <a:spcPct val="100000"/>
               </a:lnSpc>
               <a:spcBef>
                 <a:spcPts val="0"/>
@@ -4968,7 +4968,7 @@
           <a:p>
             <a:pPr algn="l">
               <a:lnSpc>
-                <a:spcPts val="1600"/>
+                <a:spcPct val="100000"/>
               </a:lnSpc>
               <a:spcBef>
                 <a:spcPts val="0"/>
@@ -4997,8 +4997,8 @@
         </p:nvSpPr>
         <p:spPr>
           <a:xfrm>
-            <a:off x="731520" y="1005840"/>
-            <a:ext cx="10058400" cy="640080"/>
+            <a:off x="731520" y="914400"/>
+            <a:ext cx="10515600" cy="1097280"/>
           </a:xfrm>
           <a:prstGeom prst="rect">
             <a:avLst/>
@@ -5013,15 +5013,15 @@
           <a:p>
             <a:pPr algn="l">
               <a:lnSpc>
-                <a:spcPts val="4700"/>
-              </a:lnSpc>
-              <a:spcBef>
-                <a:spcPts val="0"/>
-              </a:spcBef>
-              <a:spcAft>
-                <a:spcPts val="0"/>
-              </a:spcAft>
-              <a:defRPr sz="3800" b="1">
+                <a:spcPct val="100000"/>
+              </a:lnSpc>
+              <a:spcBef>
+                <a:spcPts val="0"/>
+              </a:spcBef>
+              <a:spcAft>
+                <a:spcPts val="0"/>
+              </a:spcAft>
+              <a:defRPr sz="3400" b="1">
                 <a:solidFill>
                   <a:srgbClr val="1E2A38"/>
                 </a:solidFill>
@@ -5043,7 +5043,7 @@
         <p:spPr>
           <a:xfrm>
             <a:off x="731520" y="2194560"/>
-            <a:ext cx="2606040" cy="3657600"/>
+            <a:ext cx="2606040" cy="3931920"/>
           </a:xfrm>
           <a:prstGeom prst="roundRect">
             <a:avLst/>
@@ -5144,7 +5144,7 @@
           <a:p>
             <a:pPr algn="ctr">
               <a:lnSpc>
-                <a:spcPts val="2700"/>
+                <a:spcPct val="100000"/>
               </a:lnSpc>
               <a:spcBef>
                 <a:spcPts val="0"/>
@@ -5174,7 +5174,7 @@
         <p:spPr>
           <a:xfrm>
             <a:off x="960120" y="3337560"/>
-            <a:ext cx="2148840" cy="457200"/>
+            <a:ext cx="2148840" cy="640080"/>
           </a:xfrm>
           <a:prstGeom prst="rect">
             <a:avLst/>
@@ -5189,15 +5189,15 @@
           <a:p>
             <a:pPr algn="ctr">
               <a:lnSpc>
-                <a:spcPts val="2100"/>
-              </a:lnSpc>
-              <a:spcBef>
-                <a:spcPts val="0"/>
-              </a:spcBef>
-              <a:spcAft>
-                <a:spcPts val="0"/>
-              </a:spcAft>
-              <a:defRPr sz="1700" b="1">
+                <a:spcPct val="100000"/>
+              </a:lnSpc>
+              <a:spcBef>
+                <a:spcPts val="0"/>
+              </a:spcBef>
+              <a:spcAft>
+                <a:spcPts val="0"/>
+              </a:spcAft>
+              <a:defRPr sz="1600" b="1">
                 <a:solidFill>
                   <a:srgbClr val="1E2A38"/>
                 </a:solidFill>
@@ -5218,8 +5218,8 @@
         </p:nvSpPr>
         <p:spPr>
           <a:xfrm>
-            <a:off x="960120" y="3931920"/>
-            <a:ext cx="2148840" cy="1645920"/>
+            <a:off x="960120" y="4069079"/>
+            <a:ext cx="2148840" cy="1737360"/>
           </a:xfrm>
           <a:prstGeom prst="rect">
             <a:avLst/>
@@ -5234,7 +5234,7 @@
           <a:p>
             <a:pPr algn="ctr">
               <a:lnSpc>
-                <a:spcPts val="1600"/>
+                <a:spcPct val="100000"/>
               </a:lnSpc>
               <a:spcBef>
                 <a:spcPts val="0"/>
@@ -5264,7 +5264,7 @@
         <p:spPr>
           <a:xfrm>
             <a:off x="3566160" y="2194560"/>
-            <a:ext cx="2606040" cy="3657600"/>
+            <a:ext cx="2606040" cy="3931920"/>
           </a:xfrm>
           <a:prstGeom prst="roundRect">
             <a:avLst/>
@@ -5365,7 +5365,7 @@
           <a:p>
             <a:pPr algn="ctr">
               <a:lnSpc>
-                <a:spcPts val="2700"/>
+                <a:spcPct val="100000"/>
               </a:lnSpc>
               <a:spcBef>
                 <a:spcPts val="0"/>
@@ -5395,7 +5395,7 @@
         <p:spPr>
           <a:xfrm>
             <a:off x="3794760" y="3337560"/>
-            <a:ext cx="2148840" cy="457200"/>
+            <a:ext cx="2148840" cy="640080"/>
           </a:xfrm>
           <a:prstGeom prst="rect">
             <a:avLst/>
@@ -5410,15 +5410,15 @@
           <a:p>
             <a:pPr algn="ctr">
               <a:lnSpc>
-                <a:spcPts val="2100"/>
-              </a:lnSpc>
-              <a:spcBef>
-                <a:spcPts val="0"/>
-              </a:spcBef>
-              <a:spcAft>
-                <a:spcPts val="0"/>
-              </a:spcAft>
-              <a:defRPr sz="1700" b="1">
+                <a:spcPct val="100000"/>
+              </a:lnSpc>
+              <a:spcBef>
+                <a:spcPts val="0"/>
+              </a:spcBef>
+              <a:spcAft>
+                <a:spcPts val="0"/>
+              </a:spcAft>
+              <a:defRPr sz="1600" b="1">
                 <a:solidFill>
                   <a:srgbClr val="1E2A38"/>
                 </a:solidFill>
@@ -5439,8 +5439,8 @@
         </p:nvSpPr>
         <p:spPr>
           <a:xfrm>
-            <a:off x="3794760" y="3931920"/>
-            <a:ext cx="2148840" cy="1645920"/>
+            <a:off x="3794760" y="4069079"/>
+            <a:ext cx="2148840" cy="1737360"/>
           </a:xfrm>
           <a:prstGeom prst="rect">
             <a:avLst/>
@@ -5455,7 +5455,7 @@
           <a:p>
             <a:pPr algn="ctr">
               <a:lnSpc>
-                <a:spcPts val="1600"/>
+                <a:spcPct val="100000"/>
               </a:lnSpc>
               <a:spcBef>
                 <a:spcPts val="0"/>
@@ -5485,7 +5485,7 @@
         <p:spPr>
           <a:xfrm>
             <a:off x="6400800" y="2194560"/>
-            <a:ext cx="2606040" cy="3657600"/>
+            <a:ext cx="2606040" cy="3931920"/>
           </a:xfrm>
           <a:prstGeom prst="roundRect">
             <a:avLst/>
@@ -5586,7 +5586,7 @@
           <a:p>
             <a:pPr algn="ctr">
               <a:lnSpc>
-                <a:spcPts val="2700"/>
+                <a:spcPct val="100000"/>
               </a:lnSpc>
               <a:spcBef>
                 <a:spcPts val="0"/>
@@ -5616,7 +5616,7 @@
         <p:spPr>
           <a:xfrm>
             <a:off x="6629400" y="3337560"/>
-            <a:ext cx="2148840" cy="457200"/>
+            <a:ext cx="2148840" cy="640080"/>
           </a:xfrm>
           <a:prstGeom prst="rect">
             <a:avLst/>
@@ -5631,15 +5631,15 @@
           <a:p>
             <a:pPr algn="ctr">
               <a:lnSpc>
-                <a:spcPts val="2100"/>
-              </a:lnSpc>
-              <a:spcBef>
-                <a:spcPts val="0"/>
-              </a:spcBef>
-              <a:spcAft>
-                <a:spcPts val="0"/>
-              </a:spcAft>
-              <a:defRPr sz="1700" b="1">
+                <a:spcPct val="100000"/>
+              </a:lnSpc>
+              <a:spcBef>
+                <a:spcPts val="0"/>
+              </a:spcBef>
+              <a:spcAft>
+                <a:spcPts val="0"/>
+              </a:spcAft>
+              <a:defRPr sz="1600" b="1">
                 <a:solidFill>
                   <a:srgbClr val="1E2A38"/>
                 </a:solidFill>
@@ -5660,8 +5660,8 @@
         </p:nvSpPr>
         <p:spPr>
           <a:xfrm>
-            <a:off x="6629400" y="3931920"/>
-            <a:ext cx="2148840" cy="1645920"/>
+            <a:off x="6629400" y="4069079"/>
+            <a:ext cx="2148840" cy="1737360"/>
           </a:xfrm>
           <a:prstGeom prst="rect">
             <a:avLst/>
@@ -5676,7 +5676,7 @@
           <a:p>
             <a:pPr algn="ctr">
               <a:lnSpc>
-                <a:spcPts val="1600"/>
+                <a:spcPct val="100000"/>
               </a:lnSpc>
               <a:spcBef>
                 <a:spcPts val="0"/>
@@ -5706,7 +5706,7 @@
         <p:spPr>
           <a:xfrm>
             <a:off x="9235440" y="2194560"/>
-            <a:ext cx="2606040" cy="3657600"/>
+            <a:ext cx="2606040" cy="3931920"/>
           </a:xfrm>
           <a:prstGeom prst="roundRect">
             <a:avLst/>
@@ -5807,7 +5807,7 @@
           <a:p>
             <a:pPr algn="ctr">
               <a:lnSpc>
-                <a:spcPts val="2700"/>
+                <a:spcPct val="100000"/>
               </a:lnSpc>
               <a:spcBef>
                 <a:spcPts val="0"/>
@@ -5837,7 +5837,7 @@
         <p:spPr>
           <a:xfrm>
             <a:off x="9464040" y="3337560"/>
-            <a:ext cx="2148840" cy="457200"/>
+            <a:ext cx="2148840" cy="640080"/>
           </a:xfrm>
           <a:prstGeom prst="rect">
             <a:avLst/>
@@ -5852,15 +5852,15 @@
           <a:p>
             <a:pPr algn="ctr">
               <a:lnSpc>
-                <a:spcPts val="2100"/>
-              </a:lnSpc>
-              <a:spcBef>
-                <a:spcPts val="0"/>
-              </a:spcBef>
-              <a:spcAft>
-                <a:spcPts val="0"/>
-              </a:spcAft>
-              <a:defRPr sz="1700" b="1">
+                <a:spcPct val="100000"/>
+              </a:lnSpc>
+              <a:spcBef>
+                <a:spcPts val="0"/>
+              </a:spcBef>
+              <a:spcAft>
+                <a:spcPts val="0"/>
+              </a:spcAft>
+              <a:defRPr sz="1600" b="1">
                 <a:solidFill>
                   <a:srgbClr val="1E2A38"/>
                 </a:solidFill>
@@ -5881,8 +5881,8 @@
         </p:nvSpPr>
         <p:spPr>
           <a:xfrm>
-            <a:off x="9464040" y="3931920"/>
-            <a:ext cx="2148840" cy="1645920"/>
+            <a:off x="9464040" y="4069079"/>
+            <a:ext cx="2148840" cy="1737360"/>
           </a:xfrm>
           <a:prstGeom prst="rect">
             <a:avLst/>
@@ -5897,7 +5897,7 @@
           <a:p>
             <a:pPr algn="ctr">
               <a:lnSpc>
-                <a:spcPts val="1600"/>
+                <a:spcPct val="100000"/>
               </a:lnSpc>
               <a:spcBef>
                 <a:spcPts val="0"/>
@@ -6011,7 +6011,7 @@
           <a:p>
             <a:pPr algn="l">
               <a:lnSpc>
-                <a:spcPts val="1600"/>
+                <a:spcPct val="100000"/>
               </a:lnSpc>
               <a:spcBef>
                 <a:spcPts val="0"/>
@@ -6040,8 +6040,8 @@
         </p:nvSpPr>
         <p:spPr>
           <a:xfrm>
-            <a:off x="731520" y="1005840"/>
-            <a:ext cx="10058400" cy="640080"/>
+            <a:off x="731520" y="914400"/>
+            <a:ext cx="10515600" cy="1097280"/>
           </a:xfrm>
           <a:prstGeom prst="rect">
             <a:avLst/>
@@ -6056,15 +6056,15 @@
           <a:p>
             <a:pPr algn="l">
               <a:lnSpc>
-                <a:spcPts val="4700"/>
-              </a:lnSpc>
-              <a:spcBef>
-                <a:spcPts val="0"/>
-              </a:spcBef>
-              <a:spcAft>
-                <a:spcPts val="0"/>
-              </a:spcAft>
-              <a:defRPr sz="3800" b="1">
+                <a:spcPct val="100000"/>
+              </a:lnSpc>
+              <a:spcBef>
+                <a:spcPts val="0"/>
+              </a:spcBef>
+              <a:spcAft>
+                <a:spcPts val="0"/>
+              </a:spcAft>
+              <a:defRPr sz="3400" b="1">
                 <a:solidFill>
                   <a:srgbClr val="1E2A38"/>
                 </a:solidFill>
@@ -6101,7 +6101,7 @@
           <a:p>
             <a:pPr algn="l">
               <a:lnSpc>
-                <a:spcPts val="2000"/>
+                <a:spcPct val="100000"/>
               </a:lnSpc>
               <a:spcBef>
                 <a:spcPts val="0"/>
@@ -6232,7 +6232,7 @@
           <a:p>
             <a:pPr algn="l">
               <a:lnSpc>
-                <a:spcPts val="3000"/>
+                <a:spcPct val="100000"/>
               </a:lnSpc>
               <a:spcBef>
                 <a:spcPts val="0"/>
@@ -6277,7 +6277,7 @@
           <a:p>
             <a:pPr algn="l">
               <a:lnSpc>
-                <a:spcPts val="1700"/>
+                <a:spcPct val="100000"/>
               </a:lnSpc>
               <a:spcBef>
                 <a:spcPts val="0"/>
@@ -6365,7 +6365,7 @@
           <a:p>
             <a:pPr algn="ctr">
               <a:lnSpc>
-                <a:spcPts val="1300"/>
+                <a:spcPct val="100000"/>
               </a:lnSpc>
               <a:spcBef>
                 <a:spcPts val="0"/>
@@ -6410,7 +6410,7 @@
           <a:p>
             <a:pPr algn="l">
               <a:lnSpc>
-                <a:spcPts val="1700"/>
+                <a:spcPct val="100000"/>
               </a:lnSpc>
               <a:spcBef>
                 <a:spcPts val="0"/>
@@ -6498,7 +6498,7 @@
           <a:p>
             <a:pPr algn="ctr">
               <a:lnSpc>
-                <a:spcPts val="1300"/>
+                <a:spcPct val="100000"/>
               </a:lnSpc>
               <a:spcBef>
                 <a:spcPts val="0"/>
@@ -6543,7 +6543,7 @@
           <a:p>
             <a:pPr algn="l">
               <a:lnSpc>
-                <a:spcPts val="1700"/>
+                <a:spcPct val="100000"/>
               </a:lnSpc>
               <a:spcBef>
                 <a:spcPts val="0"/>
@@ -6631,7 +6631,7 @@
           <a:p>
             <a:pPr algn="ctr">
               <a:lnSpc>
-                <a:spcPts val="1300"/>
+                <a:spcPct val="100000"/>
               </a:lnSpc>
               <a:spcBef>
                 <a:spcPts val="0"/>
@@ -6676,7 +6676,7 @@
           <a:p>
             <a:pPr algn="l">
               <a:lnSpc>
-                <a:spcPts val="1700"/>
+                <a:spcPct val="100000"/>
               </a:lnSpc>
               <a:spcBef>
                 <a:spcPts val="0"/>
@@ -6764,7 +6764,7 @@
           <a:p>
             <a:pPr algn="ctr">
               <a:lnSpc>
-                <a:spcPts val="1300"/>
+                <a:spcPct val="100000"/>
               </a:lnSpc>
               <a:spcBef>
                 <a:spcPts val="0"/>
@@ -6809,7 +6809,7 @@
           <a:p>
             <a:pPr algn="l">
               <a:lnSpc>
-                <a:spcPts val="1700"/>
+                <a:spcPct val="100000"/>
               </a:lnSpc>
               <a:spcBef>
                 <a:spcPts val="0"/>
@@ -6940,7 +6940,7 @@
           <a:p>
             <a:pPr algn="l">
               <a:lnSpc>
-                <a:spcPts val="3000"/>
+                <a:spcPct val="100000"/>
               </a:lnSpc>
               <a:spcBef>
                 <a:spcPts val="0"/>
@@ -6985,7 +6985,7 @@
           <a:p>
             <a:pPr algn="l">
               <a:lnSpc>
-                <a:spcPts val="1700"/>
+                <a:spcPct val="100000"/>
               </a:lnSpc>
               <a:spcBef>
                 <a:spcPts val="0"/>
@@ -7073,7 +7073,7 @@
           <a:p>
             <a:pPr algn="ctr">
               <a:lnSpc>
-                <a:spcPts val="1300"/>
+                <a:spcPct val="100000"/>
               </a:lnSpc>
               <a:spcBef>
                 <a:spcPts val="0"/>
@@ -7118,7 +7118,7 @@
           <a:p>
             <a:pPr algn="l">
               <a:lnSpc>
-                <a:spcPts val="1700"/>
+                <a:spcPct val="100000"/>
               </a:lnSpc>
               <a:spcBef>
                 <a:spcPts val="0"/>
@@ -7206,7 +7206,7 @@
           <a:p>
             <a:pPr algn="ctr">
               <a:lnSpc>
-                <a:spcPts val="1300"/>
+                <a:spcPct val="100000"/>
               </a:lnSpc>
               <a:spcBef>
                 <a:spcPts val="0"/>
@@ -7251,7 +7251,7 @@
           <a:p>
             <a:pPr algn="l">
               <a:lnSpc>
-                <a:spcPts val="1700"/>
+                <a:spcPct val="100000"/>
               </a:lnSpc>
               <a:spcBef>
                 <a:spcPts val="0"/>
@@ -7339,7 +7339,7 @@
           <a:p>
             <a:pPr algn="ctr">
               <a:lnSpc>
-                <a:spcPts val="1300"/>
+                <a:spcPct val="100000"/>
               </a:lnSpc>
               <a:spcBef>
                 <a:spcPts val="0"/>
@@ -7384,7 +7384,7 @@
           <a:p>
             <a:pPr algn="l">
               <a:lnSpc>
-                <a:spcPts val="1700"/>
+                <a:spcPct val="100000"/>
               </a:lnSpc>
               <a:spcBef>
                 <a:spcPts val="0"/>
@@ -7472,7 +7472,7 @@
           <a:p>
             <a:pPr algn="ctr">
               <a:lnSpc>
-                <a:spcPts val="1300"/>
+                <a:spcPct val="100000"/>
               </a:lnSpc>
               <a:spcBef>
                 <a:spcPts val="0"/>
@@ -7517,7 +7517,7 @@
           <a:p>
             <a:pPr algn="l">
               <a:lnSpc>
-                <a:spcPts val="1700"/>
+                <a:spcPct val="100000"/>
               </a:lnSpc>
               <a:spcBef>
                 <a:spcPts val="0"/>
@@ -7631,7 +7631,7 @@
           <a:p>
             <a:pPr algn="l">
               <a:lnSpc>
-                <a:spcPts val="1600"/>
+                <a:spcPct val="100000"/>
               </a:lnSpc>
               <a:spcBef>
                 <a:spcPts val="0"/>
@@ -7660,8 +7660,8 @@
         </p:nvSpPr>
         <p:spPr>
           <a:xfrm>
-            <a:off x="731520" y="1005840"/>
-            <a:ext cx="10058400" cy="640080"/>
+            <a:off x="731520" y="914400"/>
+            <a:ext cx="10515600" cy="914400"/>
           </a:xfrm>
           <a:prstGeom prst="rect">
             <a:avLst/>
@@ -7676,15 +7676,15 @@
           <a:p>
             <a:pPr algn="l">
               <a:lnSpc>
-                <a:spcPts val="4700"/>
-              </a:lnSpc>
-              <a:spcBef>
-                <a:spcPts val="0"/>
-              </a:spcBef>
-              <a:spcAft>
-                <a:spcPts val="0"/>
-              </a:spcAft>
-              <a:defRPr sz="3800" b="1">
+                <a:spcPct val="100000"/>
+              </a:lnSpc>
+              <a:spcBef>
+                <a:spcPts val="0"/>
+              </a:spcBef>
+              <a:spcAft>
+                <a:spcPts val="0"/>
+              </a:spcAft>
+              <a:defRPr sz="3400" b="1">
                 <a:solidFill>
                   <a:srgbClr val="1E2A38"/>
                 </a:solidFill>
@@ -7850,7 +7850,7 @@
           <a:p>
             <a:pPr algn="ctr">
               <a:lnSpc>
-                <a:spcPts val="3000"/>
+                <a:spcPct val="100000"/>
               </a:lnSpc>
               <a:spcBef>
                 <a:spcPts val="0"/>
@@ -7895,7 +7895,7 @@
           <a:p>
             <a:pPr algn="ctr">
               <a:lnSpc>
-                <a:spcPts val="2200"/>
+                <a:spcPct val="100000"/>
               </a:lnSpc>
               <a:spcBef>
                 <a:spcPts val="0"/>
@@ -7940,7 +7940,7 @@
           <a:p>
             <a:pPr algn="ctr">
               <a:lnSpc>
-                <a:spcPts val="1600"/>
+                <a:spcPct val="100000"/>
               </a:lnSpc>
               <a:spcBef>
                 <a:spcPts val="0"/>
@@ -8114,7 +8114,7 @@
           <a:p>
             <a:pPr algn="ctr">
               <a:lnSpc>
-                <a:spcPts val="3000"/>
+                <a:spcPct val="100000"/>
               </a:lnSpc>
               <a:spcBef>
                 <a:spcPts val="0"/>
@@ -8159,7 +8159,7 @@
           <a:p>
             <a:pPr algn="ctr">
               <a:lnSpc>
-                <a:spcPts val="2200"/>
+                <a:spcPct val="100000"/>
               </a:lnSpc>
               <a:spcBef>
                 <a:spcPts val="0"/>
@@ -8204,7 +8204,7 @@
           <a:p>
             <a:pPr algn="ctr">
               <a:lnSpc>
-                <a:spcPts val="1600"/>
+                <a:spcPct val="100000"/>
               </a:lnSpc>
               <a:spcBef>
                 <a:spcPts val="0"/>
@@ -8378,7 +8378,7 @@
           <a:p>
             <a:pPr algn="ctr">
               <a:lnSpc>
-                <a:spcPts val="3000"/>
+                <a:spcPct val="100000"/>
               </a:lnSpc>
               <a:spcBef>
                 <a:spcPts val="0"/>
@@ -8423,7 +8423,7 @@
           <a:p>
             <a:pPr algn="ctr">
               <a:lnSpc>
-                <a:spcPts val="2200"/>
+                <a:spcPct val="100000"/>
               </a:lnSpc>
               <a:spcBef>
                 <a:spcPts val="0"/>
@@ -8468,7 +8468,7 @@
           <a:p>
             <a:pPr algn="ctr">
               <a:lnSpc>
-                <a:spcPts val="1600"/>
+                <a:spcPct val="100000"/>
               </a:lnSpc>
               <a:spcBef>
                 <a:spcPts val="0"/>
@@ -8582,7 +8582,7 @@
           <a:p>
             <a:pPr algn="l">
               <a:lnSpc>
-                <a:spcPts val="1600"/>
+                <a:spcPct val="100000"/>
               </a:lnSpc>
               <a:spcBef>
                 <a:spcPts val="0"/>
@@ -8611,8 +8611,8 @@
         </p:nvSpPr>
         <p:spPr>
           <a:xfrm>
-            <a:off x="731520" y="1005840"/>
-            <a:ext cx="10058400" cy="640080"/>
+            <a:off x="731520" y="914400"/>
+            <a:ext cx="10515600" cy="914400"/>
           </a:xfrm>
           <a:prstGeom prst="rect">
             <a:avLst/>
@@ -8627,15 +8627,15 @@
           <a:p>
             <a:pPr algn="l">
               <a:lnSpc>
-                <a:spcPts val="4700"/>
-              </a:lnSpc>
-              <a:spcBef>
-                <a:spcPts val="0"/>
-              </a:spcBef>
-              <a:spcAft>
-                <a:spcPts val="0"/>
-              </a:spcAft>
-              <a:defRPr sz="3800" b="1">
+                <a:spcPct val="100000"/>
+              </a:lnSpc>
+              <a:spcBef>
+                <a:spcPts val="0"/>
+              </a:spcBef>
+              <a:spcAft>
+                <a:spcPts val="0"/>
+              </a:spcAft>
+              <a:defRPr sz="3400" b="1">
                 <a:solidFill>
                   <a:srgbClr val="1E2A38"/>
                 </a:solidFill>
@@ -8801,7 +8801,7 @@
           <a:p>
             <a:pPr algn="ctr">
               <a:lnSpc>
-                <a:spcPts val="3000"/>
+                <a:spcPct val="100000"/>
               </a:lnSpc>
               <a:spcBef>
                 <a:spcPts val="0"/>
@@ -8846,7 +8846,7 @@
           <a:p>
             <a:pPr algn="ctr">
               <a:lnSpc>
-                <a:spcPts val="2200"/>
+                <a:spcPct val="100000"/>
               </a:lnSpc>
               <a:spcBef>
                 <a:spcPts val="0"/>
@@ -8891,7 +8891,7 @@
           <a:p>
             <a:pPr algn="ctr">
               <a:lnSpc>
-                <a:spcPts val="1600"/>
+                <a:spcPct val="100000"/>
               </a:lnSpc>
               <a:spcBef>
                 <a:spcPts val="0"/>
@@ -9065,7 +9065,7 @@
           <a:p>
             <a:pPr algn="ctr">
               <a:lnSpc>
-                <a:spcPts val="3000"/>
+                <a:spcPct val="100000"/>
               </a:lnSpc>
               <a:spcBef>
                 <a:spcPts val="0"/>
@@ -9110,7 +9110,7 @@
           <a:p>
             <a:pPr algn="ctr">
               <a:lnSpc>
-                <a:spcPts val="2200"/>
+                <a:spcPct val="100000"/>
               </a:lnSpc>
               <a:spcBef>
                 <a:spcPts val="0"/>
@@ -9155,7 +9155,7 @@
           <a:p>
             <a:pPr algn="ctr">
               <a:lnSpc>
-                <a:spcPts val="1600"/>
+                <a:spcPct val="100000"/>
               </a:lnSpc>
               <a:spcBef>
                 <a:spcPts val="0"/>
@@ -9329,7 +9329,7 @@
           <a:p>
             <a:pPr algn="ctr">
               <a:lnSpc>
-                <a:spcPts val="3000"/>
+                <a:spcPct val="100000"/>
               </a:lnSpc>
               <a:spcBef>
                 <a:spcPts val="0"/>
@@ -9374,7 +9374,7 @@
           <a:p>
             <a:pPr algn="ctr">
               <a:lnSpc>
-                <a:spcPts val="2200"/>
+                <a:spcPct val="100000"/>
               </a:lnSpc>
               <a:spcBef>
                 <a:spcPts val="0"/>
@@ -9419,7 +9419,7 @@
           <a:p>
             <a:pPr algn="ctr">
               <a:lnSpc>
-                <a:spcPts val="1600"/>
+                <a:spcPct val="100000"/>
               </a:lnSpc>
               <a:spcBef>
                 <a:spcPts val="0"/>
@@ -9533,7 +9533,7 @@
           <a:p>
             <a:pPr algn="l">
               <a:lnSpc>
-                <a:spcPts val="1600"/>
+                <a:spcPct val="100000"/>
               </a:lnSpc>
               <a:spcBef>
                 <a:spcPts val="0"/>
@@ -9562,8 +9562,8 @@
         </p:nvSpPr>
         <p:spPr>
           <a:xfrm>
-            <a:off x="731520" y="914400"/>
-            <a:ext cx="10058400" cy="640080"/>
+            <a:off x="731520" y="822960"/>
+            <a:ext cx="10515600" cy="914400"/>
           </a:xfrm>
           <a:prstGeom prst="rect">
             <a:avLst/>
@@ -9578,15 +9578,15 @@
           <a:p>
             <a:pPr algn="l">
               <a:lnSpc>
-                <a:spcPts val="4500"/>
-              </a:lnSpc>
-              <a:spcBef>
-                <a:spcPts val="0"/>
-              </a:spcBef>
-              <a:spcAft>
-                <a:spcPts val="0"/>
-              </a:spcAft>
-              <a:defRPr sz="3600" b="1">
+                <a:spcPct val="100000"/>
+              </a:lnSpc>
+              <a:spcBef>
+                <a:spcPts val="0"/>
+              </a:spcBef>
+              <a:spcAft>
+                <a:spcPts val="0"/>
+              </a:spcAft>
+              <a:defRPr sz="3200" b="1">
                 <a:solidFill>
                   <a:srgbClr val="FFFFFF"/>
                 </a:solidFill>
@@ -9709,7 +9709,7 @@
           <a:p>
             <a:pPr algn="l">
               <a:lnSpc>
-                <a:spcPts val="2500"/>
+                <a:spcPct val="100000"/>
               </a:lnSpc>
               <a:spcBef>
                 <a:spcPts val="0"/>
@@ -9754,13 +9754,13 @@
           <a:p>
             <a:pPr algn="l">
               <a:lnSpc>
-                <a:spcPts val="1600"/>
-              </a:lnSpc>
-              <a:spcBef>
-                <a:spcPts val="0"/>
-              </a:spcBef>
-              <a:spcAft>
-                <a:spcPts val="400"/>
+                <a:spcPct val="100000"/>
+              </a:lnSpc>
+              <a:spcBef>
+                <a:spcPts val="0"/>
+              </a:spcBef>
+              <a:spcAft>
+                <a:spcPts val="300"/>
               </a:spcAft>
               <a:defRPr sz="1300" b="0">
                 <a:solidFill>
@@ -9776,13 +9776,13 @@
           <a:p>
             <a:pPr algn="l">
               <a:lnSpc>
-                <a:spcPts val="1600"/>
-              </a:lnSpc>
-              <a:spcBef>
-                <a:spcPts val="0"/>
-              </a:spcBef>
-              <a:spcAft>
-                <a:spcPts val="400"/>
+                <a:spcPct val="100000"/>
+              </a:lnSpc>
+              <a:spcBef>
+                <a:spcPts val="0"/>
+              </a:spcBef>
+              <a:spcAft>
+                <a:spcPts val="300"/>
               </a:spcAft>
               <a:defRPr sz="1300" b="0">
                 <a:solidFill>
@@ -9798,13 +9798,13 @@
           <a:p>
             <a:pPr algn="l">
               <a:lnSpc>
-                <a:spcPts val="1600"/>
-              </a:lnSpc>
-              <a:spcBef>
-                <a:spcPts val="0"/>
-              </a:spcBef>
-              <a:spcAft>
-                <a:spcPts val="400"/>
+                <a:spcPct val="100000"/>
+              </a:lnSpc>
+              <a:spcBef>
+                <a:spcPts val="0"/>
+              </a:spcBef>
+              <a:spcAft>
+                <a:spcPts val="300"/>
               </a:spcAft>
               <a:defRPr sz="1300" b="0">
                 <a:solidFill>
@@ -9820,13 +9820,13 @@
           <a:p>
             <a:pPr algn="l">
               <a:lnSpc>
-                <a:spcPts val="1600"/>
-              </a:lnSpc>
-              <a:spcBef>
-                <a:spcPts val="0"/>
-              </a:spcBef>
-              <a:spcAft>
-                <a:spcPts val="400"/>
+                <a:spcPct val="100000"/>
+              </a:lnSpc>
+              <a:spcBef>
+                <a:spcPts val="0"/>
+              </a:spcBef>
+              <a:spcAft>
+                <a:spcPts val="300"/>
               </a:spcAft>
               <a:defRPr sz="1300" b="0">
                 <a:solidFill>
@@ -9951,7 +9951,7 @@
           <a:p>
             <a:pPr algn="l">
               <a:lnSpc>
-                <a:spcPts val="2500"/>
+                <a:spcPct val="100000"/>
               </a:lnSpc>
               <a:spcBef>
                 <a:spcPts val="0"/>
@@ -9996,13 +9996,13 @@
           <a:p>
             <a:pPr algn="l">
               <a:lnSpc>
-                <a:spcPts val="1600"/>
-              </a:lnSpc>
-              <a:spcBef>
-                <a:spcPts val="0"/>
-              </a:spcBef>
-              <a:spcAft>
-                <a:spcPts val="400"/>
+                <a:spcPct val="100000"/>
+              </a:lnSpc>
+              <a:spcBef>
+                <a:spcPts val="0"/>
+              </a:spcBef>
+              <a:spcAft>
+                <a:spcPts val="300"/>
               </a:spcAft>
               <a:defRPr sz="1300" b="0">
                 <a:solidFill>
@@ -10018,13 +10018,13 @@
           <a:p>
             <a:pPr algn="l">
               <a:lnSpc>
-                <a:spcPts val="1600"/>
-              </a:lnSpc>
-              <a:spcBef>
-                <a:spcPts val="0"/>
-              </a:spcBef>
-              <a:spcAft>
-                <a:spcPts val="400"/>
+                <a:spcPct val="100000"/>
+              </a:lnSpc>
+              <a:spcBef>
+                <a:spcPts val="0"/>
+              </a:spcBef>
+              <a:spcAft>
+                <a:spcPts val="300"/>
               </a:spcAft>
               <a:defRPr sz="1300" b="0">
                 <a:solidFill>
@@ -10040,13 +10040,13 @@
           <a:p>
             <a:pPr algn="l">
               <a:lnSpc>
-                <a:spcPts val="1600"/>
-              </a:lnSpc>
-              <a:spcBef>
-                <a:spcPts val="0"/>
-              </a:spcBef>
-              <a:spcAft>
-                <a:spcPts val="400"/>
+                <a:spcPct val="100000"/>
+              </a:lnSpc>
+              <a:spcBef>
+                <a:spcPts val="0"/>
+              </a:spcBef>
+              <a:spcAft>
+                <a:spcPts val="300"/>
               </a:spcAft>
               <a:defRPr sz="1300" b="0">
                 <a:solidFill>
@@ -10062,13 +10062,13 @@
           <a:p>
             <a:pPr algn="l">
               <a:lnSpc>
-                <a:spcPts val="1600"/>
-              </a:lnSpc>
-              <a:spcBef>
-                <a:spcPts val="0"/>
-              </a:spcBef>
-              <a:spcAft>
-                <a:spcPts val="400"/>
+                <a:spcPct val="100000"/>
+              </a:lnSpc>
+              <a:spcBef>
+                <a:spcPts val="0"/>
+              </a:spcBef>
+              <a:spcAft>
+                <a:spcPts val="300"/>
               </a:spcAft>
               <a:defRPr sz="1300" b="0">
                 <a:solidFill>
@@ -10193,7 +10193,7 @@
           <a:p>
             <a:pPr algn="l">
               <a:lnSpc>
-                <a:spcPts val="2500"/>
+                <a:spcPct val="100000"/>
               </a:lnSpc>
               <a:spcBef>
                 <a:spcPts val="0"/>
@@ -10238,13 +10238,13 @@
           <a:p>
             <a:pPr algn="l">
               <a:lnSpc>
-                <a:spcPts val="1600"/>
-              </a:lnSpc>
-              <a:spcBef>
-                <a:spcPts val="0"/>
-              </a:spcBef>
-              <a:spcAft>
-                <a:spcPts val="400"/>
+                <a:spcPct val="100000"/>
+              </a:lnSpc>
+              <a:spcBef>
+                <a:spcPts val="0"/>
+              </a:spcBef>
+              <a:spcAft>
+                <a:spcPts val="300"/>
               </a:spcAft>
               <a:defRPr sz="1300" b="0">
                 <a:solidFill>
@@ -10260,13 +10260,13 @@
           <a:p>
             <a:pPr algn="l">
               <a:lnSpc>
-                <a:spcPts val="1600"/>
-              </a:lnSpc>
-              <a:spcBef>
-                <a:spcPts val="0"/>
-              </a:spcBef>
-              <a:spcAft>
-                <a:spcPts val="400"/>
+                <a:spcPct val="100000"/>
+              </a:lnSpc>
+              <a:spcBef>
+                <a:spcPts val="0"/>
+              </a:spcBef>
+              <a:spcAft>
+                <a:spcPts val="300"/>
               </a:spcAft>
               <a:defRPr sz="1300" b="0">
                 <a:solidFill>
@@ -10282,13 +10282,13 @@
           <a:p>
             <a:pPr algn="l">
               <a:lnSpc>
-                <a:spcPts val="1600"/>
-              </a:lnSpc>
-              <a:spcBef>
-                <a:spcPts val="0"/>
-              </a:spcBef>
-              <a:spcAft>
-                <a:spcPts val="400"/>
+                <a:spcPct val="100000"/>
+              </a:lnSpc>
+              <a:spcBef>
+                <a:spcPts val="0"/>
+              </a:spcBef>
+              <a:spcAft>
+                <a:spcPts val="300"/>
               </a:spcAft>
               <a:defRPr sz="1300" b="0">
                 <a:solidFill>
@@ -10304,13 +10304,13 @@
           <a:p>
             <a:pPr algn="l">
               <a:lnSpc>
-                <a:spcPts val="1600"/>
-              </a:lnSpc>
-              <a:spcBef>
-                <a:spcPts val="0"/>
-              </a:spcBef>
-              <a:spcAft>
-                <a:spcPts val="400"/>
+                <a:spcPct val="100000"/>
+              </a:lnSpc>
+              <a:spcBef>
+                <a:spcPts val="0"/>
+              </a:spcBef>
+              <a:spcAft>
+                <a:spcPts val="300"/>
               </a:spcAft>
               <a:defRPr sz="1300" b="0">
                 <a:solidFill>
@@ -10435,7 +10435,7 @@
           <a:p>
             <a:pPr algn="l">
               <a:lnSpc>
-                <a:spcPts val="2500"/>
+                <a:spcPct val="100000"/>
               </a:lnSpc>
               <a:spcBef>
                 <a:spcPts val="0"/>
@@ -10480,13 +10480,13 @@
           <a:p>
             <a:pPr algn="l">
               <a:lnSpc>
-                <a:spcPts val="1600"/>
-              </a:lnSpc>
-              <a:spcBef>
-                <a:spcPts val="0"/>
-              </a:spcBef>
-              <a:spcAft>
-                <a:spcPts val="400"/>
+                <a:spcPct val="100000"/>
+              </a:lnSpc>
+              <a:spcBef>
+                <a:spcPts val="0"/>
+              </a:spcBef>
+              <a:spcAft>
+                <a:spcPts val="300"/>
               </a:spcAft>
               <a:defRPr sz="1300" b="0">
                 <a:solidFill>
@@ -10502,13 +10502,13 @@
           <a:p>
             <a:pPr algn="l">
               <a:lnSpc>
-                <a:spcPts val="1600"/>
-              </a:lnSpc>
-              <a:spcBef>
-                <a:spcPts val="0"/>
-              </a:spcBef>
-              <a:spcAft>
-                <a:spcPts val="400"/>
+                <a:spcPct val="100000"/>
+              </a:lnSpc>
+              <a:spcBef>
+                <a:spcPts val="0"/>
+              </a:spcBef>
+              <a:spcAft>
+                <a:spcPts val="300"/>
               </a:spcAft>
               <a:defRPr sz="1300" b="0">
                 <a:solidFill>
@@ -10524,13 +10524,13 @@
           <a:p>
             <a:pPr algn="l">
               <a:lnSpc>
-                <a:spcPts val="1600"/>
-              </a:lnSpc>
-              <a:spcBef>
-                <a:spcPts val="0"/>
-              </a:spcBef>
-              <a:spcAft>
-                <a:spcPts val="400"/>
+                <a:spcPct val="100000"/>
+              </a:lnSpc>
+              <a:spcBef>
+                <a:spcPts val="0"/>
+              </a:spcBef>
+              <a:spcAft>
+                <a:spcPts val="300"/>
               </a:spcAft>
               <a:defRPr sz="1300" b="0">
                 <a:solidFill>
@@ -10546,13 +10546,13 @@
           <a:p>
             <a:pPr algn="l">
               <a:lnSpc>
-                <a:spcPts val="1600"/>
-              </a:lnSpc>
-              <a:spcBef>
-                <a:spcPts val="0"/>
-              </a:spcBef>
-              <a:spcAft>
-                <a:spcPts val="400"/>
+                <a:spcPct val="100000"/>
+              </a:lnSpc>
+              <a:spcBef>
+                <a:spcPts val="0"/>
+              </a:spcBef>
+              <a:spcAft>
+                <a:spcPts val="300"/>
               </a:spcAft>
               <a:defRPr sz="1300" b="0">
                 <a:solidFill>
@@ -10591,7 +10591,7 @@
           <a:p>
             <a:pPr algn="ctr">
               <a:lnSpc>
-                <a:spcPts val="1600"/>
+                <a:spcPct val="100000"/>
               </a:lnSpc>
               <a:spcBef>
                 <a:spcPts val="0"/>
@@ -10705,7 +10705,7 @@
           <a:p>
             <a:pPr algn="l">
               <a:lnSpc>
-                <a:spcPts val="1600"/>
+                <a:spcPct val="100000"/>
               </a:lnSpc>
               <a:spcBef>
                 <a:spcPts val="0"/>
@@ -10734,8 +10734,8 @@
         </p:nvSpPr>
         <p:spPr>
           <a:xfrm>
-            <a:off x="731520" y="1005840"/>
-            <a:ext cx="10058400" cy="640080"/>
+            <a:off x="731520" y="914400"/>
+            <a:ext cx="10515600" cy="914400"/>
           </a:xfrm>
           <a:prstGeom prst="rect">
             <a:avLst/>
@@ -10750,15 +10750,15 @@
           <a:p>
             <a:pPr algn="l">
               <a:lnSpc>
-                <a:spcPts val="4700"/>
-              </a:lnSpc>
-              <a:spcBef>
-                <a:spcPts val="0"/>
-              </a:spcBef>
-              <a:spcAft>
-                <a:spcPts val="0"/>
-              </a:spcAft>
-              <a:defRPr sz="3800" b="1">
+                <a:spcPct val="100000"/>
+              </a:lnSpc>
+              <a:spcBef>
+                <a:spcPts val="0"/>
+              </a:spcBef>
+              <a:spcAft>
+                <a:spcPts val="0"/>
+              </a:spcAft>
+              <a:defRPr sz="3400" b="1">
                 <a:solidFill>
                   <a:srgbClr val="1E2A38"/>
                 </a:solidFill>
@@ -10838,7 +10838,7 @@
           <a:p>
             <a:pPr algn="ctr">
               <a:lnSpc>
-                <a:spcPts val="6500"/>
+                <a:spcPct val="100000"/>
               </a:lnSpc>
               <a:spcBef>
                 <a:spcPts val="0"/>
@@ -10867,8 +10867,8 @@
         </p:nvSpPr>
         <p:spPr>
           <a:xfrm>
-            <a:off x="914400" y="3337560"/>
-            <a:ext cx="3108960" cy="457200"/>
+            <a:off x="914400" y="3291840"/>
+            <a:ext cx="3108960" cy="640080"/>
           </a:xfrm>
           <a:prstGeom prst="rect">
             <a:avLst/>
@@ -10883,15 +10883,15 @@
           <a:p>
             <a:pPr algn="ctr">
               <a:lnSpc>
-                <a:spcPts val="1800"/>
-              </a:lnSpc>
-              <a:spcBef>
-                <a:spcPts val="0"/>
-              </a:spcBef>
-              <a:spcAft>
-                <a:spcPts val="0"/>
-              </a:spcAft>
-              <a:defRPr sz="1500" b="0">
+                <a:spcPct val="100000"/>
+              </a:lnSpc>
+              <a:spcBef>
+                <a:spcPts val="0"/>
+              </a:spcBef>
+              <a:spcAft>
+                <a:spcPts val="0"/>
+              </a:spcAft>
+              <a:defRPr sz="1400" b="0">
                 <a:solidFill>
                   <a:srgbClr val="6B7280"/>
                 </a:solidFill>
@@ -10971,7 +10971,7 @@
           <a:p>
             <a:pPr algn="ctr">
               <a:lnSpc>
-                <a:spcPts val="6500"/>
+                <a:spcPct val="100000"/>
               </a:lnSpc>
               <a:spcBef>
                 <a:spcPts val="0"/>
@@ -11000,8 +11000,8 @@
         </p:nvSpPr>
         <p:spPr>
           <a:xfrm>
-            <a:off x="4480560" y="3337560"/>
-            <a:ext cx="3108960" cy="457200"/>
+            <a:off x="4480560" y="3291840"/>
+            <a:ext cx="3108960" cy="640080"/>
           </a:xfrm>
           <a:prstGeom prst="rect">
             <a:avLst/>
@@ -11016,15 +11016,15 @@
           <a:p>
             <a:pPr algn="ctr">
               <a:lnSpc>
-                <a:spcPts val="1800"/>
-              </a:lnSpc>
-              <a:spcBef>
-                <a:spcPts val="0"/>
-              </a:spcBef>
-              <a:spcAft>
-                <a:spcPts val="0"/>
-              </a:spcAft>
-              <a:defRPr sz="1500" b="0">
+                <a:spcPct val="100000"/>
+              </a:lnSpc>
+              <a:spcBef>
+                <a:spcPts val="0"/>
+              </a:spcBef>
+              <a:spcAft>
+                <a:spcPts val="0"/>
+              </a:spcAft>
+              <a:defRPr sz="1400" b="0">
                 <a:solidFill>
                   <a:srgbClr val="6B7280"/>
                 </a:solidFill>
@@ -11104,7 +11104,7 @@
           <a:p>
             <a:pPr algn="ctr">
               <a:lnSpc>
-                <a:spcPts val="6500"/>
+                <a:spcPct val="100000"/>
               </a:lnSpc>
               <a:spcBef>
                 <a:spcPts val="0"/>
@@ -11133,8 +11133,8 @@
         </p:nvSpPr>
         <p:spPr>
           <a:xfrm>
-            <a:off x="8046720" y="3337560"/>
-            <a:ext cx="3108960" cy="457200"/>
+            <a:off x="8046720" y="3291840"/>
+            <a:ext cx="3108960" cy="640080"/>
           </a:xfrm>
           <a:prstGeom prst="rect">
             <a:avLst/>
@@ -11149,15 +11149,15 @@
           <a:p>
             <a:pPr algn="ctr">
               <a:lnSpc>
-                <a:spcPts val="1800"/>
-              </a:lnSpc>
-              <a:spcBef>
-                <a:spcPts val="0"/>
-              </a:spcBef>
-              <a:spcAft>
-                <a:spcPts val="0"/>
-              </a:spcAft>
-              <a:defRPr sz="1500" b="0">
+                <a:spcPct val="100000"/>
+              </a:lnSpc>
+              <a:spcBef>
+                <a:spcPts val="0"/>
+              </a:spcBef>
+              <a:spcAft>
+                <a:spcPts val="0"/>
+              </a:spcAft>
+              <a:defRPr sz="1400" b="0">
                 <a:solidFill>
                   <a:srgbClr val="6B7280"/>
                 </a:solidFill>
@@ -11237,7 +11237,7 @@
           <a:p>
             <a:pPr algn="ctr">
               <a:lnSpc>
-                <a:spcPts val="6500"/>
+                <a:spcPct val="100000"/>
               </a:lnSpc>
               <a:spcBef>
                 <a:spcPts val="0"/>
@@ -11266,8 +11266,8 @@
         </p:nvSpPr>
         <p:spPr>
           <a:xfrm>
-            <a:off x="914400" y="5715000"/>
-            <a:ext cx="3108960" cy="457200"/>
+            <a:off x="914400" y="5669280"/>
+            <a:ext cx="3108960" cy="640080"/>
           </a:xfrm>
           <a:prstGeom prst="rect">
             <a:avLst/>
@@ -11282,15 +11282,15 @@
           <a:p>
             <a:pPr algn="ctr">
               <a:lnSpc>
-                <a:spcPts val="1800"/>
-              </a:lnSpc>
-              <a:spcBef>
-                <a:spcPts val="0"/>
-              </a:spcBef>
-              <a:spcAft>
-                <a:spcPts val="0"/>
-              </a:spcAft>
-              <a:defRPr sz="1500" b="0">
+                <a:spcPct val="100000"/>
+              </a:lnSpc>
+              <a:spcBef>
+                <a:spcPts val="0"/>
+              </a:spcBef>
+              <a:spcAft>
+                <a:spcPts val="0"/>
+              </a:spcAft>
+              <a:defRPr sz="1400" b="0">
                 <a:solidFill>
                   <a:srgbClr val="6B7280"/>
                 </a:solidFill>
@@ -11370,7 +11370,7 @@
           <a:p>
             <a:pPr algn="ctr">
               <a:lnSpc>
-                <a:spcPts val="6500"/>
+                <a:spcPct val="100000"/>
               </a:lnSpc>
               <a:spcBef>
                 <a:spcPts val="0"/>
@@ -11399,8 +11399,8 @@
         </p:nvSpPr>
         <p:spPr>
           <a:xfrm>
-            <a:off x="4480560" y="5715000"/>
-            <a:ext cx="3108960" cy="457200"/>
+            <a:off x="4480560" y="5669280"/>
+            <a:ext cx="3108960" cy="640080"/>
           </a:xfrm>
           <a:prstGeom prst="rect">
             <a:avLst/>
@@ -11415,15 +11415,15 @@
           <a:p>
             <a:pPr algn="ctr">
               <a:lnSpc>
-                <a:spcPts val="1800"/>
-              </a:lnSpc>
-              <a:spcBef>
-                <a:spcPts val="0"/>
-              </a:spcBef>
-              <a:spcAft>
-                <a:spcPts val="0"/>
-              </a:spcAft>
-              <a:defRPr sz="1500" b="0">
+                <a:spcPct val="100000"/>
+              </a:lnSpc>
+              <a:spcBef>
+                <a:spcPts val="0"/>
+              </a:spcBef>
+              <a:spcAft>
+                <a:spcPts val="0"/>
+              </a:spcAft>
+              <a:defRPr sz="1400" b="0">
                 <a:solidFill>
                   <a:srgbClr val="6B7280"/>
                 </a:solidFill>
@@ -11503,7 +11503,7 @@
           <a:p>
             <a:pPr algn="ctr">
               <a:lnSpc>
-                <a:spcPts val="6500"/>
+                <a:spcPct val="100000"/>
               </a:lnSpc>
               <a:spcBef>
                 <a:spcPts val="0"/>
@@ -11532,8 +11532,8 @@
         </p:nvSpPr>
         <p:spPr>
           <a:xfrm>
-            <a:off x="8046720" y="5715000"/>
-            <a:ext cx="3108960" cy="457200"/>
+            <a:off x="8046720" y="5669280"/>
+            <a:ext cx="3108960" cy="640080"/>
           </a:xfrm>
           <a:prstGeom prst="rect">
             <a:avLst/>
@@ -11548,15 +11548,15 @@
           <a:p>
             <a:pPr algn="ctr">
               <a:lnSpc>
-                <a:spcPts val="1800"/>
-              </a:lnSpc>
-              <a:spcBef>
-                <a:spcPts val="0"/>
-              </a:spcBef>
-              <a:spcAft>
-                <a:spcPts val="0"/>
-              </a:spcAft>
-              <a:defRPr sz="1500" b="0">
+                <a:spcPct val="100000"/>
+              </a:lnSpc>
+              <a:spcBef>
+                <a:spcPts val="0"/>
+              </a:spcBef>
+              <a:spcAft>
+                <a:spcPts val="0"/>
+              </a:spcAft>
+              <a:defRPr sz="1400" b="0">
                 <a:solidFill>
                   <a:srgbClr val="6B7280"/>
                 </a:solidFill>
@@ -11662,7 +11662,7 @@
           <a:p>
             <a:pPr algn="l">
               <a:lnSpc>
-                <a:spcPts val="1600"/>
+                <a:spcPct val="100000"/>
               </a:lnSpc>
               <a:spcBef>
                 <a:spcPts val="0"/>
@@ -11691,8 +11691,8 @@
         </p:nvSpPr>
         <p:spPr>
           <a:xfrm>
-            <a:off x="731520" y="1005840"/>
-            <a:ext cx="10058400" cy="640080"/>
+            <a:off x="731520" y="914400"/>
+            <a:ext cx="10515600" cy="914400"/>
           </a:xfrm>
           <a:prstGeom prst="rect">
             <a:avLst/>
@@ -11707,15 +11707,15 @@
           <a:p>
             <a:pPr algn="l">
               <a:lnSpc>
-                <a:spcPts val="4700"/>
-              </a:lnSpc>
-              <a:spcBef>
-                <a:spcPts val="0"/>
-              </a:spcBef>
-              <a:spcAft>
-                <a:spcPts val="0"/>
-              </a:spcAft>
-              <a:defRPr sz="3800" b="1">
+                <a:spcPct val="100000"/>
+              </a:lnSpc>
+              <a:spcBef>
+                <a:spcPts val="0"/>
+              </a:spcBef>
+              <a:spcAft>
+                <a:spcPts val="0"/>
+              </a:spcAft>
+              <a:defRPr sz="3400" b="1">
                 <a:solidFill>
                   <a:srgbClr val="1E2A38"/>
                 </a:solidFill>
@@ -11736,7 +11736,7 @@
         </p:nvSpPr>
         <p:spPr>
           <a:xfrm>
-            <a:off x="914400" y="2121408"/>
+            <a:off x="914400" y="2212848"/>
             <a:ext cx="164592" cy="164592"/>
           </a:xfrm>
           <a:prstGeom prst="ellipse">
@@ -11779,8 +11779,8 @@
         </p:nvSpPr>
         <p:spPr>
           <a:xfrm>
-            <a:off x="1371600" y="2011680"/>
-            <a:ext cx="3657600" cy="365760"/>
+            <a:off x="1371600" y="2103120"/>
+            <a:ext cx="3657600" cy="548640"/>
           </a:xfrm>
           <a:prstGeom prst="rect">
             <a:avLst/>
@@ -11795,15 +11795,15 @@
           <a:p>
             <a:pPr algn="l">
               <a:lnSpc>
-                <a:spcPts val="2000"/>
-              </a:lnSpc>
-              <a:spcBef>
-                <a:spcPts val="0"/>
-              </a:spcBef>
-              <a:spcAft>
-                <a:spcPts val="0"/>
-              </a:spcAft>
-              <a:defRPr sz="1600" b="1">
+                <a:spcPct val="100000"/>
+              </a:lnSpc>
+              <a:spcBef>
+                <a:spcPts val="0"/>
+              </a:spcBef>
+              <a:spcAft>
+                <a:spcPts val="0"/>
+              </a:spcAft>
+              <a:defRPr sz="1400" b="1">
                 <a:solidFill>
                   <a:srgbClr val="1E2A38"/>
                 </a:solidFill>
@@ -11824,8 +11824,8 @@
         </p:nvSpPr>
         <p:spPr>
           <a:xfrm>
-            <a:off x="5029200" y="2011680"/>
-            <a:ext cx="6400800" cy="731520"/>
+            <a:off x="5212080" y="2103120"/>
+            <a:ext cx="6217920" cy="731520"/>
           </a:xfrm>
           <a:prstGeom prst="rect">
             <a:avLst/>
@@ -11840,15 +11840,15 @@
           <a:p>
             <a:pPr algn="l">
               <a:lnSpc>
-                <a:spcPts val="1700"/>
-              </a:lnSpc>
-              <a:spcBef>
-                <a:spcPts val="0"/>
-              </a:spcBef>
-              <a:spcAft>
-                <a:spcPts val="0"/>
-              </a:spcAft>
-              <a:defRPr sz="1400" b="0">
+                <a:spcPct val="100000"/>
+              </a:lnSpc>
+              <a:spcBef>
+                <a:spcPts val="0"/>
+              </a:spcBef>
+              <a:spcAft>
+                <a:spcPts val="0"/>
+              </a:spcAft>
+              <a:defRPr sz="1300" b="0">
                 <a:solidFill>
                   <a:srgbClr val="6B7280"/>
                 </a:solidFill>
@@ -11869,7 +11869,7 @@
         </p:nvSpPr>
         <p:spPr>
           <a:xfrm>
-            <a:off x="914400" y="3035808"/>
+            <a:off x="914400" y="3127248"/>
             <a:ext cx="164592" cy="164592"/>
           </a:xfrm>
           <a:prstGeom prst="ellipse">
@@ -11912,8 +11912,8 @@
         </p:nvSpPr>
         <p:spPr>
           <a:xfrm>
-            <a:off x="1371600" y="2926080"/>
-            <a:ext cx="3657600" cy="365760"/>
+            <a:off x="1371600" y="3017520"/>
+            <a:ext cx="3657600" cy="548640"/>
           </a:xfrm>
           <a:prstGeom prst="rect">
             <a:avLst/>
@@ -11928,15 +11928,15 @@
           <a:p>
             <a:pPr algn="l">
               <a:lnSpc>
-                <a:spcPts val="2000"/>
-              </a:lnSpc>
-              <a:spcBef>
-                <a:spcPts val="0"/>
-              </a:spcBef>
-              <a:spcAft>
-                <a:spcPts val="0"/>
-              </a:spcAft>
-              <a:defRPr sz="1600" b="1">
+                <a:spcPct val="100000"/>
+              </a:lnSpc>
+              <a:spcBef>
+                <a:spcPts val="0"/>
+              </a:spcBef>
+              <a:spcAft>
+                <a:spcPts val="0"/>
+              </a:spcAft>
+              <a:defRPr sz="1400" b="1">
                 <a:solidFill>
                   <a:srgbClr val="1E2A38"/>
                 </a:solidFill>
@@ -11957,8 +11957,8 @@
         </p:nvSpPr>
         <p:spPr>
           <a:xfrm>
-            <a:off x="5029200" y="2926080"/>
-            <a:ext cx="6400800" cy="731520"/>
+            <a:off x="5212080" y="3017520"/>
+            <a:ext cx="6217920" cy="731520"/>
           </a:xfrm>
           <a:prstGeom prst="rect">
             <a:avLst/>
@@ -11973,15 +11973,15 @@
           <a:p>
             <a:pPr algn="l">
               <a:lnSpc>
-                <a:spcPts val="1700"/>
-              </a:lnSpc>
-              <a:spcBef>
-                <a:spcPts val="0"/>
-              </a:spcBef>
-              <a:spcAft>
-                <a:spcPts val="0"/>
-              </a:spcAft>
-              <a:defRPr sz="1400" b="0">
+                <a:spcPct val="100000"/>
+              </a:lnSpc>
+              <a:spcBef>
+                <a:spcPts val="0"/>
+              </a:spcBef>
+              <a:spcAft>
+                <a:spcPts val="0"/>
+              </a:spcAft>
+              <a:defRPr sz="1300" b="0">
                 <a:solidFill>
                   <a:srgbClr val="6B7280"/>
                 </a:solidFill>
@@ -12002,7 +12002,7 @@
         </p:nvSpPr>
         <p:spPr>
           <a:xfrm>
-            <a:off x="914400" y="3950208"/>
+            <a:off x="914400" y="4041648"/>
             <a:ext cx="164592" cy="164592"/>
           </a:xfrm>
           <a:prstGeom prst="ellipse">
@@ -12045,8 +12045,8 @@
         </p:nvSpPr>
         <p:spPr>
           <a:xfrm>
-            <a:off x="1371600" y="3840480"/>
-            <a:ext cx="3657600" cy="365760"/>
+            <a:off x="1371600" y="3931920"/>
+            <a:ext cx="3657600" cy="548640"/>
           </a:xfrm>
           <a:prstGeom prst="rect">
             <a:avLst/>
@@ -12061,15 +12061,15 @@
           <a:p>
             <a:pPr algn="l">
               <a:lnSpc>
-                <a:spcPts val="2000"/>
-              </a:lnSpc>
-              <a:spcBef>
-                <a:spcPts val="0"/>
-              </a:spcBef>
-              <a:spcAft>
-                <a:spcPts val="0"/>
-              </a:spcAft>
-              <a:defRPr sz="1600" b="1">
+                <a:spcPct val="100000"/>
+              </a:lnSpc>
+              <a:spcBef>
+                <a:spcPts val="0"/>
+              </a:spcBef>
+              <a:spcAft>
+                <a:spcPts val="0"/>
+              </a:spcAft>
+              <a:defRPr sz="1400" b="1">
                 <a:solidFill>
                   <a:srgbClr val="1E2A38"/>
                 </a:solidFill>
@@ -12090,8 +12090,8 @@
         </p:nvSpPr>
         <p:spPr>
           <a:xfrm>
-            <a:off x="5029200" y="3840480"/>
-            <a:ext cx="6400800" cy="731520"/>
+            <a:off x="5212080" y="3931920"/>
+            <a:ext cx="6217920" cy="731520"/>
           </a:xfrm>
           <a:prstGeom prst="rect">
             <a:avLst/>
@@ -12106,15 +12106,15 @@
           <a:p>
             <a:pPr algn="l">
               <a:lnSpc>
-                <a:spcPts val="1700"/>
-              </a:lnSpc>
-              <a:spcBef>
-                <a:spcPts val="0"/>
-              </a:spcBef>
-              <a:spcAft>
-                <a:spcPts val="0"/>
-              </a:spcAft>
-              <a:defRPr sz="1400" b="0">
+                <a:spcPct val="100000"/>
+              </a:lnSpc>
+              <a:spcBef>
+                <a:spcPts val="0"/>
+              </a:spcBef>
+              <a:spcAft>
+                <a:spcPts val="0"/>
+              </a:spcAft>
+              <a:defRPr sz="1300" b="0">
                 <a:solidFill>
                   <a:srgbClr val="6B7280"/>
                 </a:solidFill>
@@ -12135,7 +12135,7 @@
         </p:nvSpPr>
         <p:spPr>
           <a:xfrm>
-            <a:off x="914400" y="4864608"/>
+            <a:off x="914400" y="4956048"/>
             <a:ext cx="164592" cy="164592"/>
           </a:xfrm>
           <a:prstGeom prst="ellipse">
@@ -12178,8 +12178,8 @@
         </p:nvSpPr>
         <p:spPr>
           <a:xfrm>
-            <a:off x="1371600" y="4754880"/>
-            <a:ext cx="3657600" cy="365760"/>
+            <a:off x="1371600" y="4846320"/>
+            <a:ext cx="3657600" cy="548640"/>
           </a:xfrm>
           <a:prstGeom prst="rect">
             <a:avLst/>
@@ -12194,15 +12194,15 @@
           <a:p>
             <a:pPr algn="l">
               <a:lnSpc>
-                <a:spcPts val="2000"/>
-              </a:lnSpc>
-              <a:spcBef>
-                <a:spcPts val="0"/>
-              </a:spcBef>
-              <a:spcAft>
-                <a:spcPts val="0"/>
-              </a:spcAft>
-              <a:defRPr sz="1600" b="1">
+                <a:spcPct val="100000"/>
+              </a:lnSpc>
+              <a:spcBef>
+                <a:spcPts val="0"/>
+              </a:spcBef>
+              <a:spcAft>
+                <a:spcPts val="0"/>
+              </a:spcAft>
+              <a:defRPr sz="1400" b="1">
                 <a:solidFill>
                   <a:srgbClr val="1E2A38"/>
                 </a:solidFill>
@@ -12223,8 +12223,8 @@
         </p:nvSpPr>
         <p:spPr>
           <a:xfrm>
-            <a:off x="5029200" y="4754880"/>
-            <a:ext cx="6400800" cy="731520"/>
+            <a:off x="5212080" y="4846320"/>
+            <a:ext cx="6217920" cy="731520"/>
           </a:xfrm>
           <a:prstGeom prst="rect">
             <a:avLst/>
@@ -12239,15 +12239,15 @@
           <a:p>
             <a:pPr algn="l">
               <a:lnSpc>
-                <a:spcPts val="1700"/>
-              </a:lnSpc>
-              <a:spcBef>
-                <a:spcPts val="0"/>
-              </a:spcBef>
-              <a:spcAft>
-                <a:spcPts val="0"/>
-              </a:spcAft>
-              <a:defRPr sz="1400" b="0">
+                <a:spcPct val="100000"/>
+              </a:lnSpc>
+              <a:spcBef>
+                <a:spcPts val="0"/>
+              </a:spcBef>
+              <a:spcAft>
+                <a:spcPts val="0"/>
+              </a:spcAft>
+              <a:defRPr sz="1300" b="0">
                 <a:solidFill>
                   <a:srgbClr val="6B7280"/>
                 </a:solidFill>
@@ -12268,7 +12268,7 @@
         </p:nvSpPr>
         <p:spPr>
           <a:xfrm>
-            <a:off x="914400" y="5779008"/>
+            <a:off x="914400" y="5870448"/>
             <a:ext cx="164592" cy="164592"/>
           </a:xfrm>
           <a:prstGeom prst="ellipse">
@@ -12311,8 +12311,8 @@
         </p:nvSpPr>
         <p:spPr>
           <a:xfrm>
-            <a:off x="1371600" y="5669280"/>
-            <a:ext cx="3657600" cy="365760"/>
+            <a:off x="1371600" y="5760720"/>
+            <a:ext cx="3657600" cy="548640"/>
           </a:xfrm>
           <a:prstGeom prst="rect">
             <a:avLst/>
@@ -12327,15 +12327,15 @@
           <a:p>
             <a:pPr algn="l">
               <a:lnSpc>
-                <a:spcPts val="2000"/>
-              </a:lnSpc>
-              <a:spcBef>
-                <a:spcPts val="0"/>
-              </a:spcBef>
-              <a:spcAft>
-                <a:spcPts val="0"/>
-              </a:spcAft>
-              <a:defRPr sz="1600" b="1">
+                <a:spcPct val="100000"/>
+              </a:lnSpc>
+              <a:spcBef>
+                <a:spcPts val="0"/>
+              </a:spcBef>
+              <a:spcAft>
+                <a:spcPts val="0"/>
+              </a:spcAft>
+              <a:defRPr sz="1400" b="1">
                 <a:solidFill>
                   <a:srgbClr val="1E2A38"/>
                 </a:solidFill>
@@ -12343,7 +12343,7 @@
               </a:defRPr>
             </a:pPr>
             <a:r>
-              <a:t>Alumni network + cold email outreach</a:t>
+              <a:t>Alumni + cold email outreach</a:t>
             </a:r>
           </a:p>
         </p:txBody>
@@ -12356,8 +12356,8 @@
         </p:nvSpPr>
         <p:spPr>
           <a:xfrm>
-            <a:off x="5029200" y="5669280"/>
-            <a:ext cx="6400800" cy="731520"/>
+            <a:off x="5212080" y="5760720"/>
+            <a:ext cx="6217920" cy="731520"/>
           </a:xfrm>
           <a:prstGeom prst="rect">
             <a:avLst/>
@@ -12372,15 +12372,15 @@
           <a:p>
             <a:pPr algn="l">
               <a:lnSpc>
-                <a:spcPts val="1700"/>
-              </a:lnSpc>
-              <a:spcBef>
-                <a:spcPts val="0"/>
-              </a:spcBef>
-              <a:spcAft>
-                <a:spcPts val="0"/>
-              </a:spcAft>
-              <a:defRPr sz="1400" b="0">
+                <a:spcPct val="100000"/>
+              </a:lnSpc>
+              <a:spcBef>
+                <a:spcPts val="0"/>
+              </a:spcBef>
+              <a:spcAft>
+                <a:spcPts val="0"/>
+              </a:spcAft>
+              <a:defRPr sz="1300" b="0">
                 <a:solidFill>
                   <a:srgbClr val="6B7280"/>
                 </a:solidFill>
@@ -12486,7 +12486,7 @@
           <a:p>
             <a:pPr algn="l">
               <a:lnSpc>
-                <a:spcPts val="1600"/>
+                <a:spcPct val="100000"/>
               </a:lnSpc>
               <a:spcBef>
                 <a:spcPts val="0"/>
@@ -12515,8 +12515,8 @@
         </p:nvSpPr>
         <p:spPr>
           <a:xfrm>
-            <a:off x="731520" y="914400"/>
-            <a:ext cx="10058400" cy="640080"/>
+            <a:off x="731520" y="822960"/>
+            <a:ext cx="10515600" cy="914400"/>
           </a:xfrm>
           <a:prstGeom prst="rect">
             <a:avLst/>
@@ -12531,15 +12531,15 @@
           <a:p>
             <a:pPr algn="l">
               <a:lnSpc>
-                <a:spcPts val="4500"/>
-              </a:lnSpc>
-              <a:spcBef>
-                <a:spcPts val="0"/>
-              </a:spcBef>
-              <a:spcAft>
-                <a:spcPts val="0"/>
-              </a:spcAft>
-              <a:defRPr sz="3600" b="1">
+                <a:spcPct val="100000"/>
+              </a:lnSpc>
+              <a:spcBef>
+                <a:spcPts val="0"/>
+              </a:spcBef>
+              <a:spcAft>
+                <a:spcPts val="0"/>
+              </a:spcAft>
+              <a:defRPr sz="3200" b="1">
                 <a:solidFill>
                   <a:srgbClr val="FFFFFF"/>
                 </a:solidFill>
@@ -12662,7 +12662,7 @@
           <a:p>
             <a:pPr algn="ctr">
               <a:lnSpc>
-                <a:spcPts val="3200"/>
+                <a:spcPct val="100000"/>
               </a:lnSpc>
               <a:spcBef>
                 <a:spcPts val="0"/>
@@ -12692,7 +12692,7 @@
         <p:spPr>
           <a:xfrm>
             <a:off x="594360" y="3246120"/>
-            <a:ext cx="1828800" cy="411480"/>
+            <a:ext cx="1828800" cy="502920"/>
           </a:xfrm>
           <a:prstGeom prst="rect">
             <a:avLst/>
@@ -12707,15 +12707,15 @@
           <a:p>
             <a:pPr algn="ctr">
               <a:lnSpc>
-                <a:spcPts val="2100"/>
-              </a:lnSpc>
-              <a:spcBef>
-                <a:spcPts val="0"/>
-              </a:spcBef>
-              <a:spcAft>
-                <a:spcPts val="0"/>
-              </a:spcAft>
-              <a:defRPr sz="1700" b="1">
+                <a:spcPct val="100000"/>
+              </a:lnSpc>
+              <a:spcBef>
+                <a:spcPts val="0"/>
+              </a:spcBef>
+              <a:spcAft>
+                <a:spcPts val="0"/>
+              </a:spcAft>
+              <a:defRPr sz="1500" b="1">
                 <a:solidFill>
                   <a:srgbClr val="FFFFFF"/>
                 </a:solidFill>
@@ -12752,13 +12752,13 @@
           <a:p>
             <a:pPr algn="ctr">
               <a:lnSpc>
-                <a:spcPts val="1600"/>
-              </a:lnSpc>
-              <a:spcBef>
-                <a:spcPts val="0"/>
-              </a:spcBef>
-              <a:spcAft>
-                <a:spcPts val="400"/>
+                <a:spcPct val="100000"/>
+              </a:lnSpc>
+              <a:spcBef>
+                <a:spcPts val="0"/>
+              </a:spcBef>
+              <a:spcAft>
+                <a:spcPts val="300"/>
               </a:spcAft>
               <a:defRPr sz="1300" b="0">
                 <a:solidFill>
@@ -12774,13 +12774,13 @@
           <a:p>
             <a:pPr algn="ctr">
               <a:lnSpc>
-                <a:spcPts val="1600"/>
-              </a:lnSpc>
-              <a:spcBef>
-                <a:spcPts val="0"/>
-              </a:spcBef>
-              <a:spcAft>
-                <a:spcPts val="400"/>
+                <a:spcPct val="100000"/>
+              </a:lnSpc>
+              <a:spcBef>
+                <a:spcPts val="0"/>
+              </a:spcBef>
+              <a:spcAft>
+                <a:spcPts val="300"/>
               </a:spcAft>
               <a:defRPr sz="1300" b="0">
                 <a:solidFill>
@@ -12819,7 +12819,7 @@
           <a:p>
             <a:pPr algn="ctr">
               <a:lnSpc>
-                <a:spcPts val="2200"/>
+                <a:spcPct val="100000"/>
               </a:lnSpc>
               <a:spcBef>
                 <a:spcPts val="0"/>
@@ -12950,7 +12950,7 @@
           <a:p>
             <a:pPr algn="ctr">
               <a:lnSpc>
-                <a:spcPts val="3200"/>
+                <a:spcPct val="100000"/>
               </a:lnSpc>
               <a:spcBef>
                 <a:spcPts val="0"/>
@@ -12980,7 +12980,7 @@
         <p:spPr>
           <a:xfrm>
             <a:off x="2926080" y="3246120"/>
-            <a:ext cx="1828800" cy="411480"/>
+            <a:ext cx="1828800" cy="502920"/>
           </a:xfrm>
           <a:prstGeom prst="rect">
             <a:avLst/>
@@ -12995,15 +12995,15 @@
           <a:p>
             <a:pPr algn="ctr">
               <a:lnSpc>
-                <a:spcPts val="2100"/>
-              </a:lnSpc>
-              <a:spcBef>
-                <a:spcPts val="0"/>
-              </a:spcBef>
-              <a:spcAft>
-                <a:spcPts val="0"/>
-              </a:spcAft>
-              <a:defRPr sz="1700" b="1">
+                <a:spcPct val="100000"/>
+              </a:lnSpc>
+              <a:spcBef>
+                <a:spcPts val="0"/>
+              </a:spcBef>
+              <a:spcAft>
+                <a:spcPts val="0"/>
+              </a:spcAft>
+              <a:defRPr sz="1500" b="1">
                 <a:solidFill>
                   <a:srgbClr val="FFFFFF"/>
                 </a:solidFill>
@@ -13040,13 +13040,13 @@
           <a:p>
             <a:pPr algn="ctr">
               <a:lnSpc>
-                <a:spcPts val="1600"/>
-              </a:lnSpc>
-              <a:spcBef>
-                <a:spcPts val="0"/>
-              </a:spcBef>
-              <a:spcAft>
-                <a:spcPts val="400"/>
+                <a:spcPct val="100000"/>
+              </a:lnSpc>
+              <a:spcBef>
+                <a:spcPts val="0"/>
+              </a:spcBef>
+              <a:spcAft>
+                <a:spcPts val="300"/>
               </a:spcAft>
               <a:defRPr sz="1300" b="0">
                 <a:solidFill>
@@ -13062,13 +13062,13 @@
           <a:p>
             <a:pPr algn="ctr">
               <a:lnSpc>
-                <a:spcPts val="1600"/>
-              </a:lnSpc>
-              <a:spcBef>
-                <a:spcPts val="0"/>
-              </a:spcBef>
-              <a:spcAft>
-                <a:spcPts val="400"/>
+                <a:spcPct val="100000"/>
+              </a:lnSpc>
+              <a:spcBef>
+                <a:spcPts val="0"/>
+              </a:spcBef>
+              <a:spcAft>
+                <a:spcPts val="300"/>
               </a:spcAft>
               <a:defRPr sz="1300" b="0">
                 <a:solidFill>
@@ -13107,7 +13107,7 @@
           <a:p>
             <a:pPr algn="ctr">
               <a:lnSpc>
-                <a:spcPts val="2200"/>
+                <a:spcPct val="100000"/>
               </a:lnSpc>
               <a:spcBef>
                 <a:spcPts val="0"/>
@@ -13238,7 +13238,7 @@
           <a:p>
             <a:pPr algn="ctr">
               <a:lnSpc>
-                <a:spcPts val="3200"/>
+                <a:spcPct val="100000"/>
               </a:lnSpc>
               <a:spcBef>
                 <a:spcPts val="0"/>
@@ -13268,7 +13268,7 @@
         <p:spPr>
           <a:xfrm>
             <a:off x="5257800" y="3246120"/>
-            <a:ext cx="1828800" cy="411480"/>
+            <a:ext cx="1828800" cy="502920"/>
           </a:xfrm>
           <a:prstGeom prst="rect">
             <a:avLst/>
@@ -13283,15 +13283,15 @@
           <a:p>
             <a:pPr algn="ctr">
               <a:lnSpc>
-                <a:spcPts val="2100"/>
-              </a:lnSpc>
-              <a:spcBef>
-                <a:spcPts val="0"/>
-              </a:spcBef>
-              <a:spcAft>
-                <a:spcPts val="0"/>
-              </a:spcAft>
-              <a:defRPr sz="1700" b="1">
+                <a:spcPct val="100000"/>
+              </a:lnSpc>
+              <a:spcBef>
+                <a:spcPts val="0"/>
+              </a:spcBef>
+              <a:spcAft>
+                <a:spcPts val="0"/>
+              </a:spcAft>
+              <a:defRPr sz="1500" b="1">
                 <a:solidFill>
                   <a:srgbClr val="FFFFFF"/>
                 </a:solidFill>
@@ -13328,13 +13328,13 @@
           <a:p>
             <a:pPr algn="ctr">
               <a:lnSpc>
-                <a:spcPts val="1600"/>
-              </a:lnSpc>
-              <a:spcBef>
-                <a:spcPts val="0"/>
-              </a:spcBef>
-              <a:spcAft>
-                <a:spcPts val="400"/>
+                <a:spcPct val="100000"/>
+              </a:lnSpc>
+              <a:spcBef>
+                <a:spcPts val="0"/>
+              </a:spcBef>
+              <a:spcAft>
+                <a:spcPts val="300"/>
               </a:spcAft>
               <a:defRPr sz="1300" b="0">
                 <a:solidFill>
@@ -13350,13 +13350,13 @@
           <a:p>
             <a:pPr algn="ctr">
               <a:lnSpc>
-                <a:spcPts val="1600"/>
-              </a:lnSpc>
-              <a:spcBef>
-                <a:spcPts val="0"/>
-              </a:spcBef>
-              <a:spcAft>
-                <a:spcPts val="400"/>
+                <a:spcPct val="100000"/>
+              </a:lnSpc>
+              <a:spcBef>
+                <a:spcPts val="0"/>
+              </a:spcBef>
+              <a:spcAft>
+                <a:spcPts val="300"/>
               </a:spcAft>
               <a:defRPr sz="1300" b="0">
                 <a:solidFill>
@@ -13395,7 +13395,7 @@
           <a:p>
             <a:pPr algn="ctr">
               <a:lnSpc>
-                <a:spcPts val="2200"/>
+                <a:spcPct val="100000"/>
               </a:lnSpc>
               <a:spcBef>
                 <a:spcPts val="0"/>
@@ -13526,7 +13526,7 @@
           <a:p>
             <a:pPr algn="ctr">
               <a:lnSpc>
-                <a:spcPts val="3200"/>
+                <a:spcPct val="100000"/>
               </a:lnSpc>
               <a:spcBef>
                 <a:spcPts val="0"/>
@@ -13556,7 +13556,7 @@
         <p:spPr>
           <a:xfrm>
             <a:off x="7589520" y="3246120"/>
-            <a:ext cx="1828800" cy="411480"/>
+            <a:ext cx="1828800" cy="502920"/>
           </a:xfrm>
           <a:prstGeom prst="rect">
             <a:avLst/>
@@ -13571,15 +13571,15 @@
           <a:p>
             <a:pPr algn="ctr">
               <a:lnSpc>
-                <a:spcPts val="2100"/>
-              </a:lnSpc>
-              <a:spcBef>
-                <a:spcPts val="0"/>
-              </a:spcBef>
-              <a:spcAft>
-                <a:spcPts val="0"/>
-              </a:spcAft>
-              <a:defRPr sz="1700" b="1">
+                <a:spcPct val="100000"/>
+              </a:lnSpc>
+              <a:spcBef>
+                <a:spcPts val="0"/>
+              </a:spcBef>
+              <a:spcAft>
+                <a:spcPts val="0"/>
+              </a:spcAft>
+              <a:defRPr sz="1500" b="1">
                 <a:solidFill>
                   <a:srgbClr val="FFFFFF"/>
                 </a:solidFill>
@@ -13616,13 +13616,13 @@
           <a:p>
             <a:pPr algn="ctr">
               <a:lnSpc>
-                <a:spcPts val="1600"/>
-              </a:lnSpc>
-              <a:spcBef>
-                <a:spcPts val="0"/>
-              </a:spcBef>
-              <a:spcAft>
-                <a:spcPts val="400"/>
+                <a:spcPct val="100000"/>
+              </a:lnSpc>
+              <a:spcBef>
+                <a:spcPts val="0"/>
+              </a:spcBef>
+              <a:spcAft>
+                <a:spcPts val="300"/>
               </a:spcAft>
               <a:defRPr sz="1300" b="0">
                 <a:solidFill>
@@ -13638,13 +13638,13 @@
           <a:p>
             <a:pPr algn="ctr">
               <a:lnSpc>
-                <a:spcPts val="1600"/>
-              </a:lnSpc>
-              <a:spcBef>
-                <a:spcPts val="0"/>
-              </a:spcBef>
-              <a:spcAft>
-                <a:spcPts val="400"/>
+                <a:spcPct val="100000"/>
+              </a:lnSpc>
+              <a:spcBef>
+                <a:spcPts val="0"/>
+              </a:spcBef>
+              <a:spcAft>
+                <a:spcPts val="300"/>
               </a:spcAft>
               <a:defRPr sz="1300" b="0">
                 <a:solidFill>
@@ -13683,7 +13683,7 @@
           <a:p>
             <a:pPr algn="ctr">
               <a:lnSpc>
-                <a:spcPts val="2200"/>
+                <a:spcPct val="100000"/>
               </a:lnSpc>
               <a:spcBef>
                 <a:spcPts val="0"/>
@@ -13814,7 +13814,7 @@
           <a:p>
             <a:pPr algn="ctr">
               <a:lnSpc>
-                <a:spcPts val="3200"/>
+                <a:spcPct val="100000"/>
               </a:lnSpc>
               <a:spcBef>
                 <a:spcPts val="0"/>
@@ -13844,7 +13844,7 @@
         <p:spPr>
           <a:xfrm>
             <a:off x="9921240" y="3246120"/>
-            <a:ext cx="1828800" cy="411480"/>
+            <a:ext cx="1828800" cy="502920"/>
           </a:xfrm>
           <a:prstGeom prst="rect">
             <a:avLst/>
@@ -13859,15 +13859,15 @@
           <a:p>
             <a:pPr algn="ctr">
               <a:lnSpc>
-                <a:spcPts val="2100"/>
-              </a:lnSpc>
-              <a:spcBef>
-                <a:spcPts val="0"/>
-              </a:spcBef>
-              <a:spcAft>
-                <a:spcPts val="0"/>
-              </a:spcAft>
-              <a:defRPr sz="1700" b="1">
+                <a:spcPct val="100000"/>
+              </a:lnSpc>
+              <a:spcBef>
+                <a:spcPts val="0"/>
+              </a:spcBef>
+              <a:spcAft>
+                <a:spcPts val="0"/>
+              </a:spcAft>
+              <a:defRPr sz="1500" b="1">
                 <a:solidFill>
                   <a:srgbClr val="FFFFFF"/>
                 </a:solidFill>
@@ -13904,13 +13904,13 @@
           <a:p>
             <a:pPr algn="ctr">
               <a:lnSpc>
-                <a:spcPts val="1600"/>
-              </a:lnSpc>
-              <a:spcBef>
-                <a:spcPts val="0"/>
-              </a:spcBef>
-              <a:spcAft>
-                <a:spcPts val="400"/>
+                <a:spcPct val="100000"/>
+              </a:lnSpc>
+              <a:spcBef>
+                <a:spcPts val="0"/>
+              </a:spcBef>
+              <a:spcAft>
+                <a:spcPts val="300"/>
               </a:spcAft>
               <a:defRPr sz="1300" b="0">
                 <a:solidFill>
@@ -13926,13 +13926,13 @@
           <a:p>
             <a:pPr algn="ctr">
               <a:lnSpc>
-                <a:spcPts val="1600"/>
-              </a:lnSpc>
-              <a:spcBef>
-                <a:spcPts val="0"/>
-              </a:spcBef>
-              <a:spcAft>
-                <a:spcPts val="400"/>
+                <a:spcPct val="100000"/>
+              </a:lnSpc>
+              <a:spcBef>
+                <a:spcPts val="0"/>
+              </a:spcBef>
+              <a:spcAft>
+                <a:spcPts val="300"/>
               </a:spcAft>
               <a:defRPr sz="1300" b="0">
                 <a:solidFill>
@@ -13971,7 +13971,7 @@
           <a:p>
             <a:pPr algn="ctr">
               <a:lnSpc>
-                <a:spcPts val="1700"/>
+                <a:spcPct val="100000"/>
               </a:lnSpc>
               <a:spcBef>
                 <a:spcPts val="0"/>

--- a/MakeItSo_Pitch_Deck.pptx
+++ b/MakeItSo_Pitch_Deck.pptx
@@ -4615,8 +4615,8 @@
         </p:nvSpPr>
         <p:spPr>
           <a:xfrm>
-            <a:off x="5394960" y="1325880"/>
-            <a:ext cx="1371600" cy="1097280"/>
+            <a:off x="5394960" y="1280160"/>
+            <a:ext cx="1371600" cy="1188720"/>
           </a:xfrm>
           <a:prstGeom prst="rect">
             <a:avLst/>
@@ -4639,15 +4639,15 @@
               <a:spcAft>
                 <a:spcPts val="0"/>
               </a:spcAft>
-              <a:defRPr sz="3600" b="1">
+              <a:defRPr sz="4800" b="0">
                 <a:solidFill>
                   <a:srgbClr val="FFFFFF"/>
                 </a:solidFill>
-                <a:latin typeface="Georgia"/>
-              </a:defRPr>
-            </a:pPr>
-            <a:r>
-              <a:t>MIS</a:t>
+                <a:latin typeface="Segoe UI Emoji"/>
+              </a:defRPr>
+            </a:pPr>
+            <a:r>
+              <a:t>✨</a:t>
             </a:r>
           </a:p>
         </p:txBody>

--- a/MakeItSo_Pitch_Deck.pptx
+++ b/MakeItSo_Pitch_Deck.pptx
@@ -3286,8 +3286,8 @@
         </p:nvSpPr>
         <p:spPr>
           <a:xfrm>
-            <a:off x="5394960" y="1600200"/>
-            <a:ext cx="1371600" cy="1097280"/>
+            <a:off x="5394960" y="1554480"/>
+            <a:ext cx="1371600" cy="1188720"/>
           </a:xfrm>
           <a:prstGeom prst="rect">
             <a:avLst/>
@@ -3310,15 +3310,15 @@
               <a:spcAft>
                 <a:spcPts val="0"/>
               </a:spcAft>
-              <a:defRPr sz="3600" b="1">
+              <a:defRPr sz="4800" b="0">
                 <a:solidFill>
                   <a:srgbClr val="FFFFFF"/>
                 </a:solidFill>
-                <a:latin typeface="Georgia"/>
-              </a:defRPr>
-            </a:pPr>
-            <a:r>
-              <a:t>MIS</a:t>
+                <a:latin typeface="Segoe UI Emoji"/>
+              </a:defRPr>
+            </a:pPr>
+            <a:r>
+              <a:t>✨</a:t>
             </a:r>
           </a:p>
         </p:txBody>
